--- a/projects/biam_hostel_management/Overview.pptx
+++ b/projects/biam_hostel_management/Overview.pptx
@@ -6,15 +6,16 @@
   </p:sldMasterIdLst>
   <p:sldIdLst>
     <p:sldId id="256" r:id="rId2"/>
-    <p:sldId id="257" r:id="rId3"/>
-    <p:sldId id="258" r:id="rId4"/>
-    <p:sldId id="260" r:id="rId5"/>
-    <p:sldId id="262" r:id="rId6"/>
-    <p:sldId id="261" r:id="rId7"/>
+    <p:sldId id="260" r:id="rId3"/>
+    <p:sldId id="257" r:id="rId4"/>
+    <p:sldId id="258" r:id="rId5"/>
+    <p:sldId id="261" r:id="rId6"/>
+    <p:sldId id="262" r:id="rId7"/>
     <p:sldId id="259" r:id="rId8"/>
+    <p:sldId id="263" r:id="rId9"/>
   </p:sldIdLst>
   <p:sldSz cx="12192000" cy="6858000"/>
-  <p:notesSz cx="6858000" cy="9144000"/>
+  <p:notesSz cx="7315200" cy="9601200"/>
   <p:defaultTextStyle>
     <a:defPPr>
       <a:defRPr lang="en-US"/>
@@ -265,7 +266,7 @@
           <a:p>
             <a:fld id="{E55682CF-FAD7-4BD3-8747-1696A45B0684}" type="datetimeFigureOut">
               <a:rPr lang="en-US" smtClean="0"/>
-              <a:t>1/26/2026</a:t>
+              <a:t>2/15/2026</a:t>
             </a:fld>
             <a:endParaRPr lang="en-US"/>
           </a:p>
@@ -463,7 +464,7 @@
           <a:p>
             <a:fld id="{E55682CF-FAD7-4BD3-8747-1696A45B0684}" type="datetimeFigureOut">
               <a:rPr lang="en-US" smtClean="0"/>
-              <a:t>1/26/2026</a:t>
+              <a:t>2/15/2026</a:t>
             </a:fld>
             <a:endParaRPr lang="en-US"/>
           </a:p>
@@ -671,7 +672,7 @@
           <a:p>
             <a:fld id="{E55682CF-FAD7-4BD3-8747-1696A45B0684}" type="datetimeFigureOut">
               <a:rPr lang="en-US" smtClean="0"/>
-              <a:t>1/26/2026</a:t>
+              <a:t>2/15/2026</a:t>
             </a:fld>
             <a:endParaRPr lang="en-US"/>
           </a:p>
@@ -869,7 +870,7 @@
           <a:p>
             <a:fld id="{E55682CF-FAD7-4BD3-8747-1696A45B0684}" type="datetimeFigureOut">
               <a:rPr lang="en-US" smtClean="0"/>
-              <a:t>1/26/2026</a:t>
+              <a:t>2/15/2026</a:t>
             </a:fld>
             <a:endParaRPr lang="en-US"/>
           </a:p>
@@ -1144,7 +1145,7 @@
           <a:p>
             <a:fld id="{E55682CF-FAD7-4BD3-8747-1696A45B0684}" type="datetimeFigureOut">
               <a:rPr lang="en-US" smtClean="0"/>
-              <a:t>1/26/2026</a:t>
+              <a:t>2/15/2026</a:t>
             </a:fld>
             <a:endParaRPr lang="en-US"/>
           </a:p>
@@ -1409,7 +1410,7 @@
           <a:p>
             <a:fld id="{E55682CF-FAD7-4BD3-8747-1696A45B0684}" type="datetimeFigureOut">
               <a:rPr lang="en-US" smtClean="0"/>
-              <a:t>1/26/2026</a:t>
+              <a:t>2/15/2026</a:t>
             </a:fld>
             <a:endParaRPr lang="en-US"/>
           </a:p>
@@ -1821,7 +1822,7 @@
           <a:p>
             <a:fld id="{E55682CF-FAD7-4BD3-8747-1696A45B0684}" type="datetimeFigureOut">
               <a:rPr lang="en-US" smtClean="0"/>
-              <a:t>1/26/2026</a:t>
+              <a:t>2/15/2026</a:t>
             </a:fld>
             <a:endParaRPr lang="en-US"/>
           </a:p>
@@ -1962,7 +1963,7 @@
           <a:p>
             <a:fld id="{E55682CF-FAD7-4BD3-8747-1696A45B0684}" type="datetimeFigureOut">
               <a:rPr lang="en-US" smtClean="0"/>
-              <a:t>1/26/2026</a:t>
+              <a:t>2/15/2026</a:t>
             </a:fld>
             <a:endParaRPr lang="en-US"/>
           </a:p>
@@ -2075,7 +2076,7 @@
           <a:p>
             <a:fld id="{E55682CF-FAD7-4BD3-8747-1696A45B0684}" type="datetimeFigureOut">
               <a:rPr lang="en-US" smtClean="0"/>
-              <a:t>1/26/2026</a:t>
+              <a:t>2/15/2026</a:t>
             </a:fld>
             <a:endParaRPr lang="en-US"/>
           </a:p>
@@ -2386,7 +2387,7 @@
           <a:p>
             <a:fld id="{E55682CF-FAD7-4BD3-8747-1696A45B0684}" type="datetimeFigureOut">
               <a:rPr lang="en-US" smtClean="0"/>
-              <a:t>1/26/2026</a:t>
+              <a:t>2/15/2026</a:t>
             </a:fld>
             <a:endParaRPr lang="en-US"/>
           </a:p>
@@ -2674,7 +2675,7 @@
           <a:p>
             <a:fld id="{E55682CF-FAD7-4BD3-8747-1696A45B0684}" type="datetimeFigureOut">
               <a:rPr lang="en-US" smtClean="0"/>
-              <a:t>1/26/2026</a:t>
+              <a:t>2/15/2026</a:t>
             </a:fld>
             <a:endParaRPr lang="en-US"/>
           </a:p>
@@ -2915,7 +2916,7 @@
           <a:p>
             <a:fld id="{E55682CF-FAD7-4BD3-8747-1696A45B0684}" type="datetimeFigureOut">
               <a:rPr lang="en-US" smtClean="0"/>
-              <a:t>1/26/2026</a:t>
+              <a:t>2/15/2026</a:t>
             </a:fld>
             <a:endParaRPr lang="en-US"/>
           </a:p>
@@ -3350,8 +3351,8 @@
         </p:nvSpPr>
         <p:spPr>
           <a:xfrm>
-            <a:off x="1524000" y="1446663"/>
-            <a:ext cx="9144000" cy="549322"/>
+            <a:off x="1524000" y="3151616"/>
+            <a:ext cx="9144000" cy="1140605"/>
           </a:xfrm>
         </p:spPr>
         <p:txBody>
@@ -3368,220 +3369,39 @@
                 <a:latin typeface="Inter 18pt" panose="02000503000000020004" pitchFamily="2" charset="0"/>
                 <a:ea typeface="Inter 18pt" panose="02000503000000020004" pitchFamily="2" charset="0"/>
               </a:rPr>
-              <a:t>BIAM Feedback and Booking Management</a:t>
-            </a:r>
-          </a:p>
-        </p:txBody>
-      </p:sp>
-      <p:graphicFrame>
-        <p:nvGraphicFramePr>
-          <p:cNvPr id="4" name="Table 4">
-            <a:extLst>
-              <a:ext uri="{FF2B5EF4-FFF2-40B4-BE49-F238E27FC236}">
-                <a16:creationId xmlns:a16="http://schemas.microsoft.com/office/drawing/2014/main" id="{8DA50DD5-9AA5-4C2A-9CB3-F99082D4CEE2}"/>
-              </a:ext>
-            </a:extLst>
-          </p:cNvPr>
-          <p:cNvGraphicFramePr>
-            <a:graphicFrameLocks noGrp="1"/>
-          </p:cNvGraphicFramePr>
-          <p:nvPr>
-            <p:extLst>
-              <p:ext uri="{D42A27DB-BD31-4B8C-83A1-F6EECF244321}">
-                <p14:modId xmlns:p14="http://schemas.microsoft.com/office/powerpoint/2010/main" val="408818845"/>
-              </p:ext>
-            </p:extLst>
-          </p:nvPr>
-        </p:nvGraphicFramePr>
-        <p:xfrm>
-          <a:off x="2028966" y="3058023"/>
-          <a:ext cx="7892956" cy="1483360"/>
-        </p:xfrm>
-        <a:graphic>
-          <a:graphicData uri="http://schemas.openxmlformats.org/drawingml/2006/table">
-            <a:tbl>
-              <a:tblPr firstRow="1" bandRow="1">
-                <a:tableStyleId>{35758FB7-9AC5-4552-8A53-C91805E547FA}</a:tableStyleId>
-              </a:tblPr>
-              <a:tblGrid>
-                <a:gridCol w="3621207">
-                  <a:extLst>
-                    <a:ext uri="{9D8B030D-6E8A-4147-A177-3AD203B41FA5}">
-                      <a16:colId xmlns:a16="http://schemas.microsoft.com/office/drawing/2014/main" val="2837055047"/>
-                    </a:ext>
-                  </a:extLst>
-                </a:gridCol>
-                <a:gridCol w="4271749">
-                  <a:extLst>
-                    <a:ext uri="{9D8B030D-6E8A-4147-A177-3AD203B41FA5}">
-                      <a16:colId xmlns:a16="http://schemas.microsoft.com/office/drawing/2014/main" val="2445087991"/>
-                    </a:ext>
-                  </a:extLst>
-                </a:gridCol>
-              </a:tblGrid>
-              <a:tr h="370840">
-                <a:tc>
-                  <a:txBody>
-                    <a:bodyPr/>
-                    <a:lstStyle/>
-                    <a:p>
-                      <a:pPr algn="ctr"/>
-                      <a:r>
-                        <a:rPr lang="en-US" dirty="0"/>
-                        <a:t>Description</a:t>
-                      </a:r>
-                      <a:endParaRPr lang="en-US" b="1" dirty="0"/>
-                    </a:p>
-                  </a:txBody>
-                  <a:tcPr/>
-                </a:tc>
-                <a:tc>
-                  <a:txBody>
-                    <a:bodyPr/>
-                    <a:lstStyle/>
-                    <a:p>
-                      <a:pPr algn="ctr"/>
-                      <a:r>
-                        <a:rPr lang="en-US" dirty="0"/>
-                        <a:t>Concept/Designer/Author</a:t>
-                      </a:r>
-                      <a:endParaRPr lang="en-US" b="1" dirty="0"/>
-                    </a:p>
-                  </a:txBody>
-                  <a:tcPr/>
-                </a:tc>
-                <a:extLst>
-                  <a:ext uri="{0D108BD9-81ED-4DB2-BD59-A6C34878D82A}">
-                    <a16:rowId xmlns:a16="http://schemas.microsoft.com/office/drawing/2014/main" val="366877074"/>
-                  </a:ext>
-                </a:extLst>
-              </a:tr>
-              <a:tr h="370840">
-                <a:tc>
-                  <a:txBody>
-                    <a:bodyPr/>
-                    <a:lstStyle/>
-                    <a:p>
-                      <a:pPr algn="r"/>
-                      <a:r>
-                        <a:rPr lang="en-US" b="1" dirty="0">
-                          <a:solidFill>
-                            <a:schemeClr val="bg1"/>
-                          </a:solidFill>
-                        </a:rPr>
-                        <a:t>Typing Engine:</a:t>
-                      </a:r>
-                    </a:p>
-                  </a:txBody>
-                  <a:tcPr/>
-                </a:tc>
-                <a:tc>
-                  <a:txBody>
-                    <a:bodyPr/>
-                    <a:lstStyle/>
-                    <a:p>
-                      <a:r>
-                        <a:rPr lang="en-US" dirty="0"/>
-                        <a:t>Md. </a:t>
-                      </a:r>
-                      <a:r>
-                        <a:rPr lang="en-US" dirty="0" err="1"/>
-                        <a:t>Basedul</a:t>
-                      </a:r>
-                      <a:r>
-                        <a:rPr lang="en-US" dirty="0"/>
-                        <a:t> Islam, AP, BIAM Foundation</a:t>
-                      </a:r>
-                    </a:p>
-                  </a:txBody>
-                  <a:tcPr/>
-                </a:tc>
-                <a:extLst>
-                  <a:ext uri="{0D108BD9-81ED-4DB2-BD59-A6C34878D82A}">
-                    <a16:rowId xmlns:a16="http://schemas.microsoft.com/office/drawing/2014/main" val="447737057"/>
-                  </a:ext>
-                </a:extLst>
-              </a:tr>
-              <a:tr h="370840">
-                <a:tc>
-                  <a:txBody>
-                    <a:bodyPr/>
-                    <a:lstStyle/>
-                    <a:p>
-                      <a:pPr algn="r"/>
-                      <a:r>
-                        <a:rPr lang="en-US" b="1" dirty="0">
-                          <a:solidFill>
-                            <a:schemeClr val="bg1"/>
-                          </a:solidFill>
-                        </a:rPr>
-                        <a:t>Svelte5 + Inertia.js implementation:</a:t>
-                      </a:r>
-                    </a:p>
-                  </a:txBody>
-                  <a:tcPr/>
-                </a:tc>
-                <a:tc>
-                  <a:txBody>
-                    <a:bodyPr/>
-                    <a:lstStyle/>
-                    <a:p>
-                      <a:r>
-                        <a:rPr lang="en-US" dirty="0"/>
-                        <a:t>Md. Adal Khan, CO, BIAM Foundation</a:t>
-                      </a:r>
-                    </a:p>
-                  </a:txBody>
-                  <a:tcPr/>
-                </a:tc>
-                <a:extLst>
-                  <a:ext uri="{0D108BD9-81ED-4DB2-BD59-A6C34878D82A}">
-                    <a16:rowId xmlns:a16="http://schemas.microsoft.com/office/drawing/2014/main" val="2667606742"/>
-                  </a:ext>
-                </a:extLst>
-              </a:tr>
-              <a:tr h="370840">
-                <a:tc>
-                  <a:txBody>
-                    <a:bodyPr/>
-                    <a:lstStyle/>
-                    <a:p>
-                      <a:pPr algn="r"/>
-                      <a:r>
-                        <a:rPr lang="en-US" b="1" dirty="0">
-                          <a:solidFill>
-                            <a:schemeClr val="bg1"/>
-                          </a:solidFill>
-                        </a:rPr>
-                        <a:t>Backend Development:</a:t>
-                      </a:r>
-                    </a:p>
-                  </a:txBody>
-                  <a:tcPr/>
-                </a:tc>
-                <a:tc>
-                  <a:txBody>
-                    <a:bodyPr/>
-                    <a:lstStyle/>
-                    <a:p>
-                      <a:r>
-                        <a:rPr lang="en-US" dirty="0"/>
-                        <a:t>Md. Adal Khan, CO, BIAM Foundation</a:t>
-                      </a:r>
-                    </a:p>
-                  </a:txBody>
-                  <a:tcPr/>
-                </a:tc>
-                <a:extLst>
-                  <a:ext uri="{0D108BD9-81ED-4DB2-BD59-A6C34878D82A}">
-                    <a16:rowId xmlns:a16="http://schemas.microsoft.com/office/drawing/2014/main" val="2257606852"/>
-                  </a:ext>
-                </a:extLst>
-              </a:tr>
-            </a:tbl>
-          </a:graphicData>
-        </a:graphic>
-      </p:graphicFrame>
+              <a:t>BIAM Feedback and Hostel Management</a:t>
+            </a:r>
+            <a:br>
+              <a:rPr lang="en-US" sz="2800" b="1" dirty="0">
+                <a:solidFill>
+                  <a:srgbClr val="FF0000"/>
+                </a:solidFill>
+                <a:latin typeface="Inter 18pt" panose="02000503000000020004" pitchFamily="2" charset="0"/>
+                <a:ea typeface="Inter 18pt" panose="02000503000000020004" pitchFamily="2" charset="0"/>
+              </a:rPr>
+            </a:br>
+            <a:br>
+              <a:rPr lang="en-US" sz="2800" b="1" dirty="0">
+                <a:solidFill>
+                  <a:srgbClr val="FF0000"/>
+                </a:solidFill>
+                <a:latin typeface="Inter 18pt" panose="02000503000000020004" pitchFamily="2" charset="0"/>
+                <a:ea typeface="Inter 18pt" panose="02000503000000020004" pitchFamily="2" charset="0"/>
+              </a:rPr>
+            </a:br>
+            <a:r>
+              <a:rPr lang="en-US" sz="1400" b="1" dirty="0">
+                <a:solidFill>
+                  <a:srgbClr val="FF0000"/>
+                </a:solidFill>
+                <a:latin typeface="Inter 18pt" panose="02000503000000020004" pitchFamily="2" charset="0"/>
+                <a:ea typeface="Inter 18pt" panose="02000503000000020004" pitchFamily="2" charset="0"/>
+              </a:rPr>
+              <a:t>15/02/2026</a:t>
+            </a:r>
+          </a:p>
+        </p:txBody>
+      </p:sp>
       <p:pic>
         <p:nvPicPr>
           <p:cNvPr id="1028" name="Picture 4" descr="BIAM Foundation | Dhaka">
@@ -3611,7 +3431,7 @@
         </p:blipFill>
         <p:spPr bwMode="auto">
           <a:xfrm>
-            <a:off x="5166603" y="251465"/>
+            <a:off x="5330377" y="1807310"/>
             <a:ext cx="1316084" cy="1140606"/>
           </a:xfrm>
           <a:prstGeom prst="rect">
@@ -3661,6 +3481,138 @@
       </p:grpSpPr>
       <p:sp>
         <p:nvSpPr>
+          <p:cNvPr id="176" name="Rectangle 175">
+            <a:extLst>
+              <a:ext uri="{FF2B5EF4-FFF2-40B4-BE49-F238E27FC236}">
+                <a16:creationId xmlns:a16="http://schemas.microsoft.com/office/drawing/2014/main" id="{0C492EFC-6D53-44DA-9BB2-E6492B3C12C3}"/>
+              </a:ext>
+            </a:extLst>
+          </p:cNvPr>
+          <p:cNvSpPr/>
+          <p:nvPr/>
+        </p:nvSpPr>
+        <p:spPr>
+          <a:xfrm>
+            <a:off x="8216899" y="3774742"/>
+            <a:ext cx="3670299" cy="2081155"/>
+          </a:xfrm>
+          <a:prstGeom prst="rect">
+            <a:avLst/>
+          </a:prstGeom>
+        </p:spPr>
+        <p:style>
+          <a:lnRef idx="2">
+            <a:schemeClr val="dk1"/>
+          </a:lnRef>
+          <a:fillRef idx="1">
+            <a:schemeClr val="lt1"/>
+          </a:fillRef>
+          <a:effectRef idx="0">
+            <a:schemeClr val="dk1"/>
+          </a:effectRef>
+          <a:fontRef idx="minor">
+            <a:schemeClr val="dk1"/>
+          </a:fontRef>
+        </p:style>
+        <p:txBody>
+          <a:bodyPr rtlCol="0" anchor="ctr"/>
+          <a:lstStyle/>
+          <a:p>
+            <a:pPr algn="ctr"/>
+            <a:endParaRPr lang="en-US"/>
+          </a:p>
+        </p:txBody>
+      </p:sp>
+      <p:sp>
+        <p:nvSpPr>
+          <p:cNvPr id="148" name="Rectangle 147">
+            <a:extLst>
+              <a:ext uri="{FF2B5EF4-FFF2-40B4-BE49-F238E27FC236}">
+                <a16:creationId xmlns:a16="http://schemas.microsoft.com/office/drawing/2014/main" id="{B294C26F-1989-438C-848C-C3E5A2679AFC}"/>
+              </a:ext>
+            </a:extLst>
+          </p:cNvPr>
+          <p:cNvSpPr/>
+          <p:nvPr/>
+        </p:nvSpPr>
+        <p:spPr>
+          <a:xfrm>
+            <a:off x="7581239" y="1002103"/>
+            <a:ext cx="1788944" cy="1209137"/>
+          </a:xfrm>
+          <a:prstGeom prst="rect">
+            <a:avLst/>
+          </a:prstGeom>
+        </p:spPr>
+        <p:style>
+          <a:lnRef idx="2">
+            <a:schemeClr val="accent2"/>
+          </a:lnRef>
+          <a:fillRef idx="1">
+            <a:schemeClr val="lt1"/>
+          </a:fillRef>
+          <a:effectRef idx="0">
+            <a:schemeClr val="accent2"/>
+          </a:effectRef>
+          <a:fontRef idx="minor">
+            <a:schemeClr val="dk1"/>
+          </a:fontRef>
+        </p:style>
+        <p:txBody>
+          <a:bodyPr rtlCol="0" anchor="ctr"/>
+          <a:lstStyle/>
+          <a:p>
+            <a:pPr algn="ctr"/>
+            <a:endParaRPr lang="en-US"/>
+          </a:p>
+        </p:txBody>
+      </p:sp>
+      <p:sp>
+        <p:nvSpPr>
+          <p:cNvPr id="147" name="Rectangle 146">
+            <a:extLst>
+              <a:ext uri="{FF2B5EF4-FFF2-40B4-BE49-F238E27FC236}">
+                <a16:creationId xmlns:a16="http://schemas.microsoft.com/office/drawing/2014/main" id="{A3E7DDD5-EC12-49FF-8C9B-030CB74C1D8A}"/>
+              </a:ext>
+            </a:extLst>
+          </p:cNvPr>
+          <p:cNvSpPr/>
+          <p:nvPr/>
+        </p:nvSpPr>
+        <p:spPr>
+          <a:xfrm>
+            <a:off x="9916344" y="325146"/>
+            <a:ext cx="1857229" cy="1211554"/>
+          </a:xfrm>
+          <a:prstGeom prst="rect">
+            <a:avLst/>
+          </a:prstGeom>
+        </p:spPr>
+        <p:style>
+          <a:lnRef idx="2">
+            <a:schemeClr val="accent5"/>
+          </a:lnRef>
+          <a:fillRef idx="1">
+            <a:schemeClr val="lt1"/>
+          </a:fillRef>
+          <a:effectRef idx="0">
+            <a:schemeClr val="accent5"/>
+          </a:effectRef>
+          <a:fontRef idx="minor">
+            <a:schemeClr val="dk1"/>
+          </a:fontRef>
+        </p:style>
+        <p:txBody>
+          <a:bodyPr rtlCol="0" anchor="ctr"/>
+          <a:lstStyle/>
+          <a:p>
+            <a:pPr algn="ctr"/>
+            <a:endParaRPr lang="en-US"/>
+          </a:p>
+        </p:txBody>
+      </p:sp>
+      <p:sp>
+        <p:nvSpPr>
           <p:cNvPr id="2" name="Title 1">
             <a:extLst>
               <a:ext uri="{FF2B5EF4-FFF2-40B4-BE49-F238E27FC236}">
@@ -3677,8 +3629,8 @@
         </p:nvSpPr>
         <p:spPr>
           <a:xfrm>
-            <a:off x="4771551" y="146762"/>
-            <a:ext cx="2648898" cy="318924"/>
+            <a:off x="-272054" y="151516"/>
+            <a:ext cx="5313953" cy="252641"/>
           </a:xfrm>
         </p:spPr>
         <p:txBody>
@@ -3690,28 +3642,3414 @@
             <a:pPr algn="ctr"/>
             <a:r>
               <a:rPr lang="en-US" sz="1400" b="1" dirty="0">
+                <a:solidFill>
+                  <a:srgbClr val="00B050"/>
+                </a:solidFill>
                 <a:latin typeface="Inter 18pt" panose="02000503000000020004" pitchFamily="2" charset="0"/>
                 <a:ea typeface="Inter 18pt" panose="02000503000000020004" pitchFamily="2" charset="0"/>
               </a:rPr>
-              <a:t>High Level Overview</a:t>
+              <a:t>High Level Overview (Updated: 15/02/2026) - Running</a:t>
             </a:r>
             <a:br>
               <a:rPr lang="en-US" sz="1400" b="1" dirty="0">
+                <a:solidFill>
+                  <a:srgbClr val="00B050"/>
+                </a:solidFill>
                 <a:latin typeface="Inter 18pt" panose="02000503000000020004" pitchFamily="2" charset="0"/>
                 <a:ea typeface="Inter 18pt" panose="02000503000000020004" pitchFamily="2" charset="0"/>
               </a:rPr>
             </a:br>
             <a:endParaRPr lang="en-US" sz="1400" b="1" dirty="0">
+              <a:solidFill>
+                <a:srgbClr val="00B050"/>
+              </a:solidFill>
               <a:latin typeface="Inter 18pt" panose="02000503000000020004" pitchFamily="2" charset="0"/>
               <a:ea typeface="Inter 18pt" panose="02000503000000020004" pitchFamily="2" charset="0"/>
             </a:endParaRPr>
           </a:p>
         </p:txBody>
       </p:sp>
+      <p:sp>
+        <p:nvSpPr>
+          <p:cNvPr id="3" name="Smiley Face 2">
+            <a:extLst>
+              <a:ext uri="{FF2B5EF4-FFF2-40B4-BE49-F238E27FC236}">
+                <a16:creationId xmlns:a16="http://schemas.microsoft.com/office/drawing/2014/main" id="{B71339BF-84EB-4FAA-9F2C-67677E754C47}"/>
+              </a:ext>
+            </a:extLst>
+          </p:cNvPr>
+          <p:cNvSpPr/>
+          <p:nvPr/>
+        </p:nvSpPr>
+        <p:spPr>
+          <a:xfrm>
+            <a:off x="423082" y="887106"/>
+            <a:ext cx="423080" cy="423080"/>
+          </a:xfrm>
+          <a:prstGeom prst="smileyFace">
+            <a:avLst/>
+          </a:prstGeom>
+        </p:spPr>
+        <p:style>
+          <a:lnRef idx="2">
+            <a:schemeClr val="dk1"/>
+          </a:lnRef>
+          <a:fillRef idx="1">
+            <a:schemeClr val="lt1"/>
+          </a:fillRef>
+          <a:effectRef idx="0">
+            <a:schemeClr val="dk1"/>
+          </a:effectRef>
+          <a:fontRef idx="minor">
+            <a:schemeClr val="dk1"/>
+          </a:fontRef>
+        </p:style>
+        <p:txBody>
+          <a:bodyPr rtlCol="0" anchor="ctr"/>
+          <a:lstStyle/>
+          <a:p>
+            <a:pPr algn="ctr"/>
+            <a:endParaRPr lang="en-US" dirty="0"/>
+          </a:p>
+        </p:txBody>
+      </p:sp>
+      <p:sp>
+        <p:nvSpPr>
+          <p:cNvPr id="4" name="Flowchart: Predefined Process 3">
+            <a:extLst>
+              <a:ext uri="{FF2B5EF4-FFF2-40B4-BE49-F238E27FC236}">
+                <a16:creationId xmlns:a16="http://schemas.microsoft.com/office/drawing/2014/main" id="{F672EB78-A3B3-40C3-BD87-518C75E823A1}"/>
+              </a:ext>
+            </a:extLst>
+          </p:cNvPr>
+          <p:cNvSpPr/>
+          <p:nvPr/>
+        </p:nvSpPr>
+        <p:spPr>
+          <a:xfrm>
+            <a:off x="1364777" y="887106"/>
+            <a:ext cx="914400" cy="423080"/>
+          </a:xfrm>
+          <a:prstGeom prst="flowChartPredefinedProcess">
+            <a:avLst/>
+          </a:prstGeom>
+        </p:spPr>
+        <p:style>
+          <a:lnRef idx="2">
+            <a:schemeClr val="dk1"/>
+          </a:lnRef>
+          <a:fillRef idx="1">
+            <a:schemeClr val="lt1"/>
+          </a:fillRef>
+          <a:effectRef idx="0">
+            <a:schemeClr val="dk1"/>
+          </a:effectRef>
+          <a:fontRef idx="minor">
+            <a:schemeClr val="dk1"/>
+          </a:fontRef>
+        </p:style>
+        <p:txBody>
+          <a:bodyPr rtlCol="0" anchor="ctr"/>
+          <a:lstStyle/>
+          <a:p>
+            <a:pPr algn="ctr"/>
+            <a:r>
+              <a:rPr lang="en-US" sz="1000" dirty="0">
+                <a:latin typeface="Inter 18pt" panose="02000503000000020004" pitchFamily="2" charset="0"/>
+                <a:ea typeface="Inter 18pt" panose="02000503000000020004" pitchFamily="2" charset="0"/>
+              </a:rPr>
+              <a:t>Login (/login)</a:t>
+            </a:r>
+          </a:p>
+        </p:txBody>
+      </p:sp>
+      <p:cxnSp>
+        <p:nvCxnSpPr>
+          <p:cNvPr id="6" name="Straight Arrow Connector 5">
+            <a:extLst>
+              <a:ext uri="{FF2B5EF4-FFF2-40B4-BE49-F238E27FC236}">
+                <a16:creationId xmlns:a16="http://schemas.microsoft.com/office/drawing/2014/main" id="{DAC130BC-5B3A-4294-B8A5-2263105CF140}"/>
+              </a:ext>
+            </a:extLst>
+          </p:cNvPr>
+          <p:cNvCxnSpPr/>
+          <p:nvPr/>
+        </p:nvCxnSpPr>
+        <p:spPr>
+          <a:xfrm>
+            <a:off x="900752" y="1098646"/>
+            <a:ext cx="354841" cy="0"/>
+          </a:xfrm>
+          <a:prstGeom prst="straightConnector1">
+            <a:avLst/>
+          </a:prstGeom>
+          <a:ln>
+            <a:tailEnd type="triangle"/>
+          </a:ln>
+        </p:spPr>
+        <p:style>
+          <a:lnRef idx="1">
+            <a:schemeClr val="dk1"/>
+          </a:lnRef>
+          <a:fillRef idx="0">
+            <a:schemeClr val="dk1"/>
+          </a:fillRef>
+          <a:effectRef idx="0">
+            <a:schemeClr val="dk1"/>
+          </a:effectRef>
+          <a:fontRef idx="minor">
+            <a:schemeClr val="tx1"/>
+          </a:fontRef>
+        </p:style>
+      </p:cxnSp>
+      <p:sp>
+        <p:nvSpPr>
+          <p:cNvPr id="7" name="Rectangle 6">
+            <a:extLst>
+              <a:ext uri="{FF2B5EF4-FFF2-40B4-BE49-F238E27FC236}">
+                <a16:creationId xmlns:a16="http://schemas.microsoft.com/office/drawing/2014/main" id="{18CA756A-53A8-49EF-9033-947838E8799D}"/>
+              </a:ext>
+            </a:extLst>
+          </p:cNvPr>
+          <p:cNvSpPr/>
+          <p:nvPr/>
+        </p:nvSpPr>
+        <p:spPr>
+          <a:xfrm>
+            <a:off x="2934267" y="852986"/>
+            <a:ext cx="1473960" cy="457200"/>
+          </a:xfrm>
+          <a:prstGeom prst="rect">
+            <a:avLst/>
+          </a:prstGeom>
+        </p:spPr>
+        <p:style>
+          <a:lnRef idx="2">
+            <a:schemeClr val="dk1"/>
+          </a:lnRef>
+          <a:fillRef idx="1">
+            <a:schemeClr val="lt1"/>
+          </a:fillRef>
+          <a:effectRef idx="0">
+            <a:schemeClr val="dk1"/>
+          </a:effectRef>
+          <a:fontRef idx="minor">
+            <a:schemeClr val="dk1"/>
+          </a:fontRef>
+        </p:style>
+        <p:txBody>
+          <a:bodyPr rtlCol="0" anchor="ctr"/>
+          <a:lstStyle/>
+          <a:p>
+            <a:pPr algn="ctr"/>
+            <a:r>
+              <a:rPr lang="en-US" sz="1000" dirty="0">
+                <a:latin typeface="Inter 18pt" panose="02000503000000020004" pitchFamily="2" charset="0"/>
+                <a:ea typeface="Inter 18pt" panose="02000503000000020004" pitchFamily="2" charset="0"/>
+              </a:rPr>
+              <a:t>Feedback Form (/)</a:t>
+            </a:r>
+          </a:p>
+        </p:txBody>
+      </p:sp>
+      <p:cxnSp>
+        <p:nvCxnSpPr>
+          <p:cNvPr id="9" name="Straight Arrow Connector 8">
+            <a:extLst>
+              <a:ext uri="{FF2B5EF4-FFF2-40B4-BE49-F238E27FC236}">
+                <a16:creationId xmlns:a16="http://schemas.microsoft.com/office/drawing/2014/main" id="{BCAA83C1-BA4A-4F04-A1C9-4383BFB99029}"/>
+              </a:ext>
+            </a:extLst>
+          </p:cNvPr>
+          <p:cNvCxnSpPr/>
+          <p:nvPr/>
+        </p:nvCxnSpPr>
+        <p:spPr>
+          <a:xfrm>
+            <a:off x="2374710" y="1098646"/>
+            <a:ext cx="464024" cy="0"/>
+          </a:xfrm>
+          <a:prstGeom prst="straightConnector1">
+            <a:avLst/>
+          </a:prstGeom>
+          <a:ln>
+            <a:tailEnd type="triangle"/>
+          </a:ln>
+        </p:spPr>
+        <p:style>
+          <a:lnRef idx="1">
+            <a:schemeClr val="dk1"/>
+          </a:lnRef>
+          <a:fillRef idx="0">
+            <a:schemeClr val="dk1"/>
+          </a:fillRef>
+          <a:effectRef idx="0">
+            <a:schemeClr val="dk1"/>
+          </a:effectRef>
+          <a:fontRef idx="minor">
+            <a:schemeClr val="tx1"/>
+          </a:fontRef>
+        </p:style>
+      </p:cxnSp>
+      <p:sp>
+        <p:nvSpPr>
+          <p:cNvPr id="10" name="Rectangle 9">
+            <a:extLst>
+              <a:ext uri="{FF2B5EF4-FFF2-40B4-BE49-F238E27FC236}">
+                <a16:creationId xmlns:a16="http://schemas.microsoft.com/office/drawing/2014/main" id="{20B70951-EB1D-4855-A514-BB8ED1C2B162}"/>
+              </a:ext>
+            </a:extLst>
+          </p:cNvPr>
+          <p:cNvSpPr/>
+          <p:nvPr/>
+        </p:nvSpPr>
+        <p:spPr>
+          <a:xfrm>
+            <a:off x="5017405" y="407871"/>
+            <a:ext cx="914400" cy="318924"/>
+          </a:xfrm>
+          <a:prstGeom prst="rect">
+            <a:avLst/>
+          </a:prstGeom>
+        </p:spPr>
+        <p:style>
+          <a:lnRef idx="2">
+            <a:schemeClr val="dk1"/>
+          </a:lnRef>
+          <a:fillRef idx="1">
+            <a:schemeClr val="lt1"/>
+          </a:fillRef>
+          <a:effectRef idx="0">
+            <a:schemeClr val="dk1"/>
+          </a:effectRef>
+          <a:fontRef idx="minor">
+            <a:schemeClr val="dk1"/>
+          </a:fontRef>
+        </p:style>
+        <p:txBody>
+          <a:bodyPr rtlCol="0" anchor="ctr"/>
+          <a:lstStyle/>
+          <a:p>
+            <a:pPr algn="ctr"/>
+            <a:r>
+              <a:rPr lang="en-US" sz="1000" dirty="0">
+                <a:solidFill>
+                  <a:srgbClr val="FF0000"/>
+                </a:solidFill>
+                <a:latin typeface="Inter 18pt" panose="02000503000000020004" pitchFamily="2" charset="0"/>
+                <a:ea typeface="Inter 18pt" panose="02000503000000020004" pitchFamily="2" charset="0"/>
+              </a:rPr>
+              <a:t>Home </a:t>
+            </a:r>
+            <a:r>
+              <a:rPr lang="en-US" sz="800" dirty="0">
+                <a:solidFill>
+                  <a:srgbClr val="FF0000"/>
+                </a:solidFill>
+                <a:latin typeface="Inter 18pt" panose="02000503000000020004" pitchFamily="2" charset="0"/>
+                <a:ea typeface="Inter 18pt" panose="02000503000000020004" pitchFamily="2" charset="0"/>
+              </a:rPr>
+              <a:t>(/) 308</a:t>
+            </a:r>
+            <a:endParaRPr lang="en-US" sz="1000" dirty="0">
+              <a:solidFill>
+                <a:srgbClr val="FF0000"/>
+              </a:solidFill>
+              <a:latin typeface="Inter 18pt" panose="02000503000000020004" pitchFamily="2" charset="0"/>
+              <a:ea typeface="Inter 18pt" panose="02000503000000020004" pitchFamily="2" charset="0"/>
+            </a:endParaRPr>
+          </a:p>
+        </p:txBody>
+      </p:sp>
+      <p:sp>
+        <p:nvSpPr>
+          <p:cNvPr id="14" name="Cylinder 13">
+            <a:extLst>
+              <a:ext uri="{FF2B5EF4-FFF2-40B4-BE49-F238E27FC236}">
+                <a16:creationId xmlns:a16="http://schemas.microsoft.com/office/drawing/2014/main" id="{D26E7933-718C-4C2B-A9A7-81ADEDE8CF4C}"/>
+              </a:ext>
+            </a:extLst>
+          </p:cNvPr>
+          <p:cNvSpPr/>
+          <p:nvPr/>
+        </p:nvSpPr>
+        <p:spPr>
+          <a:xfrm>
+            <a:off x="1444888" y="1958405"/>
+            <a:ext cx="914400" cy="696036"/>
+          </a:xfrm>
+          <a:prstGeom prst="can">
+            <a:avLst/>
+          </a:prstGeom>
+        </p:spPr>
+        <p:style>
+          <a:lnRef idx="2">
+            <a:schemeClr val="dk1"/>
+          </a:lnRef>
+          <a:fillRef idx="1">
+            <a:schemeClr val="lt1"/>
+          </a:fillRef>
+          <a:effectRef idx="0">
+            <a:schemeClr val="dk1"/>
+          </a:effectRef>
+          <a:fontRef idx="minor">
+            <a:schemeClr val="dk1"/>
+          </a:fontRef>
+        </p:style>
+        <p:txBody>
+          <a:bodyPr rtlCol="0" anchor="ctr"/>
+          <a:lstStyle/>
+          <a:p>
+            <a:pPr algn="ctr"/>
+            <a:r>
+              <a:rPr lang="en-US" sz="1000" dirty="0">
+                <a:latin typeface="Inter 18pt" panose="02000503000000020004" pitchFamily="2" charset="0"/>
+                <a:ea typeface="Inter 18pt" panose="02000503000000020004" pitchFamily="2" charset="0"/>
+              </a:rPr>
+              <a:t>feedback</a:t>
+            </a:r>
+          </a:p>
+        </p:txBody>
+      </p:sp>
+      <p:sp>
+        <p:nvSpPr>
+          <p:cNvPr id="18" name="Rectangle 17">
+            <a:extLst>
+              <a:ext uri="{FF2B5EF4-FFF2-40B4-BE49-F238E27FC236}">
+                <a16:creationId xmlns:a16="http://schemas.microsoft.com/office/drawing/2014/main" id="{E316D01C-3EB6-44E5-AFED-33BFE2804968}"/>
+              </a:ext>
+            </a:extLst>
+          </p:cNvPr>
+          <p:cNvSpPr/>
+          <p:nvPr/>
+        </p:nvSpPr>
+        <p:spPr>
+          <a:xfrm>
+            <a:off x="5016135" y="762662"/>
+            <a:ext cx="914400" cy="318924"/>
+          </a:xfrm>
+          <a:prstGeom prst="rect">
+            <a:avLst/>
+          </a:prstGeom>
+        </p:spPr>
+        <p:style>
+          <a:lnRef idx="2">
+            <a:schemeClr val="dk1"/>
+          </a:lnRef>
+          <a:fillRef idx="1">
+            <a:schemeClr val="lt1"/>
+          </a:fillRef>
+          <a:effectRef idx="0">
+            <a:schemeClr val="dk1"/>
+          </a:effectRef>
+          <a:fontRef idx="minor">
+            <a:schemeClr val="dk1"/>
+          </a:fontRef>
+        </p:style>
+        <p:txBody>
+          <a:bodyPr rtlCol="0" anchor="ctr"/>
+          <a:lstStyle/>
+          <a:p>
+            <a:pPr algn="ctr"/>
+            <a:r>
+              <a:rPr lang="en-US" sz="1000" dirty="0">
+                <a:latin typeface="Inter 18pt" panose="02000503000000020004" pitchFamily="2" charset="0"/>
+                <a:ea typeface="Inter 18pt" panose="02000503000000020004" pitchFamily="2" charset="0"/>
+              </a:rPr>
+              <a:t>Hostel </a:t>
+            </a:r>
+            <a:r>
+              <a:rPr lang="en-US" sz="800" dirty="0">
+                <a:latin typeface="Inter 18pt" panose="02000503000000020004" pitchFamily="2" charset="0"/>
+                <a:ea typeface="Inter 18pt" panose="02000503000000020004" pitchFamily="2" charset="0"/>
+              </a:rPr>
+              <a:t>(/admin/hostel</a:t>
+            </a:r>
+            <a:r>
+              <a:rPr lang="en-US" sz="1000" dirty="0">
+                <a:latin typeface="Inter 18pt" panose="02000503000000020004" pitchFamily="2" charset="0"/>
+                <a:ea typeface="Inter 18pt" panose="02000503000000020004" pitchFamily="2" charset="0"/>
+              </a:rPr>
+              <a:t>)</a:t>
+            </a:r>
+          </a:p>
+        </p:txBody>
+      </p:sp>
+      <p:sp>
+        <p:nvSpPr>
+          <p:cNvPr id="19" name="Rectangle 18">
+            <a:extLst>
+              <a:ext uri="{FF2B5EF4-FFF2-40B4-BE49-F238E27FC236}">
+                <a16:creationId xmlns:a16="http://schemas.microsoft.com/office/drawing/2014/main" id="{D6A3B91D-CC08-49BF-ABA0-CEB4DE932643}"/>
+              </a:ext>
+            </a:extLst>
+          </p:cNvPr>
+          <p:cNvSpPr/>
+          <p:nvPr/>
+        </p:nvSpPr>
+        <p:spPr>
+          <a:xfrm>
+            <a:off x="5010441" y="1117453"/>
+            <a:ext cx="914400" cy="318924"/>
+          </a:xfrm>
+          <a:prstGeom prst="rect">
+            <a:avLst/>
+          </a:prstGeom>
+        </p:spPr>
+        <p:style>
+          <a:lnRef idx="2">
+            <a:schemeClr val="dk1"/>
+          </a:lnRef>
+          <a:fillRef idx="1">
+            <a:schemeClr val="lt1"/>
+          </a:fillRef>
+          <a:effectRef idx="0">
+            <a:schemeClr val="dk1"/>
+          </a:effectRef>
+          <a:fontRef idx="minor">
+            <a:schemeClr val="dk1"/>
+          </a:fontRef>
+        </p:style>
+        <p:txBody>
+          <a:bodyPr rtlCol="0" anchor="ctr"/>
+          <a:lstStyle/>
+          <a:p>
+            <a:pPr algn="ctr"/>
+            <a:r>
+              <a:rPr lang="en-US" sz="1000" dirty="0">
+                <a:latin typeface="Inter 18pt" panose="02000503000000020004" pitchFamily="2" charset="0"/>
+                <a:ea typeface="Inter 18pt" panose="02000503000000020004" pitchFamily="2" charset="0"/>
+              </a:rPr>
+              <a:t>Report </a:t>
+            </a:r>
+            <a:r>
+              <a:rPr lang="en-US" sz="800" dirty="0">
+                <a:latin typeface="Inter 18pt" panose="02000503000000020004" pitchFamily="2" charset="0"/>
+                <a:ea typeface="Inter 18pt" panose="02000503000000020004" pitchFamily="2" charset="0"/>
+              </a:rPr>
+              <a:t>(/admin/report)</a:t>
+            </a:r>
+            <a:endParaRPr lang="en-US" sz="1000" dirty="0">
+              <a:latin typeface="Inter 18pt" panose="02000503000000020004" pitchFamily="2" charset="0"/>
+              <a:ea typeface="Inter 18pt" panose="02000503000000020004" pitchFamily="2" charset="0"/>
+            </a:endParaRPr>
+          </a:p>
+        </p:txBody>
+      </p:sp>
+      <p:cxnSp>
+        <p:nvCxnSpPr>
+          <p:cNvPr id="22" name="Straight Arrow Connector 21">
+            <a:extLst>
+              <a:ext uri="{FF2B5EF4-FFF2-40B4-BE49-F238E27FC236}">
+                <a16:creationId xmlns:a16="http://schemas.microsoft.com/office/drawing/2014/main" id="{E5EDB70C-CBC1-461E-B78C-BAD616191695}"/>
+              </a:ext>
+            </a:extLst>
+          </p:cNvPr>
+          <p:cNvCxnSpPr>
+            <a:cxnSpLocks/>
+          </p:cNvCxnSpPr>
+          <p:nvPr/>
+        </p:nvCxnSpPr>
+        <p:spPr>
+          <a:xfrm flipV="1">
+            <a:off x="4401877" y="622300"/>
+            <a:ext cx="544773" cy="452936"/>
+          </a:xfrm>
+          <a:prstGeom prst="straightConnector1">
+            <a:avLst/>
+          </a:prstGeom>
+          <a:ln>
+            <a:tailEnd type="triangle"/>
+          </a:ln>
+        </p:spPr>
+        <p:style>
+          <a:lnRef idx="1">
+            <a:schemeClr val="dk1"/>
+          </a:lnRef>
+          <a:fillRef idx="0">
+            <a:schemeClr val="dk1"/>
+          </a:fillRef>
+          <a:effectRef idx="0">
+            <a:schemeClr val="dk1"/>
+          </a:effectRef>
+          <a:fontRef idx="minor">
+            <a:schemeClr val="tx1"/>
+          </a:fontRef>
+        </p:style>
+      </p:cxnSp>
+      <p:cxnSp>
+        <p:nvCxnSpPr>
+          <p:cNvPr id="24" name="Straight Arrow Connector 23">
+            <a:extLst>
+              <a:ext uri="{FF2B5EF4-FFF2-40B4-BE49-F238E27FC236}">
+                <a16:creationId xmlns:a16="http://schemas.microsoft.com/office/drawing/2014/main" id="{8C7D481A-CC26-4CD6-BAE6-5E58DF2658CC}"/>
+              </a:ext>
+            </a:extLst>
+          </p:cNvPr>
+          <p:cNvCxnSpPr>
+            <a:cxnSpLocks/>
+            <a:stCxn id="7" idx="3"/>
+          </p:cNvCxnSpPr>
+          <p:nvPr/>
+        </p:nvCxnSpPr>
+        <p:spPr>
+          <a:xfrm flipV="1">
+            <a:off x="4408227" y="935536"/>
+            <a:ext cx="578698" cy="146050"/>
+          </a:xfrm>
+          <a:prstGeom prst="straightConnector1">
+            <a:avLst/>
+          </a:prstGeom>
+          <a:ln>
+            <a:tailEnd type="triangle"/>
+          </a:ln>
+        </p:spPr>
+        <p:style>
+          <a:lnRef idx="1">
+            <a:schemeClr val="dk1"/>
+          </a:lnRef>
+          <a:fillRef idx="0">
+            <a:schemeClr val="dk1"/>
+          </a:fillRef>
+          <a:effectRef idx="0">
+            <a:schemeClr val="dk1"/>
+          </a:effectRef>
+          <a:fontRef idx="minor">
+            <a:schemeClr val="tx1"/>
+          </a:fontRef>
+        </p:style>
+      </p:cxnSp>
+      <p:cxnSp>
+        <p:nvCxnSpPr>
+          <p:cNvPr id="26" name="Straight Arrow Connector 25">
+            <a:extLst>
+              <a:ext uri="{FF2B5EF4-FFF2-40B4-BE49-F238E27FC236}">
+                <a16:creationId xmlns:a16="http://schemas.microsoft.com/office/drawing/2014/main" id="{88A288D3-CC0B-4CF0-B01F-F3CBB3DE96F1}"/>
+              </a:ext>
+            </a:extLst>
+          </p:cNvPr>
+          <p:cNvCxnSpPr>
+            <a:cxnSpLocks/>
+          </p:cNvCxnSpPr>
+          <p:nvPr/>
+        </p:nvCxnSpPr>
+        <p:spPr>
+          <a:xfrm>
+            <a:off x="4414577" y="1100539"/>
+            <a:ext cx="559648" cy="146050"/>
+          </a:xfrm>
+          <a:prstGeom prst="straightConnector1">
+            <a:avLst/>
+          </a:prstGeom>
+          <a:ln>
+            <a:tailEnd type="triangle"/>
+          </a:ln>
+        </p:spPr>
+        <p:style>
+          <a:lnRef idx="1">
+            <a:schemeClr val="dk1"/>
+          </a:lnRef>
+          <a:fillRef idx="0">
+            <a:schemeClr val="dk1"/>
+          </a:fillRef>
+          <a:effectRef idx="0">
+            <a:schemeClr val="dk1"/>
+          </a:effectRef>
+          <a:fontRef idx="minor">
+            <a:schemeClr val="tx1"/>
+          </a:fontRef>
+        </p:style>
+      </p:cxnSp>
+      <p:sp>
+        <p:nvSpPr>
+          <p:cNvPr id="34" name="Rectangle 33">
+            <a:extLst>
+              <a:ext uri="{FF2B5EF4-FFF2-40B4-BE49-F238E27FC236}">
+                <a16:creationId xmlns:a16="http://schemas.microsoft.com/office/drawing/2014/main" id="{46689D72-92E4-453C-8D40-A0056FB4C088}"/>
+              </a:ext>
+            </a:extLst>
+          </p:cNvPr>
+          <p:cNvSpPr/>
+          <p:nvPr/>
+        </p:nvSpPr>
+        <p:spPr>
+          <a:xfrm>
+            <a:off x="6414260" y="403108"/>
+            <a:ext cx="1374773" cy="318924"/>
+          </a:xfrm>
+          <a:prstGeom prst="rect">
+            <a:avLst/>
+          </a:prstGeom>
+        </p:spPr>
+        <p:style>
+          <a:lnRef idx="2">
+            <a:schemeClr val="dk1"/>
+          </a:lnRef>
+          <a:fillRef idx="1">
+            <a:schemeClr val="lt1"/>
+          </a:fillRef>
+          <a:effectRef idx="0">
+            <a:schemeClr val="dk1"/>
+          </a:effectRef>
+          <a:fontRef idx="minor">
+            <a:schemeClr val="dk1"/>
+          </a:fontRef>
+        </p:style>
+        <p:txBody>
+          <a:bodyPr rtlCol="0" anchor="ctr"/>
+          <a:lstStyle/>
+          <a:p>
+            <a:pPr algn="ctr"/>
+            <a:r>
+              <a:rPr lang="en-US" sz="1000" dirty="0">
+                <a:latin typeface="Inter 18pt" panose="02000503000000020004" pitchFamily="2" charset="0"/>
+                <a:ea typeface="Inter 18pt" panose="02000503000000020004" pitchFamily="2" charset="0"/>
+              </a:rPr>
+              <a:t>Check-in </a:t>
+            </a:r>
+            <a:r>
+              <a:rPr lang="en-US" sz="700" dirty="0">
+                <a:latin typeface="Inter 18pt" panose="02000503000000020004" pitchFamily="2" charset="0"/>
+                <a:ea typeface="Inter 18pt" panose="02000503000000020004" pitchFamily="2" charset="0"/>
+              </a:rPr>
+              <a:t>(/admin/hostel/check-in</a:t>
+            </a:r>
+            <a:r>
+              <a:rPr lang="en-US" sz="900" dirty="0">
+                <a:latin typeface="Inter 18pt" panose="02000503000000020004" pitchFamily="2" charset="0"/>
+                <a:ea typeface="Inter 18pt" panose="02000503000000020004" pitchFamily="2" charset="0"/>
+              </a:rPr>
+              <a:t>)</a:t>
+            </a:r>
+            <a:endParaRPr lang="en-US" sz="1000" dirty="0">
+              <a:latin typeface="Inter 18pt" panose="02000503000000020004" pitchFamily="2" charset="0"/>
+              <a:ea typeface="Inter 18pt" panose="02000503000000020004" pitchFamily="2" charset="0"/>
+            </a:endParaRPr>
+          </a:p>
+        </p:txBody>
+      </p:sp>
+      <p:sp>
+        <p:nvSpPr>
+          <p:cNvPr id="35" name="Rectangle 34">
+            <a:extLst>
+              <a:ext uri="{FF2B5EF4-FFF2-40B4-BE49-F238E27FC236}">
+                <a16:creationId xmlns:a16="http://schemas.microsoft.com/office/drawing/2014/main" id="{5923CFAA-01CB-4178-91A6-68CB3890EDE0}"/>
+              </a:ext>
+            </a:extLst>
+          </p:cNvPr>
+          <p:cNvSpPr/>
+          <p:nvPr/>
+        </p:nvSpPr>
+        <p:spPr>
+          <a:xfrm>
+            <a:off x="7944610" y="411544"/>
+            <a:ext cx="1374773" cy="318924"/>
+          </a:xfrm>
+          <a:prstGeom prst="rect">
+            <a:avLst/>
+          </a:prstGeom>
+        </p:spPr>
+        <p:style>
+          <a:lnRef idx="2">
+            <a:schemeClr val="dk1"/>
+          </a:lnRef>
+          <a:fillRef idx="1">
+            <a:schemeClr val="lt1"/>
+          </a:fillRef>
+          <a:effectRef idx="0">
+            <a:schemeClr val="dk1"/>
+          </a:effectRef>
+          <a:fontRef idx="minor">
+            <a:schemeClr val="dk1"/>
+          </a:fontRef>
+        </p:style>
+        <p:txBody>
+          <a:bodyPr rtlCol="0" anchor="ctr"/>
+          <a:lstStyle/>
+          <a:p>
+            <a:pPr algn="ctr"/>
+            <a:r>
+              <a:rPr lang="en-US" sz="1000" dirty="0">
+                <a:latin typeface="Inter 18pt" panose="02000503000000020004" pitchFamily="2" charset="0"/>
+                <a:ea typeface="Inter 18pt" panose="02000503000000020004" pitchFamily="2" charset="0"/>
+              </a:rPr>
+              <a:t>Checkout </a:t>
+            </a:r>
+            <a:r>
+              <a:rPr lang="en-US" sz="700" dirty="0">
+                <a:latin typeface="Inter 18pt" panose="02000503000000020004" pitchFamily="2" charset="0"/>
+                <a:ea typeface="Inter 18pt" panose="02000503000000020004" pitchFamily="2" charset="0"/>
+              </a:rPr>
+              <a:t>(/admin/hostel/checkout</a:t>
+            </a:r>
+            <a:r>
+              <a:rPr lang="en-US" sz="900" dirty="0">
+                <a:latin typeface="Inter 18pt" panose="02000503000000020004" pitchFamily="2" charset="0"/>
+                <a:ea typeface="Inter 18pt" panose="02000503000000020004" pitchFamily="2" charset="0"/>
+              </a:rPr>
+              <a:t>)</a:t>
+            </a:r>
+            <a:endParaRPr lang="en-US" sz="1000" dirty="0">
+              <a:latin typeface="Inter 18pt" panose="02000503000000020004" pitchFamily="2" charset="0"/>
+              <a:ea typeface="Inter 18pt" panose="02000503000000020004" pitchFamily="2" charset="0"/>
+            </a:endParaRPr>
+          </a:p>
+        </p:txBody>
+      </p:sp>
+      <p:sp>
+        <p:nvSpPr>
+          <p:cNvPr id="36" name="Rectangle 35">
+            <a:extLst>
+              <a:ext uri="{FF2B5EF4-FFF2-40B4-BE49-F238E27FC236}">
+                <a16:creationId xmlns:a16="http://schemas.microsoft.com/office/drawing/2014/main" id="{ACBD70B4-AB21-4771-A435-41ABE5BF4D1A}"/>
+              </a:ext>
+            </a:extLst>
+          </p:cNvPr>
+          <p:cNvSpPr/>
+          <p:nvPr/>
+        </p:nvSpPr>
+        <p:spPr>
+          <a:xfrm>
+            <a:off x="2934267" y="1573023"/>
+            <a:ext cx="578697" cy="318924"/>
+          </a:xfrm>
+          <a:prstGeom prst="rect">
+            <a:avLst/>
+          </a:prstGeom>
+        </p:spPr>
+        <p:style>
+          <a:lnRef idx="2">
+            <a:schemeClr val="dk1"/>
+          </a:lnRef>
+          <a:fillRef idx="1">
+            <a:schemeClr val="lt1"/>
+          </a:fillRef>
+          <a:effectRef idx="0">
+            <a:schemeClr val="dk1"/>
+          </a:effectRef>
+          <a:fontRef idx="minor">
+            <a:schemeClr val="dk1"/>
+          </a:fontRef>
+        </p:style>
+        <p:txBody>
+          <a:bodyPr rtlCol="0" anchor="ctr"/>
+          <a:lstStyle/>
+          <a:p>
+            <a:pPr algn="ctr"/>
+            <a:r>
+              <a:rPr lang="en-US" sz="1000" dirty="0"/>
+              <a:t>SMS</a:t>
+            </a:r>
+          </a:p>
+        </p:txBody>
+      </p:sp>
+      <p:cxnSp>
+        <p:nvCxnSpPr>
+          <p:cNvPr id="54" name="Connector: Elbow 53">
+            <a:extLst>
+              <a:ext uri="{FF2B5EF4-FFF2-40B4-BE49-F238E27FC236}">
+                <a16:creationId xmlns:a16="http://schemas.microsoft.com/office/drawing/2014/main" id="{0C76C772-7F42-436B-B3DD-2C9290814D25}"/>
+              </a:ext>
+            </a:extLst>
+          </p:cNvPr>
+          <p:cNvCxnSpPr>
+            <a:stCxn id="18" idx="3"/>
+            <a:endCxn id="34" idx="1"/>
+          </p:cNvCxnSpPr>
+          <p:nvPr/>
+        </p:nvCxnSpPr>
+        <p:spPr>
+          <a:xfrm flipV="1">
+            <a:off x="5930535" y="562570"/>
+            <a:ext cx="483725" cy="359554"/>
+          </a:xfrm>
+          <a:prstGeom prst="bentConnector3">
+            <a:avLst/>
+          </a:prstGeom>
+          <a:ln>
+            <a:tailEnd type="triangle"/>
+          </a:ln>
+        </p:spPr>
+        <p:style>
+          <a:lnRef idx="1">
+            <a:schemeClr val="dk1"/>
+          </a:lnRef>
+          <a:fillRef idx="0">
+            <a:schemeClr val="dk1"/>
+          </a:fillRef>
+          <a:effectRef idx="0">
+            <a:schemeClr val="dk1"/>
+          </a:effectRef>
+          <a:fontRef idx="minor">
+            <a:schemeClr val="tx1"/>
+          </a:fontRef>
+        </p:style>
+      </p:cxnSp>
+      <p:cxnSp>
+        <p:nvCxnSpPr>
+          <p:cNvPr id="56" name="Connector: Elbow 55">
+            <a:extLst>
+              <a:ext uri="{FF2B5EF4-FFF2-40B4-BE49-F238E27FC236}">
+                <a16:creationId xmlns:a16="http://schemas.microsoft.com/office/drawing/2014/main" id="{45994ED3-8A66-43B0-89A1-D1EA8FA2BF56}"/>
+              </a:ext>
+            </a:extLst>
+          </p:cNvPr>
+          <p:cNvCxnSpPr>
+            <a:cxnSpLocks/>
+          </p:cNvCxnSpPr>
+          <p:nvPr/>
+        </p:nvCxnSpPr>
+        <p:spPr>
+          <a:xfrm flipV="1">
+            <a:off x="6172397" y="710080"/>
+            <a:ext cx="2459600" cy="204356"/>
+          </a:xfrm>
+          <a:prstGeom prst="bentConnector3">
+            <a:avLst>
+              <a:gd name="adj1" fmla="val 100085"/>
+            </a:avLst>
+          </a:prstGeom>
+          <a:ln>
+            <a:tailEnd type="triangle"/>
+          </a:ln>
+        </p:spPr>
+        <p:style>
+          <a:lnRef idx="1">
+            <a:schemeClr val="dk1"/>
+          </a:lnRef>
+          <a:fillRef idx="0">
+            <a:schemeClr val="dk1"/>
+          </a:fillRef>
+          <a:effectRef idx="0">
+            <a:schemeClr val="dk1"/>
+          </a:effectRef>
+          <a:fontRef idx="minor">
+            <a:schemeClr val="tx1"/>
+          </a:fontRef>
+        </p:style>
+      </p:cxnSp>
+      <p:sp>
+        <p:nvSpPr>
+          <p:cNvPr id="59" name="Rectangle 58">
+            <a:extLst>
+              <a:ext uri="{FF2B5EF4-FFF2-40B4-BE49-F238E27FC236}">
+                <a16:creationId xmlns:a16="http://schemas.microsoft.com/office/drawing/2014/main" id="{264840F8-1014-4A74-8397-AFE08A28D649}"/>
+              </a:ext>
+            </a:extLst>
+          </p:cNvPr>
+          <p:cNvSpPr/>
+          <p:nvPr/>
+        </p:nvSpPr>
+        <p:spPr>
+          <a:xfrm>
+            <a:off x="7657441" y="1072997"/>
+            <a:ext cx="1630170" cy="318924"/>
+          </a:xfrm>
+          <a:prstGeom prst="rect">
+            <a:avLst/>
+          </a:prstGeom>
+        </p:spPr>
+        <p:style>
+          <a:lnRef idx="2">
+            <a:schemeClr val="dk1"/>
+          </a:lnRef>
+          <a:fillRef idx="1">
+            <a:schemeClr val="lt1"/>
+          </a:fillRef>
+          <a:effectRef idx="0">
+            <a:schemeClr val="dk1"/>
+          </a:effectRef>
+          <a:fontRef idx="minor">
+            <a:schemeClr val="dk1"/>
+          </a:fontRef>
+        </p:style>
+        <p:txBody>
+          <a:bodyPr rtlCol="0" anchor="ctr"/>
+          <a:lstStyle/>
+          <a:p>
+            <a:pPr algn="ctr"/>
+            <a:r>
+              <a:rPr lang="en-US" sz="1000" dirty="0">
+                <a:latin typeface="Inter 18pt" panose="02000503000000020004" pitchFamily="2" charset="0"/>
+                <a:ea typeface="Inter 18pt" panose="02000503000000020004" pitchFamily="2" charset="0"/>
+              </a:rPr>
+              <a:t>Guest Feedback Report </a:t>
+            </a:r>
+          </a:p>
+          <a:p>
+            <a:pPr algn="ctr"/>
+            <a:r>
+              <a:rPr lang="en-US" sz="700" dirty="0">
+                <a:latin typeface="Inter 18pt" panose="02000503000000020004" pitchFamily="2" charset="0"/>
+                <a:ea typeface="Inter 18pt" panose="02000503000000020004" pitchFamily="2" charset="0"/>
+              </a:rPr>
+              <a:t>(POST /admin/report/generate</a:t>
+            </a:r>
+            <a:r>
+              <a:rPr lang="en-US" sz="900" dirty="0">
+                <a:latin typeface="Inter 18pt" panose="02000503000000020004" pitchFamily="2" charset="0"/>
+                <a:ea typeface="Inter 18pt" panose="02000503000000020004" pitchFamily="2" charset="0"/>
+              </a:rPr>
+              <a:t>)</a:t>
+            </a:r>
+            <a:endParaRPr lang="en-US" sz="1000" dirty="0">
+              <a:latin typeface="Inter 18pt" panose="02000503000000020004" pitchFamily="2" charset="0"/>
+              <a:ea typeface="Inter 18pt" panose="02000503000000020004" pitchFamily="2" charset="0"/>
+            </a:endParaRPr>
+          </a:p>
+        </p:txBody>
+      </p:sp>
+      <p:sp>
+        <p:nvSpPr>
+          <p:cNvPr id="60" name="Rectangle 59">
+            <a:extLst>
+              <a:ext uri="{FF2B5EF4-FFF2-40B4-BE49-F238E27FC236}">
+                <a16:creationId xmlns:a16="http://schemas.microsoft.com/office/drawing/2014/main" id="{2C78C27C-8504-455A-974D-67B2162F1DB9}"/>
+              </a:ext>
+            </a:extLst>
+          </p:cNvPr>
+          <p:cNvSpPr/>
+          <p:nvPr/>
+        </p:nvSpPr>
+        <p:spPr>
+          <a:xfrm>
+            <a:off x="7657440" y="1444761"/>
+            <a:ext cx="1630171" cy="318924"/>
+          </a:xfrm>
+          <a:prstGeom prst="rect">
+            <a:avLst/>
+          </a:prstGeom>
+        </p:spPr>
+        <p:style>
+          <a:lnRef idx="2">
+            <a:schemeClr val="dk1"/>
+          </a:lnRef>
+          <a:fillRef idx="1">
+            <a:schemeClr val="lt1"/>
+          </a:fillRef>
+          <a:effectRef idx="0">
+            <a:schemeClr val="dk1"/>
+          </a:effectRef>
+          <a:fontRef idx="minor">
+            <a:schemeClr val="dk1"/>
+          </a:fontRef>
+        </p:style>
+        <p:txBody>
+          <a:bodyPr rtlCol="0" anchor="ctr"/>
+          <a:lstStyle/>
+          <a:p>
+            <a:pPr algn="ctr"/>
+            <a:r>
+              <a:rPr lang="en-US" sz="1000" dirty="0">
+                <a:latin typeface="Inter 18pt" panose="02000503000000020004" pitchFamily="2" charset="0"/>
+                <a:ea typeface="Inter 18pt" panose="02000503000000020004" pitchFamily="2" charset="0"/>
+              </a:rPr>
+              <a:t>Occupancies</a:t>
+            </a:r>
+          </a:p>
+          <a:p>
+            <a:pPr algn="ctr"/>
+            <a:r>
+              <a:rPr lang="en-US" sz="700" dirty="0">
+                <a:latin typeface="Inter 18pt" panose="02000503000000020004" pitchFamily="2" charset="0"/>
+                <a:ea typeface="Inter 18pt" panose="02000503000000020004" pitchFamily="2" charset="0"/>
+              </a:rPr>
+              <a:t>(GET /admin/report/{query}{msg}</a:t>
+            </a:r>
+            <a:r>
+              <a:rPr lang="en-US" sz="900" dirty="0">
+                <a:latin typeface="Inter 18pt" panose="02000503000000020004" pitchFamily="2" charset="0"/>
+                <a:ea typeface="Inter 18pt" panose="02000503000000020004" pitchFamily="2" charset="0"/>
+              </a:rPr>
+              <a:t>)</a:t>
+            </a:r>
+            <a:endParaRPr lang="en-US" sz="1000" dirty="0">
+              <a:latin typeface="Inter 18pt" panose="02000503000000020004" pitchFamily="2" charset="0"/>
+              <a:ea typeface="Inter 18pt" panose="02000503000000020004" pitchFamily="2" charset="0"/>
+            </a:endParaRPr>
+          </a:p>
+        </p:txBody>
+      </p:sp>
+      <p:sp>
+        <p:nvSpPr>
+          <p:cNvPr id="61" name="Rectangle 60">
+            <a:extLst>
+              <a:ext uri="{FF2B5EF4-FFF2-40B4-BE49-F238E27FC236}">
+                <a16:creationId xmlns:a16="http://schemas.microsoft.com/office/drawing/2014/main" id="{A5B93571-2D42-4E2E-A3B7-A34E0154DF70}"/>
+              </a:ext>
+            </a:extLst>
+          </p:cNvPr>
+          <p:cNvSpPr/>
+          <p:nvPr/>
+        </p:nvSpPr>
+        <p:spPr>
+          <a:xfrm>
+            <a:off x="7657439" y="1816525"/>
+            <a:ext cx="1630171" cy="318924"/>
+          </a:xfrm>
+          <a:prstGeom prst="rect">
+            <a:avLst/>
+          </a:prstGeom>
+        </p:spPr>
+        <p:style>
+          <a:lnRef idx="2">
+            <a:schemeClr val="dk1"/>
+          </a:lnRef>
+          <a:fillRef idx="1">
+            <a:schemeClr val="lt1"/>
+          </a:fillRef>
+          <a:effectRef idx="0">
+            <a:schemeClr val="dk1"/>
+          </a:effectRef>
+          <a:fontRef idx="minor">
+            <a:schemeClr val="dk1"/>
+          </a:fontRef>
+        </p:style>
+        <p:txBody>
+          <a:bodyPr rtlCol="0" anchor="ctr"/>
+          <a:lstStyle/>
+          <a:p>
+            <a:pPr algn="ctr"/>
+            <a:r>
+              <a:rPr lang="en-US" sz="1000" dirty="0">
+                <a:latin typeface="Inter 18pt" panose="02000503000000020004" pitchFamily="2" charset="0"/>
+                <a:ea typeface="Inter 18pt" panose="02000503000000020004" pitchFamily="2" charset="0"/>
+              </a:rPr>
+              <a:t>Vacancies</a:t>
+            </a:r>
+          </a:p>
+          <a:p>
+            <a:pPr algn="ctr"/>
+            <a:r>
+              <a:rPr lang="en-US" sz="700" dirty="0">
+                <a:latin typeface="Inter 18pt" panose="02000503000000020004" pitchFamily="2" charset="0"/>
+                <a:ea typeface="Inter 18pt" panose="02000503000000020004" pitchFamily="2" charset="0"/>
+              </a:rPr>
+              <a:t>(GET /admin/report/{query}{msg}</a:t>
+            </a:r>
+            <a:r>
+              <a:rPr lang="en-US" sz="900" dirty="0">
+                <a:latin typeface="Inter 18pt" panose="02000503000000020004" pitchFamily="2" charset="0"/>
+                <a:ea typeface="Inter 18pt" panose="02000503000000020004" pitchFamily="2" charset="0"/>
+              </a:rPr>
+              <a:t>)</a:t>
+            </a:r>
+            <a:endParaRPr lang="en-US" sz="1000" dirty="0">
+              <a:latin typeface="Inter 18pt" panose="02000503000000020004" pitchFamily="2" charset="0"/>
+              <a:ea typeface="Inter 18pt" panose="02000503000000020004" pitchFamily="2" charset="0"/>
+            </a:endParaRPr>
+          </a:p>
+        </p:txBody>
+      </p:sp>
+      <p:cxnSp>
+        <p:nvCxnSpPr>
+          <p:cNvPr id="63" name="Connector: Elbow 62">
+            <a:extLst>
+              <a:ext uri="{FF2B5EF4-FFF2-40B4-BE49-F238E27FC236}">
+                <a16:creationId xmlns:a16="http://schemas.microsoft.com/office/drawing/2014/main" id="{5458EF7E-4337-4FD5-B4CF-AF525A7A8744}"/>
+              </a:ext>
+            </a:extLst>
+          </p:cNvPr>
+          <p:cNvCxnSpPr>
+            <a:stCxn id="19" idx="3"/>
+            <a:endCxn id="59" idx="1"/>
+          </p:cNvCxnSpPr>
+          <p:nvPr/>
+        </p:nvCxnSpPr>
+        <p:spPr>
+          <a:xfrm flipV="1">
+            <a:off x="5924841" y="1232459"/>
+            <a:ext cx="1732600" cy="44456"/>
+          </a:xfrm>
+          <a:prstGeom prst="bentConnector3">
+            <a:avLst/>
+          </a:prstGeom>
+          <a:ln>
+            <a:tailEnd type="triangle"/>
+          </a:ln>
+        </p:spPr>
+        <p:style>
+          <a:lnRef idx="1">
+            <a:schemeClr val="dk1"/>
+          </a:lnRef>
+          <a:fillRef idx="0">
+            <a:schemeClr val="dk1"/>
+          </a:fillRef>
+          <a:effectRef idx="0">
+            <a:schemeClr val="dk1"/>
+          </a:effectRef>
+          <a:fontRef idx="minor">
+            <a:schemeClr val="tx1"/>
+          </a:fontRef>
+        </p:style>
+      </p:cxnSp>
+      <p:cxnSp>
+        <p:nvCxnSpPr>
+          <p:cNvPr id="65" name="Connector: Elbow 64">
+            <a:extLst>
+              <a:ext uri="{FF2B5EF4-FFF2-40B4-BE49-F238E27FC236}">
+                <a16:creationId xmlns:a16="http://schemas.microsoft.com/office/drawing/2014/main" id="{B649ECFE-9819-461A-95BD-3847DE31ECA7}"/>
+              </a:ext>
+            </a:extLst>
+          </p:cNvPr>
+          <p:cNvCxnSpPr>
+            <a:cxnSpLocks/>
+            <a:stCxn id="19" idx="3"/>
+            <a:endCxn id="60" idx="1"/>
+          </p:cNvCxnSpPr>
+          <p:nvPr/>
+        </p:nvCxnSpPr>
+        <p:spPr>
+          <a:xfrm>
+            <a:off x="5924841" y="1276915"/>
+            <a:ext cx="1732599" cy="327308"/>
+          </a:xfrm>
+          <a:prstGeom prst="bentConnector3">
+            <a:avLst>
+              <a:gd name="adj1" fmla="val 50000"/>
+            </a:avLst>
+          </a:prstGeom>
+          <a:ln>
+            <a:tailEnd type="triangle"/>
+          </a:ln>
+        </p:spPr>
+        <p:style>
+          <a:lnRef idx="1">
+            <a:schemeClr val="dk1"/>
+          </a:lnRef>
+          <a:fillRef idx="0">
+            <a:schemeClr val="dk1"/>
+          </a:fillRef>
+          <a:effectRef idx="0">
+            <a:schemeClr val="dk1"/>
+          </a:effectRef>
+          <a:fontRef idx="minor">
+            <a:schemeClr val="tx1"/>
+          </a:fontRef>
+        </p:style>
+      </p:cxnSp>
+      <p:cxnSp>
+        <p:nvCxnSpPr>
+          <p:cNvPr id="67" name="Connector: Elbow 66">
+            <a:extLst>
+              <a:ext uri="{FF2B5EF4-FFF2-40B4-BE49-F238E27FC236}">
+                <a16:creationId xmlns:a16="http://schemas.microsoft.com/office/drawing/2014/main" id="{4279630D-D6DF-4253-AAE4-1F04B88C2EB2}"/>
+              </a:ext>
+            </a:extLst>
+          </p:cNvPr>
+          <p:cNvCxnSpPr>
+            <a:cxnSpLocks/>
+          </p:cNvCxnSpPr>
+          <p:nvPr/>
+        </p:nvCxnSpPr>
+        <p:spPr>
+          <a:xfrm rot="10800000" flipV="1">
+            <a:off x="2396360" y="1462148"/>
+            <a:ext cx="5155730" cy="914192"/>
+          </a:xfrm>
+          <a:prstGeom prst="bentConnector3">
+            <a:avLst>
+              <a:gd name="adj1" fmla="val 25382"/>
+            </a:avLst>
+          </a:prstGeom>
+          <a:ln w="9525" cap="flat" cmpd="sng" algn="ctr">
+            <a:solidFill>
+              <a:schemeClr val="accent6"/>
+            </a:solidFill>
+            <a:prstDash val="dash"/>
+            <a:round/>
+            <a:headEnd type="arrow" w="med" len="med"/>
+            <a:tailEnd type="arrow" w="med" len="med"/>
+          </a:ln>
+        </p:spPr>
+        <p:style>
+          <a:lnRef idx="0">
+            <a:scrgbClr r="0" g="0" b="0"/>
+          </a:lnRef>
+          <a:fillRef idx="0">
+            <a:scrgbClr r="0" g="0" b="0"/>
+          </a:fillRef>
+          <a:effectRef idx="0">
+            <a:scrgbClr r="0" g="0" b="0"/>
+          </a:effectRef>
+          <a:fontRef idx="minor">
+            <a:schemeClr val="tx1"/>
+          </a:fontRef>
+        </p:style>
+      </p:cxnSp>
+      <p:sp>
+        <p:nvSpPr>
+          <p:cNvPr id="86" name="Cylinder 85">
+            <a:extLst>
+              <a:ext uri="{FF2B5EF4-FFF2-40B4-BE49-F238E27FC236}">
+                <a16:creationId xmlns:a16="http://schemas.microsoft.com/office/drawing/2014/main" id="{02C244C3-C8A9-43C3-9F62-616669CFA14B}"/>
+              </a:ext>
+            </a:extLst>
+          </p:cNvPr>
+          <p:cNvSpPr/>
+          <p:nvPr/>
+        </p:nvSpPr>
+        <p:spPr>
+          <a:xfrm>
+            <a:off x="1443860" y="2754338"/>
+            <a:ext cx="914400" cy="814362"/>
+          </a:xfrm>
+          <a:prstGeom prst="can">
+            <a:avLst/>
+          </a:prstGeom>
+        </p:spPr>
+        <p:style>
+          <a:lnRef idx="2">
+            <a:schemeClr val="dk1"/>
+          </a:lnRef>
+          <a:fillRef idx="1">
+            <a:schemeClr val="lt1"/>
+          </a:fillRef>
+          <a:effectRef idx="0">
+            <a:schemeClr val="dk1"/>
+          </a:effectRef>
+          <a:fontRef idx="minor">
+            <a:schemeClr val="dk1"/>
+          </a:fontRef>
+        </p:style>
+        <p:txBody>
+          <a:bodyPr rtlCol="0" anchor="ctr"/>
+          <a:lstStyle/>
+          <a:p>
+            <a:pPr algn="ctr"/>
+            <a:r>
+              <a:rPr lang="en-US" sz="1000" dirty="0">
+                <a:latin typeface="Inter 18pt" panose="02000503000000020004" pitchFamily="2" charset="0"/>
+                <a:ea typeface="Inter 18pt" panose="02000503000000020004" pitchFamily="2" charset="0"/>
+              </a:rPr>
+              <a:t>Users</a:t>
+            </a:r>
+          </a:p>
+        </p:txBody>
+      </p:sp>
+      <p:cxnSp>
+        <p:nvCxnSpPr>
+          <p:cNvPr id="92" name="Connector: Elbow 91">
+            <a:extLst>
+              <a:ext uri="{FF2B5EF4-FFF2-40B4-BE49-F238E27FC236}">
+                <a16:creationId xmlns:a16="http://schemas.microsoft.com/office/drawing/2014/main" id="{AB5B4FC7-3EC5-433F-9E78-82137F388467}"/>
+              </a:ext>
+            </a:extLst>
+          </p:cNvPr>
+          <p:cNvCxnSpPr>
+            <a:cxnSpLocks/>
+            <a:stCxn id="7" idx="2"/>
+          </p:cNvCxnSpPr>
+          <p:nvPr/>
+        </p:nvCxnSpPr>
+        <p:spPr>
+          <a:xfrm rot="5400000">
+            <a:off x="2565164" y="1133385"/>
+            <a:ext cx="929282" cy="1282885"/>
+          </a:xfrm>
+          <a:prstGeom prst="bentConnector2">
+            <a:avLst/>
+          </a:prstGeom>
+          <a:ln>
+            <a:prstDash val="dash"/>
+            <a:headEnd type="arrow" w="med" len="med"/>
+            <a:tailEnd type="arrow" w="med" len="med"/>
+          </a:ln>
+        </p:spPr>
+        <p:style>
+          <a:lnRef idx="1">
+            <a:schemeClr val="dk1"/>
+          </a:lnRef>
+          <a:fillRef idx="0">
+            <a:schemeClr val="dk1"/>
+          </a:fillRef>
+          <a:effectRef idx="0">
+            <a:schemeClr val="dk1"/>
+          </a:effectRef>
+          <a:fontRef idx="minor">
+            <a:schemeClr val="tx1"/>
+          </a:fontRef>
+        </p:style>
+      </p:cxnSp>
+      <p:cxnSp>
+        <p:nvCxnSpPr>
+          <p:cNvPr id="97" name="Straight Arrow Connector 96">
+            <a:extLst>
+              <a:ext uri="{FF2B5EF4-FFF2-40B4-BE49-F238E27FC236}">
+                <a16:creationId xmlns:a16="http://schemas.microsoft.com/office/drawing/2014/main" id="{6B37E2A1-150D-4226-9AF4-60A0EC4FD269}"/>
+              </a:ext>
+            </a:extLst>
+          </p:cNvPr>
+          <p:cNvCxnSpPr/>
+          <p:nvPr/>
+        </p:nvCxnSpPr>
+        <p:spPr>
+          <a:xfrm>
+            <a:off x="3219736" y="1359131"/>
+            <a:ext cx="0" cy="185882"/>
+          </a:xfrm>
+          <a:prstGeom prst="straightConnector1">
+            <a:avLst/>
+          </a:prstGeom>
+          <a:ln>
+            <a:tailEnd type="triangle"/>
+          </a:ln>
+        </p:spPr>
+        <p:style>
+          <a:lnRef idx="1">
+            <a:schemeClr val="dk1"/>
+          </a:lnRef>
+          <a:fillRef idx="0">
+            <a:schemeClr val="dk1"/>
+          </a:fillRef>
+          <a:effectRef idx="0">
+            <a:schemeClr val="dk1"/>
+          </a:effectRef>
+          <a:fontRef idx="minor">
+            <a:schemeClr val="tx1"/>
+          </a:fontRef>
+        </p:style>
+      </p:cxnSp>
+      <p:cxnSp>
+        <p:nvCxnSpPr>
+          <p:cNvPr id="99" name="Connector: Elbow 98">
+            <a:extLst>
+              <a:ext uri="{FF2B5EF4-FFF2-40B4-BE49-F238E27FC236}">
+                <a16:creationId xmlns:a16="http://schemas.microsoft.com/office/drawing/2014/main" id="{03E743A4-DEAA-4EA2-BE95-2B27BB9C52B8}"/>
+              </a:ext>
+            </a:extLst>
+          </p:cNvPr>
+          <p:cNvCxnSpPr>
+            <a:cxnSpLocks/>
+          </p:cNvCxnSpPr>
+          <p:nvPr/>
+        </p:nvCxnSpPr>
+        <p:spPr>
+          <a:xfrm rot="5400000">
+            <a:off x="2718732" y="1596871"/>
+            <a:ext cx="182512" cy="827256"/>
+          </a:xfrm>
+          <a:prstGeom prst="bentConnector2">
+            <a:avLst/>
+          </a:prstGeom>
+          <a:ln>
+            <a:prstDash val="dash"/>
+            <a:tailEnd type="triangle"/>
+          </a:ln>
+        </p:spPr>
+        <p:style>
+          <a:lnRef idx="1">
+            <a:schemeClr val="dk1"/>
+          </a:lnRef>
+          <a:fillRef idx="0">
+            <a:schemeClr val="dk1"/>
+          </a:fillRef>
+          <a:effectRef idx="0">
+            <a:schemeClr val="dk1"/>
+          </a:effectRef>
+          <a:fontRef idx="minor">
+            <a:schemeClr val="tx1"/>
+          </a:fontRef>
+        </p:style>
+      </p:cxnSp>
+      <p:sp>
+        <p:nvSpPr>
+          <p:cNvPr id="105" name="Rectangle 104">
+            <a:extLst>
+              <a:ext uri="{FF2B5EF4-FFF2-40B4-BE49-F238E27FC236}">
+                <a16:creationId xmlns:a16="http://schemas.microsoft.com/office/drawing/2014/main" id="{CCB96192-EB7C-40D9-9667-0CAD83A84AD4}"/>
+              </a:ext>
+            </a:extLst>
+          </p:cNvPr>
+          <p:cNvSpPr/>
+          <p:nvPr/>
+        </p:nvSpPr>
+        <p:spPr>
+          <a:xfrm>
+            <a:off x="9992544" y="764566"/>
+            <a:ext cx="1714377" cy="318924"/>
+          </a:xfrm>
+          <a:prstGeom prst="rect">
+            <a:avLst/>
+          </a:prstGeom>
+        </p:spPr>
+        <p:style>
+          <a:lnRef idx="2">
+            <a:schemeClr val="dk1"/>
+          </a:lnRef>
+          <a:fillRef idx="1">
+            <a:schemeClr val="lt1"/>
+          </a:fillRef>
+          <a:effectRef idx="0">
+            <a:schemeClr val="dk1"/>
+          </a:effectRef>
+          <a:fontRef idx="minor">
+            <a:schemeClr val="dk1"/>
+          </a:fontRef>
+        </p:style>
+        <p:txBody>
+          <a:bodyPr rtlCol="0" anchor="ctr"/>
+          <a:lstStyle/>
+          <a:p>
+            <a:pPr algn="ctr"/>
+            <a:r>
+              <a:rPr lang="en-US" sz="1000" dirty="0">
+                <a:latin typeface="Inter 18pt" panose="02000503000000020004" pitchFamily="2" charset="0"/>
+                <a:ea typeface="Inter 18pt" panose="02000503000000020004" pitchFamily="2" charset="0"/>
+              </a:rPr>
+              <a:t>Update </a:t>
+            </a:r>
+          </a:p>
+          <a:p>
+            <a:pPr algn="ctr"/>
+            <a:r>
+              <a:rPr lang="en-US" sz="700" dirty="0">
+                <a:latin typeface="Inter 18pt" panose="02000503000000020004" pitchFamily="2" charset="0"/>
+                <a:ea typeface="Inter 18pt" panose="02000503000000020004" pitchFamily="2" charset="0"/>
+              </a:rPr>
+              <a:t>(POST /admin/check-in/{id}/refresh</a:t>
+            </a:r>
+            <a:endParaRPr lang="en-US" sz="1000" dirty="0">
+              <a:latin typeface="Inter 18pt" panose="02000503000000020004" pitchFamily="2" charset="0"/>
+              <a:ea typeface="Inter 18pt" panose="02000503000000020004" pitchFamily="2" charset="0"/>
+            </a:endParaRPr>
+          </a:p>
+        </p:txBody>
+      </p:sp>
+      <p:pic>
+        <p:nvPicPr>
+          <p:cNvPr id="108" name="Graphic 107" descr="Lock">
+            <a:extLst>
+              <a:ext uri="{FF2B5EF4-FFF2-40B4-BE49-F238E27FC236}">
+                <a16:creationId xmlns:a16="http://schemas.microsoft.com/office/drawing/2014/main" id="{21AE184C-35E1-4750-A828-249E3E949C96}"/>
+              </a:ext>
+            </a:extLst>
+          </p:cNvPr>
+          <p:cNvPicPr>
+            <a:picLocks noChangeAspect="1"/>
+          </p:cNvPicPr>
+          <p:nvPr/>
+        </p:nvPicPr>
+        <p:blipFill>
+          <a:blip r:embed="rId2">
+            <a:extLst>
+              <a:ext uri="{28A0092B-C50C-407E-A947-70E740481C1C}">
+                <a14:useLocalDpi xmlns:a14="http://schemas.microsoft.com/office/drawing/2010/main" val="0"/>
+              </a:ext>
+              <a:ext uri="{96DAC541-7B7A-43D3-8B79-37D633B846F1}">
+                <asvg:svgBlip xmlns:asvg="http://schemas.microsoft.com/office/drawing/2016/SVG/main" r:embed="rId3"/>
+              </a:ext>
+            </a:extLst>
+          </a:blip>
+          <a:stretch>
+            <a:fillRect/>
+          </a:stretch>
+        </p:blipFill>
+        <p:spPr>
+          <a:xfrm>
+            <a:off x="10483795" y="798752"/>
+            <a:ext cx="152400" cy="152400"/>
+          </a:xfrm>
+          <a:prstGeom prst="rect">
+            <a:avLst/>
+          </a:prstGeom>
+        </p:spPr>
+      </p:pic>
+      <p:grpSp>
+        <p:nvGrpSpPr>
+          <p:cNvPr id="115" name="Group 114">
+            <a:extLst>
+              <a:ext uri="{FF2B5EF4-FFF2-40B4-BE49-F238E27FC236}">
+                <a16:creationId xmlns:a16="http://schemas.microsoft.com/office/drawing/2014/main" id="{2C00FF75-46A2-449C-9AC9-49F270E479F7}"/>
+              </a:ext>
+            </a:extLst>
+          </p:cNvPr>
+          <p:cNvGrpSpPr/>
+          <p:nvPr/>
+        </p:nvGrpSpPr>
+        <p:grpSpPr>
+          <a:xfrm>
+            <a:off x="9992545" y="1167203"/>
+            <a:ext cx="1714376" cy="318924"/>
+            <a:chOff x="9319383" y="4532012"/>
+            <a:chExt cx="1714376" cy="318924"/>
+          </a:xfrm>
+        </p:grpSpPr>
+        <p:sp>
+          <p:nvSpPr>
+            <p:cNvPr id="106" name="Rectangle 105">
+              <a:extLst>
+                <a:ext uri="{FF2B5EF4-FFF2-40B4-BE49-F238E27FC236}">
+                  <a16:creationId xmlns:a16="http://schemas.microsoft.com/office/drawing/2014/main" id="{0A21E7F8-F52A-4C78-B079-8BE4AFE40705}"/>
+                </a:ext>
+              </a:extLst>
+            </p:cNvPr>
+            <p:cNvSpPr/>
+            <p:nvPr/>
+          </p:nvSpPr>
+          <p:spPr>
+            <a:xfrm>
+              <a:off x="9319383" y="4532012"/>
+              <a:ext cx="1714376" cy="318924"/>
+            </a:xfrm>
+            <a:prstGeom prst="rect">
+              <a:avLst/>
+            </a:prstGeom>
+          </p:spPr>
+          <p:style>
+            <a:lnRef idx="2">
+              <a:schemeClr val="dk1"/>
+            </a:lnRef>
+            <a:fillRef idx="1">
+              <a:schemeClr val="lt1"/>
+            </a:fillRef>
+            <a:effectRef idx="0">
+              <a:schemeClr val="dk1"/>
+            </a:effectRef>
+            <a:fontRef idx="minor">
+              <a:schemeClr val="dk1"/>
+            </a:fontRef>
+          </p:style>
+          <p:txBody>
+            <a:bodyPr rtlCol="0" anchor="ctr"/>
+            <a:lstStyle/>
+            <a:p>
+              <a:pPr algn="ctr"/>
+              <a:r>
+                <a:rPr lang="en-US" sz="1000" dirty="0">
+                  <a:latin typeface="Inter 18pt" panose="02000503000000020004" pitchFamily="2" charset="0"/>
+                  <a:ea typeface="Inter 18pt" panose="02000503000000020004" pitchFamily="2" charset="0"/>
+                </a:rPr>
+                <a:t>Delete </a:t>
+              </a:r>
+            </a:p>
+            <a:p>
+              <a:pPr algn="ctr"/>
+              <a:r>
+                <a:rPr lang="en-US" sz="700" dirty="0">
+                  <a:latin typeface="Inter 18pt" panose="02000503000000020004" pitchFamily="2" charset="0"/>
+                  <a:ea typeface="Inter 18pt" panose="02000503000000020004" pitchFamily="2" charset="0"/>
+                </a:rPr>
+                <a:t>(POST /admin/check-in/{id}/minus</a:t>
+              </a:r>
+              <a:r>
+                <a:rPr lang="en-US" sz="900" dirty="0">
+                  <a:latin typeface="Inter 18pt" panose="02000503000000020004" pitchFamily="2" charset="0"/>
+                  <a:ea typeface="Inter 18pt" panose="02000503000000020004" pitchFamily="2" charset="0"/>
+                </a:rPr>
+                <a:t>)</a:t>
+              </a:r>
+              <a:endParaRPr lang="en-US" sz="1000" dirty="0">
+                <a:latin typeface="Inter 18pt" panose="02000503000000020004" pitchFamily="2" charset="0"/>
+                <a:ea typeface="Inter 18pt" panose="02000503000000020004" pitchFamily="2" charset="0"/>
+              </a:endParaRPr>
+            </a:p>
+          </p:txBody>
+        </p:sp>
+        <p:pic>
+          <p:nvPicPr>
+            <p:cNvPr id="109" name="Graphic 108" descr="Lock">
+              <a:extLst>
+                <a:ext uri="{FF2B5EF4-FFF2-40B4-BE49-F238E27FC236}">
+                  <a16:creationId xmlns:a16="http://schemas.microsoft.com/office/drawing/2014/main" id="{15162385-F98D-4470-A21C-F5827F3AA10F}"/>
+                </a:ext>
+              </a:extLst>
+            </p:cNvPr>
+            <p:cNvPicPr>
+              <a:picLocks noChangeAspect="1"/>
+            </p:cNvPicPr>
+            <p:nvPr/>
+          </p:nvPicPr>
+          <p:blipFill>
+            <a:blip r:embed="rId4">
+              <a:extLst>
+                <a:ext uri="{28A0092B-C50C-407E-A947-70E740481C1C}">
+                  <a14:useLocalDpi xmlns:a14="http://schemas.microsoft.com/office/drawing/2010/main" val="0"/>
+                </a:ext>
+                <a:ext uri="{96DAC541-7B7A-43D3-8B79-37D633B846F1}">
+                  <asvg:svgBlip xmlns:asvg="http://schemas.microsoft.com/office/drawing/2016/SVG/main" r:embed="rId5"/>
+                </a:ext>
+              </a:extLst>
+            </a:blip>
+            <a:stretch>
+              <a:fillRect/>
+            </a:stretch>
+          </p:blipFill>
+          <p:spPr>
+            <a:xfrm>
+              <a:off x="9837421" y="4539074"/>
+              <a:ext cx="152400" cy="152400"/>
+            </a:xfrm>
+            <a:prstGeom prst="rect">
+              <a:avLst/>
+            </a:prstGeom>
+          </p:spPr>
+        </p:pic>
+        <p:pic>
+          <p:nvPicPr>
+            <p:cNvPr id="111" name="Graphic 110" descr="Key">
+              <a:extLst>
+                <a:ext uri="{FF2B5EF4-FFF2-40B4-BE49-F238E27FC236}">
+                  <a16:creationId xmlns:a16="http://schemas.microsoft.com/office/drawing/2014/main" id="{DC03482A-4BAA-49CF-8D10-C8ADF69A83A0}"/>
+                </a:ext>
+              </a:extLst>
+            </p:cNvPr>
+            <p:cNvPicPr>
+              <a:picLocks noChangeAspect="1"/>
+            </p:cNvPicPr>
+            <p:nvPr/>
+          </p:nvPicPr>
+          <p:blipFill>
+            <a:blip r:embed="rId6">
+              <a:extLst>
+                <a:ext uri="{28A0092B-C50C-407E-A947-70E740481C1C}">
+                  <a14:useLocalDpi xmlns:a14="http://schemas.microsoft.com/office/drawing/2010/main" val="0"/>
+                </a:ext>
+                <a:ext uri="{96DAC541-7B7A-43D3-8B79-37D633B846F1}">
+                  <asvg:svgBlip xmlns:asvg="http://schemas.microsoft.com/office/drawing/2016/SVG/main" r:embed="rId7"/>
+                </a:ext>
+              </a:extLst>
+            </a:blip>
+            <a:stretch>
+              <a:fillRect/>
+            </a:stretch>
+          </p:blipFill>
+          <p:spPr>
+            <a:xfrm>
+              <a:off x="9650731" y="4542884"/>
+              <a:ext cx="181516" cy="181516"/>
+            </a:xfrm>
+            <a:prstGeom prst="rect">
+              <a:avLst/>
+            </a:prstGeom>
+          </p:spPr>
+        </p:pic>
+      </p:grpSp>
+      <p:grpSp>
+        <p:nvGrpSpPr>
+          <p:cNvPr id="116" name="Group 115">
+            <a:extLst>
+              <a:ext uri="{FF2B5EF4-FFF2-40B4-BE49-F238E27FC236}">
+                <a16:creationId xmlns:a16="http://schemas.microsoft.com/office/drawing/2014/main" id="{5DE38839-26B5-4501-86F7-48A87346CBAF}"/>
+              </a:ext>
+            </a:extLst>
+          </p:cNvPr>
+          <p:cNvGrpSpPr/>
+          <p:nvPr/>
+        </p:nvGrpSpPr>
+        <p:grpSpPr>
+          <a:xfrm>
+            <a:off x="9992545" y="375946"/>
+            <a:ext cx="1714376" cy="318924"/>
+            <a:chOff x="9319383" y="3740755"/>
+            <a:chExt cx="1714376" cy="318924"/>
+          </a:xfrm>
+        </p:grpSpPr>
+        <p:sp>
+          <p:nvSpPr>
+            <p:cNvPr id="104" name="Rectangle 103">
+              <a:extLst>
+                <a:ext uri="{FF2B5EF4-FFF2-40B4-BE49-F238E27FC236}">
+                  <a16:creationId xmlns:a16="http://schemas.microsoft.com/office/drawing/2014/main" id="{8237E889-DCFF-4C2A-8E89-F7D7BAC9586B}"/>
+                </a:ext>
+              </a:extLst>
+            </p:cNvPr>
+            <p:cNvSpPr/>
+            <p:nvPr/>
+          </p:nvSpPr>
+          <p:spPr>
+            <a:xfrm>
+              <a:off x="9319383" y="3740755"/>
+              <a:ext cx="1714376" cy="318924"/>
+            </a:xfrm>
+            <a:prstGeom prst="rect">
+              <a:avLst/>
+            </a:prstGeom>
+          </p:spPr>
+          <p:style>
+            <a:lnRef idx="2">
+              <a:schemeClr val="dk1"/>
+            </a:lnRef>
+            <a:fillRef idx="1">
+              <a:schemeClr val="lt1"/>
+            </a:fillRef>
+            <a:effectRef idx="0">
+              <a:schemeClr val="dk1"/>
+            </a:effectRef>
+            <a:fontRef idx="minor">
+              <a:schemeClr val="dk1"/>
+            </a:fontRef>
+          </p:style>
+          <p:txBody>
+            <a:bodyPr rtlCol="0" anchor="ctr"/>
+            <a:lstStyle/>
+            <a:p>
+              <a:pPr algn="ctr"/>
+              <a:r>
+                <a:rPr lang="en-US" sz="1000" dirty="0">
+                  <a:latin typeface="Inter 18pt" panose="02000503000000020004" pitchFamily="2" charset="0"/>
+                  <a:ea typeface="Inter 18pt" panose="02000503000000020004" pitchFamily="2" charset="0"/>
+                </a:rPr>
+                <a:t>Create</a:t>
+              </a:r>
+            </a:p>
+            <a:p>
+              <a:pPr algn="ctr"/>
+              <a:r>
+                <a:rPr lang="en-US" sz="700" dirty="0">
+                  <a:latin typeface="Inter 18pt" panose="02000503000000020004" pitchFamily="2" charset="0"/>
+                  <a:ea typeface="Inter 18pt" panose="02000503000000020004" pitchFamily="2" charset="0"/>
+                </a:rPr>
+                <a:t>(POST /admin/check-in/plus</a:t>
+              </a:r>
+              <a:endParaRPr lang="en-US" sz="1000" dirty="0">
+                <a:latin typeface="Inter 18pt" panose="02000503000000020004" pitchFamily="2" charset="0"/>
+                <a:ea typeface="Inter 18pt" panose="02000503000000020004" pitchFamily="2" charset="0"/>
+              </a:endParaRPr>
+            </a:p>
+          </p:txBody>
+        </p:sp>
+        <p:pic>
+          <p:nvPicPr>
+            <p:cNvPr id="114" name="Graphic 113" descr="Key">
+              <a:extLst>
+                <a:ext uri="{FF2B5EF4-FFF2-40B4-BE49-F238E27FC236}">
+                  <a16:creationId xmlns:a16="http://schemas.microsoft.com/office/drawing/2014/main" id="{D55D9960-D172-4BE3-94D1-BBF3BCFF2D6D}"/>
+                </a:ext>
+              </a:extLst>
+            </p:cNvPr>
+            <p:cNvPicPr>
+              <a:picLocks noChangeAspect="1"/>
+            </p:cNvPicPr>
+            <p:nvPr/>
+          </p:nvPicPr>
+          <p:blipFill>
+            <a:blip r:embed="rId6">
+              <a:extLst>
+                <a:ext uri="{28A0092B-C50C-407E-A947-70E740481C1C}">
+                  <a14:useLocalDpi xmlns:a14="http://schemas.microsoft.com/office/drawing/2010/main" val="0"/>
+                </a:ext>
+                <a:ext uri="{96DAC541-7B7A-43D3-8B79-37D633B846F1}">
+                  <asvg:svgBlip xmlns:asvg="http://schemas.microsoft.com/office/drawing/2016/SVG/main" r:embed="rId7"/>
+                </a:ext>
+              </a:extLst>
+            </a:blip>
+            <a:stretch>
+              <a:fillRect/>
+            </a:stretch>
+          </p:blipFill>
+          <p:spPr>
+            <a:xfrm>
+              <a:off x="9785446" y="3753549"/>
+              <a:ext cx="181516" cy="181516"/>
+            </a:xfrm>
+            <a:prstGeom prst="rect">
+              <a:avLst/>
+            </a:prstGeom>
+          </p:spPr>
+        </p:pic>
+      </p:grpSp>
+      <p:sp>
+        <p:nvSpPr>
+          <p:cNvPr id="131" name="Rectangle 130">
+            <a:extLst>
+              <a:ext uri="{FF2B5EF4-FFF2-40B4-BE49-F238E27FC236}">
+                <a16:creationId xmlns:a16="http://schemas.microsoft.com/office/drawing/2014/main" id="{791D3CCA-EF43-442F-8D0A-E7FBDC0D9E81}"/>
+              </a:ext>
+            </a:extLst>
+          </p:cNvPr>
+          <p:cNvSpPr/>
+          <p:nvPr/>
+        </p:nvSpPr>
+        <p:spPr>
+          <a:xfrm>
+            <a:off x="4683678" y="2171729"/>
+            <a:ext cx="914400" cy="426546"/>
+          </a:xfrm>
+          <a:prstGeom prst="rect">
+            <a:avLst/>
+          </a:prstGeom>
+        </p:spPr>
+        <p:style>
+          <a:lnRef idx="2">
+            <a:schemeClr val="dk1"/>
+          </a:lnRef>
+          <a:fillRef idx="1">
+            <a:schemeClr val="lt1"/>
+          </a:fillRef>
+          <a:effectRef idx="0">
+            <a:schemeClr val="dk1"/>
+          </a:effectRef>
+          <a:fontRef idx="minor">
+            <a:schemeClr val="dk1"/>
+          </a:fontRef>
+        </p:style>
+        <p:txBody>
+          <a:bodyPr rtlCol="0" anchor="ctr"/>
+          <a:lstStyle/>
+          <a:p>
+            <a:pPr algn="ctr"/>
+            <a:r>
+              <a:rPr lang="en-US" sz="1000" dirty="0">
+                <a:latin typeface="Inter 18pt" panose="02000503000000020004" pitchFamily="2" charset="0"/>
+                <a:ea typeface="Inter 18pt" panose="02000503000000020004" pitchFamily="2" charset="0"/>
+              </a:rPr>
+              <a:t>Cache</a:t>
+            </a:r>
+          </a:p>
+        </p:txBody>
+      </p:sp>
+      <p:sp>
+        <p:nvSpPr>
+          <p:cNvPr id="132" name="Diamond 131">
+            <a:extLst>
+              <a:ext uri="{FF2B5EF4-FFF2-40B4-BE49-F238E27FC236}">
+                <a16:creationId xmlns:a16="http://schemas.microsoft.com/office/drawing/2014/main" id="{E373C9BB-68A5-4523-9D8F-F37D34C24326}"/>
+              </a:ext>
+            </a:extLst>
+          </p:cNvPr>
+          <p:cNvSpPr/>
+          <p:nvPr/>
+        </p:nvSpPr>
+        <p:spPr>
+          <a:xfrm>
+            <a:off x="4683678" y="2754338"/>
+            <a:ext cx="914400" cy="914400"/>
+          </a:xfrm>
+          <a:prstGeom prst="diamond">
+            <a:avLst/>
+          </a:prstGeom>
+        </p:spPr>
+        <p:style>
+          <a:lnRef idx="2">
+            <a:schemeClr val="dk1"/>
+          </a:lnRef>
+          <a:fillRef idx="1">
+            <a:schemeClr val="lt1"/>
+          </a:fillRef>
+          <a:effectRef idx="0">
+            <a:schemeClr val="dk1"/>
+          </a:effectRef>
+          <a:fontRef idx="minor">
+            <a:schemeClr val="dk1"/>
+          </a:fontRef>
+        </p:style>
+        <p:txBody>
+          <a:bodyPr rtlCol="0" anchor="ctr"/>
+          <a:lstStyle/>
+          <a:p>
+            <a:pPr algn="ctr"/>
+            <a:endParaRPr lang="en-US" sz="1000" dirty="0">
+              <a:latin typeface="Inter 18pt" panose="02000503000000020004" pitchFamily="2" charset="0"/>
+              <a:ea typeface="Inter 18pt" panose="02000503000000020004" pitchFamily="2" charset="0"/>
+            </a:endParaRPr>
+          </a:p>
+        </p:txBody>
+      </p:sp>
+      <p:pic>
+        <p:nvPicPr>
+          <p:cNvPr id="134" name="Graphic 133" descr="Skull">
+            <a:extLst>
+              <a:ext uri="{FF2B5EF4-FFF2-40B4-BE49-F238E27FC236}">
+                <a16:creationId xmlns:a16="http://schemas.microsoft.com/office/drawing/2014/main" id="{0E4A109D-41EC-43BC-8012-5C9787371D0F}"/>
+              </a:ext>
+            </a:extLst>
+          </p:cNvPr>
+          <p:cNvPicPr>
+            <a:picLocks noChangeAspect="1"/>
+          </p:cNvPicPr>
+          <p:nvPr/>
+        </p:nvPicPr>
+        <p:blipFill>
+          <a:blip r:embed="rId8">
+            <a:extLst>
+              <a:ext uri="{28A0092B-C50C-407E-A947-70E740481C1C}">
+                <a14:useLocalDpi xmlns:a14="http://schemas.microsoft.com/office/drawing/2010/main" val="0"/>
+              </a:ext>
+              <a:ext uri="{96DAC541-7B7A-43D3-8B79-37D633B846F1}">
+                <asvg:svgBlip xmlns:asvg="http://schemas.microsoft.com/office/drawing/2016/SVG/main" r:embed="rId9"/>
+              </a:ext>
+            </a:extLst>
+          </a:blip>
+          <a:stretch>
+            <a:fillRect/>
+          </a:stretch>
+        </p:blipFill>
+        <p:spPr>
+          <a:xfrm>
+            <a:off x="4959641" y="3009119"/>
+            <a:ext cx="355600" cy="355600"/>
+          </a:xfrm>
+          <a:prstGeom prst="rect">
+            <a:avLst/>
+          </a:prstGeom>
+        </p:spPr>
+      </p:pic>
+      <p:cxnSp>
+        <p:nvCxnSpPr>
+          <p:cNvPr id="154" name="Straight Arrow Connector 153">
+            <a:extLst>
+              <a:ext uri="{FF2B5EF4-FFF2-40B4-BE49-F238E27FC236}">
+                <a16:creationId xmlns:a16="http://schemas.microsoft.com/office/drawing/2014/main" id="{DA462DD5-5D3C-4608-BE23-AD3EF2499166}"/>
+              </a:ext>
+            </a:extLst>
+          </p:cNvPr>
+          <p:cNvCxnSpPr/>
+          <p:nvPr/>
+        </p:nvCxnSpPr>
+        <p:spPr>
+          <a:xfrm flipV="1">
+            <a:off x="7150100" y="138816"/>
+            <a:ext cx="0" cy="262624"/>
+          </a:xfrm>
+          <a:prstGeom prst="straightConnector1">
+            <a:avLst/>
+          </a:prstGeom>
+          <a:ln>
+            <a:tailEnd type="triangle"/>
+          </a:ln>
+        </p:spPr>
+        <p:style>
+          <a:lnRef idx="1">
+            <a:schemeClr val="dk1"/>
+          </a:lnRef>
+          <a:fillRef idx="0">
+            <a:schemeClr val="dk1"/>
+          </a:fillRef>
+          <a:effectRef idx="0">
+            <a:schemeClr val="dk1"/>
+          </a:effectRef>
+          <a:fontRef idx="minor">
+            <a:schemeClr val="tx1"/>
+          </a:fontRef>
+        </p:style>
+      </p:cxnSp>
+      <p:cxnSp>
+        <p:nvCxnSpPr>
+          <p:cNvPr id="156" name="Connector: Elbow 155">
+            <a:extLst>
+              <a:ext uri="{FF2B5EF4-FFF2-40B4-BE49-F238E27FC236}">
+                <a16:creationId xmlns:a16="http://schemas.microsoft.com/office/drawing/2014/main" id="{56BB50AF-2466-4E93-9298-35DECA62B3D2}"/>
+              </a:ext>
+            </a:extLst>
+          </p:cNvPr>
+          <p:cNvCxnSpPr>
+            <a:endCxn id="147" idx="0"/>
+          </p:cNvCxnSpPr>
+          <p:nvPr/>
+        </p:nvCxnSpPr>
+        <p:spPr>
+          <a:xfrm>
+            <a:off x="7150100" y="138816"/>
+            <a:ext cx="3694859" cy="186330"/>
+          </a:xfrm>
+          <a:prstGeom prst="bentConnector2">
+            <a:avLst/>
+          </a:prstGeom>
+          <a:ln>
+            <a:tailEnd type="triangle"/>
+          </a:ln>
+        </p:spPr>
+        <p:style>
+          <a:lnRef idx="1">
+            <a:schemeClr val="dk1"/>
+          </a:lnRef>
+          <a:fillRef idx="0">
+            <a:schemeClr val="dk1"/>
+          </a:fillRef>
+          <a:effectRef idx="0">
+            <a:schemeClr val="dk1"/>
+          </a:effectRef>
+          <a:fontRef idx="minor">
+            <a:schemeClr val="tx1"/>
+          </a:fontRef>
+        </p:style>
+      </p:cxnSp>
+      <p:cxnSp>
+        <p:nvCxnSpPr>
+          <p:cNvPr id="158" name="Connector: Elbow 157">
+            <a:extLst>
+              <a:ext uri="{FF2B5EF4-FFF2-40B4-BE49-F238E27FC236}">
+                <a16:creationId xmlns:a16="http://schemas.microsoft.com/office/drawing/2014/main" id="{E252A5CE-9416-400B-A4E9-400D439F0FE9}"/>
+              </a:ext>
+            </a:extLst>
+          </p:cNvPr>
+          <p:cNvCxnSpPr>
+            <a:cxnSpLocks/>
+            <a:stCxn id="106" idx="2"/>
+            <a:endCxn id="132" idx="3"/>
+          </p:cNvCxnSpPr>
+          <p:nvPr/>
+        </p:nvCxnSpPr>
+        <p:spPr>
+          <a:xfrm rot="5400000">
+            <a:off x="7361201" y="-276995"/>
+            <a:ext cx="1725411" cy="5251655"/>
+          </a:xfrm>
+          <a:prstGeom prst="bentConnector2">
+            <a:avLst/>
+          </a:prstGeom>
+          <a:ln>
+            <a:solidFill>
+              <a:srgbClr val="F61212"/>
+            </a:solidFill>
+            <a:prstDash val="lgDash"/>
+            <a:tailEnd type="triangle"/>
+          </a:ln>
+        </p:spPr>
+        <p:style>
+          <a:lnRef idx="1">
+            <a:schemeClr val="accent1"/>
+          </a:lnRef>
+          <a:fillRef idx="0">
+            <a:schemeClr val="accent1"/>
+          </a:fillRef>
+          <a:effectRef idx="0">
+            <a:schemeClr val="accent1"/>
+          </a:effectRef>
+          <a:fontRef idx="minor">
+            <a:schemeClr val="tx1"/>
+          </a:fontRef>
+        </p:style>
+      </p:cxnSp>
+      <p:sp>
+        <p:nvSpPr>
+          <p:cNvPr id="163" name="Rectangle 162">
+            <a:extLst>
+              <a:ext uri="{FF2B5EF4-FFF2-40B4-BE49-F238E27FC236}">
+                <a16:creationId xmlns:a16="http://schemas.microsoft.com/office/drawing/2014/main" id="{013B9618-B6C8-4171-A68E-7B3CF395416B}"/>
+              </a:ext>
+            </a:extLst>
+          </p:cNvPr>
+          <p:cNvSpPr/>
+          <p:nvPr/>
+        </p:nvSpPr>
+        <p:spPr>
+          <a:xfrm>
+            <a:off x="5718410" y="2886008"/>
+            <a:ext cx="1072730" cy="246221"/>
+          </a:xfrm>
+          <a:prstGeom prst="rect">
+            <a:avLst/>
+          </a:prstGeom>
+        </p:spPr>
+        <p:txBody>
+          <a:bodyPr wrap="none">
+            <a:spAutoFit/>
+          </a:bodyPr>
+          <a:lstStyle/>
+          <a:p>
+            <a:r>
+              <a:rPr lang="en-US" sz="1000" dirty="0">
+                <a:latin typeface="Inter 18pt" panose="02000503000000020004" pitchFamily="2" charset="0"/>
+                <a:ea typeface="Inter 18pt" panose="02000503000000020004" pitchFamily="2" charset="0"/>
+              </a:rPr>
+              <a:t>Request Filters</a:t>
+            </a:r>
+          </a:p>
+        </p:txBody>
+      </p:sp>
+      <p:sp>
+        <p:nvSpPr>
+          <p:cNvPr id="169" name="Cylinder 168">
+            <a:extLst>
+              <a:ext uri="{FF2B5EF4-FFF2-40B4-BE49-F238E27FC236}">
+                <a16:creationId xmlns:a16="http://schemas.microsoft.com/office/drawing/2014/main" id="{C1226365-FED1-45DA-A25B-1AF4B54CAE51}"/>
+              </a:ext>
+            </a:extLst>
+          </p:cNvPr>
+          <p:cNvSpPr/>
+          <p:nvPr/>
+        </p:nvSpPr>
+        <p:spPr>
+          <a:xfrm>
+            <a:off x="1443860" y="3696599"/>
+            <a:ext cx="914400" cy="814362"/>
+          </a:xfrm>
+          <a:prstGeom prst="can">
+            <a:avLst/>
+          </a:prstGeom>
+        </p:spPr>
+        <p:style>
+          <a:lnRef idx="2">
+            <a:schemeClr val="dk1"/>
+          </a:lnRef>
+          <a:fillRef idx="1">
+            <a:schemeClr val="lt1"/>
+          </a:fillRef>
+          <a:effectRef idx="0">
+            <a:schemeClr val="dk1"/>
+          </a:effectRef>
+          <a:fontRef idx="minor">
+            <a:schemeClr val="dk1"/>
+          </a:fontRef>
+        </p:style>
+        <p:txBody>
+          <a:bodyPr rtlCol="0" anchor="ctr"/>
+          <a:lstStyle/>
+          <a:p>
+            <a:pPr algn="ctr"/>
+            <a:r>
+              <a:rPr lang="en-US" sz="1000" dirty="0">
+                <a:latin typeface="Inter 18pt" panose="02000503000000020004" pitchFamily="2" charset="0"/>
+                <a:ea typeface="Inter 18pt" panose="02000503000000020004" pitchFamily="2" charset="0"/>
+              </a:rPr>
+              <a:t>Checkout</a:t>
+            </a:r>
+          </a:p>
+        </p:txBody>
+      </p:sp>
+      <p:grpSp>
+        <p:nvGrpSpPr>
+          <p:cNvPr id="175" name="Group 174">
+            <a:extLst>
+              <a:ext uri="{FF2B5EF4-FFF2-40B4-BE49-F238E27FC236}">
+                <a16:creationId xmlns:a16="http://schemas.microsoft.com/office/drawing/2014/main" id="{05AAD2A1-BB69-479B-9ECE-F9EF8CB849D7}"/>
+              </a:ext>
+            </a:extLst>
+          </p:cNvPr>
+          <p:cNvGrpSpPr/>
+          <p:nvPr/>
+        </p:nvGrpSpPr>
+        <p:grpSpPr>
+          <a:xfrm>
+            <a:off x="8327867" y="3876859"/>
+            <a:ext cx="3445706" cy="1873083"/>
+            <a:chOff x="8568494" y="3876859"/>
+            <a:chExt cx="3445706" cy="1873083"/>
+          </a:xfrm>
+        </p:grpSpPr>
+        <p:sp>
+          <p:nvSpPr>
+            <p:cNvPr id="166" name="Rectangle 165">
+              <a:extLst>
+                <a:ext uri="{FF2B5EF4-FFF2-40B4-BE49-F238E27FC236}">
+                  <a16:creationId xmlns:a16="http://schemas.microsoft.com/office/drawing/2014/main" id="{63F669DB-9DCF-46DE-B817-5AD2437205DD}"/>
+                </a:ext>
+              </a:extLst>
+            </p:cNvPr>
+            <p:cNvSpPr/>
+            <p:nvPr/>
+          </p:nvSpPr>
+          <p:spPr>
+            <a:xfrm>
+              <a:off x="8568497" y="3876859"/>
+              <a:ext cx="3445703" cy="606242"/>
+            </a:xfrm>
+            <a:prstGeom prst="rect">
+              <a:avLst/>
+            </a:prstGeom>
+          </p:spPr>
+          <p:style>
+            <a:lnRef idx="2">
+              <a:schemeClr val="dk1"/>
+            </a:lnRef>
+            <a:fillRef idx="1">
+              <a:schemeClr val="lt1"/>
+            </a:fillRef>
+            <a:effectRef idx="0">
+              <a:schemeClr val="dk1"/>
+            </a:effectRef>
+            <a:fontRef idx="minor">
+              <a:schemeClr val="dk1"/>
+            </a:fontRef>
+          </p:style>
+          <p:txBody>
+            <a:bodyPr rtlCol="0" anchor="ctr"/>
+            <a:lstStyle/>
+            <a:p>
+              <a:pPr algn="ctr"/>
+              <a:r>
+                <a:rPr lang="en-US" sz="1000" dirty="0">
+                  <a:latin typeface="Inter 18pt" panose="02000503000000020004" pitchFamily="2" charset="0"/>
+                  <a:ea typeface="Inter 18pt" panose="02000503000000020004" pitchFamily="2" charset="0"/>
+                </a:rPr>
+                <a:t>Verify Guest (With phone) </a:t>
+              </a:r>
+            </a:p>
+            <a:p>
+              <a:pPr algn="ctr"/>
+              <a:r>
+                <a:rPr lang="en-US" sz="1000" dirty="0">
+                  <a:latin typeface="Inter 18pt" panose="02000503000000020004" pitchFamily="2" charset="0"/>
+                  <a:ea typeface="Inter 18pt" panose="02000503000000020004" pitchFamily="2" charset="0"/>
+                </a:rPr>
+                <a:t>Status != checked out</a:t>
+              </a:r>
+            </a:p>
+            <a:p>
+              <a:pPr algn="ctr"/>
+              <a:r>
+                <a:rPr lang="en-US" sz="1000" dirty="0">
+                  <a:latin typeface="Inter 18pt" panose="02000503000000020004" pitchFamily="2" charset="0"/>
+                  <a:ea typeface="Inter 18pt" panose="02000503000000020004" pitchFamily="2" charset="0"/>
+                </a:rPr>
+                <a:t>(GET /admin/hostel/checkout/{phone})</a:t>
+              </a:r>
+            </a:p>
+          </p:txBody>
+        </p:sp>
+        <p:sp>
+          <p:nvSpPr>
+            <p:cNvPr id="167" name="Rectangle 166">
+              <a:extLst>
+                <a:ext uri="{FF2B5EF4-FFF2-40B4-BE49-F238E27FC236}">
+                  <a16:creationId xmlns:a16="http://schemas.microsoft.com/office/drawing/2014/main" id="{33BFEF60-5FF7-460D-B648-9308A45D84B6}"/>
+                </a:ext>
+              </a:extLst>
+            </p:cNvPr>
+            <p:cNvSpPr/>
+            <p:nvPr/>
+          </p:nvSpPr>
+          <p:spPr>
+            <a:xfrm>
+              <a:off x="8568494" y="4732450"/>
+              <a:ext cx="3445703" cy="338101"/>
+            </a:xfrm>
+            <a:prstGeom prst="rect">
+              <a:avLst/>
+            </a:prstGeom>
+          </p:spPr>
+          <p:style>
+            <a:lnRef idx="2">
+              <a:schemeClr val="dk1"/>
+            </a:lnRef>
+            <a:fillRef idx="1">
+              <a:schemeClr val="lt1"/>
+            </a:fillRef>
+            <a:effectRef idx="0">
+              <a:schemeClr val="dk1"/>
+            </a:effectRef>
+            <a:fontRef idx="minor">
+              <a:schemeClr val="dk1"/>
+            </a:fontRef>
+          </p:style>
+          <p:txBody>
+            <a:bodyPr rtlCol="0" anchor="ctr"/>
+            <a:lstStyle/>
+            <a:p>
+              <a:pPr algn="ctr"/>
+              <a:r>
+                <a:rPr lang="en-US" sz="1000" dirty="0">
+                  <a:latin typeface="Inter 18pt" panose="02000503000000020004" pitchFamily="2" charset="0"/>
+                  <a:ea typeface="Inter 18pt" panose="02000503000000020004" pitchFamily="2" charset="0"/>
+                </a:rPr>
+                <a:t>Calculate Stayed, Discount, VAT &amp; Tax, Total Bill  </a:t>
+              </a:r>
+            </a:p>
+          </p:txBody>
+        </p:sp>
+        <p:sp>
+          <p:nvSpPr>
+            <p:cNvPr id="168" name="Rectangle 167">
+              <a:extLst>
+                <a:ext uri="{FF2B5EF4-FFF2-40B4-BE49-F238E27FC236}">
+                  <a16:creationId xmlns:a16="http://schemas.microsoft.com/office/drawing/2014/main" id="{5333A662-0E51-4864-966F-BF96B5613597}"/>
+                </a:ext>
+              </a:extLst>
+            </p:cNvPr>
+            <p:cNvSpPr/>
+            <p:nvPr/>
+          </p:nvSpPr>
+          <p:spPr>
+            <a:xfrm>
+              <a:off x="8568495" y="5294501"/>
+              <a:ext cx="3445703" cy="455441"/>
+            </a:xfrm>
+            <a:prstGeom prst="rect">
+              <a:avLst/>
+            </a:prstGeom>
+          </p:spPr>
+          <p:style>
+            <a:lnRef idx="2">
+              <a:schemeClr val="dk1"/>
+            </a:lnRef>
+            <a:fillRef idx="1">
+              <a:schemeClr val="lt1"/>
+            </a:fillRef>
+            <a:effectRef idx="0">
+              <a:schemeClr val="dk1"/>
+            </a:effectRef>
+            <a:fontRef idx="minor">
+              <a:schemeClr val="dk1"/>
+            </a:fontRef>
+          </p:style>
+          <p:txBody>
+            <a:bodyPr rtlCol="0" anchor="ctr"/>
+            <a:lstStyle/>
+            <a:p>
+              <a:pPr algn="ctr"/>
+              <a:r>
+                <a:rPr lang="en-US" sz="1000" dirty="0">
+                  <a:latin typeface="Inter 18pt" panose="02000503000000020004" pitchFamily="2" charset="0"/>
+                  <a:ea typeface="Inter 18pt" panose="02000503000000020004" pitchFamily="2" charset="0"/>
+                </a:rPr>
+                <a:t>Confirm</a:t>
+              </a:r>
+            </a:p>
+            <a:p>
+              <a:pPr algn="ctr"/>
+              <a:r>
+                <a:rPr lang="en-US" sz="1000" dirty="0">
+                  <a:latin typeface="Inter 18pt" panose="02000503000000020004" pitchFamily="2" charset="0"/>
+                  <a:ea typeface="Inter 18pt" panose="02000503000000020004" pitchFamily="2" charset="0"/>
+                </a:rPr>
+                <a:t>(POST /admin/hostel/checkout/{phone})</a:t>
+              </a:r>
+            </a:p>
+            <a:p>
+              <a:pPr algn="ctr"/>
+              <a:r>
+                <a:rPr lang="en-US" sz="1000" dirty="0">
+                  <a:latin typeface="Inter 18pt" panose="02000503000000020004" pitchFamily="2" charset="0"/>
+                  <a:ea typeface="Inter 18pt" panose="02000503000000020004" pitchFamily="2" charset="0"/>
+                </a:rPr>
+                <a:t> </a:t>
+              </a:r>
+            </a:p>
+          </p:txBody>
+        </p:sp>
+        <p:cxnSp>
+          <p:nvCxnSpPr>
+            <p:cNvPr id="173" name="Straight Arrow Connector 172">
+              <a:extLst>
+                <a:ext uri="{FF2B5EF4-FFF2-40B4-BE49-F238E27FC236}">
+                  <a16:creationId xmlns:a16="http://schemas.microsoft.com/office/drawing/2014/main" id="{43750E22-0C9F-4E9A-A563-D30F619C0DE7}"/>
+                </a:ext>
+              </a:extLst>
+            </p:cNvPr>
+            <p:cNvCxnSpPr/>
+            <p:nvPr/>
+          </p:nvCxnSpPr>
+          <p:spPr>
+            <a:xfrm>
+              <a:off x="10128541" y="5070551"/>
+              <a:ext cx="0" cy="192961"/>
+            </a:xfrm>
+            <a:prstGeom prst="straightConnector1">
+              <a:avLst/>
+            </a:prstGeom>
+            <a:ln>
+              <a:tailEnd type="triangle"/>
+            </a:ln>
+          </p:spPr>
+          <p:style>
+            <a:lnRef idx="1">
+              <a:schemeClr val="dk1"/>
+            </a:lnRef>
+            <a:fillRef idx="0">
+              <a:schemeClr val="dk1"/>
+            </a:fillRef>
+            <a:effectRef idx="0">
+              <a:schemeClr val="dk1"/>
+            </a:effectRef>
+            <a:fontRef idx="minor">
+              <a:schemeClr val="tx1"/>
+            </a:fontRef>
+          </p:style>
+        </p:cxnSp>
+        <p:cxnSp>
+          <p:nvCxnSpPr>
+            <p:cNvPr id="174" name="Straight Arrow Connector 173">
+              <a:extLst>
+                <a:ext uri="{FF2B5EF4-FFF2-40B4-BE49-F238E27FC236}">
+                  <a16:creationId xmlns:a16="http://schemas.microsoft.com/office/drawing/2014/main" id="{C7C2DF44-77DB-4486-8931-2FD62A5F69FD}"/>
+                </a:ext>
+              </a:extLst>
+            </p:cNvPr>
+            <p:cNvCxnSpPr/>
+            <p:nvPr/>
+          </p:nvCxnSpPr>
+          <p:spPr>
+            <a:xfrm>
+              <a:off x="10128541" y="4498261"/>
+              <a:ext cx="0" cy="192961"/>
+            </a:xfrm>
+            <a:prstGeom prst="straightConnector1">
+              <a:avLst/>
+            </a:prstGeom>
+            <a:ln>
+              <a:tailEnd type="triangle"/>
+            </a:ln>
+          </p:spPr>
+          <p:style>
+            <a:lnRef idx="1">
+              <a:schemeClr val="dk1"/>
+            </a:lnRef>
+            <a:fillRef idx="0">
+              <a:schemeClr val="dk1"/>
+            </a:fillRef>
+            <a:effectRef idx="0">
+              <a:schemeClr val="dk1"/>
+            </a:effectRef>
+            <a:fontRef idx="minor">
+              <a:schemeClr val="tx1"/>
+            </a:fontRef>
+          </p:style>
+        </p:cxnSp>
+      </p:grpSp>
+      <p:cxnSp>
+        <p:nvCxnSpPr>
+          <p:cNvPr id="192" name="Connector: Elbow 191">
+            <a:extLst>
+              <a:ext uri="{FF2B5EF4-FFF2-40B4-BE49-F238E27FC236}">
+                <a16:creationId xmlns:a16="http://schemas.microsoft.com/office/drawing/2014/main" id="{9236E1FC-6E6A-46A6-9013-21918B74EEDA}"/>
+              </a:ext>
+            </a:extLst>
+          </p:cNvPr>
+          <p:cNvCxnSpPr>
+            <a:stCxn id="132" idx="0"/>
+          </p:cNvCxnSpPr>
+          <p:nvPr/>
+        </p:nvCxnSpPr>
+        <p:spPr>
+          <a:xfrm rot="16200000" flipH="1" flipV="1">
+            <a:off x="3702784" y="1447913"/>
+            <a:ext cx="131670" cy="2744519"/>
+          </a:xfrm>
+          <a:prstGeom prst="bentConnector4">
+            <a:avLst>
+              <a:gd name="adj1" fmla="val -9645"/>
+              <a:gd name="adj2" fmla="val 58329"/>
+            </a:avLst>
+          </a:prstGeom>
+          <a:ln>
+            <a:prstDash val="lgDash"/>
+            <a:tailEnd type="triangle"/>
+          </a:ln>
+        </p:spPr>
+        <p:style>
+          <a:lnRef idx="1">
+            <a:schemeClr val="accent1"/>
+          </a:lnRef>
+          <a:fillRef idx="0">
+            <a:schemeClr val="accent1"/>
+          </a:fillRef>
+          <a:effectRef idx="0">
+            <a:schemeClr val="accent1"/>
+          </a:effectRef>
+          <a:fontRef idx="minor">
+            <a:schemeClr val="tx1"/>
+          </a:fontRef>
+        </p:style>
+      </p:cxnSp>
+      <p:sp>
+        <p:nvSpPr>
+          <p:cNvPr id="196" name="Rectangle 195">
+            <a:extLst>
+              <a:ext uri="{FF2B5EF4-FFF2-40B4-BE49-F238E27FC236}">
+                <a16:creationId xmlns:a16="http://schemas.microsoft.com/office/drawing/2014/main" id="{80C9E733-A271-41CD-8066-C0C1707A4BB5}"/>
+              </a:ext>
+            </a:extLst>
+          </p:cNvPr>
+          <p:cNvSpPr/>
+          <p:nvPr/>
+        </p:nvSpPr>
+        <p:spPr>
+          <a:xfrm>
+            <a:off x="3058617" y="3935005"/>
+            <a:ext cx="1225259" cy="673102"/>
+          </a:xfrm>
+          <a:prstGeom prst="rect">
+            <a:avLst/>
+          </a:prstGeom>
+        </p:spPr>
+        <p:style>
+          <a:lnRef idx="2">
+            <a:schemeClr val="dk1"/>
+          </a:lnRef>
+          <a:fillRef idx="1">
+            <a:schemeClr val="lt1"/>
+          </a:fillRef>
+          <a:effectRef idx="0">
+            <a:schemeClr val="dk1"/>
+          </a:effectRef>
+          <a:fontRef idx="minor">
+            <a:schemeClr val="dk1"/>
+          </a:fontRef>
+        </p:style>
+        <p:txBody>
+          <a:bodyPr rtlCol="0" anchor="t"/>
+          <a:lstStyle/>
+          <a:p>
+            <a:pPr algn="ctr"/>
+            <a:r>
+              <a:rPr lang="en-US" sz="1000" b="1" dirty="0">
+                <a:latin typeface="Inter 18pt" panose="02000503000000020004" pitchFamily="2" charset="0"/>
+                <a:ea typeface="Inter 18pt" panose="02000503000000020004" pitchFamily="2" charset="0"/>
+              </a:rPr>
+              <a:t>Transection</a:t>
+            </a:r>
+          </a:p>
+          <a:p>
+            <a:pPr algn="ctr"/>
+            <a:r>
+              <a:rPr lang="en-US" sz="1000" dirty="0">
+                <a:latin typeface="Inter 18pt" panose="02000503000000020004" pitchFamily="2" charset="0"/>
+                <a:ea typeface="Inter 18pt" panose="02000503000000020004" pitchFamily="2" charset="0"/>
+              </a:rPr>
+              <a:t>Create Checkout</a:t>
+            </a:r>
+          </a:p>
+          <a:p>
+            <a:pPr algn="ctr"/>
+            <a:r>
+              <a:rPr lang="en-US" sz="1000" dirty="0">
+                <a:latin typeface="Inter 18pt" panose="02000503000000020004" pitchFamily="2" charset="0"/>
+                <a:ea typeface="Inter 18pt" panose="02000503000000020004" pitchFamily="2" charset="0"/>
+              </a:rPr>
+              <a:t>Update Users</a:t>
+            </a:r>
+          </a:p>
+          <a:p>
+            <a:pPr algn="ctr"/>
+            <a:r>
+              <a:rPr lang="en-US" sz="1000" b="1" dirty="0">
+                <a:solidFill>
+                  <a:srgbClr val="C00000"/>
+                </a:solidFill>
+                <a:latin typeface="Inter 18pt" panose="02000503000000020004" pitchFamily="2" charset="0"/>
+                <a:ea typeface="Inter 18pt" panose="02000503000000020004" pitchFamily="2" charset="0"/>
+              </a:rPr>
+              <a:t>Roll back if fail</a:t>
+            </a:r>
+          </a:p>
+        </p:txBody>
+      </p:sp>
+      <p:cxnSp>
+        <p:nvCxnSpPr>
+          <p:cNvPr id="198" name="Connector: Elbow 197">
+            <a:extLst>
+              <a:ext uri="{FF2B5EF4-FFF2-40B4-BE49-F238E27FC236}">
+                <a16:creationId xmlns:a16="http://schemas.microsoft.com/office/drawing/2014/main" id="{B0A7D101-3172-4286-8E4F-6E1B89BBDCC0}"/>
+              </a:ext>
+            </a:extLst>
+          </p:cNvPr>
+          <p:cNvCxnSpPr>
+            <a:cxnSpLocks/>
+            <a:endCxn id="132" idx="2"/>
+          </p:cNvCxnSpPr>
+          <p:nvPr/>
+        </p:nvCxnSpPr>
+        <p:spPr>
+          <a:xfrm rot="10800000">
+            <a:off x="5140879" y="3668738"/>
+            <a:ext cx="3186991" cy="1878736"/>
+          </a:xfrm>
+          <a:prstGeom prst="bentConnector2">
+            <a:avLst/>
+          </a:prstGeom>
+          <a:ln w="9525" cap="flat" cmpd="sng" algn="ctr">
+            <a:solidFill>
+              <a:schemeClr val="dk1"/>
+            </a:solidFill>
+            <a:prstDash val="dash"/>
+            <a:round/>
+            <a:headEnd type="none" w="med" len="med"/>
+            <a:tailEnd type="arrow" w="med" len="med"/>
+          </a:ln>
+        </p:spPr>
+        <p:style>
+          <a:lnRef idx="0">
+            <a:scrgbClr r="0" g="0" b="0"/>
+          </a:lnRef>
+          <a:fillRef idx="0">
+            <a:scrgbClr r="0" g="0" b="0"/>
+          </a:fillRef>
+          <a:effectRef idx="0">
+            <a:scrgbClr r="0" g="0" b="0"/>
+          </a:effectRef>
+          <a:fontRef idx="minor">
+            <a:schemeClr val="tx1"/>
+          </a:fontRef>
+        </p:style>
+      </p:cxnSp>
+      <p:cxnSp>
+        <p:nvCxnSpPr>
+          <p:cNvPr id="206" name="Connector: Elbow 205">
+            <a:extLst>
+              <a:ext uri="{FF2B5EF4-FFF2-40B4-BE49-F238E27FC236}">
+                <a16:creationId xmlns:a16="http://schemas.microsoft.com/office/drawing/2014/main" id="{BF22DAD2-9CEE-4A7D-8D64-D24D4729B20C}"/>
+              </a:ext>
+            </a:extLst>
+          </p:cNvPr>
+          <p:cNvCxnSpPr>
+            <a:stCxn id="196" idx="1"/>
+            <a:endCxn id="169" idx="3"/>
+          </p:cNvCxnSpPr>
+          <p:nvPr/>
+        </p:nvCxnSpPr>
+        <p:spPr>
+          <a:xfrm rot="10800000" flipV="1">
+            <a:off x="1901061" y="4271555"/>
+            <a:ext cx="1157557" cy="239405"/>
+          </a:xfrm>
+          <a:prstGeom prst="bentConnector4">
+            <a:avLst>
+              <a:gd name="adj1" fmla="val 30251"/>
+              <a:gd name="adj2" fmla="val 236065"/>
+            </a:avLst>
+          </a:prstGeom>
+          <a:ln>
+            <a:prstDash val="dash"/>
+            <a:tailEnd type="triangle"/>
+          </a:ln>
+        </p:spPr>
+        <p:style>
+          <a:lnRef idx="1">
+            <a:schemeClr val="accent1"/>
+          </a:lnRef>
+          <a:fillRef idx="0">
+            <a:schemeClr val="accent1"/>
+          </a:fillRef>
+          <a:effectRef idx="0">
+            <a:schemeClr val="accent1"/>
+          </a:effectRef>
+          <a:fontRef idx="minor">
+            <a:schemeClr val="tx1"/>
+          </a:fontRef>
+        </p:style>
+      </p:cxnSp>
+      <p:cxnSp>
+        <p:nvCxnSpPr>
+          <p:cNvPr id="211" name="Connector: Elbow 210">
+            <a:extLst>
+              <a:ext uri="{FF2B5EF4-FFF2-40B4-BE49-F238E27FC236}">
+                <a16:creationId xmlns:a16="http://schemas.microsoft.com/office/drawing/2014/main" id="{2257CE29-C29B-418D-B4C0-81F9D69A5FDF}"/>
+              </a:ext>
+            </a:extLst>
+          </p:cNvPr>
+          <p:cNvCxnSpPr>
+            <a:stCxn id="132" idx="1"/>
+            <a:endCxn id="196" idx="3"/>
+          </p:cNvCxnSpPr>
+          <p:nvPr/>
+        </p:nvCxnSpPr>
+        <p:spPr>
+          <a:xfrm rot="10800000" flipV="1">
+            <a:off x="4283876" y="3211538"/>
+            <a:ext cx="399802" cy="1060018"/>
+          </a:xfrm>
+          <a:prstGeom prst="bentConnector3">
+            <a:avLst/>
+          </a:prstGeom>
+          <a:ln>
+            <a:solidFill>
+              <a:srgbClr val="F61212"/>
+            </a:solidFill>
+            <a:tailEnd type="triangle"/>
+          </a:ln>
+        </p:spPr>
+        <p:style>
+          <a:lnRef idx="1">
+            <a:schemeClr val="accent1"/>
+          </a:lnRef>
+          <a:fillRef idx="0">
+            <a:schemeClr val="accent1"/>
+          </a:fillRef>
+          <a:effectRef idx="0">
+            <a:schemeClr val="accent1"/>
+          </a:effectRef>
+          <a:fontRef idx="minor">
+            <a:schemeClr val="tx1"/>
+          </a:fontRef>
+        </p:style>
+      </p:cxnSp>
+      <p:sp>
+        <p:nvSpPr>
+          <p:cNvPr id="213" name="Rectangle 212">
+            <a:extLst>
+              <a:ext uri="{FF2B5EF4-FFF2-40B4-BE49-F238E27FC236}">
+                <a16:creationId xmlns:a16="http://schemas.microsoft.com/office/drawing/2014/main" id="{04DA05B2-2E82-4FF6-883C-A5092D783884}"/>
+              </a:ext>
+            </a:extLst>
+          </p:cNvPr>
+          <p:cNvSpPr/>
+          <p:nvPr/>
+        </p:nvSpPr>
+        <p:spPr>
+          <a:xfrm>
+            <a:off x="3074393" y="3101474"/>
+            <a:ext cx="1225257" cy="526490"/>
+          </a:xfrm>
+          <a:prstGeom prst="rect">
+            <a:avLst/>
+          </a:prstGeom>
+        </p:spPr>
+        <p:style>
+          <a:lnRef idx="2">
+            <a:schemeClr val="dk1"/>
+          </a:lnRef>
+          <a:fillRef idx="1">
+            <a:schemeClr val="lt1"/>
+          </a:fillRef>
+          <a:effectRef idx="0">
+            <a:schemeClr val="dk1"/>
+          </a:effectRef>
+          <a:fontRef idx="minor">
+            <a:schemeClr val="dk1"/>
+          </a:fontRef>
+        </p:style>
+        <p:txBody>
+          <a:bodyPr rtlCol="0" anchor="ctr"/>
+          <a:lstStyle/>
+          <a:p>
+            <a:pPr algn="ctr"/>
+            <a:r>
+              <a:rPr lang="en-US" sz="1000" b="1" dirty="0">
+                <a:latin typeface="Inter 18pt" panose="02000503000000020004" pitchFamily="2" charset="0"/>
+                <a:ea typeface="Inter 18pt" panose="02000503000000020004" pitchFamily="2" charset="0"/>
+              </a:rPr>
+              <a:t>Update Status: </a:t>
+            </a:r>
+          </a:p>
+          <a:p>
+            <a:pPr algn="ctr"/>
+            <a:r>
+              <a:rPr lang="en-US" sz="1000" dirty="0">
+                <a:latin typeface="Inter 18pt" panose="02000503000000020004" pitchFamily="2" charset="0"/>
+                <a:ea typeface="Inter 18pt" panose="02000503000000020004" pitchFamily="2" charset="0"/>
+              </a:rPr>
+              <a:t>Checked out</a:t>
+            </a:r>
+          </a:p>
+        </p:txBody>
+      </p:sp>
+      <p:cxnSp>
+        <p:nvCxnSpPr>
+          <p:cNvPr id="225" name="Connector: Elbow 224">
+            <a:extLst>
+              <a:ext uri="{FF2B5EF4-FFF2-40B4-BE49-F238E27FC236}">
+                <a16:creationId xmlns:a16="http://schemas.microsoft.com/office/drawing/2014/main" id="{FFF3204A-1EFF-4279-8D80-BFD1B566B177}"/>
+              </a:ext>
+            </a:extLst>
+          </p:cNvPr>
+          <p:cNvCxnSpPr>
+            <a:stCxn id="35" idx="3"/>
+          </p:cNvCxnSpPr>
+          <p:nvPr/>
+        </p:nvCxnSpPr>
+        <p:spPr>
+          <a:xfrm>
+            <a:off x="9319383" y="571006"/>
+            <a:ext cx="408817" cy="3203736"/>
+          </a:xfrm>
+          <a:prstGeom prst="bentConnector2">
+            <a:avLst/>
+          </a:prstGeom>
+          <a:ln>
+            <a:tailEnd type="triangle"/>
+          </a:ln>
+        </p:spPr>
+        <p:style>
+          <a:lnRef idx="1">
+            <a:schemeClr val="accent1"/>
+          </a:lnRef>
+          <a:fillRef idx="0">
+            <a:schemeClr val="accent1"/>
+          </a:fillRef>
+          <a:effectRef idx="0">
+            <a:schemeClr val="accent1"/>
+          </a:effectRef>
+          <a:fontRef idx="minor">
+            <a:schemeClr val="tx1"/>
+          </a:fontRef>
+        </p:style>
+      </p:cxnSp>
+      <p:cxnSp>
+        <p:nvCxnSpPr>
+          <p:cNvPr id="233" name="Straight Arrow Connector 232">
+            <a:extLst>
+              <a:ext uri="{FF2B5EF4-FFF2-40B4-BE49-F238E27FC236}">
+                <a16:creationId xmlns:a16="http://schemas.microsoft.com/office/drawing/2014/main" id="{C1085ACE-D6CD-4094-88EB-42D88A98ACF8}"/>
+              </a:ext>
+            </a:extLst>
+          </p:cNvPr>
+          <p:cNvCxnSpPr>
+            <a:cxnSpLocks/>
+          </p:cNvCxnSpPr>
+          <p:nvPr/>
+        </p:nvCxnSpPr>
+        <p:spPr>
+          <a:xfrm flipV="1">
+            <a:off x="3687021" y="3641157"/>
+            <a:ext cx="0" cy="267170"/>
+          </a:xfrm>
+          <a:prstGeom prst="straightConnector1">
+            <a:avLst/>
+          </a:prstGeom>
+          <a:ln>
+            <a:prstDash val="dash"/>
+            <a:tailEnd type="triangle"/>
+          </a:ln>
+        </p:spPr>
+        <p:style>
+          <a:lnRef idx="1">
+            <a:schemeClr val="accent1"/>
+          </a:lnRef>
+          <a:fillRef idx="0">
+            <a:schemeClr val="accent1"/>
+          </a:fillRef>
+          <a:effectRef idx="0">
+            <a:schemeClr val="accent1"/>
+          </a:effectRef>
+          <a:fontRef idx="minor">
+            <a:schemeClr val="tx1"/>
+          </a:fontRef>
+        </p:style>
+      </p:cxnSp>
+      <p:cxnSp>
+        <p:nvCxnSpPr>
+          <p:cNvPr id="236" name="Connector: Elbow 235">
+            <a:extLst>
+              <a:ext uri="{FF2B5EF4-FFF2-40B4-BE49-F238E27FC236}">
+                <a16:creationId xmlns:a16="http://schemas.microsoft.com/office/drawing/2014/main" id="{DA117931-EBE0-47C5-A6B0-C5D18BBFA1DC}"/>
+              </a:ext>
+            </a:extLst>
+          </p:cNvPr>
+          <p:cNvCxnSpPr>
+            <a:stCxn id="213" idx="1"/>
+            <a:endCxn id="86" idx="4"/>
+          </p:cNvCxnSpPr>
+          <p:nvPr/>
+        </p:nvCxnSpPr>
+        <p:spPr>
+          <a:xfrm rot="10800000">
+            <a:off x="2358261" y="3161519"/>
+            <a:ext cx="716133" cy="203200"/>
+          </a:xfrm>
+          <a:prstGeom prst="bentConnector3">
+            <a:avLst/>
+          </a:prstGeom>
+          <a:ln>
+            <a:prstDash val="lgDash"/>
+            <a:tailEnd type="triangle"/>
+          </a:ln>
+        </p:spPr>
+        <p:style>
+          <a:lnRef idx="1">
+            <a:schemeClr val="accent2"/>
+          </a:lnRef>
+          <a:fillRef idx="0">
+            <a:schemeClr val="accent2"/>
+          </a:fillRef>
+          <a:effectRef idx="0">
+            <a:schemeClr val="accent2"/>
+          </a:effectRef>
+          <a:fontRef idx="minor">
+            <a:schemeClr val="tx1"/>
+          </a:fontRef>
+        </p:style>
+      </p:cxnSp>
+      <p:cxnSp>
+        <p:nvCxnSpPr>
+          <p:cNvPr id="238" name="Connector: Elbow 237">
+            <a:extLst>
+              <a:ext uri="{FF2B5EF4-FFF2-40B4-BE49-F238E27FC236}">
+                <a16:creationId xmlns:a16="http://schemas.microsoft.com/office/drawing/2014/main" id="{10D57548-5337-4324-9A0B-1A7F01AB9B66}"/>
+              </a:ext>
+            </a:extLst>
+          </p:cNvPr>
+          <p:cNvCxnSpPr>
+            <a:cxnSpLocks/>
+          </p:cNvCxnSpPr>
+          <p:nvPr/>
+        </p:nvCxnSpPr>
+        <p:spPr>
+          <a:xfrm>
+            <a:off x="2614031" y="3848959"/>
+            <a:ext cx="5721148" cy="393486"/>
+          </a:xfrm>
+          <a:prstGeom prst="bentConnector3">
+            <a:avLst>
+              <a:gd name="adj1" fmla="val 50222"/>
+            </a:avLst>
+          </a:prstGeom>
+          <a:ln>
+            <a:tailEnd type="triangle"/>
+          </a:ln>
+        </p:spPr>
+        <p:style>
+          <a:lnRef idx="1">
+            <a:schemeClr val="accent1"/>
+          </a:lnRef>
+          <a:fillRef idx="0">
+            <a:schemeClr val="accent1"/>
+          </a:fillRef>
+          <a:effectRef idx="0">
+            <a:schemeClr val="accent1"/>
+          </a:effectRef>
+          <a:fontRef idx="minor">
+            <a:schemeClr val="tx1"/>
+          </a:fontRef>
+        </p:style>
+      </p:cxnSp>
+      <p:cxnSp>
+        <p:nvCxnSpPr>
+          <p:cNvPr id="246" name="Connector: Elbow 245">
+            <a:extLst>
+              <a:ext uri="{FF2B5EF4-FFF2-40B4-BE49-F238E27FC236}">
+                <a16:creationId xmlns:a16="http://schemas.microsoft.com/office/drawing/2014/main" id="{8E7FAA1E-60A5-47BB-AC3A-ED38A1E7F148}"/>
+              </a:ext>
+            </a:extLst>
+          </p:cNvPr>
+          <p:cNvCxnSpPr/>
+          <p:nvPr/>
+        </p:nvCxnSpPr>
+        <p:spPr>
+          <a:xfrm rot="16200000" flipV="1">
+            <a:off x="2236625" y="3471553"/>
+            <a:ext cx="419959" cy="334854"/>
+          </a:xfrm>
+          <a:prstGeom prst="bentConnector3">
+            <a:avLst/>
+          </a:prstGeom>
+          <a:ln>
+            <a:tailEnd type="triangle"/>
+          </a:ln>
+        </p:spPr>
+        <p:style>
+          <a:lnRef idx="1">
+            <a:schemeClr val="accent1"/>
+          </a:lnRef>
+          <a:fillRef idx="0">
+            <a:schemeClr val="accent1"/>
+          </a:fillRef>
+          <a:effectRef idx="0">
+            <a:schemeClr val="accent1"/>
+          </a:effectRef>
+          <a:fontRef idx="minor">
+            <a:schemeClr val="tx1"/>
+          </a:fontRef>
+        </p:style>
+      </p:cxnSp>
+      <p:sp>
+        <p:nvSpPr>
+          <p:cNvPr id="247" name="TextBox 246">
+            <a:extLst>
+              <a:ext uri="{FF2B5EF4-FFF2-40B4-BE49-F238E27FC236}">
+                <a16:creationId xmlns:a16="http://schemas.microsoft.com/office/drawing/2014/main" id="{056FEB1F-4A81-469C-AE2F-B82BE41BABC6}"/>
+              </a:ext>
+            </a:extLst>
+          </p:cNvPr>
+          <p:cNvSpPr txBox="1"/>
+          <p:nvPr/>
+        </p:nvSpPr>
+        <p:spPr>
+          <a:xfrm>
+            <a:off x="346778" y="1339036"/>
+            <a:ext cx="564578" cy="246221"/>
+          </a:xfrm>
+          <a:prstGeom prst="rect">
+            <a:avLst/>
+          </a:prstGeom>
+          <a:noFill/>
+        </p:spPr>
+        <p:txBody>
+          <a:bodyPr wrap="none" rtlCol="0">
+            <a:spAutoFit/>
+          </a:bodyPr>
+          <a:lstStyle/>
+          <a:p>
+            <a:r>
+              <a:rPr lang="en-US" sz="1000" dirty="0">
+                <a:latin typeface="Inter 18pt" panose="02000503000000020004" pitchFamily="2" charset="0"/>
+                <a:ea typeface="Inter 18pt" panose="02000503000000020004" pitchFamily="2" charset="0"/>
+              </a:rPr>
+              <a:t>Admin</a:t>
+            </a:r>
+          </a:p>
+        </p:txBody>
+      </p:sp>
+      <p:sp>
+        <p:nvSpPr>
+          <p:cNvPr id="250" name="Cylinder 249">
+            <a:extLst>
+              <a:ext uri="{FF2B5EF4-FFF2-40B4-BE49-F238E27FC236}">
+                <a16:creationId xmlns:a16="http://schemas.microsoft.com/office/drawing/2014/main" id="{BA848F14-5C4A-4465-AD79-D33D9D15E4CB}"/>
+              </a:ext>
+            </a:extLst>
+          </p:cNvPr>
+          <p:cNvSpPr/>
+          <p:nvPr/>
+        </p:nvSpPr>
+        <p:spPr>
+          <a:xfrm>
+            <a:off x="1443860" y="5401924"/>
+            <a:ext cx="914400" cy="696036"/>
+          </a:xfrm>
+          <a:prstGeom prst="can">
+            <a:avLst/>
+          </a:prstGeom>
+        </p:spPr>
+        <p:style>
+          <a:lnRef idx="2">
+            <a:schemeClr val="dk1"/>
+          </a:lnRef>
+          <a:fillRef idx="1">
+            <a:schemeClr val="lt1"/>
+          </a:fillRef>
+          <a:effectRef idx="0">
+            <a:schemeClr val="dk1"/>
+          </a:effectRef>
+          <a:fontRef idx="minor">
+            <a:schemeClr val="dk1"/>
+          </a:fontRef>
+        </p:style>
+        <p:txBody>
+          <a:bodyPr rtlCol="0" anchor="ctr"/>
+          <a:lstStyle/>
+          <a:p>
+            <a:pPr algn="ctr"/>
+            <a:r>
+              <a:rPr lang="en-US" sz="1000" dirty="0">
+                <a:latin typeface="Inter 18pt" panose="02000503000000020004" pitchFamily="2" charset="0"/>
+                <a:ea typeface="Inter 18pt" panose="02000503000000020004" pitchFamily="2" charset="0"/>
+              </a:rPr>
+              <a:t>History</a:t>
+            </a:r>
+          </a:p>
+        </p:txBody>
+      </p:sp>
+      <p:pic>
+        <p:nvPicPr>
+          <p:cNvPr id="252" name="Graphic 251" descr="Devil face with no fill">
+            <a:extLst>
+              <a:ext uri="{FF2B5EF4-FFF2-40B4-BE49-F238E27FC236}">
+                <a16:creationId xmlns:a16="http://schemas.microsoft.com/office/drawing/2014/main" id="{E23F0962-50F6-4575-881A-9622B696C079}"/>
+              </a:ext>
+            </a:extLst>
+          </p:cNvPr>
+          <p:cNvPicPr>
+            <a:picLocks noChangeAspect="1"/>
+          </p:cNvPicPr>
+          <p:nvPr/>
+        </p:nvPicPr>
+        <p:blipFill>
+          <a:blip r:embed="rId10">
+            <a:extLst>
+              <a:ext uri="{28A0092B-C50C-407E-A947-70E740481C1C}">
+                <a14:useLocalDpi xmlns:a14="http://schemas.microsoft.com/office/drawing/2010/main" val="0"/>
+              </a:ext>
+              <a:ext uri="{96DAC541-7B7A-43D3-8B79-37D633B846F1}">
+                <asvg:svgBlip xmlns:asvg="http://schemas.microsoft.com/office/drawing/2016/SVG/main" r:embed="rId11"/>
+              </a:ext>
+            </a:extLst>
+          </a:blip>
+          <a:stretch>
+            <a:fillRect/>
+          </a:stretch>
+        </p:blipFill>
+        <p:spPr>
+          <a:xfrm>
+            <a:off x="2898322" y="5395853"/>
+            <a:ext cx="682512" cy="682512"/>
+          </a:xfrm>
+          <a:prstGeom prst="rect">
+            <a:avLst/>
+          </a:prstGeom>
+        </p:spPr>
+      </p:pic>
+      <p:grpSp>
+        <p:nvGrpSpPr>
+          <p:cNvPr id="257" name="Group 256">
+            <a:extLst>
+              <a:ext uri="{FF2B5EF4-FFF2-40B4-BE49-F238E27FC236}">
+                <a16:creationId xmlns:a16="http://schemas.microsoft.com/office/drawing/2014/main" id="{174899C6-037A-42C6-A955-E81EA6AA013F}"/>
+              </a:ext>
+            </a:extLst>
+          </p:cNvPr>
+          <p:cNvGrpSpPr/>
+          <p:nvPr/>
+        </p:nvGrpSpPr>
+        <p:grpSpPr>
+          <a:xfrm>
+            <a:off x="2440954" y="5687308"/>
+            <a:ext cx="471529" cy="62634"/>
+            <a:chOff x="3899592" y="5547475"/>
+            <a:chExt cx="471529" cy="62634"/>
+          </a:xfrm>
+        </p:grpSpPr>
+        <p:cxnSp>
+          <p:nvCxnSpPr>
+            <p:cNvPr id="254" name="Straight Arrow Connector 253">
+              <a:extLst>
+                <a:ext uri="{FF2B5EF4-FFF2-40B4-BE49-F238E27FC236}">
+                  <a16:creationId xmlns:a16="http://schemas.microsoft.com/office/drawing/2014/main" id="{F7E21440-F74F-4D88-BD2A-D601C95347E4}"/>
+                </a:ext>
+              </a:extLst>
+            </p:cNvPr>
+            <p:cNvCxnSpPr/>
+            <p:nvPr/>
+          </p:nvCxnSpPr>
+          <p:spPr>
+            <a:xfrm>
+              <a:off x="3975102" y="5547475"/>
+              <a:ext cx="396019" cy="0"/>
+            </a:xfrm>
+            <a:prstGeom prst="straightConnector1">
+              <a:avLst/>
+            </a:prstGeom>
+            <a:ln>
+              <a:tailEnd type="triangle"/>
+            </a:ln>
+          </p:spPr>
+          <p:style>
+            <a:lnRef idx="1">
+              <a:schemeClr val="dk1"/>
+            </a:lnRef>
+            <a:fillRef idx="0">
+              <a:schemeClr val="dk1"/>
+            </a:fillRef>
+            <a:effectRef idx="0">
+              <a:schemeClr val="dk1"/>
+            </a:effectRef>
+            <a:fontRef idx="minor">
+              <a:schemeClr val="tx1"/>
+            </a:fontRef>
+          </p:style>
+        </p:cxnSp>
+        <p:cxnSp>
+          <p:nvCxnSpPr>
+            <p:cNvPr id="255" name="Straight Arrow Connector 254">
+              <a:extLst>
+                <a:ext uri="{FF2B5EF4-FFF2-40B4-BE49-F238E27FC236}">
+                  <a16:creationId xmlns:a16="http://schemas.microsoft.com/office/drawing/2014/main" id="{424EB534-6370-4A87-9BAE-7E90F1BDA039}"/>
+                </a:ext>
+              </a:extLst>
+            </p:cNvPr>
+            <p:cNvCxnSpPr>
+              <a:cxnSpLocks/>
+            </p:cNvCxnSpPr>
+            <p:nvPr/>
+          </p:nvCxnSpPr>
+          <p:spPr>
+            <a:xfrm flipH="1">
+              <a:off x="3899592" y="5610109"/>
+              <a:ext cx="358883" cy="0"/>
+            </a:xfrm>
+            <a:prstGeom prst="straightConnector1">
+              <a:avLst/>
+            </a:prstGeom>
+            <a:ln>
+              <a:tailEnd type="triangle"/>
+            </a:ln>
+          </p:spPr>
+          <p:style>
+            <a:lnRef idx="1">
+              <a:schemeClr val="dk1"/>
+            </a:lnRef>
+            <a:fillRef idx="0">
+              <a:schemeClr val="dk1"/>
+            </a:fillRef>
+            <a:effectRef idx="0">
+              <a:schemeClr val="dk1"/>
+            </a:effectRef>
+            <a:fontRef idx="minor">
+              <a:schemeClr val="tx1"/>
+            </a:fontRef>
+          </p:style>
+        </p:cxnSp>
+      </p:grpSp>
+      <p:sp>
+        <p:nvSpPr>
+          <p:cNvPr id="258" name="TextBox 257">
+            <a:extLst>
+              <a:ext uri="{FF2B5EF4-FFF2-40B4-BE49-F238E27FC236}">
+                <a16:creationId xmlns:a16="http://schemas.microsoft.com/office/drawing/2014/main" id="{E13B3FA7-F732-44E4-833D-0EE0367B9D14}"/>
+              </a:ext>
+            </a:extLst>
+          </p:cNvPr>
+          <p:cNvSpPr txBox="1"/>
+          <p:nvPr/>
+        </p:nvSpPr>
+        <p:spPr>
+          <a:xfrm>
+            <a:off x="1364777" y="6120738"/>
+            <a:ext cx="7563289" cy="246221"/>
+          </a:xfrm>
+          <a:prstGeom prst="rect">
+            <a:avLst/>
+          </a:prstGeom>
+          <a:noFill/>
+        </p:spPr>
+        <p:txBody>
+          <a:bodyPr wrap="none" rtlCol="0">
+            <a:spAutoFit/>
+          </a:bodyPr>
+          <a:lstStyle/>
+          <a:p>
+            <a:r>
+              <a:rPr lang="en-US" sz="1000" dirty="0"/>
+              <a:t>An event listener monitors for specific events and executes a response—such as storing data—whenever that event is triggered by an action.</a:t>
+            </a:r>
+            <a:endParaRPr lang="en-US" sz="1000" dirty="0">
+              <a:latin typeface="Inter 18pt" panose="02000503000000020004" pitchFamily="2" charset="0"/>
+              <a:ea typeface="Inter 18pt" panose="02000503000000020004" pitchFamily="2" charset="0"/>
+            </a:endParaRPr>
+          </a:p>
+        </p:txBody>
+      </p:sp>
+      <p:pic>
+        <p:nvPicPr>
+          <p:cNvPr id="259" name="Graphic 258" descr="Devil face with no fill">
+            <a:extLst>
+              <a:ext uri="{FF2B5EF4-FFF2-40B4-BE49-F238E27FC236}">
+                <a16:creationId xmlns:a16="http://schemas.microsoft.com/office/drawing/2014/main" id="{6D28F8E5-6C7F-4BC8-8150-19E486EAAB59}"/>
+              </a:ext>
+            </a:extLst>
+          </p:cNvPr>
+          <p:cNvPicPr>
+            <a:picLocks noChangeAspect="1"/>
+          </p:cNvPicPr>
+          <p:nvPr/>
+        </p:nvPicPr>
+        <p:blipFill>
+          <a:blip r:embed="rId12">
+            <a:extLst>
+              <a:ext uri="{28A0092B-C50C-407E-A947-70E740481C1C}">
+                <a14:useLocalDpi xmlns:a14="http://schemas.microsoft.com/office/drawing/2010/main" val="0"/>
+              </a:ext>
+              <a:ext uri="{96DAC541-7B7A-43D3-8B79-37D633B846F1}">
+                <asvg:svgBlip xmlns:asvg="http://schemas.microsoft.com/office/drawing/2016/SVG/main" r:embed="rId13"/>
+              </a:ext>
+            </a:extLst>
+          </a:blip>
+          <a:stretch>
+            <a:fillRect/>
+          </a:stretch>
+        </p:blipFill>
+        <p:spPr>
+          <a:xfrm>
+            <a:off x="8422373" y="5395162"/>
+            <a:ext cx="288121" cy="288121"/>
+          </a:xfrm>
+          <a:prstGeom prst="rect">
+            <a:avLst/>
+          </a:prstGeom>
+        </p:spPr>
+      </p:pic>
+      <p:pic>
+        <p:nvPicPr>
+          <p:cNvPr id="260" name="Graphic 259" descr="Devil face with no fill">
+            <a:extLst>
+              <a:ext uri="{FF2B5EF4-FFF2-40B4-BE49-F238E27FC236}">
+                <a16:creationId xmlns:a16="http://schemas.microsoft.com/office/drawing/2014/main" id="{F2455ACB-1DC0-4F6C-965A-AE43DFD2EEE1}"/>
+              </a:ext>
+            </a:extLst>
+          </p:cNvPr>
+          <p:cNvPicPr>
+            <a:picLocks noChangeAspect="1"/>
+          </p:cNvPicPr>
+          <p:nvPr/>
+        </p:nvPicPr>
+        <p:blipFill>
+          <a:blip r:embed="rId12">
+            <a:extLst>
+              <a:ext uri="{28A0092B-C50C-407E-A947-70E740481C1C}">
+                <a14:useLocalDpi xmlns:a14="http://schemas.microsoft.com/office/drawing/2010/main" val="0"/>
+              </a:ext>
+              <a:ext uri="{96DAC541-7B7A-43D3-8B79-37D633B846F1}">
+                <asvg:svgBlip xmlns:asvg="http://schemas.microsoft.com/office/drawing/2016/SVG/main" r:embed="rId13"/>
+              </a:ext>
+            </a:extLst>
+          </a:blip>
+          <a:stretch>
+            <a:fillRect/>
+          </a:stretch>
+        </p:blipFill>
+        <p:spPr>
+          <a:xfrm>
+            <a:off x="11804956" y="374749"/>
+            <a:ext cx="288121" cy="288121"/>
+          </a:xfrm>
+          <a:prstGeom prst="rect">
+            <a:avLst/>
+          </a:prstGeom>
+        </p:spPr>
+      </p:pic>
+      <p:pic>
+        <p:nvPicPr>
+          <p:cNvPr id="261" name="Graphic 260" descr="Devil face with no fill">
+            <a:extLst>
+              <a:ext uri="{FF2B5EF4-FFF2-40B4-BE49-F238E27FC236}">
+                <a16:creationId xmlns:a16="http://schemas.microsoft.com/office/drawing/2014/main" id="{7E3DB4CA-91E2-4A85-96A1-B90E7D330C2B}"/>
+              </a:ext>
+            </a:extLst>
+          </p:cNvPr>
+          <p:cNvPicPr>
+            <a:picLocks noChangeAspect="1"/>
+          </p:cNvPicPr>
+          <p:nvPr/>
+        </p:nvPicPr>
+        <p:blipFill>
+          <a:blip r:embed="rId12">
+            <a:extLst>
+              <a:ext uri="{28A0092B-C50C-407E-A947-70E740481C1C}">
+                <a14:useLocalDpi xmlns:a14="http://schemas.microsoft.com/office/drawing/2010/main" val="0"/>
+              </a:ext>
+              <a:ext uri="{96DAC541-7B7A-43D3-8B79-37D633B846F1}">
+                <asvg:svgBlip xmlns:asvg="http://schemas.microsoft.com/office/drawing/2016/SVG/main" r:embed="rId13"/>
+              </a:ext>
+            </a:extLst>
+          </a:blip>
+          <a:stretch>
+            <a:fillRect/>
+          </a:stretch>
+        </p:blipFill>
+        <p:spPr>
+          <a:xfrm>
+            <a:off x="11819899" y="794391"/>
+            <a:ext cx="288121" cy="288121"/>
+          </a:xfrm>
+          <a:prstGeom prst="rect">
+            <a:avLst/>
+          </a:prstGeom>
+        </p:spPr>
+      </p:pic>
+      <p:pic>
+        <p:nvPicPr>
+          <p:cNvPr id="262" name="Graphic 261" descr="Devil face with no fill">
+            <a:extLst>
+              <a:ext uri="{FF2B5EF4-FFF2-40B4-BE49-F238E27FC236}">
+                <a16:creationId xmlns:a16="http://schemas.microsoft.com/office/drawing/2014/main" id="{CA9072D2-4C3A-4E97-91AC-FB826C59061B}"/>
+              </a:ext>
+            </a:extLst>
+          </p:cNvPr>
+          <p:cNvPicPr>
+            <a:picLocks noChangeAspect="1"/>
+          </p:cNvPicPr>
+          <p:nvPr/>
+        </p:nvPicPr>
+        <p:blipFill>
+          <a:blip r:embed="rId12">
+            <a:extLst>
+              <a:ext uri="{28A0092B-C50C-407E-A947-70E740481C1C}">
+                <a14:useLocalDpi xmlns:a14="http://schemas.microsoft.com/office/drawing/2010/main" val="0"/>
+              </a:ext>
+              <a:ext uri="{96DAC541-7B7A-43D3-8B79-37D633B846F1}">
+                <asvg:svgBlip xmlns:asvg="http://schemas.microsoft.com/office/drawing/2016/SVG/main" r:embed="rId13"/>
+              </a:ext>
+            </a:extLst>
+          </a:blip>
+          <a:stretch>
+            <a:fillRect/>
+          </a:stretch>
+        </p:blipFill>
+        <p:spPr>
+          <a:xfrm>
+            <a:off x="11832522" y="1182604"/>
+            <a:ext cx="288121" cy="288121"/>
+          </a:xfrm>
+          <a:prstGeom prst="rect">
+            <a:avLst/>
+          </a:prstGeom>
+        </p:spPr>
+      </p:pic>
     </p:spTree>
     <p:extLst>
       <p:ext uri="{BB962C8B-B14F-4D97-AF65-F5344CB8AC3E}">
-        <p14:creationId xmlns:p14="http://schemas.microsoft.com/office/powerpoint/2010/main" val="2400317157"/>
+        <p14:creationId xmlns:p14="http://schemas.microsoft.com/office/powerpoint/2010/main" val="3815722644"/>
       </p:ext>
     </p:extLst>
   </p:cSld>
@@ -3724,6 +7062,14 @@
 <file path=ppt/slides/slide3.xml><?xml version="1.0" encoding="utf-8"?>
 <p:sld xmlns:a="http://schemas.openxmlformats.org/drawingml/2006/main" xmlns:r="http://schemas.openxmlformats.org/officeDocument/2006/relationships" xmlns:p="http://schemas.openxmlformats.org/presentationml/2006/main">
   <p:cSld>
+    <p:bg>
+      <p:bgPr>
+        <a:solidFill>
+          <a:schemeClr val="bg1"/>
+        </a:solidFill>
+        <a:effectLst/>
+      </p:bgPr>
+    </p:bg>
     <p:spTree>
       <p:nvGrpSpPr>
         <p:cNvPr id="1" name=""/>
@@ -3740,6 +7086,182 @@
       </p:grpSpPr>
       <p:sp>
         <p:nvSpPr>
+          <p:cNvPr id="5" name="Rectangle 4">
+            <a:extLst>
+              <a:ext uri="{FF2B5EF4-FFF2-40B4-BE49-F238E27FC236}">
+                <a16:creationId xmlns:a16="http://schemas.microsoft.com/office/drawing/2014/main" id="{40296640-57A8-4E4D-8CA7-C94107A49CC9}"/>
+              </a:ext>
+            </a:extLst>
+          </p:cNvPr>
+          <p:cNvSpPr/>
+          <p:nvPr/>
+        </p:nvSpPr>
+        <p:spPr>
+          <a:xfrm>
+            <a:off x="6421271" y="347453"/>
+            <a:ext cx="2970997" cy="815432"/>
+          </a:xfrm>
+          <a:prstGeom prst="rect">
+            <a:avLst/>
+          </a:prstGeom>
+        </p:spPr>
+        <p:style>
+          <a:lnRef idx="2">
+            <a:schemeClr val="dk1"/>
+          </a:lnRef>
+          <a:fillRef idx="1">
+            <a:schemeClr val="lt1"/>
+          </a:fillRef>
+          <a:effectRef idx="0">
+            <a:schemeClr val="dk1"/>
+          </a:effectRef>
+          <a:fontRef idx="minor">
+            <a:schemeClr val="dk1"/>
+          </a:fontRef>
+        </p:style>
+        <p:txBody>
+          <a:bodyPr rtlCol="0" anchor="ctr"/>
+          <a:lstStyle/>
+          <a:p>
+            <a:pPr algn="ctr"/>
+            <a:endParaRPr lang="en-US"/>
+          </a:p>
+        </p:txBody>
+      </p:sp>
+      <p:sp>
+        <p:nvSpPr>
+          <p:cNvPr id="266" name="Rectangle 265">
+            <a:extLst>
+              <a:ext uri="{FF2B5EF4-FFF2-40B4-BE49-F238E27FC236}">
+                <a16:creationId xmlns:a16="http://schemas.microsoft.com/office/drawing/2014/main" id="{4C715C53-FF65-4868-8459-4EC216A3F34C}"/>
+              </a:ext>
+            </a:extLst>
+          </p:cNvPr>
+          <p:cNvSpPr/>
+          <p:nvPr/>
+        </p:nvSpPr>
+        <p:spPr>
+          <a:xfrm>
+            <a:off x="4934241" y="338259"/>
+            <a:ext cx="1071202" cy="1164653"/>
+          </a:xfrm>
+          <a:prstGeom prst="rect">
+            <a:avLst/>
+          </a:prstGeom>
+        </p:spPr>
+        <p:style>
+          <a:lnRef idx="2">
+            <a:schemeClr val="dk1"/>
+          </a:lnRef>
+          <a:fillRef idx="1">
+            <a:schemeClr val="lt1"/>
+          </a:fillRef>
+          <a:effectRef idx="0">
+            <a:schemeClr val="dk1"/>
+          </a:effectRef>
+          <a:fontRef idx="minor">
+            <a:schemeClr val="dk1"/>
+          </a:fontRef>
+        </p:style>
+        <p:txBody>
+          <a:bodyPr rtlCol="0" anchor="ctr"/>
+          <a:lstStyle/>
+          <a:p>
+            <a:pPr algn="ctr"/>
+            <a:endParaRPr lang="en-US"/>
+          </a:p>
+        </p:txBody>
+      </p:sp>
+      <p:sp>
+        <p:nvSpPr>
+          <p:cNvPr id="176" name="Rectangle 175">
+            <a:extLst>
+              <a:ext uri="{FF2B5EF4-FFF2-40B4-BE49-F238E27FC236}">
+                <a16:creationId xmlns:a16="http://schemas.microsoft.com/office/drawing/2014/main" id="{0C492EFC-6D53-44DA-9BB2-E6492B3C12C3}"/>
+              </a:ext>
+            </a:extLst>
+          </p:cNvPr>
+          <p:cNvSpPr/>
+          <p:nvPr/>
+        </p:nvSpPr>
+        <p:spPr>
+          <a:xfrm>
+            <a:off x="8227917" y="3774742"/>
+            <a:ext cx="3865160" cy="2081155"/>
+          </a:xfrm>
+          <a:prstGeom prst="rect">
+            <a:avLst/>
+          </a:prstGeom>
+        </p:spPr>
+        <p:style>
+          <a:lnRef idx="2">
+            <a:schemeClr val="dk1"/>
+          </a:lnRef>
+          <a:fillRef idx="1">
+            <a:schemeClr val="lt1"/>
+          </a:fillRef>
+          <a:effectRef idx="0">
+            <a:schemeClr val="dk1"/>
+          </a:effectRef>
+          <a:fontRef idx="minor">
+            <a:schemeClr val="dk1"/>
+          </a:fontRef>
+        </p:style>
+        <p:txBody>
+          <a:bodyPr rtlCol="0" anchor="ctr"/>
+          <a:lstStyle/>
+          <a:p>
+            <a:pPr algn="ctr"/>
+            <a:endParaRPr lang="en-US"/>
+          </a:p>
+        </p:txBody>
+      </p:sp>
+      <p:sp>
+        <p:nvSpPr>
+          <p:cNvPr id="147" name="Rectangle 146">
+            <a:extLst>
+              <a:ext uri="{FF2B5EF4-FFF2-40B4-BE49-F238E27FC236}">
+                <a16:creationId xmlns:a16="http://schemas.microsoft.com/office/drawing/2014/main" id="{A3E7DDD5-EC12-49FF-8C9B-030CB74C1D8A}"/>
+              </a:ext>
+            </a:extLst>
+          </p:cNvPr>
+          <p:cNvSpPr/>
+          <p:nvPr/>
+        </p:nvSpPr>
+        <p:spPr>
+          <a:xfrm>
+            <a:off x="9916344" y="325146"/>
+            <a:ext cx="1857229" cy="1211554"/>
+          </a:xfrm>
+          <a:prstGeom prst="rect">
+            <a:avLst/>
+          </a:prstGeom>
+        </p:spPr>
+        <p:style>
+          <a:lnRef idx="2">
+            <a:schemeClr val="accent5"/>
+          </a:lnRef>
+          <a:fillRef idx="1">
+            <a:schemeClr val="lt1"/>
+          </a:fillRef>
+          <a:effectRef idx="0">
+            <a:schemeClr val="accent5"/>
+          </a:effectRef>
+          <a:fontRef idx="minor">
+            <a:schemeClr val="dk1"/>
+          </a:fontRef>
+        </p:style>
+        <p:txBody>
+          <a:bodyPr rtlCol="0" anchor="ctr"/>
+          <a:lstStyle/>
+          <a:p>
+            <a:pPr algn="ctr"/>
+            <a:endParaRPr lang="en-US"/>
+          </a:p>
+        </p:txBody>
+      </p:sp>
+      <p:sp>
+        <p:nvSpPr>
           <p:cNvPr id="2" name="Title 1">
             <a:extLst>
               <a:ext uri="{FF2B5EF4-FFF2-40B4-BE49-F238E27FC236}">
@@ -3756,382 +7278,52 @@
         </p:nvSpPr>
         <p:spPr>
           <a:xfrm>
-            <a:off x="838201" y="365125"/>
-            <a:ext cx="4675496" cy="562923"/>
+            <a:off x="-151721" y="150559"/>
+            <a:ext cx="5313953" cy="252641"/>
           </a:xfrm>
         </p:spPr>
         <p:txBody>
           <a:bodyPr>
-            <a:normAutofit/>
+            <a:normAutofit fontScale="90000"/>
           </a:bodyPr>
           <a:lstStyle/>
           <a:p>
-            <a:r>
-              <a:rPr lang="en-US" sz="2000" dirty="0">
-                <a:latin typeface="Arial Narrow" panose="020B0606020202030204" pitchFamily="34" charset="0"/>
+            <a:pPr algn="ctr"/>
+            <a:r>
+              <a:rPr lang="en-US" sz="1400" b="1" dirty="0">
+                <a:solidFill>
+                  <a:srgbClr val="C00000"/>
+                </a:solidFill>
+                <a:latin typeface="Inter 18pt" panose="02000503000000020004" pitchFamily="2" charset="0"/>
                 <a:ea typeface="Inter 18pt" panose="02000503000000020004" pitchFamily="2" charset="0"/>
               </a:rPr>
-              <a:t>Data Flow: Table Name: admins</a:t>
-            </a:r>
-          </a:p>
-        </p:txBody>
-      </p:sp>
-      <p:sp>
-        <p:nvSpPr>
-          <p:cNvPr id="5" name="TextBox 4">
-            <a:extLst>
-              <a:ext uri="{FF2B5EF4-FFF2-40B4-BE49-F238E27FC236}">
-                <a16:creationId xmlns:a16="http://schemas.microsoft.com/office/drawing/2014/main" id="{87852E62-169B-40FE-99EE-FA34609481B3}"/>
-              </a:ext>
-            </a:extLst>
-          </p:cNvPr>
-          <p:cNvSpPr txBox="1"/>
-          <p:nvPr/>
-        </p:nvSpPr>
-        <p:spPr>
-          <a:xfrm>
-            <a:off x="736979" y="1105468"/>
-            <a:ext cx="4833374" cy="646331"/>
-          </a:xfrm>
-          <a:prstGeom prst="rect">
-            <a:avLst/>
-          </a:prstGeom>
-          <a:noFill/>
-        </p:spPr>
-        <p:txBody>
-          <a:bodyPr wrap="none" rtlCol="0">
-            <a:spAutoFit/>
-          </a:bodyPr>
-          <a:lstStyle/>
-          <a:p>
-            <a:pPr marL="285750" indent="-285750">
-              <a:buClr>
+              <a:t>High Level Overview (Updated: 15/02/2026) – Proposed v1</a:t>
+            </a:r>
+            <a:br>
+              <a:rPr lang="en-US" sz="1400" b="1" dirty="0">
+                <a:solidFill>
+                  <a:srgbClr val="00B050"/>
+                </a:solidFill>
+                <a:latin typeface="Inter 18pt" panose="02000503000000020004" pitchFamily="2" charset="0"/>
+                <a:ea typeface="Inter 18pt" panose="02000503000000020004" pitchFamily="2" charset="0"/>
+              </a:rPr>
+            </a:br>
+            <a:endParaRPr lang="en-US" sz="1400" b="1" dirty="0">
+              <a:solidFill>
                 <a:srgbClr val="00B050"/>
-              </a:buClr>
-              <a:buFont typeface="Wingdings" panose="05000000000000000000" pitchFamily="2" charset="2"/>
-              <a:buChar char="ü"/>
-            </a:pPr>
-            <a:r>
-              <a:rPr lang="en-US" dirty="0">
-                <a:latin typeface="Arial Narrow" panose="020B0606020202030204" pitchFamily="34" charset="0"/>
-              </a:rPr>
-              <a:t>Authentication should use this table.</a:t>
-            </a:r>
-          </a:p>
-          <a:p>
-            <a:pPr marL="285750" indent="-285750">
-              <a:buClr>
-                <a:srgbClr val="00B050"/>
-              </a:buClr>
-              <a:buFont typeface="Wingdings" panose="05000000000000000000" pitchFamily="2" charset="2"/>
-              <a:buChar char="ü"/>
-            </a:pPr>
-            <a:r>
-              <a:rPr lang="en-US" dirty="0">
-                <a:latin typeface="Arial Narrow" panose="020B0606020202030204" pitchFamily="34" charset="0"/>
-              </a:rPr>
-              <a:t>This table has no more job to handle authentication.</a:t>
-            </a:r>
-          </a:p>
-        </p:txBody>
-      </p:sp>
-      <p:graphicFrame>
-        <p:nvGraphicFramePr>
-          <p:cNvPr id="21" name="Table 4">
-            <a:extLst>
-              <a:ext uri="{FF2B5EF4-FFF2-40B4-BE49-F238E27FC236}">
-                <a16:creationId xmlns:a16="http://schemas.microsoft.com/office/drawing/2014/main" id="{7CCB55E1-4BFC-4D21-8423-CB24C70E5131}"/>
-              </a:ext>
-            </a:extLst>
-          </p:cNvPr>
-          <p:cNvGraphicFramePr>
-            <a:graphicFrameLocks noGrp="1"/>
-          </p:cNvGraphicFramePr>
-          <p:nvPr>
-            <p:extLst>
-              <p:ext uri="{D42A27DB-BD31-4B8C-83A1-F6EECF244321}">
-                <p14:modId xmlns:p14="http://schemas.microsoft.com/office/powerpoint/2010/main" val="4061431845"/>
-              </p:ext>
-            </p:extLst>
-          </p:nvPr>
-        </p:nvGraphicFramePr>
-        <p:xfrm>
-          <a:off x="1009825" y="1946526"/>
-          <a:ext cx="9539895" cy="1112520"/>
-        </p:xfrm>
-        <a:graphic>
-          <a:graphicData uri="http://schemas.openxmlformats.org/drawingml/2006/table">
-            <a:tbl>
-              <a:tblPr firstRow="1" bandRow="1">
-                <a:tableStyleId>{5940675A-B579-460E-94D1-54222C63F5DA}</a:tableStyleId>
-              </a:tblPr>
-              <a:tblGrid>
-                <a:gridCol w="1907979">
-                  <a:extLst>
-                    <a:ext uri="{9D8B030D-6E8A-4147-A177-3AD203B41FA5}">
-                      <a16:colId xmlns:a16="http://schemas.microsoft.com/office/drawing/2014/main" val="3754981159"/>
-                    </a:ext>
-                  </a:extLst>
-                </a:gridCol>
-                <a:gridCol w="1907979">
-                  <a:extLst>
-                    <a:ext uri="{9D8B030D-6E8A-4147-A177-3AD203B41FA5}">
-                      <a16:colId xmlns:a16="http://schemas.microsoft.com/office/drawing/2014/main" val="3021474219"/>
-                    </a:ext>
-                  </a:extLst>
-                </a:gridCol>
-                <a:gridCol w="1907979">
-                  <a:extLst>
-                    <a:ext uri="{9D8B030D-6E8A-4147-A177-3AD203B41FA5}">
-                      <a16:colId xmlns:a16="http://schemas.microsoft.com/office/drawing/2014/main" val="3981111130"/>
-                    </a:ext>
-                  </a:extLst>
-                </a:gridCol>
-                <a:gridCol w="1907979">
-                  <a:extLst>
-                    <a:ext uri="{9D8B030D-6E8A-4147-A177-3AD203B41FA5}">
-                      <a16:colId xmlns:a16="http://schemas.microsoft.com/office/drawing/2014/main" val="3706363297"/>
-                    </a:ext>
-                  </a:extLst>
-                </a:gridCol>
-                <a:gridCol w="1907979">
-                  <a:extLst>
-                    <a:ext uri="{9D8B030D-6E8A-4147-A177-3AD203B41FA5}">
-                      <a16:colId xmlns:a16="http://schemas.microsoft.com/office/drawing/2014/main" val="2694398640"/>
-                    </a:ext>
-                  </a:extLst>
-                </a:gridCol>
-              </a:tblGrid>
-              <a:tr h="370840">
-                <a:tc gridSpan="5">
-                  <a:txBody>
-                    <a:bodyPr/>
-                    <a:lstStyle/>
-                    <a:p>
-                      <a:pPr algn="ctr"/>
-                      <a:r>
-                        <a:rPr lang="en-US" b="1" dirty="0"/>
-                        <a:t>admins</a:t>
-                      </a:r>
-                    </a:p>
-                  </a:txBody>
-                  <a:tcPr/>
-                </a:tc>
-                <a:tc hMerge="1">
-                  <a:txBody>
-                    <a:bodyPr/>
-                    <a:lstStyle/>
-                    <a:p>
-                      <a:pPr algn="ctr"/>
-                      <a:endParaRPr lang="en-US" b="1" dirty="0"/>
-                    </a:p>
-                  </a:txBody>
-                  <a:tcPr/>
-                </a:tc>
-                <a:tc hMerge="1">
-                  <a:txBody>
-                    <a:bodyPr/>
-                    <a:lstStyle/>
-                    <a:p>
-                      <a:pPr algn="ctr"/>
-                      <a:endParaRPr lang="en-US" b="1" dirty="0"/>
-                    </a:p>
-                  </a:txBody>
-                  <a:tcPr/>
-                </a:tc>
-                <a:tc hMerge="1">
-                  <a:txBody>
-                    <a:bodyPr/>
-                    <a:lstStyle/>
-                    <a:p>
-                      <a:pPr algn="ctr"/>
-                      <a:endParaRPr lang="en-US" b="1" dirty="0"/>
-                    </a:p>
-                  </a:txBody>
-                  <a:tcPr/>
-                </a:tc>
-                <a:tc hMerge="1">
-                  <a:txBody>
-                    <a:bodyPr/>
-                    <a:lstStyle/>
-                    <a:p>
-                      <a:pPr algn="ctr"/>
-                      <a:endParaRPr lang="en-US" b="1" dirty="0"/>
-                    </a:p>
-                  </a:txBody>
-                  <a:tcPr/>
-                </a:tc>
-                <a:extLst>
-                  <a:ext uri="{0D108BD9-81ED-4DB2-BD59-A6C34878D82A}">
-                    <a16:rowId xmlns:a16="http://schemas.microsoft.com/office/drawing/2014/main" val="1090423420"/>
-                  </a:ext>
-                </a:extLst>
-              </a:tr>
-              <a:tr h="370840">
-                <a:tc>
-                  <a:txBody>
-                    <a:bodyPr/>
-                    <a:lstStyle/>
-                    <a:p>
-                      <a:pPr algn="ctr"/>
-                      <a:r>
-                        <a:rPr lang="en-US" b="1" dirty="0"/>
-                        <a:t>Id</a:t>
-                      </a:r>
-                    </a:p>
-                  </a:txBody>
-                  <a:tcPr/>
-                </a:tc>
-                <a:tc>
-                  <a:txBody>
-                    <a:bodyPr/>
-                    <a:lstStyle/>
-                    <a:p>
-                      <a:pPr algn="ctr"/>
-                      <a:r>
-                        <a:rPr lang="en-US" b="1" dirty="0"/>
-                        <a:t>email</a:t>
-                      </a:r>
-                    </a:p>
-                  </a:txBody>
-                  <a:tcPr/>
-                </a:tc>
-                <a:tc>
-                  <a:txBody>
-                    <a:bodyPr/>
-                    <a:lstStyle/>
-                    <a:p>
-                      <a:pPr algn="ctr"/>
-                      <a:r>
-                        <a:rPr lang="en-US" b="1" dirty="0"/>
-                        <a:t>email_verified_at</a:t>
-                      </a:r>
-                    </a:p>
-                  </a:txBody>
-                  <a:tcPr/>
-                </a:tc>
-                <a:tc>
-                  <a:txBody>
-                    <a:bodyPr/>
-                    <a:lstStyle/>
-                    <a:p>
-                      <a:pPr algn="ctr"/>
-                      <a:r>
-                        <a:rPr lang="en-US" b="1" dirty="0"/>
-                        <a:t>Password</a:t>
-                      </a:r>
-                    </a:p>
-                  </a:txBody>
-                  <a:tcPr/>
-                </a:tc>
-                <a:tc>
-                  <a:txBody>
-                    <a:bodyPr/>
-                    <a:lstStyle/>
-                    <a:p>
-                      <a:pPr algn="ctr"/>
-                      <a:r>
-                        <a:rPr lang="en-US" b="1" dirty="0" err="1"/>
-                        <a:t>Remember_token</a:t>
-                      </a:r>
-                      <a:endParaRPr lang="en-US" b="1" dirty="0"/>
-                    </a:p>
-                  </a:txBody>
-                  <a:tcPr/>
-                </a:tc>
-                <a:extLst>
-                  <a:ext uri="{0D108BD9-81ED-4DB2-BD59-A6C34878D82A}">
-                    <a16:rowId xmlns:a16="http://schemas.microsoft.com/office/drawing/2014/main" val="1660160347"/>
-                  </a:ext>
-                </a:extLst>
-              </a:tr>
-              <a:tr h="370840">
-                <a:tc>
-                  <a:txBody>
-                    <a:bodyPr/>
-                    <a:lstStyle/>
-                    <a:p>
-                      <a:pPr algn="ctr"/>
-                      <a:r>
-                        <a:rPr lang="en-US" dirty="0"/>
-                        <a:t>Integer</a:t>
-                      </a:r>
-                    </a:p>
-                  </a:txBody>
-                  <a:tcPr/>
-                </a:tc>
-                <a:tc>
-                  <a:txBody>
-                    <a:bodyPr/>
-                    <a:lstStyle/>
-                    <a:p>
-                      <a:pPr algn="ctr"/>
-                      <a:r>
-                        <a:rPr lang="en-US" dirty="0"/>
-                        <a:t>string</a:t>
-                      </a:r>
-                    </a:p>
-                  </a:txBody>
-                  <a:tcPr/>
-                </a:tc>
-                <a:tc>
-                  <a:txBody>
-                    <a:bodyPr/>
-                    <a:lstStyle/>
-                    <a:p>
-                      <a:pPr algn="ctr"/>
-                      <a:r>
-                        <a:rPr lang="en-US" dirty="0"/>
-                        <a:t>integer</a:t>
-                      </a:r>
-                    </a:p>
-                  </a:txBody>
-                  <a:tcPr/>
-                </a:tc>
-                <a:tc>
-                  <a:txBody>
-                    <a:bodyPr/>
-                    <a:lstStyle/>
-                    <a:p>
-                      <a:pPr algn="ctr"/>
-                      <a:r>
-                        <a:rPr lang="en-US" dirty="0"/>
-                        <a:t>String (Hash)</a:t>
-                      </a:r>
-                    </a:p>
-                  </a:txBody>
-                  <a:tcPr/>
-                </a:tc>
-                <a:tc>
-                  <a:txBody>
-                    <a:bodyPr/>
-                    <a:lstStyle/>
-                    <a:p>
-                      <a:pPr algn="ctr"/>
-                      <a:r>
-                        <a:rPr lang="en-US" dirty="0"/>
-                        <a:t>String (Hash)</a:t>
-                      </a:r>
-                    </a:p>
-                  </a:txBody>
-                  <a:tcPr/>
-                </a:tc>
-                <a:extLst>
-                  <a:ext uri="{0D108BD9-81ED-4DB2-BD59-A6C34878D82A}">
-                    <a16:rowId xmlns:a16="http://schemas.microsoft.com/office/drawing/2014/main" val="3642843113"/>
-                  </a:ext>
-                </a:extLst>
-              </a:tr>
-            </a:tbl>
-          </a:graphicData>
-        </a:graphic>
-      </p:graphicFrame>
-      <p:sp>
-        <p:nvSpPr>
-          <p:cNvPr id="6" name="Rectangle 5">
-            <a:extLst>
-              <a:ext uri="{FF2B5EF4-FFF2-40B4-BE49-F238E27FC236}">
-                <a16:creationId xmlns:a16="http://schemas.microsoft.com/office/drawing/2014/main" id="{75ED8CB2-C536-456F-919E-A544DD05C08A}"/>
+              </a:solidFill>
+              <a:latin typeface="Inter 18pt" panose="02000503000000020004" pitchFamily="2" charset="0"/>
+              <a:ea typeface="Inter 18pt" panose="02000503000000020004" pitchFamily="2" charset="0"/>
+            </a:endParaRPr>
+          </a:p>
+        </p:txBody>
+      </p:sp>
+      <p:sp>
+        <p:nvSpPr>
+          <p:cNvPr id="3" name="Smiley Face 2">
+            <a:extLst>
+              <a:ext uri="{FF2B5EF4-FFF2-40B4-BE49-F238E27FC236}">
+                <a16:creationId xmlns:a16="http://schemas.microsoft.com/office/drawing/2014/main" id="{B71339BF-84EB-4FAA-9F2C-67677E754C47}"/>
               </a:ext>
             </a:extLst>
           </p:cNvPr>
@@ -4140,28 +7332,25 @@
         </p:nvSpPr>
         <p:spPr>
           <a:xfrm>
-            <a:off x="1725306" y="4314155"/>
-            <a:ext cx="1815152" cy="562970"/>
-          </a:xfrm>
-          <a:prstGeom prst="rect">
-            <a:avLst/>
-          </a:prstGeom>
-          <a:solidFill>
-            <a:schemeClr val="accent1"/>
-          </a:solidFill>
+            <a:off x="2619686" y="747622"/>
+            <a:ext cx="423080" cy="423080"/>
+          </a:xfrm>
+          <a:prstGeom prst="smileyFace">
+            <a:avLst/>
+          </a:prstGeom>
         </p:spPr>
         <p:style>
-          <a:lnRef idx="3">
-            <a:schemeClr val="lt1"/>
+          <a:lnRef idx="2">
+            <a:schemeClr val="dk1"/>
           </a:lnRef>
           <a:fillRef idx="1">
-            <a:schemeClr val="accent4"/>
+            <a:schemeClr val="lt1"/>
           </a:fillRef>
-          <a:effectRef idx="1">
-            <a:schemeClr val="accent4"/>
+          <a:effectRef idx="0">
+            <a:schemeClr val="dk1"/>
           </a:effectRef>
           <a:fontRef idx="minor">
-            <a:schemeClr val="lt1"/>
+            <a:schemeClr val="dk1"/>
           </a:fontRef>
         </p:style>
         <p:txBody>
@@ -4169,21 +7358,16 @@
           <a:lstStyle/>
           <a:p>
             <a:pPr algn="ctr"/>
-            <a:r>
-              <a:rPr lang="en-US" dirty="0">
-                <a:latin typeface="Arial Narrow" panose="020B0606020202030204" pitchFamily="34" charset="0"/>
-              </a:rPr>
-              <a:t>Login Request</a:t>
-            </a:r>
-          </a:p>
-        </p:txBody>
-      </p:sp>
-      <p:sp>
-        <p:nvSpPr>
-          <p:cNvPr id="12" name="Rectangle 11">
-            <a:extLst>
-              <a:ext uri="{FF2B5EF4-FFF2-40B4-BE49-F238E27FC236}">
-                <a16:creationId xmlns:a16="http://schemas.microsoft.com/office/drawing/2014/main" id="{D9DA3C9E-DBB4-4A0A-8A04-8B28B60153F0}"/>
+            <a:endParaRPr lang="en-US" dirty="0"/>
+          </a:p>
+        </p:txBody>
+      </p:sp>
+      <p:sp>
+        <p:nvSpPr>
+          <p:cNvPr id="4" name="Flowchart: Predefined Process 3">
+            <a:extLst>
+              <a:ext uri="{FF2B5EF4-FFF2-40B4-BE49-F238E27FC236}">
+                <a16:creationId xmlns:a16="http://schemas.microsoft.com/office/drawing/2014/main" id="{F672EB78-A3B3-40C3-BD87-518C75E823A1}"/>
               </a:ext>
             </a:extLst>
           </p:cNvPr>
@@ -4192,25 +7376,25 @@
         </p:nvSpPr>
         <p:spPr>
           <a:xfrm>
-            <a:off x="4852918" y="3798955"/>
-            <a:ext cx="1815152" cy="1364765"/>
-          </a:xfrm>
-          <a:prstGeom prst="rect">
+            <a:off x="3501091" y="734395"/>
+            <a:ext cx="914400" cy="423080"/>
+          </a:xfrm>
+          <a:prstGeom prst="flowChartPredefinedProcess">
             <a:avLst/>
           </a:prstGeom>
         </p:spPr>
         <p:style>
-          <a:lnRef idx="0">
-            <a:schemeClr val="accent5"/>
+          <a:lnRef idx="2">
+            <a:schemeClr val="dk1"/>
           </a:lnRef>
-          <a:fillRef idx="3">
-            <a:schemeClr val="accent5"/>
+          <a:fillRef idx="1">
+            <a:schemeClr val="lt1"/>
           </a:fillRef>
-          <a:effectRef idx="3">
-            <a:schemeClr val="accent5"/>
+          <a:effectRef idx="0">
+            <a:schemeClr val="dk1"/>
           </a:effectRef>
           <a:fontRef idx="minor">
-            <a:schemeClr val="lt1"/>
+            <a:schemeClr val="dk1"/>
           </a:fontRef>
         </p:style>
         <p:txBody>
@@ -4219,29 +7403,21 @@
           <a:p>
             <a:pPr algn="ctr"/>
             <a:r>
-              <a:rPr lang="en-US" dirty="0">
-                <a:latin typeface="Arial Narrow" panose="020B0606020202030204" pitchFamily="34" charset="0"/>
+              <a:rPr lang="en-US" sz="1000" dirty="0">
+                <a:latin typeface="Inter 18pt" panose="02000503000000020004" pitchFamily="2" charset="0"/>
+                <a:ea typeface="Inter 18pt" panose="02000503000000020004" pitchFamily="2" charset="0"/>
               </a:rPr>
-              <a:t>Login Controller </a:t>
-            </a:r>
-          </a:p>
-          <a:p>
-            <a:pPr algn="ctr"/>
-            <a:r>
-              <a:rPr lang="en-US" dirty="0">
-                <a:latin typeface="Arial Narrow" panose="020B0606020202030204" pitchFamily="34" charset="0"/>
-              </a:rPr>
-              <a:t>(Verify Authentication)</a:t>
+              <a:t>Login (/login)</a:t>
             </a:r>
           </a:p>
         </p:txBody>
       </p:sp>
       <p:cxnSp>
         <p:nvCxnSpPr>
-          <p:cNvPr id="16" name="Straight Arrow Connector 15">
-            <a:extLst>
-              <a:ext uri="{FF2B5EF4-FFF2-40B4-BE49-F238E27FC236}">
-                <a16:creationId xmlns:a16="http://schemas.microsoft.com/office/drawing/2014/main" id="{21EA9BD7-2059-441C-BABE-27763F22C38E}"/>
+          <p:cNvPr id="6" name="Straight Arrow Connector 5">
+            <a:extLst>
+              <a:ext uri="{FF2B5EF4-FFF2-40B4-BE49-F238E27FC236}">
+                <a16:creationId xmlns:a16="http://schemas.microsoft.com/office/drawing/2014/main" id="{DAC130BC-5B3A-4294-B8A5-2263105CF140}"/>
               </a:ext>
             </a:extLst>
           </p:cNvPr>
@@ -4250,14 +7426,13 @@
         </p:nvCxnSpPr>
         <p:spPr>
           <a:xfrm>
-            <a:off x="3671248" y="4549579"/>
-            <a:ext cx="1050878" cy="0"/>
+            <a:off x="3105815" y="932197"/>
+            <a:ext cx="354841" cy="0"/>
           </a:xfrm>
           <a:prstGeom prst="straightConnector1">
             <a:avLst/>
           </a:prstGeom>
           <a:ln>
-            <a:headEnd type="triangle"/>
             <a:tailEnd type="triangle"/>
           </a:ln>
         </p:spPr>
@@ -4276,64 +7451,1377 @@
           </a:fontRef>
         </p:style>
       </p:cxnSp>
-      <p:sp>
-        <p:nvSpPr>
-          <p:cNvPr id="17" name="Cylinder 16">
-            <a:extLst>
-              <a:ext uri="{FF2B5EF4-FFF2-40B4-BE49-F238E27FC236}">
-                <a16:creationId xmlns:a16="http://schemas.microsoft.com/office/drawing/2014/main" id="{31839A88-EAA4-4412-A558-702D11BA7F9C}"/>
-              </a:ext>
-            </a:extLst>
-          </p:cNvPr>
-          <p:cNvSpPr/>
-          <p:nvPr/>
-        </p:nvSpPr>
-        <p:spPr>
-          <a:xfrm>
-            <a:off x="7703471" y="4112849"/>
-            <a:ext cx="554117" cy="736976"/>
-          </a:xfrm>
-          <a:prstGeom prst="can">
-            <a:avLst/>
-          </a:prstGeom>
+      <p:cxnSp>
+        <p:nvCxnSpPr>
+          <p:cNvPr id="9" name="Straight Arrow Connector 8">
+            <a:extLst>
+              <a:ext uri="{FF2B5EF4-FFF2-40B4-BE49-F238E27FC236}">
+                <a16:creationId xmlns:a16="http://schemas.microsoft.com/office/drawing/2014/main" id="{BCAA83C1-BA4A-4F04-A1C9-4383BFB99029}"/>
+              </a:ext>
+            </a:extLst>
+          </p:cNvPr>
+          <p:cNvCxnSpPr/>
+          <p:nvPr/>
+        </p:nvCxnSpPr>
+        <p:spPr>
+          <a:xfrm>
+            <a:off x="4419417" y="920882"/>
+            <a:ext cx="464024" cy="0"/>
+          </a:xfrm>
+          <a:prstGeom prst="straightConnector1">
+            <a:avLst/>
+          </a:prstGeom>
+          <a:ln>
+            <a:tailEnd type="triangle"/>
+          </a:ln>
         </p:spPr>
         <p:style>
-          <a:lnRef idx="0">
+          <a:lnRef idx="1">
             <a:schemeClr val="dk1"/>
           </a:lnRef>
-          <a:fillRef idx="3">
+          <a:fillRef idx="0">
             <a:schemeClr val="dk1"/>
           </a:fillRef>
-          <a:effectRef idx="3">
+          <a:effectRef idx="0">
             <a:schemeClr val="dk1"/>
           </a:effectRef>
           <a:fontRef idx="minor">
-            <a:schemeClr val="lt1"/>
+            <a:schemeClr val="tx1"/>
           </a:fontRef>
         </p:style>
+      </p:cxnSp>
+      <p:sp>
+        <p:nvSpPr>
+          <p:cNvPr id="10" name="Rectangle 9">
+            <a:extLst>
+              <a:ext uri="{FF2B5EF4-FFF2-40B4-BE49-F238E27FC236}">
+                <a16:creationId xmlns:a16="http://schemas.microsoft.com/office/drawing/2014/main" id="{20B70951-EB1D-4855-A514-BB8ED1C2B162}"/>
+              </a:ext>
+            </a:extLst>
+          </p:cNvPr>
+          <p:cNvSpPr/>
+          <p:nvPr/>
+        </p:nvSpPr>
+        <p:spPr>
+          <a:xfrm>
+            <a:off x="5017405" y="407871"/>
+            <a:ext cx="914400" cy="318924"/>
+          </a:xfrm>
+          <a:prstGeom prst="rect">
+            <a:avLst/>
+          </a:prstGeom>
+        </p:spPr>
+        <p:style>
+          <a:lnRef idx="2">
+            <a:schemeClr val="dk1"/>
+          </a:lnRef>
+          <a:fillRef idx="1">
+            <a:schemeClr val="lt1"/>
+          </a:fillRef>
+          <a:effectRef idx="0">
+            <a:schemeClr val="dk1"/>
+          </a:effectRef>
+          <a:fontRef idx="minor">
+            <a:schemeClr val="dk1"/>
+          </a:fontRef>
+        </p:style>
         <p:txBody>
           <a:bodyPr rtlCol="0" anchor="ctr"/>
           <a:lstStyle/>
           <a:p>
             <a:pPr algn="ctr"/>
             <a:r>
-              <a:rPr lang="en-US" dirty="0" err="1">
-                <a:latin typeface="Arial Narrow" panose="020B0606020202030204" pitchFamily="34" charset="0"/>
+              <a:rPr lang="en-US" sz="1000" dirty="0">
+                <a:solidFill>
+                  <a:srgbClr val="FF0000"/>
+                </a:solidFill>
+                <a:latin typeface="Inter 18pt" panose="02000503000000020004" pitchFamily="2" charset="0"/>
+                <a:ea typeface="Inter 18pt" panose="02000503000000020004" pitchFamily="2" charset="0"/>
               </a:rPr>
-              <a:t>db</a:t>
-            </a:r>
-            <a:endParaRPr lang="en-US" dirty="0">
-              <a:latin typeface="Arial Narrow" panose="020B0606020202030204" pitchFamily="34" charset="0"/>
+              <a:t>Home </a:t>
+            </a:r>
+            <a:r>
+              <a:rPr lang="en-US" sz="800" dirty="0">
+                <a:solidFill>
+                  <a:srgbClr val="FF0000"/>
+                </a:solidFill>
+                <a:latin typeface="Inter 18pt" panose="02000503000000020004" pitchFamily="2" charset="0"/>
+                <a:ea typeface="Inter 18pt" panose="02000503000000020004" pitchFamily="2" charset="0"/>
+              </a:rPr>
+              <a:t>(/) 308</a:t>
+            </a:r>
+            <a:endParaRPr lang="en-US" sz="1000" dirty="0">
+              <a:solidFill>
+                <a:srgbClr val="FF0000"/>
+              </a:solidFill>
+              <a:latin typeface="Inter 18pt" panose="02000503000000020004" pitchFamily="2" charset="0"/>
+              <a:ea typeface="Inter 18pt" panose="02000503000000020004" pitchFamily="2" charset="0"/>
             </a:endParaRPr>
           </a:p>
         </p:txBody>
       </p:sp>
+      <p:sp>
+        <p:nvSpPr>
+          <p:cNvPr id="14" name="Cylinder 13">
+            <a:extLst>
+              <a:ext uri="{FF2B5EF4-FFF2-40B4-BE49-F238E27FC236}">
+                <a16:creationId xmlns:a16="http://schemas.microsoft.com/office/drawing/2014/main" id="{D26E7933-718C-4C2B-A9A7-81ADEDE8CF4C}"/>
+              </a:ext>
+            </a:extLst>
+          </p:cNvPr>
+          <p:cNvSpPr/>
+          <p:nvPr/>
+        </p:nvSpPr>
+        <p:spPr>
+          <a:xfrm>
+            <a:off x="358365" y="5404703"/>
+            <a:ext cx="914400" cy="696036"/>
+          </a:xfrm>
+          <a:prstGeom prst="can">
+            <a:avLst/>
+          </a:prstGeom>
+        </p:spPr>
+        <p:style>
+          <a:lnRef idx="2">
+            <a:schemeClr val="dk1"/>
+          </a:lnRef>
+          <a:fillRef idx="1">
+            <a:schemeClr val="lt1"/>
+          </a:fillRef>
+          <a:effectRef idx="0">
+            <a:schemeClr val="dk1"/>
+          </a:effectRef>
+          <a:fontRef idx="minor">
+            <a:schemeClr val="dk1"/>
+          </a:fontRef>
+        </p:style>
+        <p:txBody>
+          <a:bodyPr rtlCol="0" anchor="ctr"/>
+          <a:lstStyle/>
+          <a:p>
+            <a:pPr algn="ctr"/>
+            <a:r>
+              <a:rPr lang="en-US" sz="1000" dirty="0">
+                <a:latin typeface="Inter 18pt" panose="02000503000000020004" pitchFamily="2" charset="0"/>
+                <a:ea typeface="Inter 18pt" panose="02000503000000020004" pitchFamily="2" charset="0"/>
+              </a:rPr>
+              <a:t>feedback</a:t>
+            </a:r>
+          </a:p>
+        </p:txBody>
+      </p:sp>
+      <p:sp>
+        <p:nvSpPr>
+          <p:cNvPr id="18" name="Rectangle 17">
+            <a:extLst>
+              <a:ext uri="{FF2B5EF4-FFF2-40B4-BE49-F238E27FC236}">
+                <a16:creationId xmlns:a16="http://schemas.microsoft.com/office/drawing/2014/main" id="{E316D01C-3EB6-44E5-AFED-33BFE2804968}"/>
+              </a:ext>
+            </a:extLst>
+          </p:cNvPr>
+          <p:cNvSpPr/>
+          <p:nvPr/>
+        </p:nvSpPr>
+        <p:spPr>
+          <a:xfrm>
+            <a:off x="5016135" y="762662"/>
+            <a:ext cx="914400" cy="318924"/>
+          </a:xfrm>
+          <a:prstGeom prst="rect">
+            <a:avLst/>
+          </a:prstGeom>
+        </p:spPr>
+        <p:style>
+          <a:lnRef idx="2">
+            <a:schemeClr val="dk1"/>
+          </a:lnRef>
+          <a:fillRef idx="1">
+            <a:schemeClr val="lt1"/>
+          </a:fillRef>
+          <a:effectRef idx="0">
+            <a:schemeClr val="dk1"/>
+          </a:effectRef>
+          <a:fontRef idx="minor">
+            <a:schemeClr val="dk1"/>
+          </a:fontRef>
+        </p:style>
+        <p:txBody>
+          <a:bodyPr rtlCol="0" anchor="ctr"/>
+          <a:lstStyle/>
+          <a:p>
+            <a:pPr algn="ctr"/>
+            <a:r>
+              <a:rPr lang="en-US" sz="1000" dirty="0">
+                <a:latin typeface="Inter 18pt" panose="02000503000000020004" pitchFamily="2" charset="0"/>
+                <a:ea typeface="Inter 18pt" panose="02000503000000020004" pitchFamily="2" charset="0"/>
+              </a:rPr>
+              <a:t>Hostel </a:t>
+            </a:r>
+            <a:r>
+              <a:rPr lang="en-US" sz="800" dirty="0">
+                <a:latin typeface="Inter 18pt" panose="02000503000000020004" pitchFamily="2" charset="0"/>
+                <a:ea typeface="Inter 18pt" panose="02000503000000020004" pitchFamily="2" charset="0"/>
+              </a:rPr>
+              <a:t>(/admin/hostel</a:t>
+            </a:r>
+            <a:r>
+              <a:rPr lang="en-US" sz="1000" dirty="0">
+                <a:latin typeface="Inter 18pt" panose="02000503000000020004" pitchFamily="2" charset="0"/>
+                <a:ea typeface="Inter 18pt" panose="02000503000000020004" pitchFamily="2" charset="0"/>
+              </a:rPr>
+              <a:t>)</a:t>
+            </a:r>
+          </a:p>
+        </p:txBody>
+      </p:sp>
+      <p:sp>
+        <p:nvSpPr>
+          <p:cNvPr id="19" name="Rectangle 18">
+            <a:extLst>
+              <a:ext uri="{FF2B5EF4-FFF2-40B4-BE49-F238E27FC236}">
+                <a16:creationId xmlns:a16="http://schemas.microsoft.com/office/drawing/2014/main" id="{D6A3B91D-CC08-49BF-ABA0-CEB4DE932643}"/>
+              </a:ext>
+            </a:extLst>
+          </p:cNvPr>
+          <p:cNvSpPr/>
+          <p:nvPr/>
+        </p:nvSpPr>
+        <p:spPr>
+          <a:xfrm>
+            <a:off x="5010441" y="1117453"/>
+            <a:ext cx="914400" cy="318924"/>
+          </a:xfrm>
+          <a:prstGeom prst="rect">
+            <a:avLst/>
+          </a:prstGeom>
+        </p:spPr>
+        <p:style>
+          <a:lnRef idx="2">
+            <a:schemeClr val="dk1"/>
+          </a:lnRef>
+          <a:fillRef idx="1">
+            <a:schemeClr val="lt1"/>
+          </a:fillRef>
+          <a:effectRef idx="0">
+            <a:schemeClr val="dk1"/>
+          </a:effectRef>
+          <a:fontRef idx="minor">
+            <a:schemeClr val="dk1"/>
+          </a:fontRef>
+        </p:style>
+        <p:txBody>
+          <a:bodyPr rtlCol="0" anchor="ctr"/>
+          <a:lstStyle/>
+          <a:p>
+            <a:pPr algn="ctr"/>
+            <a:r>
+              <a:rPr lang="en-US" sz="1000" dirty="0">
+                <a:latin typeface="Inter 18pt" panose="02000503000000020004" pitchFamily="2" charset="0"/>
+                <a:ea typeface="Inter 18pt" panose="02000503000000020004" pitchFamily="2" charset="0"/>
+              </a:rPr>
+              <a:t>Report </a:t>
+            </a:r>
+            <a:r>
+              <a:rPr lang="en-US" sz="800" dirty="0">
+                <a:latin typeface="Inter 18pt" panose="02000503000000020004" pitchFamily="2" charset="0"/>
+                <a:ea typeface="Inter 18pt" panose="02000503000000020004" pitchFamily="2" charset="0"/>
+              </a:rPr>
+              <a:t>(/admin/report)</a:t>
+            </a:r>
+            <a:endParaRPr lang="en-US" sz="1000" dirty="0">
+              <a:latin typeface="Inter 18pt" panose="02000503000000020004" pitchFamily="2" charset="0"/>
+              <a:ea typeface="Inter 18pt" panose="02000503000000020004" pitchFamily="2" charset="0"/>
+            </a:endParaRPr>
+          </a:p>
+        </p:txBody>
+      </p:sp>
+      <p:sp>
+        <p:nvSpPr>
+          <p:cNvPr id="34" name="Rectangle 33">
+            <a:extLst>
+              <a:ext uri="{FF2B5EF4-FFF2-40B4-BE49-F238E27FC236}">
+                <a16:creationId xmlns:a16="http://schemas.microsoft.com/office/drawing/2014/main" id="{46689D72-92E4-453C-8D40-A0056FB4C088}"/>
+              </a:ext>
+            </a:extLst>
+          </p:cNvPr>
+          <p:cNvSpPr/>
+          <p:nvPr/>
+        </p:nvSpPr>
+        <p:spPr>
+          <a:xfrm>
+            <a:off x="6503160" y="403108"/>
+            <a:ext cx="1374773" cy="318924"/>
+          </a:xfrm>
+          <a:prstGeom prst="rect">
+            <a:avLst/>
+          </a:prstGeom>
+        </p:spPr>
+        <p:style>
+          <a:lnRef idx="2">
+            <a:schemeClr val="dk1"/>
+          </a:lnRef>
+          <a:fillRef idx="1">
+            <a:schemeClr val="lt1"/>
+          </a:fillRef>
+          <a:effectRef idx="0">
+            <a:schemeClr val="dk1"/>
+          </a:effectRef>
+          <a:fontRef idx="minor">
+            <a:schemeClr val="dk1"/>
+          </a:fontRef>
+        </p:style>
+        <p:txBody>
+          <a:bodyPr rtlCol="0" anchor="ctr"/>
+          <a:lstStyle/>
+          <a:p>
+            <a:pPr algn="ctr"/>
+            <a:r>
+              <a:rPr lang="en-US" sz="1000" dirty="0">
+                <a:latin typeface="Inter 18pt" panose="02000503000000020004" pitchFamily="2" charset="0"/>
+                <a:ea typeface="Inter 18pt" panose="02000503000000020004" pitchFamily="2" charset="0"/>
+              </a:rPr>
+              <a:t>Check-in </a:t>
+            </a:r>
+            <a:r>
+              <a:rPr lang="en-US" sz="700" dirty="0">
+                <a:latin typeface="Inter 18pt" panose="02000503000000020004" pitchFamily="2" charset="0"/>
+                <a:ea typeface="Inter 18pt" panose="02000503000000020004" pitchFamily="2" charset="0"/>
+              </a:rPr>
+              <a:t>(/admin/hostel/check-in</a:t>
+            </a:r>
+            <a:r>
+              <a:rPr lang="en-US" sz="900" dirty="0">
+                <a:latin typeface="Inter 18pt" panose="02000503000000020004" pitchFamily="2" charset="0"/>
+                <a:ea typeface="Inter 18pt" panose="02000503000000020004" pitchFamily="2" charset="0"/>
+              </a:rPr>
+              <a:t>)</a:t>
+            </a:r>
+            <a:endParaRPr lang="en-US" sz="1000" dirty="0">
+              <a:latin typeface="Inter 18pt" panose="02000503000000020004" pitchFamily="2" charset="0"/>
+              <a:ea typeface="Inter 18pt" panose="02000503000000020004" pitchFamily="2" charset="0"/>
+            </a:endParaRPr>
+          </a:p>
+        </p:txBody>
+      </p:sp>
+      <p:sp>
+        <p:nvSpPr>
+          <p:cNvPr id="35" name="Rectangle 34">
+            <a:extLst>
+              <a:ext uri="{FF2B5EF4-FFF2-40B4-BE49-F238E27FC236}">
+                <a16:creationId xmlns:a16="http://schemas.microsoft.com/office/drawing/2014/main" id="{5923CFAA-01CB-4178-91A6-68CB3890EDE0}"/>
+              </a:ext>
+            </a:extLst>
+          </p:cNvPr>
+          <p:cNvSpPr/>
+          <p:nvPr/>
+        </p:nvSpPr>
+        <p:spPr>
+          <a:xfrm>
+            <a:off x="7944610" y="411544"/>
+            <a:ext cx="1374773" cy="318924"/>
+          </a:xfrm>
+          <a:prstGeom prst="rect">
+            <a:avLst/>
+          </a:prstGeom>
+        </p:spPr>
+        <p:style>
+          <a:lnRef idx="2">
+            <a:schemeClr val="dk1"/>
+          </a:lnRef>
+          <a:fillRef idx="1">
+            <a:schemeClr val="lt1"/>
+          </a:fillRef>
+          <a:effectRef idx="0">
+            <a:schemeClr val="dk1"/>
+          </a:effectRef>
+          <a:fontRef idx="minor">
+            <a:schemeClr val="dk1"/>
+          </a:fontRef>
+        </p:style>
+        <p:txBody>
+          <a:bodyPr rtlCol="0" anchor="ctr"/>
+          <a:lstStyle/>
+          <a:p>
+            <a:pPr algn="ctr"/>
+            <a:r>
+              <a:rPr lang="en-US" sz="1000" dirty="0">
+                <a:latin typeface="Inter 18pt" panose="02000503000000020004" pitchFamily="2" charset="0"/>
+                <a:ea typeface="Inter 18pt" panose="02000503000000020004" pitchFamily="2" charset="0"/>
+              </a:rPr>
+              <a:t>Checkout </a:t>
+            </a:r>
+            <a:r>
+              <a:rPr lang="en-US" sz="700" dirty="0">
+                <a:latin typeface="Inter 18pt" panose="02000503000000020004" pitchFamily="2" charset="0"/>
+                <a:ea typeface="Inter 18pt" panose="02000503000000020004" pitchFamily="2" charset="0"/>
+              </a:rPr>
+              <a:t>(/admin/hostel/checkout</a:t>
+            </a:r>
+            <a:r>
+              <a:rPr lang="en-US" sz="900" dirty="0">
+                <a:latin typeface="Inter 18pt" panose="02000503000000020004" pitchFamily="2" charset="0"/>
+                <a:ea typeface="Inter 18pt" panose="02000503000000020004" pitchFamily="2" charset="0"/>
+              </a:rPr>
+              <a:t>)</a:t>
+            </a:r>
+            <a:endParaRPr lang="en-US" sz="1000" dirty="0">
+              <a:latin typeface="Inter 18pt" panose="02000503000000020004" pitchFamily="2" charset="0"/>
+              <a:ea typeface="Inter 18pt" panose="02000503000000020004" pitchFamily="2" charset="0"/>
+            </a:endParaRPr>
+          </a:p>
+        </p:txBody>
+      </p:sp>
+      <p:sp>
+        <p:nvSpPr>
+          <p:cNvPr id="36" name="Rectangle 35">
+            <a:extLst>
+              <a:ext uri="{FF2B5EF4-FFF2-40B4-BE49-F238E27FC236}">
+                <a16:creationId xmlns:a16="http://schemas.microsoft.com/office/drawing/2014/main" id="{ACBD70B4-AB21-4771-A435-41ABE5BF4D1A}"/>
+              </a:ext>
+            </a:extLst>
+          </p:cNvPr>
+          <p:cNvSpPr/>
+          <p:nvPr/>
+        </p:nvSpPr>
+        <p:spPr>
+          <a:xfrm>
+            <a:off x="6716692" y="6100739"/>
+            <a:ext cx="578697" cy="318924"/>
+          </a:xfrm>
+          <a:prstGeom prst="rect">
+            <a:avLst/>
+          </a:prstGeom>
+        </p:spPr>
+        <p:style>
+          <a:lnRef idx="2">
+            <a:schemeClr val="dk1"/>
+          </a:lnRef>
+          <a:fillRef idx="1">
+            <a:schemeClr val="lt1"/>
+          </a:fillRef>
+          <a:effectRef idx="0">
+            <a:schemeClr val="dk1"/>
+          </a:effectRef>
+          <a:fontRef idx="minor">
+            <a:schemeClr val="dk1"/>
+          </a:fontRef>
+        </p:style>
+        <p:txBody>
+          <a:bodyPr rtlCol="0" anchor="ctr"/>
+          <a:lstStyle/>
+          <a:p>
+            <a:pPr algn="ctr"/>
+            <a:r>
+              <a:rPr lang="en-US" sz="1000" dirty="0"/>
+              <a:t>SMS</a:t>
+            </a:r>
+          </a:p>
+        </p:txBody>
+      </p:sp>
+      <p:grpSp>
+        <p:nvGrpSpPr>
+          <p:cNvPr id="270" name="Group 269">
+            <a:extLst>
+              <a:ext uri="{FF2B5EF4-FFF2-40B4-BE49-F238E27FC236}">
+                <a16:creationId xmlns:a16="http://schemas.microsoft.com/office/drawing/2014/main" id="{F8621F85-8E2E-440F-A109-CFC1D9F524F6}"/>
+              </a:ext>
+            </a:extLst>
+          </p:cNvPr>
+          <p:cNvGrpSpPr/>
+          <p:nvPr/>
+        </p:nvGrpSpPr>
+        <p:grpSpPr>
+          <a:xfrm>
+            <a:off x="7581239" y="1827603"/>
+            <a:ext cx="1788944" cy="1209137"/>
+            <a:chOff x="7581239" y="1002103"/>
+            <a:chExt cx="1788944" cy="1209137"/>
+          </a:xfrm>
+        </p:grpSpPr>
+        <p:sp>
+          <p:nvSpPr>
+            <p:cNvPr id="148" name="Rectangle 147">
+              <a:extLst>
+                <a:ext uri="{FF2B5EF4-FFF2-40B4-BE49-F238E27FC236}">
+                  <a16:creationId xmlns:a16="http://schemas.microsoft.com/office/drawing/2014/main" id="{B294C26F-1989-438C-848C-C3E5A2679AFC}"/>
+                </a:ext>
+              </a:extLst>
+            </p:cNvPr>
+            <p:cNvSpPr/>
+            <p:nvPr/>
+          </p:nvSpPr>
+          <p:spPr>
+            <a:xfrm>
+              <a:off x="7581239" y="1002103"/>
+              <a:ext cx="1788944" cy="1209137"/>
+            </a:xfrm>
+            <a:prstGeom prst="rect">
+              <a:avLst/>
+            </a:prstGeom>
+          </p:spPr>
+          <p:style>
+            <a:lnRef idx="2">
+              <a:schemeClr val="accent2"/>
+            </a:lnRef>
+            <a:fillRef idx="1">
+              <a:schemeClr val="lt1"/>
+            </a:fillRef>
+            <a:effectRef idx="0">
+              <a:schemeClr val="accent2"/>
+            </a:effectRef>
+            <a:fontRef idx="minor">
+              <a:schemeClr val="dk1"/>
+            </a:fontRef>
+          </p:style>
+          <p:txBody>
+            <a:bodyPr rtlCol="0" anchor="ctr"/>
+            <a:lstStyle/>
+            <a:p>
+              <a:pPr algn="ctr"/>
+              <a:endParaRPr lang="en-US"/>
+            </a:p>
+          </p:txBody>
+        </p:sp>
+        <p:sp>
+          <p:nvSpPr>
+            <p:cNvPr id="59" name="Rectangle 58">
+              <a:extLst>
+                <a:ext uri="{FF2B5EF4-FFF2-40B4-BE49-F238E27FC236}">
+                  <a16:creationId xmlns:a16="http://schemas.microsoft.com/office/drawing/2014/main" id="{264840F8-1014-4A74-8397-AFE08A28D649}"/>
+                </a:ext>
+              </a:extLst>
+            </p:cNvPr>
+            <p:cNvSpPr/>
+            <p:nvPr/>
+          </p:nvSpPr>
+          <p:spPr>
+            <a:xfrm>
+              <a:off x="7657441" y="1072997"/>
+              <a:ext cx="1630170" cy="318924"/>
+            </a:xfrm>
+            <a:prstGeom prst="rect">
+              <a:avLst/>
+            </a:prstGeom>
+          </p:spPr>
+          <p:style>
+            <a:lnRef idx="2">
+              <a:schemeClr val="dk1"/>
+            </a:lnRef>
+            <a:fillRef idx="1">
+              <a:schemeClr val="lt1"/>
+            </a:fillRef>
+            <a:effectRef idx="0">
+              <a:schemeClr val="dk1"/>
+            </a:effectRef>
+            <a:fontRef idx="minor">
+              <a:schemeClr val="dk1"/>
+            </a:fontRef>
+          </p:style>
+          <p:txBody>
+            <a:bodyPr rtlCol="0" anchor="ctr"/>
+            <a:lstStyle/>
+            <a:p>
+              <a:pPr algn="ctr"/>
+              <a:r>
+                <a:rPr lang="en-US" sz="1000" dirty="0">
+                  <a:latin typeface="Inter 18pt" panose="02000503000000020004" pitchFamily="2" charset="0"/>
+                  <a:ea typeface="Inter 18pt" panose="02000503000000020004" pitchFamily="2" charset="0"/>
+                </a:rPr>
+                <a:t>Guest Feedback Report </a:t>
+              </a:r>
+            </a:p>
+            <a:p>
+              <a:pPr algn="ctr"/>
+              <a:r>
+                <a:rPr lang="en-US" sz="700" dirty="0">
+                  <a:latin typeface="Inter 18pt" panose="02000503000000020004" pitchFamily="2" charset="0"/>
+                  <a:ea typeface="Inter 18pt" panose="02000503000000020004" pitchFamily="2" charset="0"/>
+                </a:rPr>
+                <a:t>(POST /admin/report/generate</a:t>
+              </a:r>
+              <a:r>
+                <a:rPr lang="en-US" sz="900" dirty="0">
+                  <a:latin typeface="Inter 18pt" panose="02000503000000020004" pitchFamily="2" charset="0"/>
+                  <a:ea typeface="Inter 18pt" panose="02000503000000020004" pitchFamily="2" charset="0"/>
+                </a:rPr>
+                <a:t>)</a:t>
+              </a:r>
+              <a:endParaRPr lang="en-US" sz="1000" dirty="0">
+                <a:latin typeface="Inter 18pt" panose="02000503000000020004" pitchFamily="2" charset="0"/>
+                <a:ea typeface="Inter 18pt" panose="02000503000000020004" pitchFamily="2" charset="0"/>
+              </a:endParaRPr>
+            </a:p>
+          </p:txBody>
+        </p:sp>
+        <p:sp>
+          <p:nvSpPr>
+            <p:cNvPr id="60" name="Rectangle 59">
+              <a:extLst>
+                <a:ext uri="{FF2B5EF4-FFF2-40B4-BE49-F238E27FC236}">
+                  <a16:creationId xmlns:a16="http://schemas.microsoft.com/office/drawing/2014/main" id="{2C78C27C-8504-455A-974D-67B2162F1DB9}"/>
+                </a:ext>
+              </a:extLst>
+            </p:cNvPr>
+            <p:cNvSpPr/>
+            <p:nvPr/>
+          </p:nvSpPr>
+          <p:spPr>
+            <a:xfrm>
+              <a:off x="7657440" y="1444761"/>
+              <a:ext cx="1630171" cy="318924"/>
+            </a:xfrm>
+            <a:prstGeom prst="rect">
+              <a:avLst/>
+            </a:prstGeom>
+          </p:spPr>
+          <p:style>
+            <a:lnRef idx="2">
+              <a:schemeClr val="dk1"/>
+            </a:lnRef>
+            <a:fillRef idx="1">
+              <a:schemeClr val="lt1"/>
+            </a:fillRef>
+            <a:effectRef idx="0">
+              <a:schemeClr val="dk1"/>
+            </a:effectRef>
+            <a:fontRef idx="minor">
+              <a:schemeClr val="dk1"/>
+            </a:fontRef>
+          </p:style>
+          <p:txBody>
+            <a:bodyPr rtlCol="0" anchor="ctr"/>
+            <a:lstStyle/>
+            <a:p>
+              <a:pPr algn="ctr"/>
+              <a:r>
+                <a:rPr lang="en-US" sz="1000" dirty="0">
+                  <a:latin typeface="Inter 18pt" panose="02000503000000020004" pitchFamily="2" charset="0"/>
+                  <a:ea typeface="Inter 18pt" panose="02000503000000020004" pitchFamily="2" charset="0"/>
+                </a:rPr>
+                <a:t>Occupancies</a:t>
+              </a:r>
+            </a:p>
+            <a:p>
+              <a:pPr algn="ctr"/>
+              <a:r>
+                <a:rPr lang="en-US" sz="700" dirty="0">
+                  <a:latin typeface="Inter 18pt" panose="02000503000000020004" pitchFamily="2" charset="0"/>
+                  <a:ea typeface="Inter 18pt" panose="02000503000000020004" pitchFamily="2" charset="0"/>
+                </a:rPr>
+                <a:t>(GET /admin/report/{query}{msg}</a:t>
+              </a:r>
+              <a:r>
+                <a:rPr lang="en-US" sz="900" dirty="0">
+                  <a:latin typeface="Inter 18pt" panose="02000503000000020004" pitchFamily="2" charset="0"/>
+                  <a:ea typeface="Inter 18pt" panose="02000503000000020004" pitchFamily="2" charset="0"/>
+                </a:rPr>
+                <a:t>)</a:t>
+              </a:r>
+              <a:endParaRPr lang="en-US" sz="1000" dirty="0">
+                <a:latin typeface="Inter 18pt" panose="02000503000000020004" pitchFamily="2" charset="0"/>
+                <a:ea typeface="Inter 18pt" panose="02000503000000020004" pitchFamily="2" charset="0"/>
+              </a:endParaRPr>
+            </a:p>
+          </p:txBody>
+        </p:sp>
+        <p:sp>
+          <p:nvSpPr>
+            <p:cNvPr id="61" name="Rectangle 60">
+              <a:extLst>
+                <a:ext uri="{FF2B5EF4-FFF2-40B4-BE49-F238E27FC236}">
+                  <a16:creationId xmlns:a16="http://schemas.microsoft.com/office/drawing/2014/main" id="{A5B93571-2D42-4E2E-A3B7-A34E0154DF70}"/>
+                </a:ext>
+              </a:extLst>
+            </p:cNvPr>
+            <p:cNvSpPr/>
+            <p:nvPr/>
+          </p:nvSpPr>
+          <p:spPr>
+            <a:xfrm>
+              <a:off x="7657439" y="1816525"/>
+              <a:ext cx="1630171" cy="318924"/>
+            </a:xfrm>
+            <a:prstGeom prst="rect">
+              <a:avLst/>
+            </a:prstGeom>
+          </p:spPr>
+          <p:style>
+            <a:lnRef idx="2">
+              <a:schemeClr val="dk1"/>
+            </a:lnRef>
+            <a:fillRef idx="1">
+              <a:schemeClr val="lt1"/>
+            </a:fillRef>
+            <a:effectRef idx="0">
+              <a:schemeClr val="dk1"/>
+            </a:effectRef>
+            <a:fontRef idx="minor">
+              <a:schemeClr val="dk1"/>
+            </a:fontRef>
+          </p:style>
+          <p:txBody>
+            <a:bodyPr rtlCol="0" anchor="ctr"/>
+            <a:lstStyle/>
+            <a:p>
+              <a:pPr algn="ctr"/>
+              <a:r>
+                <a:rPr lang="en-US" sz="1000" dirty="0">
+                  <a:latin typeface="Inter 18pt" panose="02000503000000020004" pitchFamily="2" charset="0"/>
+                  <a:ea typeface="Inter 18pt" panose="02000503000000020004" pitchFamily="2" charset="0"/>
+                </a:rPr>
+                <a:t>Vacancies</a:t>
+              </a:r>
+            </a:p>
+            <a:p>
+              <a:pPr algn="ctr"/>
+              <a:r>
+                <a:rPr lang="en-US" sz="700" dirty="0">
+                  <a:latin typeface="Inter 18pt" panose="02000503000000020004" pitchFamily="2" charset="0"/>
+                  <a:ea typeface="Inter 18pt" panose="02000503000000020004" pitchFamily="2" charset="0"/>
+                </a:rPr>
+                <a:t>(GET /admin/report/{query}{msg}</a:t>
+              </a:r>
+              <a:r>
+                <a:rPr lang="en-US" sz="900" dirty="0">
+                  <a:latin typeface="Inter 18pt" panose="02000503000000020004" pitchFamily="2" charset="0"/>
+                  <a:ea typeface="Inter 18pt" panose="02000503000000020004" pitchFamily="2" charset="0"/>
+                </a:rPr>
+                <a:t>)</a:t>
+              </a:r>
+              <a:endParaRPr lang="en-US" sz="1000" dirty="0">
+                <a:latin typeface="Inter 18pt" panose="02000503000000020004" pitchFamily="2" charset="0"/>
+                <a:ea typeface="Inter 18pt" panose="02000503000000020004" pitchFamily="2" charset="0"/>
+              </a:endParaRPr>
+            </a:p>
+          </p:txBody>
+        </p:sp>
+      </p:grpSp>
       <p:cxnSp>
         <p:nvCxnSpPr>
-          <p:cNvPr id="23" name="Straight Arrow Connector 22">
-            <a:extLst>
-              <a:ext uri="{FF2B5EF4-FFF2-40B4-BE49-F238E27FC236}">
-                <a16:creationId xmlns:a16="http://schemas.microsoft.com/office/drawing/2014/main" id="{B42D3F4C-267F-4012-91C3-35526E670FD2}"/>
+          <p:cNvPr id="63" name="Connector: Elbow 62">
+            <a:extLst>
+              <a:ext uri="{FF2B5EF4-FFF2-40B4-BE49-F238E27FC236}">
+                <a16:creationId xmlns:a16="http://schemas.microsoft.com/office/drawing/2014/main" id="{5458EF7E-4337-4FD5-B4CF-AF525A7A8744}"/>
+              </a:ext>
+            </a:extLst>
+          </p:cNvPr>
+          <p:cNvCxnSpPr>
+            <a:stCxn id="19" idx="3"/>
+            <a:endCxn id="59" idx="1"/>
+          </p:cNvCxnSpPr>
+          <p:nvPr/>
+        </p:nvCxnSpPr>
+        <p:spPr>
+          <a:xfrm>
+            <a:off x="5924841" y="1276915"/>
+            <a:ext cx="1732600" cy="781044"/>
+          </a:xfrm>
+          <a:prstGeom prst="bentConnector3">
+            <a:avLst/>
+          </a:prstGeom>
+          <a:ln>
+            <a:tailEnd type="triangle"/>
+          </a:ln>
+        </p:spPr>
+        <p:style>
+          <a:lnRef idx="1">
+            <a:schemeClr val="dk1"/>
+          </a:lnRef>
+          <a:fillRef idx="0">
+            <a:schemeClr val="dk1"/>
+          </a:fillRef>
+          <a:effectRef idx="0">
+            <a:schemeClr val="dk1"/>
+          </a:effectRef>
+          <a:fontRef idx="minor">
+            <a:schemeClr val="tx1"/>
+          </a:fontRef>
+        </p:style>
+      </p:cxnSp>
+      <p:cxnSp>
+        <p:nvCxnSpPr>
+          <p:cNvPr id="65" name="Connector: Elbow 64">
+            <a:extLst>
+              <a:ext uri="{FF2B5EF4-FFF2-40B4-BE49-F238E27FC236}">
+                <a16:creationId xmlns:a16="http://schemas.microsoft.com/office/drawing/2014/main" id="{B649ECFE-9819-461A-95BD-3847DE31ECA7}"/>
+              </a:ext>
+            </a:extLst>
+          </p:cNvPr>
+          <p:cNvCxnSpPr>
+            <a:cxnSpLocks/>
+            <a:stCxn id="19" idx="3"/>
+            <a:endCxn id="60" idx="1"/>
+          </p:cNvCxnSpPr>
+          <p:nvPr/>
+        </p:nvCxnSpPr>
+        <p:spPr>
+          <a:xfrm>
+            <a:off x="5924841" y="1276915"/>
+            <a:ext cx="1732599" cy="1152808"/>
+          </a:xfrm>
+          <a:prstGeom prst="bentConnector3">
+            <a:avLst>
+              <a:gd name="adj1" fmla="val 50000"/>
+            </a:avLst>
+          </a:prstGeom>
+          <a:ln>
+            <a:tailEnd type="triangle"/>
+          </a:ln>
+        </p:spPr>
+        <p:style>
+          <a:lnRef idx="1">
+            <a:schemeClr val="dk1"/>
+          </a:lnRef>
+          <a:fillRef idx="0">
+            <a:schemeClr val="dk1"/>
+          </a:fillRef>
+          <a:effectRef idx="0">
+            <a:schemeClr val="dk1"/>
+          </a:effectRef>
+          <a:fontRef idx="minor">
+            <a:schemeClr val="tx1"/>
+          </a:fontRef>
+        </p:style>
+      </p:cxnSp>
+      <p:sp>
+        <p:nvSpPr>
+          <p:cNvPr id="86" name="Cylinder 85">
+            <a:extLst>
+              <a:ext uri="{FF2B5EF4-FFF2-40B4-BE49-F238E27FC236}">
+                <a16:creationId xmlns:a16="http://schemas.microsoft.com/office/drawing/2014/main" id="{02C244C3-C8A9-43C3-9F62-616669CFA14B}"/>
+              </a:ext>
+            </a:extLst>
+          </p:cNvPr>
+          <p:cNvSpPr/>
+          <p:nvPr/>
+        </p:nvSpPr>
+        <p:spPr>
+          <a:xfrm>
+            <a:off x="252316" y="2692278"/>
+            <a:ext cx="914400" cy="814362"/>
+          </a:xfrm>
+          <a:prstGeom prst="can">
+            <a:avLst/>
+          </a:prstGeom>
+        </p:spPr>
+        <p:style>
+          <a:lnRef idx="2">
+            <a:schemeClr val="dk1"/>
+          </a:lnRef>
+          <a:fillRef idx="1">
+            <a:schemeClr val="lt1"/>
+          </a:fillRef>
+          <a:effectRef idx="0">
+            <a:schemeClr val="dk1"/>
+          </a:effectRef>
+          <a:fontRef idx="minor">
+            <a:schemeClr val="dk1"/>
+          </a:fontRef>
+        </p:style>
+        <p:txBody>
+          <a:bodyPr rtlCol="0" anchor="ctr"/>
+          <a:lstStyle/>
+          <a:p>
+            <a:pPr algn="ctr"/>
+            <a:r>
+              <a:rPr lang="en-US" sz="1000" dirty="0">
+                <a:latin typeface="Inter 18pt" panose="02000503000000020004" pitchFamily="2" charset="0"/>
+                <a:ea typeface="Inter 18pt" panose="02000503000000020004" pitchFamily="2" charset="0"/>
+              </a:rPr>
+              <a:t>Users</a:t>
+            </a:r>
+          </a:p>
+        </p:txBody>
+      </p:sp>
+      <p:sp>
+        <p:nvSpPr>
+          <p:cNvPr id="105" name="Rectangle 104">
+            <a:extLst>
+              <a:ext uri="{FF2B5EF4-FFF2-40B4-BE49-F238E27FC236}">
+                <a16:creationId xmlns:a16="http://schemas.microsoft.com/office/drawing/2014/main" id="{CCB96192-EB7C-40D9-9667-0CAD83A84AD4}"/>
+              </a:ext>
+            </a:extLst>
+          </p:cNvPr>
+          <p:cNvSpPr/>
+          <p:nvPr/>
+        </p:nvSpPr>
+        <p:spPr>
+          <a:xfrm>
+            <a:off x="9992544" y="764566"/>
+            <a:ext cx="1714377" cy="318924"/>
+          </a:xfrm>
+          <a:prstGeom prst="rect">
+            <a:avLst/>
+          </a:prstGeom>
+        </p:spPr>
+        <p:style>
+          <a:lnRef idx="2">
+            <a:schemeClr val="dk1"/>
+          </a:lnRef>
+          <a:fillRef idx="1">
+            <a:schemeClr val="lt1"/>
+          </a:fillRef>
+          <a:effectRef idx="0">
+            <a:schemeClr val="dk1"/>
+          </a:effectRef>
+          <a:fontRef idx="minor">
+            <a:schemeClr val="dk1"/>
+          </a:fontRef>
+        </p:style>
+        <p:txBody>
+          <a:bodyPr rtlCol="0" anchor="ctr"/>
+          <a:lstStyle/>
+          <a:p>
+            <a:pPr algn="ctr"/>
+            <a:r>
+              <a:rPr lang="en-US" sz="1000" dirty="0">
+                <a:latin typeface="Inter 18pt" panose="02000503000000020004" pitchFamily="2" charset="0"/>
+                <a:ea typeface="Inter 18pt" panose="02000503000000020004" pitchFamily="2" charset="0"/>
+              </a:rPr>
+              <a:t>Update </a:t>
+            </a:r>
+          </a:p>
+          <a:p>
+            <a:pPr algn="ctr"/>
+            <a:r>
+              <a:rPr lang="en-US" sz="700" dirty="0">
+                <a:latin typeface="Inter 18pt" panose="02000503000000020004" pitchFamily="2" charset="0"/>
+                <a:ea typeface="Inter 18pt" panose="02000503000000020004" pitchFamily="2" charset="0"/>
+              </a:rPr>
+              <a:t>(POST /admin/check-in/{id}/refresh</a:t>
+            </a:r>
+            <a:endParaRPr lang="en-US" sz="1000" dirty="0">
+              <a:latin typeface="Inter 18pt" panose="02000503000000020004" pitchFamily="2" charset="0"/>
+              <a:ea typeface="Inter 18pt" panose="02000503000000020004" pitchFamily="2" charset="0"/>
+            </a:endParaRPr>
+          </a:p>
+        </p:txBody>
+      </p:sp>
+      <p:pic>
+        <p:nvPicPr>
+          <p:cNvPr id="108" name="Graphic 107" descr="Lock">
+            <a:extLst>
+              <a:ext uri="{FF2B5EF4-FFF2-40B4-BE49-F238E27FC236}">
+                <a16:creationId xmlns:a16="http://schemas.microsoft.com/office/drawing/2014/main" id="{21AE184C-35E1-4750-A828-249E3E949C96}"/>
+              </a:ext>
+            </a:extLst>
+          </p:cNvPr>
+          <p:cNvPicPr>
+            <a:picLocks noChangeAspect="1"/>
+          </p:cNvPicPr>
+          <p:nvPr/>
+        </p:nvPicPr>
+        <p:blipFill>
+          <a:blip r:embed="rId2">
+            <a:extLst>
+              <a:ext uri="{28A0092B-C50C-407E-A947-70E740481C1C}">
+                <a14:useLocalDpi xmlns:a14="http://schemas.microsoft.com/office/drawing/2010/main" val="0"/>
+              </a:ext>
+              <a:ext uri="{96DAC541-7B7A-43D3-8B79-37D633B846F1}">
+                <asvg:svgBlip xmlns:asvg="http://schemas.microsoft.com/office/drawing/2016/SVG/main" r:embed="rId3"/>
+              </a:ext>
+            </a:extLst>
+          </a:blip>
+          <a:stretch>
+            <a:fillRect/>
+          </a:stretch>
+        </p:blipFill>
+        <p:spPr>
+          <a:xfrm>
+            <a:off x="10483795" y="798752"/>
+            <a:ext cx="152400" cy="152400"/>
+          </a:xfrm>
+          <a:prstGeom prst="rect">
+            <a:avLst/>
+          </a:prstGeom>
+        </p:spPr>
+      </p:pic>
+      <p:grpSp>
+        <p:nvGrpSpPr>
+          <p:cNvPr id="115" name="Group 114">
+            <a:extLst>
+              <a:ext uri="{FF2B5EF4-FFF2-40B4-BE49-F238E27FC236}">
+                <a16:creationId xmlns:a16="http://schemas.microsoft.com/office/drawing/2014/main" id="{2C00FF75-46A2-449C-9AC9-49F270E479F7}"/>
+              </a:ext>
+            </a:extLst>
+          </p:cNvPr>
+          <p:cNvGrpSpPr/>
+          <p:nvPr/>
+        </p:nvGrpSpPr>
+        <p:grpSpPr>
+          <a:xfrm>
+            <a:off x="9992545" y="1167203"/>
+            <a:ext cx="1714376" cy="318924"/>
+            <a:chOff x="9319383" y="4532012"/>
+            <a:chExt cx="1714376" cy="318924"/>
+          </a:xfrm>
+        </p:grpSpPr>
+        <p:sp>
+          <p:nvSpPr>
+            <p:cNvPr id="106" name="Rectangle 105">
+              <a:extLst>
+                <a:ext uri="{FF2B5EF4-FFF2-40B4-BE49-F238E27FC236}">
+                  <a16:creationId xmlns:a16="http://schemas.microsoft.com/office/drawing/2014/main" id="{0A21E7F8-F52A-4C78-B079-8BE4AFE40705}"/>
+                </a:ext>
+              </a:extLst>
+            </p:cNvPr>
+            <p:cNvSpPr/>
+            <p:nvPr/>
+          </p:nvSpPr>
+          <p:spPr>
+            <a:xfrm>
+              <a:off x="9319383" y="4532012"/>
+              <a:ext cx="1714376" cy="318924"/>
+            </a:xfrm>
+            <a:prstGeom prst="rect">
+              <a:avLst/>
+            </a:prstGeom>
+          </p:spPr>
+          <p:style>
+            <a:lnRef idx="2">
+              <a:schemeClr val="dk1"/>
+            </a:lnRef>
+            <a:fillRef idx="1">
+              <a:schemeClr val="lt1"/>
+            </a:fillRef>
+            <a:effectRef idx="0">
+              <a:schemeClr val="dk1"/>
+            </a:effectRef>
+            <a:fontRef idx="minor">
+              <a:schemeClr val="dk1"/>
+            </a:fontRef>
+          </p:style>
+          <p:txBody>
+            <a:bodyPr rtlCol="0" anchor="ctr"/>
+            <a:lstStyle/>
+            <a:p>
+              <a:pPr algn="ctr"/>
+              <a:r>
+                <a:rPr lang="en-US" sz="1000" dirty="0">
+                  <a:latin typeface="Inter 18pt" panose="02000503000000020004" pitchFamily="2" charset="0"/>
+                  <a:ea typeface="Inter 18pt" panose="02000503000000020004" pitchFamily="2" charset="0"/>
+                </a:rPr>
+                <a:t>Delete </a:t>
+              </a:r>
+            </a:p>
+            <a:p>
+              <a:pPr algn="ctr"/>
+              <a:r>
+                <a:rPr lang="en-US" sz="700" dirty="0">
+                  <a:latin typeface="Inter 18pt" panose="02000503000000020004" pitchFamily="2" charset="0"/>
+                  <a:ea typeface="Inter 18pt" panose="02000503000000020004" pitchFamily="2" charset="0"/>
+                </a:rPr>
+                <a:t>(POST /admin/check-in/{id}/minus</a:t>
+              </a:r>
+              <a:r>
+                <a:rPr lang="en-US" sz="900" dirty="0">
+                  <a:latin typeface="Inter 18pt" panose="02000503000000020004" pitchFamily="2" charset="0"/>
+                  <a:ea typeface="Inter 18pt" panose="02000503000000020004" pitchFamily="2" charset="0"/>
+                </a:rPr>
+                <a:t>)</a:t>
+              </a:r>
+              <a:endParaRPr lang="en-US" sz="1000" dirty="0">
+                <a:latin typeface="Inter 18pt" panose="02000503000000020004" pitchFamily="2" charset="0"/>
+                <a:ea typeface="Inter 18pt" panose="02000503000000020004" pitchFamily="2" charset="0"/>
+              </a:endParaRPr>
+            </a:p>
+          </p:txBody>
+        </p:sp>
+        <p:pic>
+          <p:nvPicPr>
+            <p:cNvPr id="109" name="Graphic 108" descr="Lock">
+              <a:extLst>
+                <a:ext uri="{FF2B5EF4-FFF2-40B4-BE49-F238E27FC236}">
+                  <a16:creationId xmlns:a16="http://schemas.microsoft.com/office/drawing/2014/main" id="{15162385-F98D-4470-A21C-F5827F3AA10F}"/>
+                </a:ext>
+              </a:extLst>
+            </p:cNvPr>
+            <p:cNvPicPr>
+              <a:picLocks noChangeAspect="1"/>
+            </p:cNvPicPr>
+            <p:nvPr/>
+          </p:nvPicPr>
+          <p:blipFill>
+            <a:blip r:embed="rId4">
+              <a:extLst>
+                <a:ext uri="{28A0092B-C50C-407E-A947-70E740481C1C}">
+                  <a14:useLocalDpi xmlns:a14="http://schemas.microsoft.com/office/drawing/2010/main" val="0"/>
+                </a:ext>
+                <a:ext uri="{96DAC541-7B7A-43D3-8B79-37D633B846F1}">
+                  <asvg:svgBlip xmlns:asvg="http://schemas.microsoft.com/office/drawing/2016/SVG/main" r:embed="rId5"/>
+                </a:ext>
+              </a:extLst>
+            </a:blip>
+            <a:stretch>
+              <a:fillRect/>
+            </a:stretch>
+          </p:blipFill>
+          <p:spPr>
+            <a:xfrm>
+              <a:off x="9837421" y="4539074"/>
+              <a:ext cx="152400" cy="152400"/>
+            </a:xfrm>
+            <a:prstGeom prst="rect">
+              <a:avLst/>
+            </a:prstGeom>
+          </p:spPr>
+        </p:pic>
+        <p:pic>
+          <p:nvPicPr>
+            <p:cNvPr id="111" name="Graphic 110" descr="Key">
+              <a:extLst>
+                <a:ext uri="{FF2B5EF4-FFF2-40B4-BE49-F238E27FC236}">
+                  <a16:creationId xmlns:a16="http://schemas.microsoft.com/office/drawing/2014/main" id="{DC03482A-4BAA-49CF-8D10-C8ADF69A83A0}"/>
+                </a:ext>
+              </a:extLst>
+            </p:cNvPr>
+            <p:cNvPicPr>
+              <a:picLocks noChangeAspect="1"/>
+            </p:cNvPicPr>
+            <p:nvPr/>
+          </p:nvPicPr>
+          <p:blipFill>
+            <a:blip r:embed="rId6">
+              <a:extLst>
+                <a:ext uri="{28A0092B-C50C-407E-A947-70E740481C1C}">
+                  <a14:useLocalDpi xmlns:a14="http://schemas.microsoft.com/office/drawing/2010/main" val="0"/>
+                </a:ext>
+                <a:ext uri="{96DAC541-7B7A-43D3-8B79-37D633B846F1}">
+                  <asvg:svgBlip xmlns:asvg="http://schemas.microsoft.com/office/drawing/2016/SVG/main" r:embed="rId7"/>
+                </a:ext>
+              </a:extLst>
+            </a:blip>
+            <a:stretch>
+              <a:fillRect/>
+            </a:stretch>
+          </p:blipFill>
+          <p:spPr>
+            <a:xfrm>
+              <a:off x="9650731" y="4542884"/>
+              <a:ext cx="181516" cy="181516"/>
+            </a:xfrm>
+            <a:prstGeom prst="rect">
+              <a:avLst/>
+            </a:prstGeom>
+          </p:spPr>
+        </p:pic>
+      </p:grpSp>
+      <p:grpSp>
+        <p:nvGrpSpPr>
+          <p:cNvPr id="116" name="Group 115">
+            <a:extLst>
+              <a:ext uri="{FF2B5EF4-FFF2-40B4-BE49-F238E27FC236}">
+                <a16:creationId xmlns:a16="http://schemas.microsoft.com/office/drawing/2014/main" id="{5DE38839-26B5-4501-86F7-48A87346CBAF}"/>
+              </a:ext>
+            </a:extLst>
+          </p:cNvPr>
+          <p:cNvGrpSpPr/>
+          <p:nvPr/>
+        </p:nvGrpSpPr>
+        <p:grpSpPr>
+          <a:xfrm>
+            <a:off x="9992545" y="375946"/>
+            <a:ext cx="1714376" cy="318924"/>
+            <a:chOff x="9319383" y="3740755"/>
+            <a:chExt cx="1714376" cy="318924"/>
+          </a:xfrm>
+        </p:grpSpPr>
+        <p:sp>
+          <p:nvSpPr>
+            <p:cNvPr id="104" name="Rectangle 103">
+              <a:extLst>
+                <a:ext uri="{FF2B5EF4-FFF2-40B4-BE49-F238E27FC236}">
+                  <a16:creationId xmlns:a16="http://schemas.microsoft.com/office/drawing/2014/main" id="{8237E889-DCFF-4C2A-8E89-F7D7BAC9586B}"/>
+                </a:ext>
+              </a:extLst>
+            </p:cNvPr>
+            <p:cNvSpPr/>
+            <p:nvPr/>
+          </p:nvSpPr>
+          <p:spPr>
+            <a:xfrm>
+              <a:off x="9319383" y="3740755"/>
+              <a:ext cx="1714376" cy="318924"/>
+            </a:xfrm>
+            <a:prstGeom prst="rect">
+              <a:avLst/>
+            </a:prstGeom>
+          </p:spPr>
+          <p:style>
+            <a:lnRef idx="2">
+              <a:schemeClr val="dk1"/>
+            </a:lnRef>
+            <a:fillRef idx="1">
+              <a:schemeClr val="lt1"/>
+            </a:fillRef>
+            <a:effectRef idx="0">
+              <a:schemeClr val="dk1"/>
+            </a:effectRef>
+            <a:fontRef idx="minor">
+              <a:schemeClr val="dk1"/>
+            </a:fontRef>
+          </p:style>
+          <p:txBody>
+            <a:bodyPr rtlCol="0" anchor="ctr"/>
+            <a:lstStyle/>
+            <a:p>
+              <a:pPr algn="ctr"/>
+              <a:r>
+                <a:rPr lang="en-US" sz="1000" dirty="0">
+                  <a:latin typeface="Inter 18pt" panose="02000503000000020004" pitchFamily="2" charset="0"/>
+                  <a:ea typeface="Inter 18pt" panose="02000503000000020004" pitchFamily="2" charset="0"/>
+                </a:rPr>
+                <a:t>Create</a:t>
+              </a:r>
+            </a:p>
+            <a:p>
+              <a:pPr algn="ctr"/>
+              <a:r>
+                <a:rPr lang="en-US" sz="700" dirty="0">
+                  <a:latin typeface="Inter 18pt" panose="02000503000000020004" pitchFamily="2" charset="0"/>
+                  <a:ea typeface="Inter 18pt" panose="02000503000000020004" pitchFamily="2" charset="0"/>
+                </a:rPr>
+                <a:t>(POST /admin/check-in/plus</a:t>
+              </a:r>
+              <a:endParaRPr lang="en-US" sz="1000" dirty="0">
+                <a:latin typeface="Inter 18pt" panose="02000503000000020004" pitchFamily="2" charset="0"/>
+                <a:ea typeface="Inter 18pt" panose="02000503000000020004" pitchFamily="2" charset="0"/>
+              </a:endParaRPr>
+            </a:p>
+          </p:txBody>
+        </p:sp>
+        <p:pic>
+          <p:nvPicPr>
+            <p:cNvPr id="114" name="Graphic 113" descr="Key">
+              <a:extLst>
+                <a:ext uri="{FF2B5EF4-FFF2-40B4-BE49-F238E27FC236}">
+                  <a16:creationId xmlns:a16="http://schemas.microsoft.com/office/drawing/2014/main" id="{D55D9960-D172-4BE3-94D1-BBF3BCFF2D6D}"/>
+                </a:ext>
+              </a:extLst>
+            </p:cNvPr>
+            <p:cNvPicPr>
+              <a:picLocks noChangeAspect="1"/>
+            </p:cNvPicPr>
+            <p:nvPr/>
+          </p:nvPicPr>
+          <p:blipFill>
+            <a:blip r:embed="rId6">
+              <a:extLst>
+                <a:ext uri="{28A0092B-C50C-407E-A947-70E740481C1C}">
+                  <a14:useLocalDpi xmlns:a14="http://schemas.microsoft.com/office/drawing/2010/main" val="0"/>
+                </a:ext>
+                <a:ext uri="{96DAC541-7B7A-43D3-8B79-37D633B846F1}">
+                  <asvg:svgBlip xmlns:asvg="http://schemas.microsoft.com/office/drawing/2016/SVG/main" r:embed="rId7"/>
+                </a:ext>
+              </a:extLst>
+            </a:blip>
+            <a:stretch>
+              <a:fillRect/>
+            </a:stretch>
+          </p:blipFill>
+          <p:spPr>
+            <a:xfrm>
+              <a:off x="9785446" y="3753549"/>
+              <a:ext cx="181516" cy="181516"/>
+            </a:xfrm>
+            <a:prstGeom prst="rect">
+              <a:avLst/>
+            </a:prstGeom>
+          </p:spPr>
+        </p:pic>
+      </p:grpSp>
+      <p:sp>
+        <p:nvSpPr>
+          <p:cNvPr id="132" name="Diamond 131">
+            <a:extLst>
+              <a:ext uri="{FF2B5EF4-FFF2-40B4-BE49-F238E27FC236}">
+                <a16:creationId xmlns:a16="http://schemas.microsoft.com/office/drawing/2014/main" id="{E373C9BB-68A5-4523-9D8F-F37D34C24326}"/>
+              </a:ext>
+            </a:extLst>
+          </p:cNvPr>
+          <p:cNvSpPr/>
+          <p:nvPr/>
+        </p:nvSpPr>
+        <p:spPr>
+          <a:xfrm>
+            <a:off x="4683678" y="2754338"/>
+            <a:ext cx="914400" cy="914400"/>
+          </a:xfrm>
+          <a:prstGeom prst="diamond">
+            <a:avLst/>
+          </a:prstGeom>
+        </p:spPr>
+        <p:style>
+          <a:lnRef idx="2">
+            <a:schemeClr val="dk1"/>
+          </a:lnRef>
+          <a:fillRef idx="1">
+            <a:schemeClr val="lt1"/>
+          </a:fillRef>
+          <a:effectRef idx="0">
+            <a:schemeClr val="dk1"/>
+          </a:effectRef>
+          <a:fontRef idx="minor">
+            <a:schemeClr val="dk1"/>
+          </a:fontRef>
+        </p:style>
+        <p:txBody>
+          <a:bodyPr rtlCol="0" anchor="ctr"/>
+          <a:lstStyle/>
+          <a:p>
+            <a:pPr algn="ctr"/>
+            <a:endParaRPr lang="en-US" sz="1000" dirty="0">
+              <a:latin typeface="Inter 18pt" panose="02000503000000020004" pitchFamily="2" charset="0"/>
+              <a:ea typeface="Inter 18pt" panose="02000503000000020004" pitchFamily="2" charset="0"/>
+            </a:endParaRPr>
+          </a:p>
+        </p:txBody>
+      </p:sp>
+      <p:pic>
+        <p:nvPicPr>
+          <p:cNvPr id="134" name="Graphic 133" descr="Skull">
+            <a:extLst>
+              <a:ext uri="{FF2B5EF4-FFF2-40B4-BE49-F238E27FC236}">
+                <a16:creationId xmlns:a16="http://schemas.microsoft.com/office/drawing/2014/main" id="{0E4A109D-41EC-43BC-8012-5C9787371D0F}"/>
+              </a:ext>
+            </a:extLst>
+          </p:cNvPr>
+          <p:cNvPicPr>
+            <a:picLocks noChangeAspect="1"/>
+          </p:cNvPicPr>
+          <p:nvPr/>
+        </p:nvPicPr>
+        <p:blipFill>
+          <a:blip r:embed="rId8">
+            <a:extLst>
+              <a:ext uri="{28A0092B-C50C-407E-A947-70E740481C1C}">
+                <a14:useLocalDpi xmlns:a14="http://schemas.microsoft.com/office/drawing/2010/main" val="0"/>
+              </a:ext>
+              <a:ext uri="{96DAC541-7B7A-43D3-8B79-37D633B846F1}">
+                <asvg:svgBlip xmlns:asvg="http://schemas.microsoft.com/office/drawing/2016/SVG/main" r:embed="rId9"/>
+              </a:ext>
+            </a:extLst>
+          </a:blip>
+          <a:stretch>
+            <a:fillRect/>
+          </a:stretch>
+        </p:blipFill>
+        <p:spPr>
+          <a:xfrm>
+            <a:off x="4959641" y="3009119"/>
+            <a:ext cx="355600" cy="355600"/>
+          </a:xfrm>
+          <a:prstGeom prst="rect">
+            <a:avLst/>
+          </a:prstGeom>
+        </p:spPr>
+      </p:pic>
+      <p:cxnSp>
+        <p:nvCxnSpPr>
+          <p:cNvPr id="154" name="Straight Arrow Connector 153">
+            <a:extLst>
+              <a:ext uri="{FF2B5EF4-FFF2-40B4-BE49-F238E27FC236}">
+                <a16:creationId xmlns:a16="http://schemas.microsoft.com/office/drawing/2014/main" id="{DA462DD5-5D3C-4608-BE23-AD3EF2499166}"/>
               </a:ext>
             </a:extLst>
           </p:cNvPr>
@@ -4341,15 +8829,1583 @@
           <p:nvPr/>
         </p:nvCxnSpPr>
         <p:spPr>
-          <a:xfrm>
-            <a:off x="6782828" y="4481337"/>
-            <a:ext cx="791680" cy="0"/>
+          <a:xfrm flipV="1">
+            <a:off x="7150100" y="138816"/>
+            <a:ext cx="0" cy="262624"/>
           </a:xfrm>
           <a:prstGeom prst="straightConnector1">
             <a:avLst/>
           </a:prstGeom>
           <a:ln>
-            <a:headEnd type="triangle"/>
+            <a:tailEnd type="triangle"/>
+          </a:ln>
+        </p:spPr>
+        <p:style>
+          <a:lnRef idx="1">
+            <a:schemeClr val="dk1"/>
+          </a:lnRef>
+          <a:fillRef idx="0">
+            <a:schemeClr val="dk1"/>
+          </a:fillRef>
+          <a:effectRef idx="0">
+            <a:schemeClr val="dk1"/>
+          </a:effectRef>
+          <a:fontRef idx="minor">
+            <a:schemeClr val="tx1"/>
+          </a:fontRef>
+        </p:style>
+      </p:cxnSp>
+      <p:cxnSp>
+        <p:nvCxnSpPr>
+          <p:cNvPr id="156" name="Connector: Elbow 155">
+            <a:extLst>
+              <a:ext uri="{FF2B5EF4-FFF2-40B4-BE49-F238E27FC236}">
+                <a16:creationId xmlns:a16="http://schemas.microsoft.com/office/drawing/2014/main" id="{56BB50AF-2466-4E93-9298-35DECA62B3D2}"/>
+              </a:ext>
+            </a:extLst>
+          </p:cNvPr>
+          <p:cNvCxnSpPr>
+            <a:endCxn id="147" idx="0"/>
+          </p:cNvCxnSpPr>
+          <p:nvPr/>
+        </p:nvCxnSpPr>
+        <p:spPr>
+          <a:xfrm>
+            <a:off x="7150100" y="138816"/>
+            <a:ext cx="3694859" cy="186330"/>
+          </a:xfrm>
+          <a:prstGeom prst="bentConnector2">
+            <a:avLst/>
+          </a:prstGeom>
+          <a:ln>
+            <a:tailEnd type="triangle"/>
+          </a:ln>
+        </p:spPr>
+        <p:style>
+          <a:lnRef idx="1">
+            <a:schemeClr val="dk1"/>
+          </a:lnRef>
+          <a:fillRef idx="0">
+            <a:schemeClr val="dk1"/>
+          </a:fillRef>
+          <a:effectRef idx="0">
+            <a:schemeClr val="dk1"/>
+          </a:effectRef>
+          <a:fontRef idx="minor">
+            <a:schemeClr val="tx1"/>
+          </a:fontRef>
+        </p:style>
+      </p:cxnSp>
+      <p:cxnSp>
+        <p:nvCxnSpPr>
+          <p:cNvPr id="158" name="Connector: Elbow 157">
+            <a:extLst>
+              <a:ext uri="{FF2B5EF4-FFF2-40B4-BE49-F238E27FC236}">
+                <a16:creationId xmlns:a16="http://schemas.microsoft.com/office/drawing/2014/main" id="{E252A5CE-9416-400B-A4E9-400D439F0FE9}"/>
+              </a:ext>
+            </a:extLst>
+          </p:cNvPr>
+          <p:cNvCxnSpPr>
+            <a:cxnSpLocks/>
+            <a:stCxn id="106" idx="2"/>
+            <a:endCxn id="132" idx="3"/>
+          </p:cNvCxnSpPr>
+          <p:nvPr/>
+        </p:nvCxnSpPr>
+        <p:spPr>
+          <a:xfrm rot="5400000">
+            <a:off x="7361201" y="-276995"/>
+            <a:ext cx="1725411" cy="5251655"/>
+          </a:xfrm>
+          <a:prstGeom prst="bentConnector2">
+            <a:avLst/>
+          </a:prstGeom>
+          <a:ln>
+            <a:solidFill>
+              <a:srgbClr val="F61212"/>
+            </a:solidFill>
+            <a:prstDash val="lgDash"/>
+            <a:tailEnd type="triangle"/>
+          </a:ln>
+        </p:spPr>
+        <p:style>
+          <a:lnRef idx="1">
+            <a:schemeClr val="accent1"/>
+          </a:lnRef>
+          <a:fillRef idx="0">
+            <a:schemeClr val="accent1"/>
+          </a:fillRef>
+          <a:effectRef idx="0">
+            <a:schemeClr val="accent1"/>
+          </a:effectRef>
+          <a:fontRef idx="minor">
+            <a:schemeClr val="tx1"/>
+          </a:fontRef>
+        </p:style>
+      </p:cxnSp>
+      <p:sp>
+        <p:nvSpPr>
+          <p:cNvPr id="163" name="Rectangle 162">
+            <a:extLst>
+              <a:ext uri="{FF2B5EF4-FFF2-40B4-BE49-F238E27FC236}">
+                <a16:creationId xmlns:a16="http://schemas.microsoft.com/office/drawing/2014/main" id="{013B9618-B6C8-4171-A68E-7B3CF395416B}"/>
+              </a:ext>
+            </a:extLst>
+          </p:cNvPr>
+          <p:cNvSpPr/>
+          <p:nvPr/>
+        </p:nvSpPr>
+        <p:spPr>
+          <a:xfrm>
+            <a:off x="5718410" y="2886008"/>
+            <a:ext cx="1072730" cy="246221"/>
+          </a:xfrm>
+          <a:prstGeom prst="rect">
+            <a:avLst/>
+          </a:prstGeom>
+        </p:spPr>
+        <p:txBody>
+          <a:bodyPr wrap="none">
+            <a:spAutoFit/>
+          </a:bodyPr>
+          <a:lstStyle/>
+          <a:p>
+            <a:r>
+              <a:rPr lang="en-US" sz="1000" dirty="0">
+                <a:latin typeface="Inter 18pt" panose="02000503000000020004" pitchFamily="2" charset="0"/>
+                <a:ea typeface="Inter 18pt" panose="02000503000000020004" pitchFamily="2" charset="0"/>
+              </a:rPr>
+              <a:t>Request Filters</a:t>
+            </a:r>
+          </a:p>
+        </p:txBody>
+      </p:sp>
+      <p:sp>
+        <p:nvSpPr>
+          <p:cNvPr id="169" name="Cylinder 168">
+            <a:extLst>
+              <a:ext uri="{FF2B5EF4-FFF2-40B4-BE49-F238E27FC236}">
+                <a16:creationId xmlns:a16="http://schemas.microsoft.com/office/drawing/2014/main" id="{C1226365-FED1-45DA-A25B-1AF4B54CAE51}"/>
+              </a:ext>
+            </a:extLst>
+          </p:cNvPr>
+          <p:cNvSpPr/>
+          <p:nvPr/>
+        </p:nvSpPr>
+        <p:spPr>
+          <a:xfrm>
+            <a:off x="253999" y="3819560"/>
+            <a:ext cx="914400" cy="814362"/>
+          </a:xfrm>
+          <a:prstGeom prst="can">
+            <a:avLst/>
+          </a:prstGeom>
+        </p:spPr>
+        <p:style>
+          <a:lnRef idx="2">
+            <a:schemeClr val="dk1"/>
+          </a:lnRef>
+          <a:fillRef idx="1">
+            <a:schemeClr val="lt1"/>
+          </a:fillRef>
+          <a:effectRef idx="0">
+            <a:schemeClr val="dk1"/>
+          </a:effectRef>
+          <a:fontRef idx="minor">
+            <a:schemeClr val="dk1"/>
+          </a:fontRef>
+        </p:style>
+        <p:txBody>
+          <a:bodyPr rtlCol="0" anchor="ctr"/>
+          <a:lstStyle/>
+          <a:p>
+            <a:pPr algn="ctr"/>
+            <a:r>
+              <a:rPr lang="en-US" sz="1000" dirty="0">
+                <a:latin typeface="Inter 18pt" panose="02000503000000020004" pitchFamily="2" charset="0"/>
+                <a:ea typeface="Inter 18pt" panose="02000503000000020004" pitchFamily="2" charset="0"/>
+              </a:rPr>
+              <a:t>Checkout</a:t>
+            </a:r>
+          </a:p>
+        </p:txBody>
+      </p:sp>
+      <p:grpSp>
+        <p:nvGrpSpPr>
+          <p:cNvPr id="175" name="Group 174">
+            <a:extLst>
+              <a:ext uri="{FF2B5EF4-FFF2-40B4-BE49-F238E27FC236}">
+                <a16:creationId xmlns:a16="http://schemas.microsoft.com/office/drawing/2014/main" id="{05AAD2A1-BB69-479B-9ECE-F9EF8CB849D7}"/>
+              </a:ext>
+            </a:extLst>
+          </p:cNvPr>
+          <p:cNvGrpSpPr/>
+          <p:nvPr/>
+        </p:nvGrpSpPr>
+        <p:grpSpPr>
+          <a:xfrm>
+            <a:off x="8327867" y="3876859"/>
+            <a:ext cx="3445706" cy="1873084"/>
+            <a:chOff x="8568494" y="3876859"/>
+            <a:chExt cx="3445706" cy="1873084"/>
+          </a:xfrm>
+        </p:grpSpPr>
+        <p:sp>
+          <p:nvSpPr>
+            <p:cNvPr id="166" name="Rectangle 165">
+              <a:extLst>
+                <a:ext uri="{FF2B5EF4-FFF2-40B4-BE49-F238E27FC236}">
+                  <a16:creationId xmlns:a16="http://schemas.microsoft.com/office/drawing/2014/main" id="{63F669DB-9DCF-46DE-B817-5AD2437205DD}"/>
+                </a:ext>
+              </a:extLst>
+            </p:cNvPr>
+            <p:cNvSpPr/>
+            <p:nvPr/>
+          </p:nvSpPr>
+          <p:spPr>
+            <a:xfrm>
+              <a:off x="8568497" y="3876859"/>
+              <a:ext cx="3445703" cy="606242"/>
+            </a:xfrm>
+            <a:prstGeom prst="rect">
+              <a:avLst/>
+            </a:prstGeom>
+          </p:spPr>
+          <p:style>
+            <a:lnRef idx="2">
+              <a:schemeClr val="dk1"/>
+            </a:lnRef>
+            <a:fillRef idx="1">
+              <a:schemeClr val="lt1"/>
+            </a:fillRef>
+            <a:effectRef idx="0">
+              <a:schemeClr val="dk1"/>
+            </a:effectRef>
+            <a:fontRef idx="minor">
+              <a:schemeClr val="dk1"/>
+            </a:fontRef>
+          </p:style>
+          <p:txBody>
+            <a:bodyPr rtlCol="0" anchor="ctr"/>
+            <a:lstStyle/>
+            <a:p>
+              <a:pPr algn="ctr"/>
+              <a:r>
+                <a:rPr lang="en-US" sz="1000" dirty="0">
+                  <a:latin typeface="Inter 18pt" panose="02000503000000020004" pitchFamily="2" charset="0"/>
+                  <a:ea typeface="Inter 18pt" panose="02000503000000020004" pitchFamily="2" charset="0"/>
+                </a:rPr>
+                <a:t>Verify Guest (With phone) </a:t>
+              </a:r>
+            </a:p>
+            <a:p>
+              <a:pPr algn="ctr"/>
+              <a:r>
+                <a:rPr lang="en-US" sz="1000" dirty="0">
+                  <a:latin typeface="Inter 18pt" panose="02000503000000020004" pitchFamily="2" charset="0"/>
+                  <a:ea typeface="Inter 18pt" panose="02000503000000020004" pitchFamily="2" charset="0"/>
+                </a:rPr>
+                <a:t>Status != checked out</a:t>
+              </a:r>
+            </a:p>
+            <a:p>
+              <a:pPr algn="ctr"/>
+              <a:r>
+                <a:rPr lang="en-US" sz="1000" dirty="0">
+                  <a:latin typeface="Inter 18pt" panose="02000503000000020004" pitchFamily="2" charset="0"/>
+                  <a:ea typeface="Inter 18pt" panose="02000503000000020004" pitchFamily="2" charset="0"/>
+                </a:rPr>
+                <a:t>(GET /admin/hostel/checkout/{phone})</a:t>
+              </a:r>
+            </a:p>
+          </p:txBody>
+        </p:sp>
+        <p:sp>
+          <p:nvSpPr>
+            <p:cNvPr id="167" name="Rectangle 166">
+              <a:extLst>
+                <a:ext uri="{FF2B5EF4-FFF2-40B4-BE49-F238E27FC236}">
+                  <a16:creationId xmlns:a16="http://schemas.microsoft.com/office/drawing/2014/main" id="{33BFEF60-5FF7-460D-B648-9308A45D84B6}"/>
+                </a:ext>
+              </a:extLst>
+            </p:cNvPr>
+            <p:cNvSpPr/>
+            <p:nvPr/>
+          </p:nvSpPr>
+          <p:spPr>
+            <a:xfrm>
+              <a:off x="8568494" y="4563468"/>
+              <a:ext cx="3445703" cy="507083"/>
+            </a:xfrm>
+            <a:prstGeom prst="rect">
+              <a:avLst/>
+            </a:prstGeom>
+          </p:spPr>
+          <p:style>
+            <a:lnRef idx="2">
+              <a:schemeClr val="dk1"/>
+            </a:lnRef>
+            <a:fillRef idx="1">
+              <a:schemeClr val="lt1"/>
+            </a:fillRef>
+            <a:effectRef idx="0">
+              <a:schemeClr val="dk1"/>
+            </a:effectRef>
+            <a:fontRef idx="minor">
+              <a:schemeClr val="dk1"/>
+            </a:fontRef>
+          </p:style>
+          <p:txBody>
+            <a:bodyPr rtlCol="0" anchor="ctr"/>
+            <a:lstStyle/>
+            <a:p>
+              <a:pPr algn="ctr"/>
+              <a:r>
+                <a:rPr lang="en-US" sz="1000" dirty="0">
+                  <a:latin typeface="Inter 18pt" panose="02000503000000020004" pitchFamily="2" charset="0"/>
+                  <a:ea typeface="Inter 18pt" panose="02000503000000020004" pitchFamily="2" charset="0"/>
+                </a:rPr>
+                <a:t>Calculate Stayed, Discount, VAT &amp; Tax, Total Bill  </a:t>
+              </a:r>
+            </a:p>
+          </p:txBody>
+        </p:sp>
+        <p:sp>
+          <p:nvSpPr>
+            <p:cNvPr id="168" name="Rectangle 167">
+              <a:extLst>
+                <a:ext uri="{FF2B5EF4-FFF2-40B4-BE49-F238E27FC236}">
+                  <a16:creationId xmlns:a16="http://schemas.microsoft.com/office/drawing/2014/main" id="{5333A662-0E51-4864-966F-BF96B5613597}"/>
+                </a:ext>
+              </a:extLst>
+            </p:cNvPr>
+            <p:cNvSpPr/>
+            <p:nvPr/>
+          </p:nvSpPr>
+          <p:spPr>
+            <a:xfrm>
+              <a:off x="8568495" y="5150919"/>
+              <a:ext cx="3445703" cy="599024"/>
+            </a:xfrm>
+            <a:prstGeom prst="rect">
+              <a:avLst/>
+            </a:prstGeom>
+          </p:spPr>
+          <p:style>
+            <a:lnRef idx="2">
+              <a:schemeClr val="dk1"/>
+            </a:lnRef>
+            <a:fillRef idx="1">
+              <a:schemeClr val="lt1"/>
+            </a:fillRef>
+            <a:effectRef idx="0">
+              <a:schemeClr val="dk1"/>
+            </a:effectRef>
+            <a:fontRef idx="minor">
+              <a:schemeClr val="dk1"/>
+            </a:fontRef>
+          </p:style>
+          <p:txBody>
+            <a:bodyPr rtlCol="0" anchor="ctr"/>
+            <a:lstStyle/>
+            <a:p>
+              <a:pPr algn="ctr"/>
+              <a:r>
+                <a:rPr lang="en-US" sz="1000" dirty="0">
+                  <a:latin typeface="Inter 18pt" panose="02000503000000020004" pitchFamily="2" charset="0"/>
+                  <a:ea typeface="Inter 18pt" panose="02000503000000020004" pitchFamily="2" charset="0"/>
+                </a:rPr>
+                <a:t>Confirm</a:t>
+              </a:r>
+            </a:p>
+            <a:p>
+              <a:pPr algn="ctr"/>
+              <a:r>
+                <a:rPr lang="en-US" sz="1000" dirty="0">
+                  <a:latin typeface="Inter 18pt" panose="02000503000000020004" pitchFamily="2" charset="0"/>
+                  <a:ea typeface="Inter 18pt" panose="02000503000000020004" pitchFamily="2" charset="0"/>
+                </a:rPr>
+                <a:t>(POST /admin/hostel/checkout/{phone})</a:t>
+              </a:r>
+            </a:p>
+            <a:p>
+              <a:pPr algn="ctr"/>
+              <a:r>
+                <a:rPr lang="en-US" sz="1000" dirty="0">
+                  <a:latin typeface="Inter 18pt" panose="02000503000000020004" pitchFamily="2" charset="0"/>
+                  <a:ea typeface="Inter 18pt" panose="02000503000000020004" pitchFamily="2" charset="0"/>
+                </a:rPr>
+                <a:t> </a:t>
+              </a:r>
+            </a:p>
+          </p:txBody>
+        </p:sp>
+      </p:grpSp>
+      <p:cxnSp>
+        <p:nvCxnSpPr>
+          <p:cNvPr id="192" name="Connector: Elbow 191">
+            <a:extLst>
+              <a:ext uri="{FF2B5EF4-FFF2-40B4-BE49-F238E27FC236}">
+                <a16:creationId xmlns:a16="http://schemas.microsoft.com/office/drawing/2014/main" id="{9236E1FC-6E6A-46A6-9013-21918B74EEDA}"/>
+              </a:ext>
+            </a:extLst>
+          </p:cNvPr>
+          <p:cNvCxnSpPr>
+            <a:cxnSpLocks/>
+            <a:stCxn id="132" idx="0"/>
+          </p:cNvCxnSpPr>
+          <p:nvPr/>
+        </p:nvCxnSpPr>
+        <p:spPr>
+          <a:xfrm rot="16200000" flipH="1" flipV="1">
+            <a:off x="3070339" y="850714"/>
+            <a:ext cx="166915" cy="3974162"/>
+          </a:xfrm>
+          <a:prstGeom prst="bentConnector4">
+            <a:avLst>
+              <a:gd name="adj1" fmla="val -136956"/>
+              <a:gd name="adj2" fmla="val 55752"/>
+            </a:avLst>
+          </a:prstGeom>
+          <a:ln>
+            <a:prstDash val="lgDash"/>
+            <a:tailEnd type="triangle"/>
+          </a:ln>
+        </p:spPr>
+        <p:style>
+          <a:lnRef idx="1">
+            <a:schemeClr val="accent1"/>
+          </a:lnRef>
+          <a:fillRef idx="0">
+            <a:schemeClr val="accent1"/>
+          </a:fillRef>
+          <a:effectRef idx="0">
+            <a:schemeClr val="accent1"/>
+          </a:effectRef>
+          <a:fontRef idx="minor">
+            <a:schemeClr val="tx1"/>
+          </a:fontRef>
+        </p:style>
+      </p:cxnSp>
+      <p:sp>
+        <p:nvSpPr>
+          <p:cNvPr id="196" name="Rectangle 195">
+            <a:extLst>
+              <a:ext uri="{FF2B5EF4-FFF2-40B4-BE49-F238E27FC236}">
+                <a16:creationId xmlns:a16="http://schemas.microsoft.com/office/drawing/2014/main" id="{80C9E733-A271-41CD-8066-C0C1707A4BB5}"/>
+              </a:ext>
+            </a:extLst>
+          </p:cNvPr>
+          <p:cNvSpPr/>
+          <p:nvPr/>
+        </p:nvSpPr>
+        <p:spPr>
+          <a:xfrm>
+            <a:off x="2833466" y="3935005"/>
+            <a:ext cx="2410647" cy="985159"/>
+          </a:xfrm>
+          <a:prstGeom prst="rect">
+            <a:avLst/>
+          </a:prstGeom>
+        </p:spPr>
+        <p:style>
+          <a:lnRef idx="2">
+            <a:schemeClr val="dk1"/>
+          </a:lnRef>
+          <a:fillRef idx="1">
+            <a:schemeClr val="lt1"/>
+          </a:fillRef>
+          <a:effectRef idx="0">
+            <a:schemeClr val="dk1"/>
+          </a:effectRef>
+          <a:fontRef idx="minor">
+            <a:schemeClr val="dk1"/>
+          </a:fontRef>
+        </p:style>
+        <p:txBody>
+          <a:bodyPr rtlCol="0" anchor="t"/>
+          <a:lstStyle/>
+          <a:p>
+            <a:pPr algn="ctr"/>
+            <a:r>
+              <a:rPr lang="en-US" sz="1000" b="1" dirty="0">
+                <a:latin typeface="Inter 18pt" panose="02000503000000020004" pitchFamily="2" charset="0"/>
+                <a:ea typeface="Inter 18pt" panose="02000503000000020004" pitchFamily="2" charset="0"/>
+              </a:rPr>
+              <a:t>Transection</a:t>
+            </a:r>
+          </a:p>
+          <a:p>
+            <a:r>
+              <a:rPr lang="en-US" sz="1000" dirty="0">
+                <a:latin typeface="Inter 18pt" panose="02000503000000020004" pitchFamily="2" charset="0"/>
+                <a:ea typeface="Inter 18pt" panose="02000503000000020004" pitchFamily="2" charset="0"/>
+              </a:rPr>
+              <a:t>Create Checkout(DBT: checkout)</a:t>
+            </a:r>
+          </a:p>
+          <a:p>
+            <a:r>
+              <a:rPr lang="en-US" sz="1000" dirty="0">
+                <a:latin typeface="Inter 18pt" panose="02000503000000020004" pitchFamily="2" charset="0"/>
+                <a:ea typeface="Inter 18pt" panose="02000503000000020004" pitchFamily="2" charset="0"/>
+              </a:rPr>
+              <a:t>Update Users status (DBT: checkout)</a:t>
+            </a:r>
+          </a:p>
+          <a:p>
+            <a:r>
+              <a:rPr lang="en-US" sz="1000" dirty="0">
+                <a:latin typeface="Inter 18pt" panose="02000503000000020004" pitchFamily="2" charset="0"/>
+                <a:ea typeface="Inter 18pt" panose="02000503000000020004" pitchFamily="2" charset="0"/>
+              </a:rPr>
+              <a:t>Store Feedback(DBT: feedback)</a:t>
+            </a:r>
+          </a:p>
+          <a:p>
+            <a:r>
+              <a:rPr lang="en-US" sz="1000" dirty="0">
+                <a:latin typeface="Inter 18pt" panose="02000503000000020004" pitchFamily="2" charset="0"/>
+                <a:ea typeface="Inter 18pt" panose="02000503000000020004" pitchFamily="2" charset="0"/>
+              </a:rPr>
+              <a:t>Update </a:t>
+            </a:r>
+            <a:r>
+              <a:rPr lang="en-US" sz="1000" dirty="0" err="1">
+                <a:latin typeface="Inter 18pt" panose="02000503000000020004" pitchFamily="2" charset="0"/>
+                <a:ea typeface="Inter 18pt" panose="02000503000000020004" pitchFamily="2" charset="0"/>
+              </a:rPr>
+              <a:t>Sms</a:t>
+            </a:r>
+            <a:r>
+              <a:rPr lang="en-US" sz="1000" dirty="0">
+                <a:latin typeface="Inter 18pt" panose="02000503000000020004" pitchFamily="2" charset="0"/>
+                <a:ea typeface="Inter 18pt" panose="02000503000000020004" pitchFamily="2" charset="0"/>
+              </a:rPr>
+              <a:t> Status (DBT: feedback)</a:t>
+            </a:r>
+          </a:p>
+          <a:p>
+            <a:pPr algn="ctr"/>
+            <a:r>
+              <a:rPr lang="en-US" sz="1000" b="1" dirty="0">
+                <a:solidFill>
+                  <a:srgbClr val="C00000"/>
+                </a:solidFill>
+                <a:latin typeface="Inter 18pt" panose="02000503000000020004" pitchFamily="2" charset="0"/>
+                <a:ea typeface="Inter 18pt" panose="02000503000000020004" pitchFamily="2" charset="0"/>
+              </a:rPr>
+              <a:t>Roll back if fail</a:t>
+            </a:r>
+          </a:p>
+        </p:txBody>
+      </p:sp>
+      <p:cxnSp>
+        <p:nvCxnSpPr>
+          <p:cNvPr id="206" name="Connector: Elbow 205">
+            <a:extLst>
+              <a:ext uri="{FF2B5EF4-FFF2-40B4-BE49-F238E27FC236}">
+                <a16:creationId xmlns:a16="http://schemas.microsoft.com/office/drawing/2014/main" id="{BF22DAD2-9CEE-4A7D-8D64-D24D4729B20C}"/>
+              </a:ext>
+            </a:extLst>
+          </p:cNvPr>
+          <p:cNvCxnSpPr>
+            <a:cxnSpLocks/>
+            <a:stCxn id="196" idx="1"/>
+            <a:endCxn id="169" idx="3"/>
+          </p:cNvCxnSpPr>
+          <p:nvPr/>
+        </p:nvCxnSpPr>
+        <p:spPr>
+          <a:xfrm rot="10800000" flipV="1">
+            <a:off x="711200" y="4427584"/>
+            <a:ext cx="2122267" cy="206337"/>
+          </a:xfrm>
+          <a:prstGeom prst="bentConnector4">
+            <a:avLst>
+              <a:gd name="adj1" fmla="val 39228"/>
+              <a:gd name="adj2" fmla="val 349515"/>
+            </a:avLst>
+          </a:prstGeom>
+          <a:ln>
+            <a:prstDash val="dash"/>
+            <a:tailEnd type="triangle"/>
+          </a:ln>
+        </p:spPr>
+        <p:style>
+          <a:lnRef idx="1">
+            <a:schemeClr val="accent1"/>
+          </a:lnRef>
+          <a:fillRef idx="0">
+            <a:schemeClr val="accent1"/>
+          </a:fillRef>
+          <a:effectRef idx="0">
+            <a:schemeClr val="accent1"/>
+          </a:effectRef>
+          <a:fontRef idx="minor">
+            <a:schemeClr val="tx1"/>
+          </a:fontRef>
+        </p:style>
+      </p:cxnSp>
+      <p:cxnSp>
+        <p:nvCxnSpPr>
+          <p:cNvPr id="211" name="Connector: Elbow 210">
+            <a:extLst>
+              <a:ext uri="{FF2B5EF4-FFF2-40B4-BE49-F238E27FC236}">
+                <a16:creationId xmlns:a16="http://schemas.microsoft.com/office/drawing/2014/main" id="{2257CE29-C29B-418D-B4C0-81F9D69A5FDF}"/>
+              </a:ext>
+            </a:extLst>
+          </p:cNvPr>
+          <p:cNvCxnSpPr>
+            <a:cxnSpLocks/>
+            <a:stCxn id="132" idx="1"/>
+            <a:endCxn id="196" idx="3"/>
+          </p:cNvCxnSpPr>
+          <p:nvPr/>
+        </p:nvCxnSpPr>
+        <p:spPr>
+          <a:xfrm rot="10800000" flipH="1" flipV="1">
+            <a:off x="4683677" y="3211537"/>
+            <a:ext cx="560435" cy="1216047"/>
+          </a:xfrm>
+          <a:prstGeom prst="bentConnector5">
+            <a:avLst>
+              <a:gd name="adj1" fmla="val -40790"/>
+              <a:gd name="adj2" fmla="val 44368"/>
+              <a:gd name="adj3" fmla="val 140790"/>
+            </a:avLst>
+          </a:prstGeom>
+          <a:ln>
+            <a:solidFill>
+              <a:srgbClr val="F61212"/>
+            </a:solidFill>
+            <a:tailEnd type="triangle"/>
+          </a:ln>
+        </p:spPr>
+        <p:style>
+          <a:lnRef idx="1">
+            <a:schemeClr val="accent1"/>
+          </a:lnRef>
+          <a:fillRef idx="0">
+            <a:schemeClr val="accent1"/>
+          </a:fillRef>
+          <a:effectRef idx="0">
+            <a:schemeClr val="accent1"/>
+          </a:effectRef>
+          <a:fontRef idx="minor">
+            <a:schemeClr val="tx1"/>
+          </a:fontRef>
+        </p:style>
+      </p:cxnSp>
+      <p:sp>
+        <p:nvSpPr>
+          <p:cNvPr id="213" name="Rectangle 212">
+            <a:extLst>
+              <a:ext uri="{FF2B5EF4-FFF2-40B4-BE49-F238E27FC236}">
+                <a16:creationId xmlns:a16="http://schemas.microsoft.com/office/drawing/2014/main" id="{04DA05B2-2E82-4FF6-883C-A5092D783884}"/>
+              </a:ext>
+            </a:extLst>
+          </p:cNvPr>
+          <p:cNvSpPr/>
+          <p:nvPr/>
+        </p:nvSpPr>
+        <p:spPr>
+          <a:xfrm>
+            <a:off x="3074393" y="3101474"/>
+            <a:ext cx="1225257" cy="526490"/>
+          </a:xfrm>
+          <a:prstGeom prst="rect">
+            <a:avLst/>
+          </a:prstGeom>
+        </p:spPr>
+        <p:style>
+          <a:lnRef idx="2">
+            <a:schemeClr val="dk1"/>
+          </a:lnRef>
+          <a:fillRef idx="1">
+            <a:schemeClr val="lt1"/>
+          </a:fillRef>
+          <a:effectRef idx="0">
+            <a:schemeClr val="dk1"/>
+          </a:effectRef>
+          <a:fontRef idx="minor">
+            <a:schemeClr val="dk1"/>
+          </a:fontRef>
+        </p:style>
+        <p:txBody>
+          <a:bodyPr rtlCol="0" anchor="ctr"/>
+          <a:lstStyle/>
+          <a:p>
+            <a:pPr algn="ctr"/>
+            <a:r>
+              <a:rPr lang="en-US" sz="1000" b="1" dirty="0">
+                <a:latin typeface="Inter 18pt" panose="02000503000000020004" pitchFamily="2" charset="0"/>
+                <a:ea typeface="Inter 18pt" panose="02000503000000020004" pitchFamily="2" charset="0"/>
+              </a:rPr>
+              <a:t>Update Status: </a:t>
+            </a:r>
+          </a:p>
+          <a:p>
+            <a:pPr algn="ctr"/>
+            <a:r>
+              <a:rPr lang="en-US" sz="1000" dirty="0">
+                <a:latin typeface="Inter 18pt" panose="02000503000000020004" pitchFamily="2" charset="0"/>
+                <a:ea typeface="Inter 18pt" panose="02000503000000020004" pitchFamily="2" charset="0"/>
+              </a:rPr>
+              <a:t>Checked out</a:t>
+            </a:r>
+          </a:p>
+        </p:txBody>
+      </p:sp>
+      <p:cxnSp>
+        <p:nvCxnSpPr>
+          <p:cNvPr id="225" name="Connector: Elbow 224">
+            <a:extLst>
+              <a:ext uri="{FF2B5EF4-FFF2-40B4-BE49-F238E27FC236}">
+                <a16:creationId xmlns:a16="http://schemas.microsoft.com/office/drawing/2014/main" id="{FFF3204A-1EFF-4279-8D80-BFD1B566B177}"/>
+              </a:ext>
+            </a:extLst>
+          </p:cNvPr>
+          <p:cNvCxnSpPr>
+            <a:stCxn id="35" idx="3"/>
+          </p:cNvCxnSpPr>
+          <p:nvPr/>
+        </p:nvCxnSpPr>
+        <p:spPr>
+          <a:xfrm>
+            <a:off x="9319383" y="571006"/>
+            <a:ext cx="408817" cy="3203736"/>
+          </a:xfrm>
+          <a:prstGeom prst="bentConnector2">
+            <a:avLst/>
+          </a:prstGeom>
+          <a:ln>
+            <a:tailEnd type="triangle"/>
+          </a:ln>
+        </p:spPr>
+        <p:style>
+          <a:lnRef idx="1">
+            <a:schemeClr val="accent1"/>
+          </a:lnRef>
+          <a:fillRef idx="0">
+            <a:schemeClr val="accent1"/>
+          </a:fillRef>
+          <a:effectRef idx="0">
+            <a:schemeClr val="accent1"/>
+          </a:effectRef>
+          <a:fontRef idx="minor">
+            <a:schemeClr val="tx1"/>
+          </a:fontRef>
+        </p:style>
+      </p:cxnSp>
+      <p:cxnSp>
+        <p:nvCxnSpPr>
+          <p:cNvPr id="233" name="Straight Arrow Connector 232">
+            <a:extLst>
+              <a:ext uri="{FF2B5EF4-FFF2-40B4-BE49-F238E27FC236}">
+                <a16:creationId xmlns:a16="http://schemas.microsoft.com/office/drawing/2014/main" id="{C1085ACE-D6CD-4094-88EB-42D88A98ACF8}"/>
+              </a:ext>
+            </a:extLst>
+          </p:cNvPr>
+          <p:cNvCxnSpPr>
+            <a:cxnSpLocks/>
+          </p:cNvCxnSpPr>
+          <p:nvPr/>
+        </p:nvCxnSpPr>
+        <p:spPr>
+          <a:xfrm flipV="1">
+            <a:off x="3687021" y="3641157"/>
+            <a:ext cx="0" cy="267170"/>
+          </a:xfrm>
+          <a:prstGeom prst="straightConnector1">
+            <a:avLst/>
+          </a:prstGeom>
+          <a:ln>
+            <a:prstDash val="dash"/>
+            <a:tailEnd type="triangle"/>
+          </a:ln>
+        </p:spPr>
+        <p:style>
+          <a:lnRef idx="1">
+            <a:schemeClr val="accent1"/>
+          </a:lnRef>
+          <a:fillRef idx="0">
+            <a:schemeClr val="accent1"/>
+          </a:fillRef>
+          <a:effectRef idx="0">
+            <a:schemeClr val="accent1"/>
+          </a:effectRef>
+          <a:fontRef idx="minor">
+            <a:schemeClr val="tx1"/>
+          </a:fontRef>
+        </p:style>
+      </p:cxnSp>
+      <p:cxnSp>
+        <p:nvCxnSpPr>
+          <p:cNvPr id="236" name="Connector: Elbow 235">
+            <a:extLst>
+              <a:ext uri="{FF2B5EF4-FFF2-40B4-BE49-F238E27FC236}">
+                <a16:creationId xmlns:a16="http://schemas.microsoft.com/office/drawing/2014/main" id="{DA117931-EBE0-47C5-A6B0-C5D18BBFA1DC}"/>
+              </a:ext>
+            </a:extLst>
+          </p:cNvPr>
+          <p:cNvCxnSpPr>
+            <a:stCxn id="213" idx="1"/>
+            <a:endCxn id="86" idx="4"/>
+          </p:cNvCxnSpPr>
+          <p:nvPr/>
+        </p:nvCxnSpPr>
+        <p:spPr>
+          <a:xfrm rot="10800000">
+            <a:off x="1166717" y="3099459"/>
+            <a:ext cx="1907677" cy="265260"/>
+          </a:xfrm>
+          <a:prstGeom prst="bentConnector3">
+            <a:avLst/>
+          </a:prstGeom>
+          <a:ln>
+            <a:prstDash val="lgDash"/>
+            <a:tailEnd type="triangle"/>
+          </a:ln>
+        </p:spPr>
+        <p:style>
+          <a:lnRef idx="1">
+            <a:schemeClr val="accent2"/>
+          </a:lnRef>
+          <a:fillRef idx="0">
+            <a:schemeClr val="accent2"/>
+          </a:fillRef>
+          <a:effectRef idx="0">
+            <a:schemeClr val="accent2"/>
+          </a:effectRef>
+          <a:fontRef idx="minor">
+            <a:schemeClr val="tx1"/>
+          </a:fontRef>
+        </p:style>
+      </p:cxnSp>
+      <p:cxnSp>
+        <p:nvCxnSpPr>
+          <p:cNvPr id="238" name="Connector: Elbow 237">
+            <a:extLst>
+              <a:ext uri="{FF2B5EF4-FFF2-40B4-BE49-F238E27FC236}">
+                <a16:creationId xmlns:a16="http://schemas.microsoft.com/office/drawing/2014/main" id="{10D57548-5337-4324-9A0B-1A7F01AB9B66}"/>
+              </a:ext>
+            </a:extLst>
+          </p:cNvPr>
+          <p:cNvCxnSpPr>
+            <a:cxnSpLocks/>
+          </p:cNvCxnSpPr>
+          <p:nvPr/>
+        </p:nvCxnSpPr>
+        <p:spPr>
+          <a:xfrm>
+            <a:off x="2614031" y="3848959"/>
+            <a:ext cx="5721148" cy="393486"/>
+          </a:xfrm>
+          <a:prstGeom prst="bentConnector3">
+            <a:avLst>
+              <a:gd name="adj1" fmla="val 52442"/>
+            </a:avLst>
+          </a:prstGeom>
+          <a:ln>
+            <a:tailEnd type="triangle"/>
+          </a:ln>
+        </p:spPr>
+        <p:style>
+          <a:lnRef idx="1">
+            <a:schemeClr val="accent1"/>
+          </a:lnRef>
+          <a:fillRef idx="0">
+            <a:schemeClr val="accent1"/>
+          </a:fillRef>
+          <a:effectRef idx="0">
+            <a:schemeClr val="accent1"/>
+          </a:effectRef>
+          <a:fontRef idx="minor">
+            <a:schemeClr val="tx1"/>
+          </a:fontRef>
+        </p:style>
+      </p:cxnSp>
+      <p:cxnSp>
+        <p:nvCxnSpPr>
+          <p:cNvPr id="246" name="Connector: Elbow 245">
+            <a:extLst>
+              <a:ext uri="{FF2B5EF4-FFF2-40B4-BE49-F238E27FC236}">
+                <a16:creationId xmlns:a16="http://schemas.microsoft.com/office/drawing/2014/main" id="{8E7FAA1E-60A5-47BB-AC3A-ED38A1E7F148}"/>
+              </a:ext>
+            </a:extLst>
+          </p:cNvPr>
+          <p:cNvCxnSpPr>
+            <a:cxnSpLocks/>
+          </p:cNvCxnSpPr>
+          <p:nvPr/>
+        </p:nvCxnSpPr>
+        <p:spPr>
+          <a:xfrm rot="10800000">
+            <a:off x="1148486" y="3293190"/>
+            <a:ext cx="1465547" cy="555771"/>
+          </a:xfrm>
+          <a:prstGeom prst="bentConnector3">
+            <a:avLst/>
+          </a:prstGeom>
+          <a:ln>
+            <a:tailEnd type="triangle"/>
+          </a:ln>
+        </p:spPr>
+        <p:style>
+          <a:lnRef idx="1">
+            <a:schemeClr val="accent1"/>
+          </a:lnRef>
+          <a:fillRef idx="0">
+            <a:schemeClr val="accent1"/>
+          </a:fillRef>
+          <a:effectRef idx="0">
+            <a:schemeClr val="accent1"/>
+          </a:effectRef>
+          <a:fontRef idx="minor">
+            <a:schemeClr val="tx1"/>
+          </a:fontRef>
+        </p:style>
+      </p:cxnSp>
+      <p:sp>
+        <p:nvSpPr>
+          <p:cNvPr id="247" name="TextBox 246">
+            <a:extLst>
+              <a:ext uri="{FF2B5EF4-FFF2-40B4-BE49-F238E27FC236}">
+                <a16:creationId xmlns:a16="http://schemas.microsoft.com/office/drawing/2014/main" id="{056FEB1F-4A81-469C-AE2F-B82BE41BABC6}"/>
+              </a:ext>
+            </a:extLst>
+          </p:cNvPr>
+          <p:cNvSpPr txBox="1"/>
+          <p:nvPr/>
+        </p:nvSpPr>
+        <p:spPr>
+          <a:xfrm>
+            <a:off x="2581901" y="514100"/>
+            <a:ext cx="564578" cy="246221"/>
+          </a:xfrm>
+          <a:prstGeom prst="rect">
+            <a:avLst/>
+          </a:prstGeom>
+          <a:noFill/>
+        </p:spPr>
+        <p:txBody>
+          <a:bodyPr wrap="none" rtlCol="0">
+            <a:spAutoFit/>
+          </a:bodyPr>
+          <a:lstStyle/>
+          <a:p>
+            <a:r>
+              <a:rPr lang="en-US" sz="1000" dirty="0">
+                <a:latin typeface="Inter 18pt" panose="02000503000000020004" pitchFamily="2" charset="0"/>
+                <a:ea typeface="Inter 18pt" panose="02000503000000020004" pitchFamily="2" charset="0"/>
+              </a:rPr>
+              <a:t>Admin</a:t>
+            </a:r>
+          </a:p>
+        </p:txBody>
+      </p:sp>
+      <p:pic>
+        <p:nvPicPr>
+          <p:cNvPr id="259" name="Graphic 258" descr="Devil face with no fill">
+            <a:extLst>
+              <a:ext uri="{FF2B5EF4-FFF2-40B4-BE49-F238E27FC236}">
+                <a16:creationId xmlns:a16="http://schemas.microsoft.com/office/drawing/2014/main" id="{6D28F8E5-6C7F-4BC8-8150-19E486EAAB59}"/>
+              </a:ext>
+            </a:extLst>
+          </p:cNvPr>
+          <p:cNvPicPr>
+            <a:picLocks noChangeAspect="1"/>
+          </p:cNvPicPr>
+          <p:nvPr/>
+        </p:nvPicPr>
+        <p:blipFill>
+          <a:blip r:embed="rId10">
+            <a:extLst>
+              <a:ext uri="{28A0092B-C50C-407E-A947-70E740481C1C}">
+                <a14:useLocalDpi xmlns:a14="http://schemas.microsoft.com/office/drawing/2010/main" val="0"/>
+              </a:ext>
+              <a:ext uri="{96DAC541-7B7A-43D3-8B79-37D633B846F1}">
+                <asvg:svgBlip xmlns:asvg="http://schemas.microsoft.com/office/drawing/2016/SVG/main" r:embed="rId11"/>
+              </a:ext>
+            </a:extLst>
+          </a:blip>
+          <a:stretch>
+            <a:fillRect/>
+          </a:stretch>
+        </p:blipFill>
+        <p:spPr>
+          <a:xfrm>
+            <a:off x="8536673" y="5318962"/>
+            <a:ext cx="288121" cy="288121"/>
+          </a:xfrm>
+          <a:prstGeom prst="rect">
+            <a:avLst/>
+          </a:prstGeom>
+        </p:spPr>
+      </p:pic>
+      <p:pic>
+        <p:nvPicPr>
+          <p:cNvPr id="260" name="Graphic 259" descr="Devil face with no fill">
+            <a:extLst>
+              <a:ext uri="{FF2B5EF4-FFF2-40B4-BE49-F238E27FC236}">
+                <a16:creationId xmlns:a16="http://schemas.microsoft.com/office/drawing/2014/main" id="{F2455ACB-1DC0-4F6C-965A-AE43DFD2EEE1}"/>
+              </a:ext>
+            </a:extLst>
+          </p:cNvPr>
+          <p:cNvPicPr>
+            <a:picLocks noChangeAspect="1"/>
+          </p:cNvPicPr>
+          <p:nvPr/>
+        </p:nvPicPr>
+        <p:blipFill>
+          <a:blip r:embed="rId10">
+            <a:extLst>
+              <a:ext uri="{28A0092B-C50C-407E-A947-70E740481C1C}">
+                <a14:useLocalDpi xmlns:a14="http://schemas.microsoft.com/office/drawing/2010/main" val="0"/>
+              </a:ext>
+              <a:ext uri="{96DAC541-7B7A-43D3-8B79-37D633B846F1}">
+                <asvg:svgBlip xmlns:asvg="http://schemas.microsoft.com/office/drawing/2016/SVG/main" r:embed="rId11"/>
+              </a:ext>
+            </a:extLst>
+          </a:blip>
+          <a:stretch>
+            <a:fillRect/>
+          </a:stretch>
+        </p:blipFill>
+        <p:spPr>
+          <a:xfrm>
+            <a:off x="11804956" y="374749"/>
+            <a:ext cx="288121" cy="288121"/>
+          </a:xfrm>
+          <a:prstGeom prst="rect">
+            <a:avLst/>
+          </a:prstGeom>
+        </p:spPr>
+      </p:pic>
+      <p:pic>
+        <p:nvPicPr>
+          <p:cNvPr id="261" name="Graphic 260" descr="Devil face with no fill">
+            <a:extLst>
+              <a:ext uri="{FF2B5EF4-FFF2-40B4-BE49-F238E27FC236}">
+                <a16:creationId xmlns:a16="http://schemas.microsoft.com/office/drawing/2014/main" id="{7E3DB4CA-91E2-4A85-96A1-B90E7D330C2B}"/>
+              </a:ext>
+            </a:extLst>
+          </p:cNvPr>
+          <p:cNvPicPr>
+            <a:picLocks noChangeAspect="1"/>
+          </p:cNvPicPr>
+          <p:nvPr/>
+        </p:nvPicPr>
+        <p:blipFill>
+          <a:blip r:embed="rId10">
+            <a:extLst>
+              <a:ext uri="{28A0092B-C50C-407E-A947-70E740481C1C}">
+                <a14:useLocalDpi xmlns:a14="http://schemas.microsoft.com/office/drawing/2010/main" val="0"/>
+              </a:ext>
+              <a:ext uri="{96DAC541-7B7A-43D3-8B79-37D633B846F1}">
+                <asvg:svgBlip xmlns:asvg="http://schemas.microsoft.com/office/drawing/2016/SVG/main" r:embed="rId11"/>
+              </a:ext>
+            </a:extLst>
+          </a:blip>
+          <a:stretch>
+            <a:fillRect/>
+          </a:stretch>
+        </p:blipFill>
+        <p:spPr>
+          <a:xfrm>
+            <a:off x="11819899" y="794391"/>
+            <a:ext cx="288121" cy="288121"/>
+          </a:xfrm>
+          <a:prstGeom prst="rect">
+            <a:avLst/>
+          </a:prstGeom>
+        </p:spPr>
+      </p:pic>
+      <p:pic>
+        <p:nvPicPr>
+          <p:cNvPr id="262" name="Graphic 261" descr="Devil face with no fill">
+            <a:extLst>
+              <a:ext uri="{FF2B5EF4-FFF2-40B4-BE49-F238E27FC236}">
+                <a16:creationId xmlns:a16="http://schemas.microsoft.com/office/drawing/2014/main" id="{CA9072D2-4C3A-4E97-91AC-FB826C59061B}"/>
+              </a:ext>
+            </a:extLst>
+          </p:cNvPr>
+          <p:cNvPicPr>
+            <a:picLocks noChangeAspect="1"/>
+          </p:cNvPicPr>
+          <p:nvPr/>
+        </p:nvPicPr>
+        <p:blipFill>
+          <a:blip r:embed="rId10">
+            <a:extLst>
+              <a:ext uri="{28A0092B-C50C-407E-A947-70E740481C1C}">
+                <a14:useLocalDpi xmlns:a14="http://schemas.microsoft.com/office/drawing/2010/main" val="0"/>
+              </a:ext>
+              <a:ext uri="{96DAC541-7B7A-43D3-8B79-37D633B846F1}">
+                <asvg:svgBlip xmlns:asvg="http://schemas.microsoft.com/office/drawing/2016/SVG/main" r:embed="rId11"/>
+              </a:ext>
+            </a:extLst>
+          </a:blip>
+          <a:stretch>
+            <a:fillRect/>
+          </a:stretch>
+        </p:blipFill>
+        <p:spPr>
+          <a:xfrm>
+            <a:off x="11832522" y="1182604"/>
+            <a:ext cx="288121" cy="288121"/>
+          </a:xfrm>
+          <a:prstGeom prst="rect">
+            <a:avLst/>
+          </a:prstGeom>
+        </p:spPr>
+      </p:pic>
+      <p:sp>
+        <p:nvSpPr>
+          <p:cNvPr id="271" name="Rectangle 270">
+            <a:extLst>
+              <a:ext uri="{FF2B5EF4-FFF2-40B4-BE49-F238E27FC236}">
+                <a16:creationId xmlns:a16="http://schemas.microsoft.com/office/drawing/2014/main" id="{A2DD468F-6241-4115-AA97-B128C0EFCBB0}"/>
+              </a:ext>
+            </a:extLst>
+          </p:cNvPr>
+          <p:cNvSpPr/>
+          <p:nvPr/>
+        </p:nvSpPr>
+        <p:spPr>
+          <a:xfrm>
+            <a:off x="6385485" y="5269224"/>
+            <a:ext cx="1241113" cy="638174"/>
+          </a:xfrm>
+          <a:prstGeom prst="rect">
+            <a:avLst/>
+          </a:prstGeom>
+        </p:spPr>
+        <p:style>
+          <a:lnRef idx="2">
+            <a:schemeClr val="dk1"/>
+          </a:lnRef>
+          <a:fillRef idx="1">
+            <a:schemeClr val="lt1"/>
+          </a:fillRef>
+          <a:effectRef idx="0">
+            <a:schemeClr val="dk1"/>
+          </a:effectRef>
+          <a:fontRef idx="minor">
+            <a:schemeClr val="dk1"/>
+          </a:fontRef>
+        </p:style>
+        <p:txBody>
+          <a:bodyPr rtlCol="0" anchor="ctr"/>
+          <a:lstStyle/>
+          <a:p>
+            <a:pPr algn="ctr"/>
+            <a:r>
+              <a:rPr lang="en-US" sz="1000" dirty="0">
+                <a:latin typeface="Lato" panose="020F0502020204030203" pitchFamily="34" charset="0"/>
+              </a:rPr>
+              <a:t>Show feedback form with filled data</a:t>
+            </a:r>
+          </a:p>
+        </p:txBody>
+      </p:sp>
+      <p:cxnSp>
+        <p:nvCxnSpPr>
+          <p:cNvPr id="273" name="Straight Arrow Connector 272">
+            <a:extLst>
+              <a:ext uri="{FF2B5EF4-FFF2-40B4-BE49-F238E27FC236}">
+                <a16:creationId xmlns:a16="http://schemas.microsoft.com/office/drawing/2014/main" id="{6C2433EF-688C-4190-93DC-1771F6454BE6}"/>
+              </a:ext>
+            </a:extLst>
+          </p:cNvPr>
+          <p:cNvCxnSpPr/>
+          <p:nvPr/>
+        </p:nvCxnSpPr>
+        <p:spPr>
+          <a:xfrm flipH="1">
+            <a:off x="7657439" y="5522221"/>
+            <a:ext cx="670428" cy="0"/>
+          </a:xfrm>
+          <a:prstGeom prst="straightConnector1">
+            <a:avLst/>
+          </a:prstGeom>
+          <a:ln>
+            <a:tailEnd type="triangle"/>
+          </a:ln>
+        </p:spPr>
+        <p:style>
+          <a:lnRef idx="1">
+            <a:schemeClr val="dk1"/>
+          </a:lnRef>
+          <a:fillRef idx="0">
+            <a:schemeClr val="dk1"/>
+          </a:fillRef>
+          <a:effectRef idx="0">
+            <a:schemeClr val="dk1"/>
+          </a:effectRef>
+          <a:fontRef idx="minor">
+            <a:schemeClr val="tx1"/>
+          </a:fontRef>
+        </p:style>
+      </p:cxnSp>
+      <p:cxnSp>
+        <p:nvCxnSpPr>
+          <p:cNvPr id="275" name="Straight Arrow Connector 274">
+            <a:extLst>
+              <a:ext uri="{FF2B5EF4-FFF2-40B4-BE49-F238E27FC236}">
+                <a16:creationId xmlns:a16="http://schemas.microsoft.com/office/drawing/2014/main" id="{CF195A1F-8E22-4B40-8D71-499D317C1541}"/>
+              </a:ext>
+            </a:extLst>
+          </p:cNvPr>
+          <p:cNvCxnSpPr>
+            <a:stCxn id="271" idx="2"/>
+            <a:endCxn id="36" idx="0"/>
+          </p:cNvCxnSpPr>
+          <p:nvPr/>
+        </p:nvCxnSpPr>
+        <p:spPr>
+          <a:xfrm flipH="1">
+            <a:off x="7006041" y="5907398"/>
+            <a:ext cx="1" cy="193341"/>
+          </a:xfrm>
+          <a:prstGeom prst="straightConnector1">
+            <a:avLst/>
+          </a:prstGeom>
+          <a:ln>
+            <a:tailEnd type="triangle"/>
+          </a:ln>
+        </p:spPr>
+        <p:style>
+          <a:lnRef idx="1">
+            <a:schemeClr val="dk1"/>
+          </a:lnRef>
+          <a:fillRef idx="0">
+            <a:schemeClr val="dk1"/>
+          </a:fillRef>
+          <a:effectRef idx="0">
+            <a:schemeClr val="dk1"/>
+          </a:effectRef>
+          <a:fontRef idx="minor">
+            <a:schemeClr val="tx1"/>
+          </a:fontRef>
+        </p:style>
+      </p:cxnSp>
+      <p:cxnSp>
+        <p:nvCxnSpPr>
+          <p:cNvPr id="293" name="Connector: Elbow 292">
+            <a:extLst>
+              <a:ext uri="{FF2B5EF4-FFF2-40B4-BE49-F238E27FC236}">
+                <a16:creationId xmlns:a16="http://schemas.microsoft.com/office/drawing/2014/main" id="{C2D3B3EF-4A8F-46F6-8FEB-3A82BA6082C0}"/>
+              </a:ext>
+            </a:extLst>
+          </p:cNvPr>
+          <p:cNvCxnSpPr>
+            <a:cxnSpLocks/>
+            <a:endCxn id="14" idx="4"/>
+          </p:cNvCxnSpPr>
+          <p:nvPr/>
+        </p:nvCxnSpPr>
+        <p:spPr>
+          <a:xfrm rot="10800000" flipV="1">
+            <a:off x="1272765" y="4946841"/>
+            <a:ext cx="2445100" cy="805880"/>
+          </a:xfrm>
+          <a:prstGeom prst="bentConnector3">
+            <a:avLst>
+              <a:gd name="adj1" fmla="val 137"/>
+            </a:avLst>
+          </a:prstGeom>
+          <a:ln>
+            <a:solidFill>
+              <a:srgbClr val="00B050"/>
+            </a:solidFill>
+            <a:prstDash val="lgDash"/>
+            <a:tailEnd type="triangle"/>
+          </a:ln>
+        </p:spPr>
+        <p:style>
+          <a:lnRef idx="1">
+            <a:schemeClr val="dk1"/>
+          </a:lnRef>
+          <a:fillRef idx="0">
+            <a:schemeClr val="dk1"/>
+          </a:fillRef>
+          <a:effectRef idx="0">
+            <a:schemeClr val="dk1"/>
+          </a:effectRef>
+          <a:fontRef idx="minor">
+            <a:schemeClr val="tx1"/>
+          </a:fontRef>
+        </p:style>
+      </p:cxnSp>
+      <p:cxnSp>
+        <p:nvCxnSpPr>
+          <p:cNvPr id="299" name="Connector: Elbow 298">
+            <a:extLst>
+              <a:ext uri="{FF2B5EF4-FFF2-40B4-BE49-F238E27FC236}">
+                <a16:creationId xmlns:a16="http://schemas.microsoft.com/office/drawing/2014/main" id="{29013D9B-B5AC-4213-A4CD-36C7A8029465}"/>
+              </a:ext>
+            </a:extLst>
+          </p:cNvPr>
+          <p:cNvCxnSpPr>
+            <a:cxnSpLocks/>
+          </p:cNvCxnSpPr>
+          <p:nvPr/>
+        </p:nvCxnSpPr>
+        <p:spPr>
+          <a:xfrm rot="10800000">
+            <a:off x="5264791" y="4879867"/>
+            <a:ext cx="1434515" cy="1408207"/>
+          </a:xfrm>
+          <a:prstGeom prst="bentConnector3">
+            <a:avLst/>
+          </a:prstGeom>
+          <a:ln>
+            <a:tailEnd type="triangle"/>
+          </a:ln>
+        </p:spPr>
+        <p:style>
+          <a:lnRef idx="1">
+            <a:schemeClr val="accent1"/>
+          </a:lnRef>
+          <a:fillRef idx="0">
+            <a:schemeClr val="accent1"/>
+          </a:fillRef>
+          <a:effectRef idx="0">
+            <a:schemeClr val="accent1"/>
+          </a:effectRef>
+          <a:fontRef idx="minor">
+            <a:schemeClr val="tx1"/>
+          </a:fontRef>
+        </p:style>
+      </p:cxnSp>
+      <p:sp>
+        <p:nvSpPr>
+          <p:cNvPr id="304" name="TextBox 303">
+            <a:extLst>
+              <a:ext uri="{FF2B5EF4-FFF2-40B4-BE49-F238E27FC236}">
+                <a16:creationId xmlns:a16="http://schemas.microsoft.com/office/drawing/2014/main" id="{99F6A4DC-151C-4583-94E9-E3E608A49DCE}"/>
+              </a:ext>
+            </a:extLst>
+          </p:cNvPr>
+          <p:cNvSpPr txBox="1"/>
+          <p:nvPr/>
+        </p:nvSpPr>
+        <p:spPr>
+          <a:xfrm>
+            <a:off x="6791140" y="6377465"/>
+            <a:ext cx="436338" cy="246221"/>
+          </a:xfrm>
+          <a:prstGeom prst="rect">
+            <a:avLst/>
+          </a:prstGeom>
+          <a:noFill/>
+        </p:spPr>
+        <p:txBody>
+          <a:bodyPr wrap="none" rtlCol="0">
+            <a:spAutoFit/>
+          </a:bodyPr>
+          <a:lstStyle/>
+          <a:p>
+            <a:r>
+              <a:rPr lang="en-US" sz="1000" dirty="0">
+                <a:latin typeface="Lato" panose="020F0502020204030203" pitchFamily="34" charset="0"/>
+              </a:rPr>
+              <a:t>sync</a:t>
+            </a:r>
+          </a:p>
+        </p:txBody>
+      </p:sp>
+      <p:sp>
+        <p:nvSpPr>
+          <p:cNvPr id="305" name="Rectangle 304">
+            <a:extLst>
+              <a:ext uri="{FF2B5EF4-FFF2-40B4-BE49-F238E27FC236}">
+                <a16:creationId xmlns:a16="http://schemas.microsoft.com/office/drawing/2014/main" id="{FF73216B-53ED-4D4F-B9C8-086E0FC91AF6}"/>
+              </a:ext>
+            </a:extLst>
+          </p:cNvPr>
+          <p:cNvSpPr/>
+          <p:nvPr/>
+        </p:nvSpPr>
+        <p:spPr>
+          <a:xfrm>
+            <a:off x="6503160" y="785155"/>
+            <a:ext cx="1374773" cy="318924"/>
+          </a:xfrm>
+          <a:prstGeom prst="rect">
+            <a:avLst/>
+          </a:prstGeom>
+        </p:spPr>
+        <p:style>
+          <a:lnRef idx="2">
+            <a:schemeClr val="dk1"/>
+          </a:lnRef>
+          <a:fillRef idx="1">
+            <a:schemeClr val="lt1"/>
+          </a:fillRef>
+          <a:effectRef idx="0">
+            <a:schemeClr val="dk1"/>
+          </a:effectRef>
+          <a:fontRef idx="minor">
+            <a:schemeClr val="dk1"/>
+          </a:fontRef>
+        </p:style>
+        <p:txBody>
+          <a:bodyPr rtlCol="0" anchor="ctr"/>
+          <a:lstStyle/>
+          <a:p>
+            <a:pPr algn="ctr"/>
+            <a:r>
+              <a:rPr lang="en-US" sz="1000" dirty="0">
+                <a:latin typeface="Inter 18pt" panose="02000503000000020004" pitchFamily="2" charset="0"/>
+                <a:ea typeface="Inter 18pt" panose="02000503000000020004" pitchFamily="2" charset="0"/>
+              </a:rPr>
+              <a:t>Seat Management</a:t>
+            </a:r>
+          </a:p>
+          <a:p>
+            <a:pPr algn="ctr"/>
+            <a:r>
+              <a:rPr lang="en-US" sz="1000" dirty="0">
+                <a:latin typeface="Inter 18pt" panose="02000503000000020004" pitchFamily="2" charset="0"/>
+                <a:ea typeface="Inter 18pt" panose="02000503000000020004" pitchFamily="2" charset="0"/>
+              </a:rPr>
+              <a:t> </a:t>
+            </a:r>
+            <a:r>
+              <a:rPr lang="en-US" sz="700" dirty="0">
+                <a:latin typeface="Inter 18pt" panose="02000503000000020004" pitchFamily="2" charset="0"/>
+                <a:ea typeface="Inter 18pt" panose="02000503000000020004" pitchFamily="2" charset="0"/>
+              </a:rPr>
+              <a:t>(/admin/hostel/seats</a:t>
+            </a:r>
+            <a:r>
+              <a:rPr lang="en-US" sz="900" dirty="0">
+                <a:latin typeface="Inter 18pt" panose="02000503000000020004" pitchFamily="2" charset="0"/>
+                <a:ea typeface="Inter 18pt" panose="02000503000000020004" pitchFamily="2" charset="0"/>
+              </a:rPr>
+              <a:t>)</a:t>
+            </a:r>
+            <a:endParaRPr lang="en-US" sz="1000" dirty="0">
+              <a:latin typeface="Inter 18pt" panose="02000503000000020004" pitchFamily="2" charset="0"/>
+              <a:ea typeface="Inter 18pt" panose="02000503000000020004" pitchFamily="2" charset="0"/>
+            </a:endParaRPr>
+          </a:p>
+        </p:txBody>
+      </p:sp>
+      <p:sp>
+        <p:nvSpPr>
+          <p:cNvPr id="69" name="Rectangle 68">
+            <a:extLst>
+              <a:ext uri="{FF2B5EF4-FFF2-40B4-BE49-F238E27FC236}">
+                <a16:creationId xmlns:a16="http://schemas.microsoft.com/office/drawing/2014/main" id="{05432AAC-E283-4112-B439-5885E848CDC3}"/>
+              </a:ext>
+            </a:extLst>
+          </p:cNvPr>
+          <p:cNvSpPr/>
+          <p:nvPr/>
+        </p:nvSpPr>
+        <p:spPr>
+          <a:xfrm>
+            <a:off x="7954133" y="782196"/>
+            <a:ext cx="1374773" cy="318924"/>
+          </a:xfrm>
+          <a:prstGeom prst="rect">
+            <a:avLst/>
+          </a:prstGeom>
+        </p:spPr>
+        <p:style>
+          <a:lnRef idx="2">
+            <a:schemeClr val="dk1"/>
+          </a:lnRef>
+          <a:fillRef idx="1">
+            <a:schemeClr val="lt1"/>
+          </a:fillRef>
+          <a:effectRef idx="0">
+            <a:schemeClr val="dk1"/>
+          </a:effectRef>
+          <a:fontRef idx="minor">
+            <a:schemeClr val="dk1"/>
+          </a:fontRef>
+        </p:style>
+        <p:txBody>
+          <a:bodyPr rtlCol="0" anchor="ctr"/>
+          <a:lstStyle/>
+          <a:p>
+            <a:pPr algn="ctr"/>
+            <a:endParaRPr lang="en-US" sz="1000" dirty="0">
+              <a:latin typeface="Inter 18pt" panose="02000503000000020004" pitchFamily="2" charset="0"/>
+              <a:ea typeface="Inter 18pt" panose="02000503000000020004" pitchFamily="2" charset="0"/>
+            </a:endParaRPr>
+          </a:p>
+        </p:txBody>
+      </p:sp>
+      <p:cxnSp>
+        <p:nvCxnSpPr>
+          <p:cNvPr id="16" name="Connector: Elbow 15">
+            <a:extLst>
+              <a:ext uri="{FF2B5EF4-FFF2-40B4-BE49-F238E27FC236}">
+                <a16:creationId xmlns:a16="http://schemas.microsoft.com/office/drawing/2014/main" id="{2038A06E-073B-4BF9-9B3B-1EBF08FC81DB}"/>
+              </a:ext>
+            </a:extLst>
+          </p:cNvPr>
+          <p:cNvCxnSpPr>
+            <a:cxnSpLocks/>
+            <a:stCxn id="18" idx="3"/>
+            <a:endCxn id="5" idx="1"/>
+          </p:cNvCxnSpPr>
+          <p:nvPr/>
+        </p:nvCxnSpPr>
+        <p:spPr>
+          <a:xfrm flipV="1">
+            <a:off x="5930535" y="755169"/>
+            <a:ext cx="490736" cy="166955"/>
+          </a:xfrm>
+          <a:prstGeom prst="bentConnector3">
+            <a:avLst/>
+          </a:prstGeom>
+          <a:ln>
+            <a:tailEnd type="triangle"/>
+          </a:ln>
+        </p:spPr>
+        <p:style>
+          <a:lnRef idx="1">
+            <a:schemeClr val="dk1"/>
+          </a:lnRef>
+          <a:fillRef idx="0">
+            <a:schemeClr val="dk1"/>
+          </a:fillRef>
+          <a:effectRef idx="0">
+            <a:schemeClr val="dk1"/>
+          </a:effectRef>
+          <a:fontRef idx="minor">
+            <a:schemeClr val="tx1"/>
+          </a:fontRef>
+        </p:style>
+      </p:cxnSp>
+      <p:cxnSp>
+        <p:nvCxnSpPr>
+          <p:cNvPr id="21" name="Straight Arrow Connector 20">
+            <a:extLst>
+              <a:ext uri="{FF2B5EF4-FFF2-40B4-BE49-F238E27FC236}">
+                <a16:creationId xmlns:a16="http://schemas.microsoft.com/office/drawing/2014/main" id="{7859EA7C-9880-4628-9BE6-8922C180D561}"/>
+              </a:ext>
+            </a:extLst>
+          </p:cNvPr>
+          <p:cNvCxnSpPr/>
+          <p:nvPr/>
+        </p:nvCxnSpPr>
+        <p:spPr>
+          <a:xfrm>
+            <a:off x="11938000" y="3876859"/>
+            <a:ext cx="0" cy="1892999"/>
+          </a:xfrm>
+          <a:prstGeom prst="straightConnector1">
+            <a:avLst/>
+          </a:prstGeom>
+          <a:ln>
             <a:tailEnd type="triangle"/>
           </a:ln>
         </p:spPr>
@@ -4371,7 +10427,7 @@
     </p:spTree>
     <p:extLst>
       <p:ext uri="{BB962C8B-B14F-4D97-AF65-F5344CB8AC3E}">
-        <p14:creationId xmlns:p14="http://schemas.microsoft.com/office/powerpoint/2010/main" val="3451120352"/>
+        <p14:creationId xmlns:p14="http://schemas.microsoft.com/office/powerpoint/2010/main" val="2400317157"/>
       </p:ext>
     </p:extLst>
   </p:cSld>
@@ -4400,48 +10456,10 @@
       </p:grpSpPr>
       <p:sp>
         <p:nvSpPr>
-          <p:cNvPr id="2" name="Title 1">
-            <a:extLst>
-              <a:ext uri="{FF2B5EF4-FFF2-40B4-BE49-F238E27FC236}">
-                <a16:creationId xmlns:a16="http://schemas.microsoft.com/office/drawing/2014/main" id="{8E6C9ADD-977C-4ADD-9B84-E4273B15860B}"/>
-              </a:ext>
-            </a:extLst>
-          </p:cNvPr>
-          <p:cNvSpPr>
-            <a:spLocks noGrp="1"/>
-          </p:cNvSpPr>
-          <p:nvPr>
-            <p:ph type="title"/>
-          </p:nvPr>
-        </p:nvSpPr>
-        <p:spPr>
-          <a:xfrm>
-            <a:off x="838200" y="365125"/>
-            <a:ext cx="8319447" cy="740343"/>
-          </a:xfrm>
-        </p:spPr>
-        <p:txBody>
-          <a:bodyPr>
-            <a:normAutofit/>
-          </a:bodyPr>
-          <a:lstStyle/>
-          <a:p>
-            <a:r>
-              <a:rPr lang="en-US" sz="1800" dirty="0">
-                <a:latin typeface="Inter 18pt" panose="02000503000000020004" pitchFamily="2" charset="0"/>
-                <a:ea typeface="Inter 18pt" panose="02000503000000020004" pitchFamily="2" charset="0"/>
-              </a:rPr>
-              <a:t>Table Name: exam </a:t>
-            </a:r>
-          </a:p>
-        </p:txBody>
-      </p:sp>
-      <p:sp>
-        <p:nvSpPr>
-          <p:cNvPr id="5" name="TextBox 4">
-            <a:extLst>
-              <a:ext uri="{FF2B5EF4-FFF2-40B4-BE49-F238E27FC236}">
-                <a16:creationId xmlns:a16="http://schemas.microsoft.com/office/drawing/2014/main" id="{87852E62-169B-40FE-99EE-FA34609481B3}"/>
+          <p:cNvPr id="4" name="TextBox 3">
+            <a:extLst>
+              <a:ext uri="{FF2B5EF4-FFF2-40B4-BE49-F238E27FC236}">
+                <a16:creationId xmlns:a16="http://schemas.microsoft.com/office/drawing/2014/main" id="{A2702AC7-8EE0-454C-A42A-48BAD365C673}"/>
               </a:ext>
             </a:extLst>
           </p:cNvPr>
@@ -4450,8 +10468,8 @@
         </p:nvSpPr>
         <p:spPr>
           <a:xfrm>
-            <a:off x="736979" y="1105468"/>
-            <a:ext cx="11281935" cy="1477328"/>
+            <a:off x="5160487" y="266700"/>
+            <a:ext cx="1282723" cy="307777"/>
           </a:xfrm>
           <a:prstGeom prst="rect">
             <a:avLst/>
@@ -4464,162 +10482,20 @@
           </a:bodyPr>
           <a:lstStyle/>
           <a:p>
-            <a:pPr marL="285750" indent="-285750">
-              <a:buClr>
-                <a:srgbClr val="00B050"/>
-              </a:buClr>
-              <a:buFont typeface="Wingdings" panose="05000000000000000000" pitchFamily="2" charset="2"/>
-              <a:buChar char="ü"/>
-            </a:pPr>
-            <a:r>
-              <a:rPr lang="en-US" dirty="0"/>
-              <a:t>This table holds all active exam</a:t>
-            </a:r>
-          </a:p>
-          <a:p>
-            <a:pPr marL="285750" indent="-285750">
-              <a:buClr>
-                <a:srgbClr val="00B050"/>
-              </a:buClr>
-              <a:buFont typeface="Wingdings" panose="05000000000000000000" pitchFamily="2" charset="2"/>
-              <a:buChar char="ü"/>
-            </a:pPr>
-            <a:r>
-              <a:rPr lang="en-US" dirty="0"/>
-              <a:t>Activate the Exam based on </a:t>
-            </a:r>
-            <a:r>
-              <a:rPr lang="en-US" b="1" dirty="0" err="1"/>
-              <a:t>exam_code</a:t>
-            </a:r>
-            <a:endParaRPr lang="en-US" b="1" dirty="0"/>
-          </a:p>
-          <a:p>
-            <a:pPr marL="285750" indent="-285750">
-              <a:buClr>
-                <a:srgbClr val="00B050"/>
-              </a:buClr>
-              <a:buFont typeface="Wingdings" panose="05000000000000000000" pitchFamily="2" charset="2"/>
-              <a:buChar char="ü"/>
-            </a:pPr>
-            <a:r>
-              <a:rPr lang="en-US" b="1" dirty="0"/>
-              <a:t>Fields:  </a:t>
-            </a:r>
-          </a:p>
-          <a:p>
-            <a:pPr>
-              <a:buClr>
-                <a:srgbClr val="00B050"/>
-              </a:buClr>
-            </a:pPr>
-            <a:r>
-              <a:rPr lang="en-US" b="1" dirty="0"/>
-              <a:t>          </a:t>
-            </a:r>
-            <a:r>
-              <a:rPr lang="en-US" dirty="0"/>
-              <a:t>- Id, org, </a:t>
-            </a:r>
-            <a:r>
-              <a:rPr lang="en-US" dirty="0" err="1"/>
-              <a:t>exam_code</a:t>
-            </a:r>
-            <a:r>
-              <a:rPr lang="en-US" dirty="0"/>
-              <a:t>, </a:t>
-            </a:r>
-            <a:r>
-              <a:rPr lang="en-US" dirty="0" err="1"/>
-              <a:t>duration_bn</a:t>
-            </a:r>
-            <a:r>
-              <a:rPr lang="en-US" dirty="0"/>
-              <a:t>, </a:t>
-            </a:r>
-            <a:r>
-              <a:rPr lang="en-US" dirty="0" err="1"/>
-              <a:t>duration_en</a:t>
-            </a:r>
-            <a:r>
-              <a:rPr lang="en-US" dirty="0"/>
-              <a:t>, </a:t>
-            </a:r>
-            <a:r>
-              <a:rPr lang="en-US" dirty="0" err="1"/>
-              <a:t>wpm_bn</a:t>
-            </a:r>
-            <a:r>
-              <a:rPr lang="en-US" dirty="0"/>
-              <a:t>, </a:t>
-            </a:r>
-            <a:r>
-              <a:rPr lang="en-US" dirty="0" err="1"/>
-              <a:t>wpm_en</a:t>
-            </a:r>
-            <a:r>
-              <a:rPr lang="en-US" dirty="0"/>
-              <a:t>, </a:t>
-            </a:r>
-            <a:r>
-              <a:rPr lang="en-US" dirty="0" err="1"/>
-              <a:t>accuracy_en</a:t>
-            </a:r>
-            <a:r>
-              <a:rPr lang="en-US" dirty="0"/>
-              <a:t>, </a:t>
-            </a:r>
-            <a:r>
-              <a:rPr lang="en-US" dirty="0" err="1"/>
-              <a:t>accuracy_bn</a:t>
-            </a:r>
-            <a:r>
-              <a:rPr lang="en-US" dirty="0"/>
-              <a:t>, algorithm, active</a:t>
-            </a:r>
-          </a:p>
-          <a:p>
-            <a:pPr>
-              <a:buClr>
-                <a:srgbClr val="00B050"/>
-              </a:buClr>
-            </a:pPr>
-            <a:r>
-              <a:rPr lang="en-US" dirty="0"/>
-              <a:t>          - </a:t>
-            </a:r>
-            <a:r>
-              <a:rPr lang="en-US" b="1" dirty="0"/>
-              <a:t>id is the </a:t>
-            </a:r>
-            <a:r>
-              <a:rPr lang="en-US" b="1" dirty="0" err="1"/>
-              <a:t>pkey</a:t>
-            </a:r>
-            <a:r>
-              <a:rPr lang="en-US" b="1" dirty="0"/>
-              <a:t> and </a:t>
-            </a:r>
-            <a:r>
-              <a:rPr lang="en-US" b="1" dirty="0" err="1"/>
-              <a:t>exam_key</a:t>
-            </a:r>
-            <a:r>
-              <a:rPr lang="en-US" b="1" dirty="0"/>
-              <a:t> is </a:t>
-            </a:r>
-            <a:r>
-              <a:rPr lang="en-US" b="1" dirty="0" err="1"/>
-              <a:t>fk</a:t>
-            </a:r>
-            <a:endParaRPr lang="en-US" b="1" dirty="0"/>
+            <a:r>
+              <a:rPr lang="en-US" sz="1400" dirty="0">
+                <a:latin typeface="Inter 18pt" panose="02000503000000020004" pitchFamily="2" charset="0"/>
+                <a:ea typeface="Inter 18pt" panose="02000503000000020004" pitchFamily="2" charset="0"/>
+              </a:rPr>
+              <a:t>Login (/login)</a:t>
+            </a:r>
           </a:p>
         </p:txBody>
       </p:sp>
     </p:spTree>
     <p:extLst>
       <p:ext uri="{BB962C8B-B14F-4D97-AF65-F5344CB8AC3E}">
-        <p14:creationId xmlns:p14="http://schemas.microsoft.com/office/powerpoint/2010/main" val="2811281424"/>
+        <p14:creationId xmlns:p14="http://schemas.microsoft.com/office/powerpoint/2010/main" val="471023970"/>
       </p:ext>
     </p:extLst>
   </p:cSld>
@@ -4648,48 +10524,10 @@
       </p:grpSpPr>
       <p:sp>
         <p:nvSpPr>
-          <p:cNvPr id="2" name="Title 1">
-            <a:extLst>
-              <a:ext uri="{FF2B5EF4-FFF2-40B4-BE49-F238E27FC236}">
-                <a16:creationId xmlns:a16="http://schemas.microsoft.com/office/drawing/2014/main" id="{8E6C9ADD-977C-4ADD-9B84-E4273B15860B}"/>
-              </a:ext>
-            </a:extLst>
-          </p:cNvPr>
-          <p:cNvSpPr>
-            <a:spLocks noGrp="1"/>
-          </p:cNvSpPr>
-          <p:nvPr>
-            <p:ph type="title"/>
-          </p:nvPr>
-        </p:nvSpPr>
-        <p:spPr>
-          <a:xfrm>
-            <a:off x="838200" y="365125"/>
-            <a:ext cx="8319447" cy="740343"/>
-          </a:xfrm>
-        </p:spPr>
-        <p:txBody>
-          <a:bodyPr>
-            <a:normAutofit/>
-          </a:bodyPr>
-          <a:lstStyle/>
-          <a:p>
-            <a:r>
-              <a:rPr lang="en-US" sz="1800" dirty="0">
-                <a:latin typeface="Inter 18pt" panose="02000503000000020004" pitchFamily="2" charset="0"/>
-                <a:ea typeface="Inter 18pt" panose="02000503000000020004" pitchFamily="2" charset="0"/>
-              </a:rPr>
-              <a:t>Table Name: result </a:t>
-            </a:r>
-          </a:p>
-        </p:txBody>
-      </p:sp>
-      <p:sp>
-        <p:nvSpPr>
-          <p:cNvPr id="5" name="TextBox 4">
-            <a:extLst>
-              <a:ext uri="{FF2B5EF4-FFF2-40B4-BE49-F238E27FC236}">
-                <a16:creationId xmlns:a16="http://schemas.microsoft.com/office/drawing/2014/main" id="{87852E62-169B-40FE-99EE-FA34609481B3}"/>
+          <p:cNvPr id="4" name="TextBox 3">
+            <a:extLst>
+              <a:ext uri="{FF2B5EF4-FFF2-40B4-BE49-F238E27FC236}">
+                <a16:creationId xmlns:a16="http://schemas.microsoft.com/office/drawing/2014/main" id="{A2702AC7-8EE0-454C-A42A-48BAD365C673}"/>
               </a:ext>
             </a:extLst>
           </p:cNvPr>
@@ -4698,8 +10536,8 @@
         </p:nvSpPr>
         <p:spPr>
           <a:xfrm>
-            <a:off x="1116712" y="920802"/>
-            <a:ext cx="3835281" cy="369332"/>
+            <a:off x="5160487" y="266700"/>
+            <a:ext cx="917239" cy="307777"/>
           </a:xfrm>
           <a:prstGeom prst="rect">
             <a:avLst/>
@@ -4712,16 +10550,12 @@
           </a:bodyPr>
           <a:lstStyle/>
           <a:p>
-            <a:pPr marL="285750" indent="-285750">
-              <a:buClr>
-                <a:srgbClr val="00B050"/>
-              </a:buClr>
-              <a:buFont typeface="Wingdings" panose="05000000000000000000" pitchFamily="2" charset="2"/>
-              <a:buChar char="ü"/>
-            </a:pPr>
-            <a:r>
-              <a:rPr lang="en-US" b="1" dirty="0"/>
-              <a:t>This table holds the result for exam</a:t>
+            <a:r>
+              <a:rPr lang="en-US" sz="1400" dirty="0">
+                <a:latin typeface="Inter 18pt" panose="02000503000000020004" pitchFamily="2" charset="0"/>
+                <a:ea typeface="Inter 18pt" panose="02000503000000020004" pitchFamily="2" charset="0"/>
+              </a:rPr>
+              <a:t>Home (/)</a:t>
             </a:r>
           </a:p>
         </p:txBody>
@@ -4729,7 +10563,7 @@
     </p:spTree>
     <p:extLst>
       <p:ext uri="{BB962C8B-B14F-4D97-AF65-F5344CB8AC3E}">
-        <p14:creationId xmlns:p14="http://schemas.microsoft.com/office/powerpoint/2010/main" val="507288011"/>
+        <p14:creationId xmlns:p14="http://schemas.microsoft.com/office/powerpoint/2010/main" val="1584821084"/>
       </p:ext>
     </p:extLst>
   </p:cSld>
@@ -4758,51 +10592,54 @@
       </p:grpSpPr>
       <p:sp>
         <p:nvSpPr>
-          <p:cNvPr id="2" name="Title 1">
-            <a:extLst>
-              <a:ext uri="{FF2B5EF4-FFF2-40B4-BE49-F238E27FC236}">
-                <a16:creationId xmlns:a16="http://schemas.microsoft.com/office/drawing/2014/main" id="{8E6C9ADD-977C-4ADD-9B84-E4273B15860B}"/>
-              </a:ext>
-            </a:extLst>
-          </p:cNvPr>
-          <p:cNvSpPr>
-            <a:spLocks noGrp="1"/>
-          </p:cNvSpPr>
-          <p:nvPr>
-            <p:ph type="title"/>
-          </p:nvPr>
-        </p:nvSpPr>
-        <p:spPr>
-          <a:xfrm>
-            <a:off x="838200" y="365125"/>
-            <a:ext cx="8319447" cy="740343"/>
-          </a:xfrm>
-        </p:spPr>
-        <p:txBody>
-          <a:bodyPr>
-            <a:normAutofit/>
-          </a:bodyPr>
+          <p:cNvPr id="14" name="Rectangle 13">
+            <a:extLst>
+              <a:ext uri="{FF2B5EF4-FFF2-40B4-BE49-F238E27FC236}">
+                <a16:creationId xmlns:a16="http://schemas.microsoft.com/office/drawing/2014/main" id="{FF39E8E3-D5C8-4FDA-9FE6-2CB72FC8E91A}"/>
+              </a:ext>
+            </a:extLst>
+          </p:cNvPr>
+          <p:cNvSpPr/>
+          <p:nvPr/>
+        </p:nvSpPr>
+        <p:spPr>
+          <a:xfrm>
+            <a:off x="1349374" y="34769"/>
+            <a:ext cx="1503361" cy="1232056"/>
+          </a:xfrm>
+          <a:prstGeom prst="rect">
+            <a:avLst/>
+          </a:prstGeom>
+        </p:spPr>
+        <p:style>
+          <a:lnRef idx="2">
+            <a:schemeClr val="dk1"/>
+          </a:lnRef>
+          <a:fillRef idx="1">
+            <a:schemeClr val="lt1"/>
+          </a:fillRef>
+          <a:effectRef idx="0">
+            <a:schemeClr val="dk1"/>
+          </a:effectRef>
+          <a:fontRef idx="minor">
+            <a:schemeClr val="dk1"/>
+          </a:fontRef>
+        </p:style>
+        <p:txBody>
+          <a:bodyPr rtlCol="0" anchor="ctr"/>
           <a:lstStyle/>
           <a:p>
-            <a:br>
-              <a:rPr lang="en-US" sz="1800" dirty="0">
-                <a:latin typeface="Inter 18pt" panose="02000503000000020004" pitchFamily="2" charset="0"/>
-                <a:ea typeface="Inter 18pt" panose="02000503000000020004" pitchFamily="2" charset="0"/>
-              </a:rPr>
-            </a:br>
-            <a:endParaRPr lang="en-US" sz="1800" dirty="0">
-              <a:latin typeface="Inter 18pt" panose="02000503000000020004" pitchFamily="2" charset="0"/>
-              <a:ea typeface="Inter 18pt" panose="02000503000000020004" pitchFamily="2" charset="0"/>
-            </a:endParaRPr>
-          </a:p>
-        </p:txBody>
-      </p:sp>
-      <p:sp>
-        <p:nvSpPr>
-          <p:cNvPr id="5" name="TextBox 4">
-            <a:extLst>
-              <a:ext uri="{FF2B5EF4-FFF2-40B4-BE49-F238E27FC236}">
-                <a16:creationId xmlns:a16="http://schemas.microsoft.com/office/drawing/2014/main" id="{87852E62-169B-40FE-99EE-FA34609481B3}"/>
+            <a:pPr algn="ctr"/>
+            <a:endParaRPr lang="en-US"/>
+          </a:p>
+        </p:txBody>
+      </p:sp>
+      <p:sp>
+        <p:nvSpPr>
+          <p:cNvPr id="4" name="TextBox 3">
+            <a:extLst>
+              <a:ext uri="{FF2B5EF4-FFF2-40B4-BE49-F238E27FC236}">
+                <a16:creationId xmlns:a16="http://schemas.microsoft.com/office/drawing/2014/main" id="{A2702AC7-8EE0-454C-A42A-48BAD365C673}"/>
               </a:ext>
             </a:extLst>
           </p:cNvPr>
@@ -4811,8 +10648,8 @@
         </p:nvSpPr>
         <p:spPr>
           <a:xfrm>
-            <a:off x="600502" y="232012"/>
-            <a:ext cx="1401859" cy="307777"/>
+            <a:off x="0" y="6602667"/>
+            <a:ext cx="2762295" cy="246221"/>
           </a:xfrm>
           <a:prstGeom prst="rect">
             <a:avLst/>
@@ -4825,26 +10662,25 @@
           </a:bodyPr>
           <a:lstStyle/>
           <a:p>
-            <a:pPr marL="285750" indent="-285750">
-              <a:buClr>
-                <a:srgbClr val="00B050"/>
-              </a:buClr>
-              <a:buFont typeface="Wingdings" panose="05000000000000000000" pitchFamily="2" charset="2"/>
-              <a:buChar char="ü"/>
-            </a:pPr>
-            <a:r>
-              <a:rPr lang="en-US" sz="1400" b="1" dirty="0"/>
-              <a:t>Relationship</a:t>
-            </a:r>
-          </a:p>
-        </p:txBody>
-      </p:sp>
-      <p:sp>
-        <p:nvSpPr>
-          <p:cNvPr id="3" name="Rectangle 2">
-            <a:extLst>
-              <a:ext uri="{FF2B5EF4-FFF2-40B4-BE49-F238E27FC236}">
-                <a16:creationId xmlns:a16="http://schemas.microsoft.com/office/drawing/2014/main" id="{2B5C8FD6-4B63-4AF0-B19A-1EF268E75FFD}"/>
+            <a:r>
+              <a:rPr lang="en-US" sz="1000" dirty="0">
+                <a:solidFill>
+                  <a:srgbClr val="FF0000"/>
+                </a:solidFill>
+                <a:latin typeface="Inter 18pt" panose="02000503000000020004" pitchFamily="2" charset="0"/>
+                <a:ea typeface="Inter 18pt" panose="02000503000000020004" pitchFamily="2" charset="0"/>
+              </a:rPr>
+              <a:t>Hostel (/admin/hostel) – [Protected Routes]</a:t>
+            </a:r>
+          </a:p>
+        </p:txBody>
+      </p:sp>
+      <p:sp>
+        <p:nvSpPr>
+          <p:cNvPr id="7" name="Rectangle 6">
+            <a:extLst>
+              <a:ext uri="{FF2B5EF4-FFF2-40B4-BE49-F238E27FC236}">
+                <a16:creationId xmlns:a16="http://schemas.microsoft.com/office/drawing/2014/main" id="{20F37227-6ABB-4D10-B040-940029FB3E04}"/>
               </a:ext>
             </a:extLst>
           </p:cNvPr>
@@ -4853,8 +10689,8 @@
         </p:nvSpPr>
         <p:spPr>
           <a:xfrm>
-            <a:off x="1087961" y="900752"/>
-            <a:ext cx="914400" cy="914400"/>
+            <a:off x="116587" y="101444"/>
+            <a:ext cx="978787" cy="471761"/>
           </a:xfrm>
           <a:prstGeom prst="rect">
             <a:avLst/>
@@ -4862,18 +10698,16 @@
         </p:spPr>
         <p:style>
           <a:lnRef idx="2">
-            <a:schemeClr val="accent1">
-              <a:shade val="50000"/>
-            </a:schemeClr>
+            <a:schemeClr val="dk1"/>
           </a:lnRef>
           <a:fillRef idx="1">
-            <a:schemeClr val="accent1"/>
+            <a:schemeClr val="lt1"/>
           </a:fillRef>
           <a:effectRef idx="0">
-            <a:schemeClr val="accent1"/>
+            <a:schemeClr val="dk1"/>
           </a:effectRef>
           <a:fontRef idx="minor">
-            <a:schemeClr val="lt1"/>
+            <a:schemeClr val="dk1"/>
           </a:fontRef>
         </p:style>
         <p:txBody>
@@ -4882,18 +10716,44 @@
           <a:p>
             <a:pPr algn="ctr"/>
             <a:r>
-              <a:rPr lang="en-US" dirty="0"/>
-              <a:t>exams</a:t>
-            </a:r>
-          </a:p>
-        </p:txBody>
-      </p:sp>
-      <p:sp>
-        <p:nvSpPr>
-          <p:cNvPr id="4" name="Rectangle 3">
-            <a:extLst>
-              <a:ext uri="{FF2B5EF4-FFF2-40B4-BE49-F238E27FC236}">
-                <a16:creationId xmlns:a16="http://schemas.microsoft.com/office/drawing/2014/main" id="{7FC55983-03BF-4A9E-8B40-C197227D9873}"/>
+              <a:rPr lang="en-US" sz="1000" b="1" dirty="0">
+                <a:solidFill>
+                  <a:srgbClr val="FF0000"/>
+                </a:solidFill>
+                <a:latin typeface="Inter 18pt" panose="02000503000000020004" pitchFamily="2" charset="0"/>
+                <a:ea typeface="Inter 18pt" panose="02000503000000020004" pitchFamily="2" charset="0"/>
+              </a:rPr>
+              <a:t>Hostel </a:t>
+            </a:r>
+            <a:r>
+              <a:rPr lang="en-US" sz="800" b="1" dirty="0">
+                <a:solidFill>
+                  <a:srgbClr val="FF0000"/>
+                </a:solidFill>
+                <a:latin typeface="Inter 18pt" panose="02000503000000020004" pitchFamily="2" charset="0"/>
+                <a:ea typeface="Inter 18pt" panose="02000503000000020004" pitchFamily="2" charset="0"/>
+              </a:rPr>
+              <a:t>(/admin/hostel</a:t>
+            </a:r>
+            <a:r>
+              <a:rPr lang="en-US" sz="1000" dirty="0">
+                <a:solidFill>
+                  <a:srgbClr val="FF0000"/>
+                </a:solidFill>
+                <a:latin typeface="Inter 18pt" panose="02000503000000020004" pitchFamily="2" charset="0"/>
+                <a:ea typeface="Inter 18pt" panose="02000503000000020004" pitchFamily="2" charset="0"/>
+              </a:rPr>
+              <a:t>)</a:t>
+            </a:r>
+          </a:p>
+        </p:txBody>
+      </p:sp>
+      <p:sp>
+        <p:nvSpPr>
+          <p:cNvPr id="10" name="Rectangle 9">
+            <a:extLst>
+              <a:ext uri="{FF2B5EF4-FFF2-40B4-BE49-F238E27FC236}">
+                <a16:creationId xmlns:a16="http://schemas.microsoft.com/office/drawing/2014/main" id="{5B7E2D85-5548-4CE1-A276-B7B399AABE4E}"/>
               </a:ext>
             </a:extLst>
           </p:cNvPr>
@@ -4902,8 +10762,8 @@
         </p:nvSpPr>
         <p:spPr>
           <a:xfrm>
-            <a:off x="3616658" y="914400"/>
-            <a:ext cx="914400" cy="914400"/>
+            <a:off x="1420814" y="101444"/>
+            <a:ext cx="1374773" cy="318924"/>
           </a:xfrm>
           <a:prstGeom prst="rect">
             <a:avLst/>
@@ -4911,18 +10771,16 @@
         </p:spPr>
         <p:style>
           <a:lnRef idx="2">
-            <a:schemeClr val="accent1">
-              <a:shade val="50000"/>
-            </a:schemeClr>
+            <a:schemeClr val="dk1"/>
           </a:lnRef>
           <a:fillRef idx="1">
-            <a:schemeClr val="accent1"/>
+            <a:schemeClr val="lt1"/>
           </a:fillRef>
           <a:effectRef idx="0">
-            <a:schemeClr val="accent1"/>
+            <a:schemeClr val="dk1"/>
           </a:effectRef>
           <a:fontRef idx="minor">
-            <a:schemeClr val="lt1"/>
+            <a:schemeClr val="dk1"/>
           </a:fontRef>
         </p:style>
         <p:txBody>
@@ -4931,30 +10789,189 @@
           <a:p>
             <a:pPr algn="ctr"/>
             <a:r>
-              <a:rPr lang="en-US" dirty="0"/>
-              <a:t>Users</a:t>
-            </a:r>
+              <a:rPr lang="en-US" sz="1000" dirty="0">
+                <a:latin typeface="Inter 18pt" panose="02000503000000020004" pitchFamily="2" charset="0"/>
+                <a:ea typeface="Inter 18pt" panose="02000503000000020004" pitchFamily="2" charset="0"/>
+              </a:rPr>
+              <a:t>Seat Management </a:t>
+            </a:r>
+            <a:r>
+              <a:rPr lang="en-US" sz="700" dirty="0">
+                <a:latin typeface="Inter 18pt" panose="02000503000000020004" pitchFamily="2" charset="0"/>
+                <a:ea typeface="Inter 18pt" panose="02000503000000020004" pitchFamily="2" charset="0"/>
+              </a:rPr>
+              <a:t>(/admin/hostel/seats</a:t>
+            </a:r>
+            <a:r>
+              <a:rPr lang="en-US" sz="900" dirty="0">
+                <a:latin typeface="Inter 18pt" panose="02000503000000020004" pitchFamily="2" charset="0"/>
+                <a:ea typeface="Inter 18pt" panose="02000503000000020004" pitchFamily="2" charset="0"/>
+              </a:rPr>
+              <a:t>)</a:t>
+            </a:r>
+            <a:endParaRPr lang="en-US" sz="1000" dirty="0">
+              <a:latin typeface="Inter 18pt" panose="02000503000000020004" pitchFamily="2" charset="0"/>
+              <a:ea typeface="Inter 18pt" panose="02000503000000020004" pitchFamily="2" charset="0"/>
+            </a:endParaRPr>
+          </a:p>
+        </p:txBody>
+      </p:sp>
+      <p:sp>
+        <p:nvSpPr>
+          <p:cNvPr id="11" name="Rectangle 10">
+            <a:extLst>
+              <a:ext uri="{FF2B5EF4-FFF2-40B4-BE49-F238E27FC236}">
+                <a16:creationId xmlns:a16="http://schemas.microsoft.com/office/drawing/2014/main" id="{3C07FA99-C6E8-4567-AE66-284E4F61A300}"/>
+              </a:ext>
+            </a:extLst>
+          </p:cNvPr>
+          <p:cNvSpPr/>
+          <p:nvPr/>
+        </p:nvSpPr>
+        <p:spPr>
+          <a:xfrm>
+            <a:off x="1420814" y="477518"/>
+            <a:ext cx="1374773" cy="318924"/>
+          </a:xfrm>
+          <a:prstGeom prst="rect">
+            <a:avLst/>
+          </a:prstGeom>
+        </p:spPr>
+        <p:style>
+          <a:lnRef idx="2">
+            <a:schemeClr val="dk1"/>
+          </a:lnRef>
+          <a:fillRef idx="1">
+            <a:schemeClr val="lt1"/>
+          </a:fillRef>
+          <a:effectRef idx="0">
+            <a:schemeClr val="dk1"/>
+          </a:effectRef>
+          <a:fontRef idx="minor">
+            <a:schemeClr val="dk1"/>
+          </a:fontRef>
+        </p:style>
+        <p:txBody>
+          <a:bodyPr rtlCol="0" anchor="ctr"/>
+          <a:lstStyle/>
+          <a:p>
+            <a:pPr algn="ctr"/>
+            <a:r>
+              <a:rPr lang="en-US" sz="1000" dirty="0">
+                <a:latin typeface="Inter 18pt" panose="02000503000000020004" pitchFamily="2" charset="0"/>
+                <a:ea typeface="Inter 18pt" panose="02000503000000020004" pitchFamily="2" charset="0"/>
+              </a:rPr>
+              <a:t>Check-in </a:t>
+            </a:r>
+            <a:r>
+              <a:rPr lang="en-US" sz="700" dirty="0">
+                <a:latin typeface="Inter 18pt" panose="02000503000000020004" pitchFamily="2" charset="0"/>
+                <a:ea typeface="Inter 18pt" panose="02000503000000020004" pitchFamily="2" charset="0"/>
+              </a:rPr>
+              <a:t>(/admin/hostel/check-in</a:t>
+            </a:r>
+            <a:r>
+              <a:rPr lang="en-US" sz="900" dirty="0">
+                <a:latin typeface="Inter 18pt" panose="02000503000000020004" pitchFamily="2" charset="0"/>
+                <a:ea typeface="Inter 18pt" panose="02000503000000020004" pitchFamily="2" charset="0"/>
+              </a:rPr>
+              <a:t>)</a:t>
+            </a:r>
+            <a:endParaRPr lang="en-US" sz="1000" dirty="0">
+              <a:latin typeface="Inter 18pt" panose="02000503000000020004" pitchFamily="2" charset="0"/>
+              <a:ea typeface="Inter 18pt" panose="02000503000000020004" pitchFamily="2" charset="0"/>
+            </a:endParaRPr>
+          </a:p>
+        </p:txBody>
+      </p:sp>
+      <p:sp>
+        <p:nvSpPr>
+          <p:cNvPr id="12" name="Rectangle 11">
+            <a:extLst>
+              <a:ext uri="{FF2B5EF4-FFF2-40B4-BE49-F238E27FC236}">
+                <a16:creationId xmlns:a16="http://schemas.microsoft.com/office/drawing/2014/main" id="{188DB9E8-ADED-4B55-8770-1E803799C8D0}"/>
+              </a:ext>
+            </a:extLst>
+          </p:cNvPr>
+          <p:cNvSpPr/>
+          <p:nvPr/>
+        </p:nvSpPr>
+        <p:spPr>
+          <a:xfrm>
+            <a:off x="1420814" y="853592"/>
+            <a:ext cx="1374773" cy="318924"/>
+          </a:xfrm>
+          <a:prstGeom prst="rect">
+            <a:avLst/>
+          </a:prstGeom>
+        </p:spPr>
+        <p:style>
+          <a:lnRef idx="2">
+            <a:schemeClr val="dk1"/>
+          </a:lnRef>
+          <a:fillRef idx="1">
+            <a:schemeClr val="lt1"/>
+          </a:fillRef>
+          <a:effectRef idx="0">
+            <a:schemeClr val="dk1"/>
+          </a:effectRef>
+          <a:fontRef idx="minor">
+            <a:schemeClr val="dk1"/>
+          </a:fontRef>
+        </p:style>
+        <p:txBody>
+          <a:bodyPr rtlCol="0" anchor="ctr"/>
+          <a:lstStyle/>
+          <a:p>
+            <a:pPr algn="ctr"/>
+            <a:r>
+              <a:rPr lang="en-US" sz="1000" dirty="0">
+                <a:latin typeface="Inter 18pt" panose="02000503000000020004" pitchFamily="2" charset="0"/>
+                <a:ea typeface="Inter 18pt" panose="02000503000000020004" pitchFamily="2" charset="0"/>
+              </a:rPr>
+              <a:t>Checkout </a:t>
+            </a:r>
+            <a:r>
+              <a:rPr lang="en-US" sz="700" dirty="0">
+                <a:latin typeface="Inter 18pt" panose="02000503000000020004" pitchFamily="2" charset="0"/>
+                <a:ea typeface="Inter 18pt" panose="02000503000000020004" pitchFamily="2" charset="0"/>
+              </a:rPr>
+              <a:t>(/admin/hostel/checkout</a:t>
+            </a:r>
+            <a:r>
+              <a:rPr lang="en-US" sz="900" dirty="0">
+                <a:latin typeface="Inter 18pt" panose="02000503000000020004" pitchFamily="2" charset="0"/>
+                <a:ea typeface="Inter 18pt" panose="02000503000000020004" pitchFamily="2" charset="0"/>
+              </a:rPr>
+              <a:t>)</a:t>
+            </a:r>
+            <a:endParaRPr lang="en-US" sz="1000" dirty="0">
+              <a:latin typeface="Inter 18pt" panose="02000503000000020004" pitchFamily="2" charset="0"/>
+              <a:ea typeface="Inter 18pt" panose="02000503000000020004" pitchFamily="2" charset="0"/>
+            </a:endParaRPr>
           </a:p>
         </p:txBody>
       </p:sp>
       <p:cxnSp>
         <p:nvCxnSpPr>
-          <p:cNvPr id="8" name="Straight Arrow Connector 7">
-            <a:extLst>
-              <a:ext uri="{FF2B5EF4-FFF2-40B4-BE49-F238E27FC236}">
-                <a16:creationId xmlns:a16="http://schemas.microsoft.com/office/drawing/2014/main" id="{8D9B1913-AC97-45B1-B735-939BFEC5ED4D}"/>
-              </a:ext>
-            </a:extLst>
-          </p:cNvPr>
-          <p:cNvCxnSpPr/>
+          <p:cNvPr id="16" name="Connector: Elbow 15">
+            <a:extLst>
+              <a:ext uri="{FF2B5EF4-FFF2-40B4-BE49-F238E27FC236}">
+                <a16:creationId xmlns:a16="http://schemas.microsoft.com/office/drawing/2014/main" id="{679896DB-DE21-46F2-99FC-2C97CF0C7B01}"/>
+              </a:ext>
+            </a:extLst>
+          </p:cNvPr>
+          <p:cNvCxnSpPr>
+            <a:cxnSpLocks/>
+          </p:cNvCxnSpPr>
           <p:nvPr/>
         </p:nvCxnSpPr>
         <p:spPr>
-          <a:xfrm flipV="1">
-            <a:off x="2115403" y="1105468"/>
-            <a:ext cx="1351128" cy="252484"/>
-          </a:xfrm>
-          <a:prstGeom prst="straightConnector1">
+          <a:xfrm>
+            <a:off x="1114424" y="337325"/>
+            <a:ext cx="235881" cy="235880"/>
+          </a:xfrm>
+          <a:prstGeom prst="bentConnector3">
             <a:avLst/>
           </a:prstGeom>
           <a:ln>
@@ -4963,37 +10980,287 @@
         </p:spPr>
         <p:style>
           <a:lnRef idx="1">
-            <a:schemeClr val="accent1"/>
+            <a:schemeClr val="dk1"/>
           </a:lnRef>
           <a:fillRef idx="0">
-            <a:schemeClr val="accent1"/>
+            <a:schemeClr val="dk1"/>
           </a:fillRef>
           <a:effectRef idx="0">
-            <a:schemeClr val="accent1"/>
+            <a:schemeClr val="dk1"/>
           </a:effectRef>
           <a:fontRef idx="minor">
             <a:schemeClr val="tx1"/>
           </a:fontRef>
         </p:style>
       </p:cxnSp>
+      <p:sp>
+        <p:nvSpPr>
+          <p:cNvPr id="17" name="Rectangle 16">
+            <a:extLst>
+              <a:ext uri="{FF2B5EF4-FFF2-40B4-BE49-F238E27FC236}">
+                <a16:creationId xmlns:a16="http://schemas.microsoft.com/office/drawing/2014/main" id="{38FD1876-08A1-4B13-A3CF-B6843A19F828}"/>
+              </a:ext>
+            </a:extLst>
+          </p:cNvPr>
+          <p:cNvSpPr/>
+          <p:nvPr/>
+        </p:nvSpPr>
+        <p:spPr>
+          <a:xfrm>
+            <a:off x="3353434" y="34769"/>
+            <a:ext cx="1628141" cy="1232056"/>
+          </a:xfrm>
+          <a:prstGeom prst="rect">
+            <a:avLst/>
+          </a:prstGeom>
+        </p:spPr>
+        <p:style>
+          <a:lnRef idx="2">
+            <a:schemeClr val="dk1"/>
+          </a:lnRef>
+          <a:fillRef idx="1">
+            <a:schemeClr val="lt1"/>
+          </a:fillRef>
+          <a:effectRef idx="0">
+            <a:schemeClr val="dk1"/>
+          </a:effectRef>
+          <a:fontRef idx="minor">
+            <a:schemeClr val="dk1"/>
+          </a:fontRef>
+        </p:style>
+        <p:txBody>
+          <a:bodyPr rtlCol="0" anchor="ctr"/>
+          <a:lstStyle/>
+          <a:p>
+            <a:pPr algn="ctr"/>
+            <a:endParaRPr lang="en-US"/>
+          </a:p>
+        </p:txBody>
+      </p:sp>
+      <p:sp>
+        <p:nvSpPr>
+          <p:cNvPr id="18" name="Rectangle 17">
+            <a:extLst>
+              <a:ext uri="{FF2B5EF4-FFF2-40B4-BE49-F238E27FC236}">
+                <a16:creationId xmlns:a16="http://schemas.microsoft.com/office/drawing/2014/main" id="{59D729A6-92F1-4D76-907A-CF9B34097E08}"/>
+              </a:ext>
+            </a:extLst>
+          </p:cNvPr>
+          <p:cNvSpPr/>
+          <p:nvPr/>
+        </p:nvSpPr>
+        <p:spPr>
+          <a:xfrm>
+            <a:off x="3424874" y="101444"/>
+            <a:ext cx="1556701" cy="318924"/>
+          </a:xfrm>
+          <a:prstGeom prst="rect">
+            <a:avLst/>
+          </a:prstGeom>
+        </p:spPr>
+        <p:style>
+          <a:lnRef idx="2">
+            <a:schemeClr val="dk1"/>
+          </a:lnRef>
+          <a:fillRef idx="1">
+            <a:schemeClr val="lt1"/>
+          </a:fillRef>
+          <a:effectRef idx="0">
+            <a:schemeClr val="dk1"/>
+          </a:effectRef>
+          <a:fontRef idx="minor">
+            <a:schemeClr val="dk1"/>
+          </a:fontRef>
+        </p:style>
+        <p:txBody>
+          <a:bodyPr rtlCol="0" anchor="ctr"/>
+          <a:lstStyle/>
+          <a:p>
+            <a:pPr algn="ctr"/>
+            <a:r>
+              <a:rPr lang="en-US" sz="1000" dirty="0">
+                <a:latin typeface="Inter 18pt" panose="02000503000000020004" pitchFamily="2" charset="0"/>
+                <a:ea typeface="Inter 18pt" panose="02000503000000020004" pitchFamily="2" charset="0"/>
+              </a:rPr>
+              <a:t>Create Seat </a:t>
+            </a:r>
+            <a:r>
+              <a:rPr lang="en-US" sz="700" dirty="0">
+                <a:latin typeface="Inter 18pt" panose="02000503000000020004" pitchFamily="2" charset="0"/>
+                <a:ea typeface="Inter 18pt" panose="02000503000000020004" pitchFamily="2" charset="0"/>
+              </a:rPr>
+              <a:t>(/admin/hostel/seats/create</a:t>
+            </a:r>
+            <a:r>
+              <a:rPr lang="en-US" sz="900" dirty="0">
+                <a:latin typeface="Inter 18pt" panose="02000503000000020004" pitchFamily="2" charset="0"/>
+                <a:ea typeface="Inter 18pt" panose="02000503000000020004" pitchFamily="2" charset="0"/>
+              </a:rPr>
+              <a:t>)</a:t>
+            </a:r>
+            <a:endParaRPr lang="en-US" sz="1000" dirty="0">
+              <a:latin typeface="Inter 18pt" panose="02000503000000020004" pitchFamily="2" charset="0"/>
+              <a:ea typeface="Inter 18pt" panose="02000503000000020004" pitchFamily="2" charset="0"/>
+            </a:endParaRPr>
+          </a:p>
+        </p:txBody>
+      </p:sp>
+      <p:sp>
+        <p:nvSpPr>
+          <p:cNvPr id="19" name="Rectangle 18">
+            <a:extLst>
+              <a:ext uri="{FF2B5EF4-FFF2-40B4-BE49-F238E27FC236}">
+                <a16:creationId xmlns:a16="http://schemas.microsoft.com/office/drawing/2014/main" id="{57A04D9D-B75F-4389-AE6A-59917E2CDDD9}"/>
+              </a:ext>
+            </a:extLst>
+          </p:cNvPr>
+          <p:cNvSpPr/>
+          <p:nvPr/>
+        </p:nvSpPr>
+        <p:spPr>
+          <a:xfrm>
+            <a:off x="3424874" y="477518"/>
+            <a:ext cx="1556701" cy="318924"/>
+          </a:xfrm>
+          <a:prstGeom prst="rect">
+            <a:avLst/>
+          </a:prstGeom>
+        </p:spPr>
+        <p:style>
+          <a:lnRef idx="2">
+            <a:schemeClr val="dk1"/>
+          </a:lnRef>
+          <a:fillRef idx="1">
+            <a:schemeClr val="lt1"/>
+          </a:fillRef>
+          <a:effectRef idx="0">
+            <a:schemeClr val="dk1"/>
+          </a:effectRef>
+          <a:fontRef idx="minor">
+            <a:schemeClr val="dk1"/>
+          </a:fontRef>
+        </p:style>
+        <p:txBody>
+          <a:bodyPr rtlCol="0" anchor="ctr"/>
+          <a:lstStyle/>
+          <a:p>
+            <a:pPr algn="ctr"/>
+            <a:r>
+              <a:rPr lang="en-US" sz="1000" dirty="0">
+                <a:latin typeface="Inter 18pt" panose="02000503000000020004" pitchFamily="2" charset="0"/>
+                <a:ea typeface="Inter 18pt" panose="02000503000000020004" pitchFamily="2" charset="0"/>
+              </a:rPr>
+              <a:t>View Seats </a:t>
+            </a:r>
+            <a:r>
+              <a:rPr lang="en-US" sz="700" dirty="0">
+                <a:latin typeface="Inter 18pt" panose="02000503000000020004" pitchFamily="2" charset="0"/>
+                <a:ea typeface="Inter 18pt" panose="02000503000000020004" pitchFamily="2" charset="0"/>
+              </a:rPr>
+              <a:t>(/admin/hostel/seats</a:t>
+            </a:r>
+            <a:r>
+              <a:rPr lang="en-US" sz="900" dirty="0">
+                <a:latin typeface="Inter 18pt" panose="02000503000000020004" pitchFamily="2" charset="0"/>
+                <a:ea typeface="Inter 18pt" panose="02000503000000020004" pitchFamily="2" charset="0"/>
+              </a:rPr>
+              <a:t>)</a:t>
+            </a:r>
+            <a:endParaRPr lang="en-US" sz="1000" dirty="0">
+              <a:latin typeface="Inter 18pt" panose="02000503000000020004" pitchFamily="2" charset="0"/>
+              <a:ea typeface="Inter 18pt" panose="02000503000000020004" pitchFamily="2" charset="0"/>
+            </a:endParaRPr>
+          </a:p>
+        </p:txBody>
+      </p:sp>
+      <p:sp>
+        <p:nvSpPr>
+          <p:cNvPr id="20" name="Rectangle 19">
+            <a:extLst>
+              <a:ext uri="{FF2B5EF4-FFF2-40B4-BE49-F238E27FC236}">
+                <a16:creationId xmlns:a16="http://schemas.microsoft.com/office/drawing/2014/main" id="{540FDE4F-EDB8-4FAD-A498-6739AA4AA605}"/>
+              </a:ext>
+            </a:extLst>
+          </p:cNvPr>
+          <p:cNvSpPr/>
+          <p:nvPr/>
+        </p:nvSpPr>
+        <p:spPr>
+          <a:xfrm>
+            <a:off x="3424874" y="853592"/>
+            <a:ext cx="1556701" cy="318924"/>
+          </a:xfrm>
+          <a:prstGeom prst="rect">
+            <a:avLst/>
+          </a:prstGeom>
+        </p:spPr>
+        <p:style>
+          <a:lnRef idx="2">
+            <a:schemeClr val="dk1"/>
+          </a:lnRef>
+          <a:fillRef idx="1">
+            <a:schemeClr val="lt1"/>
+          </a:fillRef>
+          <a:effectRef idx="0">
+            <a:schemeClr val="dk1"/>
+          </a:effectRef>
+          <a:fontRef idx="minor">
+            <a:schemeClr val="dk1"/>
+          </a:fontRef>
+        </p:style>
+        <p:txBody>
+          <a:bodyPr rtlCol="0" anchor="ctr"/>
+          <a:lstStyle/>
+          <a:p>
+            <a:pPr algn="ctr"/>
+            <a:r>
+              <a:rPr lang="en-US" sz="1000" dirty="0">
+                <a:latin typeface="Inter 18pt" panose="02000503000000020004" pitchFamily="2" charset="0"/>
+                <a:ea typeface="Inter 18pt" panose="02000503000000020004" pitchFamily="2" charset="0"/>
+              </a:rPr>
+              <a:t>Delete  </a:t>
+            </a:r>
+            <a:r>
+              <a:rPr lang="en-US" sz="700" dirty="0">
+                <a:latin typeface="Inter 18pt" panose="02000503000000020004" pitchFamily="2" charset="0"/>
+                <a:ea typeface="Inter 18pt" panose="02000503000000020004" pitchFamily="2" charset="0"/>
+              </a:rPr>
+              <a:t>(/admin/hostel/seats/{id}/delete</a:t>
+            </a:r>
+            <a:r>
+              <a:rPr lang="en-US" sz="900" dirty="0">
+                <a:latin typeface="Inter 18pt" panose="02000503000000020004" pitchFamily="2" charset="0"/>
+                <a:ea typeface="Inter 18pt" panose="02000503000000020004" pitchFamily="2" charset="0"/>
+              </a:rPr>
+              <a:t>)</a:t>
+            </a:r>
+            <a:endParaRPr lang="en-US" sz="1000" dirty="0">
+              <a:latin typeface="Inter 18pt" panose="02000503000000020004" pitchFamily="2" charset="0"/>
+              <a:ea typeface="Inter 18pt" panose="02000503000000020004" pitchFamily="2" charset="0"/>
+            </a:endParaRPr>
+          </a:p>
+        </p:txBody>
+      </p:sp>
       <p:cxnSp>
         <p:nvCxnSpPr>
-          <p:cNvPr id="10" name="Straight Arrow Connector 9">
-            <a:extLst>
-              <a:ext uri="{FF2B5EF4-FFF2-40B4-BE49-F238E27FC236}">
-                <a16:creationId xmlns:a16="http://schemas.microsoft.com/office/drawing/2014/main" id="{AAFA14F0-8D81-4705-8B5B-2B5482B5B8EB}"/>
-              </a:ext>
-            </a:extLst>
-          </p:cNvPr>
-          <p:cNvCxnSpPr/>
+          <p:cNvPr id="26" name="Connector: Elbow 25">
+            <a:extLst>
+              <a:ext uri="{FF2B5EF4-FFF2-40B4-BE49-F238E27FC236}">
+                <a16:creationId xmlns:a16="http://schemas.microsoft.com/office/drawing/2014/main" id="{1B94656B-2CCB-421F-A04D-DFD7AC3666D6}"/>
+              </a:ext>
+            </a:extLst>
+          </p:cNvPr>
+          <p:cNvCxnSpPr>
+            <a:stCxn id="10" idx="3"/>
+          </p:cNvCxnSpPr>
           <p:nvPr/>
         </p:nvCxnSpPr>
         <p:spPr>
-          <a:xfrm>
-            <a:off x="2106649" y="1473958"/>
-            <a:ext cx="1455417" cy="150126"/>
-          </a:xfrm>
-          <a:prstGeom prst="straightConnector1">
+          <a:xfrm flipV="1">
+            <a:off x="2795587" y="171450"/>
+            <a:ext cx="557847" cy="89456"/>
+          </a:xfrm>
+          <a:prstGeom prst="bentConnector3">
             <a:avLst/>
           </a:prstGeom>
           <a:ln>
@@ -5002,229 +11269,179 @@
         </p:spPr>
         <p:style>
           <a:lnRef idx="1">
-            <a:schemeClr val="accent1"/>
+            <a:schemeClr val="dk1"/>
           </a:lnRef>
           <a:fillRef idx="0">
-            <a:schemeClr val="accent1"/>
+            <a:schemeClr val="dk1"/>
           </a:fillRef>
           <a:effectRef idx="0">
-            <a:schemeClr val="accent1"/>
+            <a:schemeClr val="dk1"/>
           </a:effectRef>
           <a:fontRef idx="minor">
             <a:schemeClr val="tx1"/>
           </a:fontRef>
         </p:style>
       </p:cxnSp>
-      <p:sp>
-        <p:nvSpPr>
-          <p:cNvPr id="12" name="TextBox 11">
-            <a:extLst>
-              <a:ext uri="{FF2B5EF4-FFF2-40B4-BE49-F238E27FC236}">
-                <a16:creationId xmlns:a16="http://schemas.microsoft.com/office/drawing/2014/main" id="{AF8B55A4-586B-4B32-8D0E-72661F69E1BB}"/>
-              </a:ext>
-            </a:extLst>
-          </p:cNvPr>
-          <p:cNvSpPr txBox="1"/>
-          <p:nvPr/>
-        </p:nvSpPr>
-        <p:spPr>
-          <a:xfrm>
-            <a:off x="7249400" y="1968500"/>
-            <a:ext cx="3816494" cy="1200329"/>
+      <p:pic>
+        <p:nvPicPr>
+          <p:cNvPr id="27" name="Graphic 26" descr="Lock">
+            <a:extLst>
+              <a:ext uri="{FF2B5EF4-FFF2-40B4-BE49-F238E27FC236}">
+                <a16:creationId xmlns:a16="http://schemas.microsoft.com/office/drawing/2014/main" id="{2E6C82F6-490B-40BA-9CB2-4FF40BE8B514}"/>
+              </a:ext>
+            </a:extLst>
+          </p:cNvPr>
+          <p:cNvPicPr>
+            <a:picLocks noChangeAspect="1"/>
+          </p:cNvPicPr>
+          <p:nvPr/>
+        </p:nvPicPr>
+        <p:blipFill>
+          <a:blip r:embed="rId2">
+            <a:extLst>
+              <a:ext uri="{28A0092B-C50C-407E-A947-70E740481C1C}">
+                <a14:useLocalDpi xmlns:a14="http://schemas.microsoft.com/office/drawing/2010/main" val="0"/>
+              </a:ext>
+              <a:ext uri="{96DAC541-7B7A-43D3-8B79-37D633B846F1}">
+                <asvg:svgBlip xmlns:asvg="http://schemas.microsoft.com/office/drawing/2016/SVG/main" r:embed="rId3"/>
+              </a:ext>
+            </a:extLst>
+          </a:blip>
+          <a:stretch>
+            <a:fillRect/>
+          </a:stretch>
+        </p:blipFill>
+        <p:spPr>
+          <a:xfrm>
+            <a:off x="3833558" y="887882"/>
+            <a:ext cx="152400" cy="152400"/>
           </a:xfrm>
           <a:prstGeom prst="rect">
             <a:avLst/>
           </a:prstGeom>
-          <a:noFill/>
-        </p:spPr>
-        <p:txBody>
-          <a:bodyPr wrap="none" rtlCol="0">
-            <a:spAutoFit/>
-          </a:bodyPr>
-          <a:lstStyle/>
-          <a:p>
-            <a:r>
-              <a:rPr lang="en-US" dirty="0"/>
-              <a:t>Users can:</a:t>
-            </a:r>
-          </a:p>
-          <a:p>
-            <a:pPr marL="285750" indent="-285750">
-              <a:buClr>
-                <a:srgbClr val="00B050"/>
-              </a:buClr>
-              <a:buFont typeface="Wingdings" panose="05000000000000000000" pitchFamily="2" charset="2"/>
-              <a:buChar char="ü"/>
-            </a:pPr>
-            <a:r>
-              <a:rPr lang="en-US" dirty="0"/>
-              <a:t>Verify phone, roll and </a:t>
-            </a:r>
-            <a:r>
-              <a:rPr lang="en-US" dirty="0" err="1"/>
-              <a:t>exam_code</a:t>
-            </a:r>
-            <a:endParaRPr lang="en-US" dirty="0"/>
-          </a:p>
-          <a:p>
-            <a:pPr marL="285750" indent="-285750">
-              <a:buClr>
-                <a:srgbClr val="00B050"/>
-              </a:buClr>
-              <a:buFont typeface="Wingdings" panose="05000000000000000000" pitchFamily="2" charset="2"/>
-              <a:buChar char="ü"/>
-            </a:pPr>
-            <a:r>
-              <a:rPr lang="en-US" dirty="0"/>
-              <a:t>Send Typed information from Client</a:t>
-            </a:r>
-          </a:p>
-          <a:p>
-            <a:pPr marL="285750" indent="-285750">
-              <a:buClr>
-                <a:srgbClr val="00B050"/>
-              </a:buClr>
-              <a:buFont typeface="Wingdings" panose="05000000000000000000" pitchFamily="2" charset="2"/>
-              <a:buChar char="ü"/>
-            </a:pPr>
-            <a:r>
-              <a:rPr lang="en-US" dirty="0"/>
-              <a:t>Update Result Table</a:t>
-            </a:r>
-          </a:p>
-        </p:txBody>
-      </p:sp>
-      <p:sp>
-        <p:nvSpPr>
-          <p:cNvPr id="13" name="Rectangle 12">
-            <a:extLst>
-              <a:ext uri="{FF2B5EF4-FFF2-40B4-BE49-F238E27FC236}">
-                <a16:creationId xmlns:a16="http://schemas.microsoft.com/office/drawing/2014/main" id="{ECA76308-B99D-4521-94BE-F259E407F5CE}"/>
-              </a:ext>
-            </a:extLst>
-          </p:cNvPr>
-          <p:cNvSpPr/>
-          <p:nvPr/>
-        </p:nvSpPr>
-        <p:spPr>
-          <a:xfrm>
-            <a:off x="6096000" y="900752"/>
-            <a:ext cx="914400" cy="914400"/>
+        </p:spPr>
+      </p:pic>
+      <p:pic>
+        <p:nvPicPr>
+          <p:cNvPr id="28" name="Graphic 27" descr="Key">
+            <a:extLst>
+              <a:ext uri="{FF2B5EF4-FFF2-40B4-BE49-F238E27FC236}">
+                <a16:creationId xmlns:a16="http://schemas.microsoft.com/office/drawing/2014/main" id="{699F0C0B-95B7-4551-B465-D172F7FC49D3}"/>
+              </a:ext>
+            </a:extLst>
+          </p:cNvPr>
+          <p:cNvPicPr>
+            <a:picLocks noChangeAspect="1"/>
+          </p:cNvPicPr>
+          <p:nvPr/>
+        </p:nvPicPr>
+        <p:blipFill>
+          <a:blip r:embed="rId4">
+            <a:extLst>
+              <a:ext uri="{28A0092B-C50C-407E-A947-70E740481C1C}">
+                <a14:useLocalDpi xmlns:a14="http://schemas.microsoft.com/office/drawing/2010/main" val="0"/>
+              </a:ext>
+              <a:ext uri="{96DAC541-7B7A-43D3-8B79-37D633B846F1}">
+                <asvg:svgBlip xmlns:asvg="http://schemas.microsoft.com/office/drawing/2016/SVG/main" r:embed="rId5"/>
+              </a:ext>
+            </a:extLst>
+          </a:blip>
+          <a:stretch>
+            <a:fillRect/>
+          </a:stretch>
+        </p:blipFill>
+        <p:spPr>
+          <a:xfrm>
+            <a:off x="3646868" y="891692"/>
+            <a:ext cx="181516" cy="181516"/>
           </a:xfrm>
           <a:prstGeom prst="rect">
             <a:avLst/>
           </a:prstGeom>
         </p:spPr>
-        <p:style>
-          <a:lnRef idx="2">
-            <a:schemeClr val="accent1">
-              <a:shade val="50000"/>
-            </a:schemeClr>
-          </a:lnRef>
-          <a:fillRef idx="1">
-            <a:schemeClr val="accent1"/>
-          </a:fillRef>
-          <a:effectRef idx="0">
-            <a:schemeClr val="accent1"/>
-          </a:effectRef>
-          <a:fontRef idx="minor">
-            <a:schemeClr val="lt1"/>
-          </a:fontRef>
-        </p:style>
-        <p:txBody>
-          <a:bodyPr rtlCol="0" anchor="ctr"/>
-          <a:lstStyle/>
-          <a:p>
-            <a:pPr algn="ctr"/>
-            <a:r>
-              <a:rPr lang="en-US" dirty="0"/>
-              <a:t>Result</a:t>
-            </a:r>
-          </a:p>
-        </p:txBody>
-      </p:sp>
-      <p:cxnSp>
-        <p:nvCxnSpPr>
-          <p:cNvPr id="15" name="Straight Arrow Connector 14">
-            <a:extLst>
-              <a:ext uri="{FF2B5EF4-FFF2-40B4-BE49-F238E27FC236}">
-                <a16:creationId xmlns:a16="http://schemas.microsoft.com/office/drawing/2014/main" id="{CFC4A61C-AFEB-48C6-8619-5DD8D3D27A67}"/>
-              </a:ext>
-            </a:extLst>
-          </p:cNvPr>
-          <p:cNvCxnSpPr/>
-          <p:nvPr/>
-        </p:nvCxnSpPr>
-        <p:spPr>
-          <a:xfrm>
-            <a:off x="4902200" y="1357952"/>
-            <a:ext cx="1092200" cy="0"/>
-          </a:xfrm>
-          <a:prstGeom prst="straightConnector1">
-            <a:avLst/>
-          </a:prstGeom>
-          <a:ln>
-            <a:tailEnd type="triangle"/>
-          </a:ln>
-        </p:spPr>
-        <p:style>
-          <a:lnRef idx="1">
-            <a:schemeClr val="accent1"/>
-          </a:lnRef>
-          <a:fillRef idx="0">
-            <a:schemeClr val="accent1"/>
-          </a:fillRef>
-          <a:effectRef idx="0">
-            <a:schemeClr val="accent1"/>
-          </a:effectRef>
-          <a:fontRef idx="minor">
-            <a:schemeClr val="tx1"/>
-          </a:fontRef>
-        </p:style>
-      </p:cxnSp>
-      <p:cxnSp>
-        <p:nvCxnSpPr>
-          <p:cNvPr id="17" name="Straight Arrow Connector 16">
-            <a:extLst>
-              <a:ext uri="{FF2B5EF4-FFF2-40B4-BE49-F238E27FC236}">
-                <a16:creationId xmlns:a16="http://schemas.microsoft.com/office/drawing/2014/main" id="{05BD46E5-E037-49F6-AEB4-97E34CAE9F75}"/>
-              </a:ext>
-            </a:extLst>
-          </p:cNvPr>
-          <p:cNvCxnSpPr/>
-          <p:nvPr/>
-        </p:nvCxnSpPr>
-        <p:spPr>
-          <a:xfrm flipH="1">
-            <a:off x="4864100" y="1105468"/>
-            <a:ext cx="1130300" cy="0"/>
-          </a:xfrm>
-          <a:prstGeom prst="straightConnector1">
-            <a:avLst/>
-          </a:prstGeom>
-          <a:ln>
-            <a:tailEnd type="triangle"/>
-          </a:ln>
-        </p:spPr>
-        <p:style>
-          <a:lnRef idx="1">
-            <a:schemeClr val="accent1"/>
-          </a:lnRef>
-          <a:fillRef idx="0">
-            <a:schemeClr val="accent1"/>
-          </a:fillRef>
-          <a:effectRef idx="0">
-            <a:schemeClr val="accent1"/>
-          </a:effectRef>
-          <a:fontRef idx="minor">
-            <a:schemeClr val="tx1"/>
-          </a:fontRef>
-        </p:style>
-      </p:cxnSp>
+      </p:pic>
+      <p:pic>
+        <p:nvPicPr>
+          <p:cNvPr id="29" name="Graphic 28" descr="Key">
+            <a:extLst>
+              <a:ext uri="{FF2B5EF4-FFF2-40B4-BE49-F238E27FC236}">
+                <a16:creationId xmlns:a16="http://schemas.microsoft.com/office/drawing/2014/main" id="{91AC0354-7A3B-4793-B568-CDF9E680E562}"/>
+              </a:ext>
+            </a:extLst>
+          </p:cNvPr>
+          <p:cNvPicPr>
+            <a:picLocks noChangeAspect="1"/>
+          </p:cNvPicPr>
+          <p:nvPr/>
+        </p:nvPicPr>
+        <p:blipFill>
+          <a:blip r:embed="rId4">
+            <a:extLst>
+              <a:ext uri="{28A0092B-C50C-407E-A947-70E740481C1C}">
+                <a14:useLocalDpi xmlns:a14="http://schemas.microsoft.com/office/drawing/2010/main" val="0"/>
+              </a:ext>
+              <a:ext uri="{96DAC541-7B7A-43D3-8B79-37D633B846F1}">
+                <asvg:svgBlip xmlns:asvg="http://schemas.microsoft.com/office/drawing/2016/SVG/main" r:embed="rId5"/>
+              </a:ext>
+            </a:extLst>
+          </a:blip>
+          <a:stretch>
+            <a:fillRect/>
+          </a:stretch>
+        </p:blipFill>
+        <p:spPr>
+          <a:xfrm>
+            <a:off x="3646868" y="125420"/>
+            <a:ext cx="181516" cy="181516"/>
+          </a:xfrm>
+          <a:prstGeom prst="rect">
+            <a:avLst/>
+          </a:prstGeom>
+        </p:spPr>
+      </p:pic>
+      <p:pic>
+        <p:nvPicPr>
+          <p:cNvPr id="30" name="Graphic 29" descr="Key">
+            <a:extLst>
+              <a:ext uri="{FF2B5EF4-FFF2-40B4-BE49-F238E27FC236}">
+                <a16:creationId xmlns:a16="http://schemas.microsoft.com/office/drawing/2014/main" id="{F1C9B397-A2DE-44B0-8203-2B5F3B41A0F6}"/>
+              </a:ext>
+            </a:extLst>
+          </p:cNvPr>
+          <p:cNvPicPr>
+            <a:picLocks noChangeAspect="1"/>
+          </p:cNvPicPr>
+          <p:nvPr/>
+        </p:nvPicPr>
+        <p:blipFill>
+          <a:blip r:embed="rId6">
+            <a:extLst>
+              <a:ext uri="{28A0092B-C50C-407E-A947-70E740481C1C}">
+                <a14:useLocalDpi xmlns:a14="http://schemas.microsoft.com/office/drawing/2010/main" val="0"/>
+              </a:ext>
+              <a:ext uri="{96DAC541-7B7A-43D3-8B79-37D633B846F1}">
+                <asvg:svgBlip xmlns:asvg="http://schemas.microsoft.com/office/drawing/2016/SVG/main" r:embed="rId7"/>
+              </a:ext>
+            </a:extLst>
+          </a:blip>
+          <a:stretch>
+            <a:fillRect/>
+          </a:stretch>
+        </p:blipFill>
+        <p:spPr>
+          <a:xfrm>
+            <a:off x="3675443" y="491918"/>
+            <a:ext cx="181516" cy="181516"/>
+          </a:xfrm>
+          <a:prstGeom prst="rect">
+            <a:avLst/>
+          </a:prstGeom>
+        </p:spPr>
+      </p:pic>
     </p:spTree>
     <p:extLst>
       <p:ext uri="{BB962C8B-B14F-4D97-AF65-F5344CB8AC3E}">
-        <p14:creationId xmlns:p14="http://schemas.microsoft.com/office/powerpoint/2010/main" val="2708859677"/>
+        <p14:creationId xmlns:p14="http://schemas.microsoft.com/office/powerpoint/2010/main" val="2404887296"/>
       </p:ext>
     </p:extLst>
   </p:cSld>
@@ -5256,7 +11473,7 @@
           <p:cNvPr id="2" name="Title 1">
             <a:extLst>
               <a:ext uri="{FF2B5EF4-FFF2-40B4-BE49-F238E27FC236}">
-                <a16:creationId xmlns:a16="http://schemas.microsoft.com/office/drawing/2014/main" id="{8E6C9ADD-977C-4ADD-9B84-E4273B15860B}"/>
+                <a16:creationId xmlns:a16="http://schemas.microsoft.com/office/drawing/2014/main" id="{55EADD2D-BA42-4665-B7F3-A0BF0148E46C}"/>
               </a:ext>
             </a:extLst>
           </p:cNvPr>
@@ -5269,8 +11486,8 @@
         </p:nvSpPr>
         <p:spPr>
           <a:xfrm>
-            <a:off x="838201" y="365125"/>
-            <a:ext cx="4675496" cy="562923"/>
+            <a:off x="838200" y="184151"/>
+            <a:ext cx="10515600" cy="315912"/>
           </a:xfrm>
         </p:spPr>
         <p:txBody>
@@ -5279,339 +11496,288 @@
           </a:bodyPr>
           <a:lstStyle/>
           <a:p>
-            <a:r>
-              <a:rPr lang="en-US" sz="2000" dirty="0">
+            <a:pPr algn="ctr"/>
+            <a:r>
+              <a:rPr lang="en-US" sz="1400" dirty="0">
                 <a:latin typeface="Inter 18pt" panose="02000503000000020004" pitchFamily="2" charset="0"/>
                 <a:ea typeface="Inter 18pt" panose="02000503000000020004" pitchFamily="2" charset="0"/>
               </a:rPr>
-              <a:t>Data Flow: Table Name: Users </a:t>
-            </a:r>
-          </a:p>
-        </p:txBody>
-      </p:sp>
-      <p:sp>
-        <p:nvSpPr>
-          <p:cNvPr id="3" name="TextBox 2">
-            <a:extLst>
-              <a:ext uri="{FF2B5EF4-FFF2-40B4-BE49-F238E27FC236}">
-                <a16:creationId xmlns:a16="http://schemas.microsoft.com/office/drawing/2014/main" id="{92D3F557-1748-4A3A-A3C9-7B5B51721494}"/>
-              </a:ext>
-            </a:extLst>
-          </p:cNvPr>
-          <p:cNvSpPr txBox="1"/>
-          <p:nvPr/>
-        </p:nvSpPr>
-        <p:spPr>
-          <a:xfrm>
-            <a:off x="838201" y="928048"/>
-            <a:ext cx="5888087" cy="646331"/>
+              <a:t>Models</a:t>
+            </a:r>
+          </a:p>
+        </p:txBody>
+      </p:sp>
+      <p:sp>
+        <p:nvSpPr>
+          <p:cNvPr id="4" name="Rectangle 3">
+            <a:extLst>
+              <a:ext uri="{FF2B5EF4-FFF2-40B4-BE49-F238E27FC236}">
+                <a16:creationId xmlns:a16="http://schemas.microsoft.com/office/drawing/2014/main" id="{6ABB0E81-FC3B-40C1-8513-B1E3E3D5AF93}"/>
+              </a:ext>
+            </a:extLst>
+          </p:cNvPr>
+          <p:cNvSpPr/>
+          <p:nvPr/>
+        </p:nvSpPr>
+        <p:spPr>
+          <a:xfrm>
+            <a:off x="571500" y="635000"/>
+            <a:ext cx="1663700" cy="215900"/>
           </a:xfrm>
           <a:prstGeom prst="rect">
             <a:avLst/>
           </a:prstGeom>
-          <a:noFill/>
-        </p:spPr>
-        <p:txBody>
-          <a:bodyPr wrap="none" rtlCol="0">
-            <a:spAutoFit/>
-          </a:bodyPr>
+        </p:spPr>
+        <p:style>
+          <a:lnRef idx="2">
+            <a:schemeClr val="dk1"/>
+          </a:lnRef>
+          <a:fillRef idx="1">
+            <a:schemeClr val="lt1"/>
+          </a:fillRef>
+          <a:effectRef idx="0">
+            <a:schemeClr val="dk1"/>
+          </a:effectRef>
+          <a:fontRef idx="minor">
+            <a:schemeClr val="dk1"/>
+          </a:fontRef>
+        </p:style>
+        <p:txBody>
+          <a:bodyPr rtlCol="0" anchor="ctr"/>
           <a:lstStyle/>
           <a:p>
-            <a:pPr marL="285750" indent="-285750">
-              <a:buClr>
-                <a:srgbClr val="00B050"/>
-              </a:buClr>
-              <a:buFont typeface="Wingdings" panose="05000000000000000000" pitchFamily="2" charset="2"/>
-              <a:buChar char="ü"/>
-            </a:pPr>
-            <a:r>
-              <a:rPr lang="en-US" dirty="0"/>
-              <a:t>User doesn’t required login</a:t>
-            </a:r>
-          </a:p>
-          <a:p>
-            <a:pPr marL="285750" indent="-285750">
-              <a:buClr>
-                <a:srgbClr val="00B050"/>
-              </a:buClr>
-              <a:buFont typeface="Wingdings" panose="05000000000000000000" pitchFamily="2" charset="2"/>
-              <a:buChar char="ü"/>
-            </a:pPr>
-            <a:r>
-              <a:rPr lang="en-US" dirty="0"/>
-              <a:t>Instead they should only verify phone, roll and exam code</a:t>
-            </a:r>
-          </a:p>
-        </p:txBody>
-      </p:sp>
-      <p:graphicFrame>
-        <p:nvGraphicFramePr>
-          <p:cNvPr id="4" name="Table 4">
-            <a:extLst>
-              <a:ext uri="{FF2B5EF4-FFF2-40B4-BE49-F238E27FC236}">
-                <a16:creationId xmlns:a16="http://schemas.microsoft.com/office/drawing/2014/main" id="{4EC66469-58A9-4818-B073-A7A5384E74AF}"/>
-              </a:ext>
-            </a:extLst>
-          </p:cNvPr>
-          <p:cNvGraphicFramePr>
-            <a:graphicFrameLocks noGrp="1"/>
-          </p:cNvGraphicFramePr>
-          <p:nvPr>
-            <p:extLst>
-              <p:ext uri="{D42A27DB-BD31-4B8C-83A1-F6EECF244321}">
-                <p14:modId xmlns:p14="http://schemas.microsoft.com/office/powerpoint/2010/main" val="3158572500"/>
-              </p:ext>
-            </p:extLst>
-          </p:nvPr>
-        </p:nvGraphicFramePr>
-        <p:xfrm>
-          <a:off x="994769" y="1823403"/>
-          <a:ext cx="5474272" cy="1112520"/>
-        </p:xfrm>
-        <a:graphic>
-          <a:graphicData uri="http://schemas.openxmlformats.org/drawingml/2006/table">
-            <a:tbl>
-              <a:tblPr firstRow="1" bandRow="1">
-                <a:tableStyleId>{5940675A-B579-460E-94D1-54222C63F5DA}</a:tableStyleId>
-              </a:tblPr>
-              <a:tblGrid>
-                <a:gridCol w="1368568">
-                  <a:extLst>
-                    <a:ext uri="{9D8B030D-6E8A-4147-A177-3AD203B41FA5}">
-                      <a16:colId xmlns:a16="http://schemas.microsoft.com/office/drawing/2014/main" val="3754981159"/>
-                    </a:ext>
-                  </a:extLst>
-                </a:gridCol>
-                <a:gridCol w="1368568">
-                  <a:extLst>
-                    <a:ext uri="{9D8B030D-6E8A-4147-A177-3AD203B41FA5}">
-                      <a16:colId xmlns:a16="http://schemas.microsoft.com/office/drawing/2014/main" val="3021474219"/>
-                    </a:ext>
-                  </a:extLst>
-                </a:gridCol>
-                <a:gridCol w="1368568">
-                  <a:extLst>
-                    <a:ext uri="{9D8B030D-6E8A-4147-A177-3AD203B41FA5}">
-                      <a16:colId xmlns:a16="http://schemas.microsoft.com/office/drawing/2014/main" val="3981111130"/>
-                    </a:ext>
-                  </a:extLst>
-                </a:gridCol>
-                <a:gridCol w="1368568">
-                  <a:extLst>
-                    <a:ext uri="{9D8B030D-6E8A-4147-A177-3AD203B41FA5}">
-                      <a16:colId xmlns:a16="http://schemas.microsoft.com/office/drawing/2014/main" val="1449055563"/>
-                    </a:ext>
-                  </a:extLst>
-                </a:gridCol>
-              </a:tblGrid>
-              <a:tr h="370840">
-                <a:tc gridSpan="4">
-                  <a:txBody>
-                    <a:bodyPr/>
-                    <a:lstStyle/>
-                    <a:p>
-                      <a:pPr algn="ctr"/>
-                      <a:r>
-                        <a:rPr lang="en-US" b="1" dirty="0"/>
-                        <a:t>Users</a:t>
-                      </a:r>
-                    </a:p>
-                  </a:txBody>
-                  <a:tcPr/>
-                </a:tc>
-                <a:tc hMerge="1">
-                  <a:txBody>
-                    <a:bodyPr/>
-                    <a:lstStyle/>
-                    <a:p>
-                      <a:pPr algn="ctr"/>
-                      <a:endParaRPr lang="en-US" b="1" dirty="0"/>
-                    </a:p>
-                  </a:txBody>
-                  <a:tcPr/>
-                </a:tc>
-                <a:tc hMerge="1">
-                  <a:txBody>
-                    <a:bodyPr/>
-                    <a:lstStyle/>
-                    <a:p>
-                      <a:pPr algn="ctr"/>
-                      <a:endParaRPr lang="en-US" b="1" dirty="0"/>
-                    </a:p>
-                  </a:txBody>
-                  <a:tcPr/>
-                </a:tc>
-                <a:tc hMerge="1">
-                  <a:txBody>
-                    <a:bodyPr/>
-                    <a:lstStyle/>
-                    <a:p>
-                      <a:pPr algn="ctr"/>
-                      <a:endParaRPr lang="en-US" b="1" dirty="0"/>
-                    </a:p>
-                  </a:txBody>
-                  <a:tcPr/>
-                </a:tc>
-                <a:extLst>
-                  <a:ext uri="{0D108BD9-81ED-4DB2-BD59-A6C34878D82A}">
-                    <a16:rowId xmlns:a16="http://schemas.microsoft.com/office/drawing/2014/main" val="1090423420"/>
-                  </a:ext>
-                </a:extLst>
-              </a:tr>
-              <a:tr h="370840">
-                <a:tc>
-                  <a:txBody>
-                    <a:bodyPr/>
-                    <a:lstStyle/>
-                    <a:p>
-                      <a:pPr algn="ctr"/>
-                      <a:r>
-                        <a:rPr lang="en-US" b="1" dirty="0"/>
-                        <a:t>Id</a:t>
-                      </a:r>
-                    </a:p>
-                  </a:txBody>
-                  <a:tcPr/>
-                </a:tc>
-                <a:tc>
-                  <a:txBody>
-                    <a:bodyPr/>
-                    <a:lstStyle/>
-                    <a:p>
-                      <a:pPr algn="ctr"/>
-                      <a:r>
-                        <a:rPr lang="en-US" b="1" dirty="0"/>
-                        <a:t>Phone</a:t>
-                      </a:r>
-                    </a:p>
-                  </a:txBody>
-                  <a:tcPr/>
-                </a:tc>
-                <a:tc>
-                  <a:txBody>
-                    <a:bodyPr/>
-                    <a:lstStyle/>
-                    <a:p>
-                      <a:pPr algn="ctr"/>
-                      <a:r>
-                        <a:rPr lang="en-US" b="1" dirty="0"/>
-                        <a:t>roll</a:t>
-                      </a:r>
-                    </a:p>
-                  </a:txBody>
-                  <a:tcPr/>
-                </a:tc>
-                <a:tc>
-                  <a:txBody>
-                    <a:bodyPr/>
-                    <a:lstStyle/>
-                    <a:p>
-                      <a:pPr marL="0" marR="0" lvl="0" indent="0" algn="ctr" defTabSz="914400" rtl="0" eaLnBrk="1" fontAlgn="auto" latinLnBrk="0" hangingPunct="1">
-                        <a:lnSpc>
-                          <a:spcPct val="100000"/>
-                        </a:lnSpc>
-                        <a:spcBef>
-                          <a:spcPts val="0"/>
-                        </a:spcBef>
-                        <a:spcAft>
-                          <a:spcPts val="0"/>
-                        </a:spcAft>
-                        <a:buClrTx/>
-                        <a:buSzTx/>
-                        <a:buFontTx/>
-                        <a:buNone/>
-                        <a:tabLst/>
-                        <a:defRPr/>
-                      </a:pPr>
-                      <a:r>
-                        <a:rPr lang="en-US" b="1" dirty="0">
-                          <a:solidFill>
-                            <a:srgbClr val="FF0000"/>
-                          </a:solidFill>
-                        </a:rPr>
-                        <a:t>exam_code</a:t>
-                      </a:r>
-                    </a:p>
-                  </a:txBody>
-                  <a:tcPr/>
-                </a:tc>
-                <a:extLst>
-                  <a:ext uri="{0D108BD9-81ED-4DB2-BD59-A6C34878D82A}">
-                    <a16:rowId xmlns:a16="http://schemas.microsoft.com/office/drawing/2014/main" val="1660160347"/>
-                  </a:ext>
-                </a:extLst>
-              </a:tr>
-              <a:tr h="370840">
-                <a:tc>
-                  <a:txBody>
-                    <a:bodyPr/>
-                    <a:lstStyle/>
-                    <a:p>
-                      <a:pPr algn="ctr"/>
-                      <a:r>
-                        <a:rPr lang="en-US" dirty="0"/>
-                        <a:t>Integer</a:t>
-                      </a:r>
-                    </a:p>
-                  </a:txBody>
-                  <a:tcPr/>
-                </a:tc>
-                <a:tc>
-                  <a:txBody>
-                    <a:bodyPr/>
-                    <a:lstStyle/>
-                    <a:p>
-                      <a:pPr algn="ctr"/>
-                      <a:r>
-                        <a:rPr lang="en-US" dirty="0"/>
-                        <a:t>Integer</a:t>
-                      </a:r>
-                    </a:p>
-                  </a:txBody>
-                  <a:tcPr/>
-                </a:tc>
-                <a:tc>
-                  <a:txBody>
-                    <a:bodyPr/>
-                    <a:lstStyle/>
-                    <a:p>
-                      <a:pPr algn="ctr"/>
-                      <a:r>
-                        <a:rPr lang="en-US" dirty="0"/>
-                        <a:t>integer</a:t>
-                      </a:r>
-                    </a:p>
-                  </a:txBody>
-                  <a:tcPr/>
-                </a:tc>
-                <a:tc>
-                  <a:txBody>
-                    <a:bodyPr/>
-                    <a:lstStyle/>
-                    <a:p>
-                      <a:pPr algn="ctr"/>
-                      <a:r>
-                        <a:rPr lang="en-US" dirty="0"/>
-                        <a:t>integer</a:t>
-                      </a:r>
-                    </a:p>
-                  </a:txBody>
-                  <a:tcPr/>
-                </a:tc>
-                <a:extLst>
-                  <a:ext uri="{0D108BD9-81ED-4DB2-BD59-A6C34878D82A}">
-                    <a16:rowId xmlns:a16="http://schemas.microsoft.com/office/drawing/2014/main" val="3642843113"/>
-                  </a:ext>
-                </a:extLst>
-              </a:tr>
-            </a:tbl>
-          </a:graphicData>
-        </a:graphic>
-      </p:graphicFrame>
+            <a:pPr algn="ctr"/>
+            <a:r>
+              <a:rPr lang="en-US" sz="1000" dirty="0">
+                <a:latin typeface="Inter 18pt" panose="02000503000000020004" pitchFamily="2" charset="0"/>
+                <a:ea typeface="Inter 18pt" panose="02000503000000020004" pitchFamily="2" charset="0"/>
+              </a:rPr>
+              <a:t>Feedback</a:t>
+            </a:r>
+          </a:p>
+        </p:txBody>
+      </p:sp>
+      <p:sp>
+        <p:nvSpPr>
+          <p:cNvPr id="5" name="Rectangle 4">
+            <a:extLst>
+              <a:ext uri="{FF2B5EF4-FFF2-40B4-BE49-F238E27FC236}">
+                <a16:creationId xmlns:a16="http://schemas.microsoft.com/office/drawing/2014/main" id="{E9279293-6D82-4853-AA02-3738A36CE577}"/>
+              </a:ext>
+            </a:extLst>
+          </p:cNvPr>
+          <p:cNvSpPr/>
+          <p:nvPr/>
+        </p:nvSpPr>
+        <p:spPr>
+          <a:xfrm>
+            <a:off x="2324100" y="635000"/>
+            <a:ext cx="9410700" cy="215900"/>
+          </a:xfrm>
+          <a:prstGeom prst="rect">
+            <a:avLst/>
+          </a:prstGeom>
+        </p:spPr>
+        <p:style>
+          <a:lnRef idx="2">
+            <a:schemeClr val="dk1"/>
+          </a:lnRef>
+          <a:fillRef idx="1">
+            <a:schemeClr val="lt1"/>
+          </a:fillRef>
+          <a:effectRef idx="0">
+            <a:schemeClr val="dk1"/>
+          </a:effectRef>
+          <a:fontRef idx="minor">
+            <a:schemeClr val="dk1"/>
+          </a:fontRef>
+        </p:style>
+        <p:txBody>
+          <a:bodyPr rtlCol="0" anchor="ctr"/>
+          <a:lstStyle/>
+          <a:p>
+            <a:r>
+              <a:rPr lang="en-US" sz="1000" dirty="0">
+                <a:latin typeface="Inter 18pt" panose="02000503000000020004" pitchFamily="2" charset="0"/>
+                <a:ea typeface="Inter 18pt" panose="02000503000000020004" pitchFamily="2" charset="0"/>
+              </a:rPr>
+              <a:t>Int id, string phone, string roll, datetime roll</a:t>
+            </a:r>
+          </a:p>
+        </p:txBody>
+      </p:sp>
     </p:spTree>
     <p:extLst>
       <p:ext uri="{BB962C8B-B14F-4D97-AF65-F5344CB8AC3E}">
-        <p14:creationId xmlns:p14="http://schemas.microsoft.com/office/powerpoint/2010/main" val="3818192969"/>
+        <p14:creationId xmlns:p14="http://schemas.microsoft.com/office/powerpoint/2010/main" val="924529089"/>
+      </p:ext>
+    </p:extLst>
+  </p:cSld>
+  <p:clrMapOvr>
+    <a:masterClrMapping/>
+  </p:clrMapOvr>
+</p:sld>
+</file>
+
+<file path=ppt/slides/slide8.xml><?xml version="1.0" encoding="utf-8"?>
+<p:sld xmlns:a="http://schemas.openxmlformats.org/drawingml/2006/main" xmlns:r="http://schemas.openxmlformats.org/officeDocument/2006/relationships" xmlns:p="http://schemas.openxmlformats.org/presentationml/2006/main">
+  <p:cSld>
+    <p:spTree>
+      <p:nvGrpSpPr>
+        <p:cNvPr id="1" name=""/>
+        <p:cNvGrpSpPr/>
+        <p:nvPr/>
+      </p:nvGrpSpPr>
+      <p:grpSpPr>
+        <a:xfrm>
+          <a:off x="0" y="0"/>
+          <a:ext cx="0" cy="0"/>
+          <a:chOff x="0" y="0"/>
+          <a:chExt cx="0" cy="0"/>
+        </a:xfrm>
+      </p:grpSpPr>
+      <p:sp>
+        <p:nvSpPr>
+          <p:cNvPr id="2" name="Title 1">
+            <a:extLst>
+              <a:ext uri="{FF2B5EF4-FFF2-40B4-BE49-F238E27FC236}">
+                <a16:creationId xmlns:a16="http://schemas.microsoft.com/office/drawing/2014/main" id="{55EADD2D-BA42-4665-B7F3-A0BF0148E46C}"/>
+              </a:ext>
+            </a:extLst>
+          </p:cNvPr>
+          <p:cNvSpPr>
+            <a:spLocks noGrp="1"/>
+          </p:cNvSpPr>
+          <p:nvPr>
+            <p:ph type="title"/>
+          </p:nvPr>
+        </p:nvSpPr>
+        <p:spPr>
+          <a:xfrm>
+            <a:off x="838200" y="184151"/>
+            <a:ext cx="10515600" cy="315912"/>
+          </a:xfrm>
+        </p:spPr>
+        <p:txBody>
+          <a:bodyPr>
+            <a:normAutofit/>
+          </a:bodyPr>
+          <a:lstStyle/>
+          <a:p>
+            <a:pPr algn="ctr"/>
+            <a:r>
+              <a:rPr lang="en-US" sz="1400" dirty="0">
+                <a:latin typeface="Inter 18pt" panose="02000503000000020004" pitchFamily="2" charset="0"/>
+                <a:ea typeface="Inter 18pt" panose="02000503000000020004" pitchFamily="2" charset="0"/>
+              </a:rPr>
+              <a:t>Relationship</a:t>
+            </a:r>
+          </a:p>
+        </p:txBody>
+      </p:sp>
+      <p:sp>
+        <p:nvSpPr>
+          <p:cNvPr id="4" name="Rectangle 3">
+            <a:extLst>
+              <a:ext uri="{FF2B5EF4-FFF2-40B4-BE49-F238E27FC236}">
+                <a16:creationId xmlns:a16="http://schemas.microsoft.com/office/drawing/2014/main" id="{6ABB0E81-FC3B-40C1-8513-B1E3E3D5AF93}"/>
+              </a:ext>
+            </a:extLst>
+          </p:cNvPr>
+          <p:cNvSpPr/>
+          <p:nvPr/>
+        </p:nvSpPr>
+        <p:spPr>
+          <a:xfrm>
+            <a:off x="571500" y="635000"/>
+            <a:ext cx="1663700" cy="215900"/>
+          </a:xfrm>
+          <a:prstGeom prst="rect">
+            <a:avLst/>
+          </a:prstGeom>
+        </p:spPr>
+        <p:style>
+          <a:lnRef idx="2">
+            <a:schemeClr val="dk1"/>
+          </a:lnRef>
+          <a:fillRef idx="1">
+            <a:schemeClr val="lt1"/>
+          </a:fillRef>
+          <a:effectRef idx="0">
+            <a:schemeClr val="dk1"/>
+          </a:effectRef>
+          <a:fontRef idx="minor">
+            <a:schemeClr val="dk1"/>
+          </a:fontRef>
+        </p:style>
+        <p:txBody>
+          <a:bodyPr rtlCol="0" anchor="ctr"/>
+          <a:lstStyle/>
+          <a:p>
+            <a:pPr algn="ctr"/>
+            <a:r>
+              <a:rPr lang="en-US" sz="1000" dirty="0">
+                <a:latin typeface="Inter 18pt" panose="02000503000000020004" pitchFamily="2" charset="0"/>
+                <a:ea typeface="Inter 18pt" panose="02000503000000020004" pitchFamily="2" charset="0"/>
+              </a:rPr>
+              <a:t>Feedback</a:t>
+            </a:r>
+          </a:p>
+        </p:txBody>
+      </p:sp>
+      <p:sp>
+        <p:nvSpPr>
+          <p:cNvPr id="5" name="Rectangle 4">
+            <a:extLst>
+              <a:ext uri="{FF2B5EF4-FFF2-40B4-BE49-F238E27FC236}">
+                <a16:creationId xmlns:a16="http://schemas.microsoft.com/office/drawing/2014/main" id="{E9279293-6D82-4853-AA02-3738A36CE577}"/>
+              </a:ext>
+            </a:extLst>
+          </p:cNvPr>
+          <p:cNvSpPr/>
+          <p:nvPr/>
+        </p:nvSpPr>
+        <p:spPr>
+          <a:xfrm>
+            <a:off x="2324100" y="635000"/>
+            <a:ext cx="9410700" cy="215900"/>
+          </a:xfrm>
+          <a:prstGeom prst="rect">
+            <a:avLst/>
+          </a:prstGeom>
+        </p:spPr>
+        <p:style>
+          <a:lnRef idx="2">
+            <a:schemeClr val="dk1"/>
+          </a:lnRef>
+          <a:fillRef idx="1">
+            <a:schemeClr val="lt1"/>
+          </a:fillRef>
+          <a:effectRef idx="0">
+            <a:schemeClr val="dk1"/>
+          </a:effectRef>
+          <a:fontRef idx="minor">
+            <a:schemeClr val="dk1"/>
+          </a:fontRef>
+        </p:style>
+        <p:txBody>
+          <a:bodyPr rtlCol="0" anchor="ctr"/>
+          <a:lstStyle/>
+          <a:p>
+            <a:r>
+              <a:rPr lang="en-US" sz="1000" dirty="0">
+                <a:latin typeface="Inter 18pt" panose="02000503000000020004" pitchFamily="2" charset="0"/>
+                <a:ea typeface="Inter 18pt" panose="02000503000000020004" pitchFamily="2" charset="0"/>
+              </a:rPr>
+              <a:t>Int id, string phone, string roll, datetime roll</a:t>
+            </a:r>
+          </a:p>
+        </p:txBody>
+      </p:sp>
+    </p:spTree>
+    <p:extLst>
+      <p:ext uri="{BB962C8B-B14F-4D97-AF65-F5344CB8AC3E}">
+        <p14:creationId xmlns:p14="http://schemas.microsoft.com/office/powerpoint/2010/main" val="2596300006"/>
       </p:ext>
     </p:extLst>
   </p:cSld>
